--- a/GoogleColab.part3.pptx
+++ b/GoogleColab.part3.pptx
@@ -2,13 +2,19 @@
 <file path=ppt/presentation.xml><?xml version="1.0" encoding="utf-8"?>
 <p:presentation xmlns:a="http://schemas.openxmlformats.org/drawingml/2006/main" xmlns:r="http://schemas.openxmlformats.org/officeDocument/2006/relationships" xmlns:p="http://schemas.openxmlformats.org/presentationml/2006/main" saveSubsetFonts="1">
   <p:sldMasterIdLst>
-    <p:sldMasterId id="2147483648" r:id="rId1"/>
+    <p:sldMasterId id="2147483660" r:id="rId1"/>
   </p:sldMasterIdLst>
+  <p:notesMasterIdLst>
+    <p:notesMasterId r:id="rId6"/>
+  </p:notesMasterIdLst>
   <p:sldIdLst>
     <p:sldId id="256" r:id="rId2"/>
+    <p:sldId id="318" r:id="rId3"/>
+    <p:sldId id="320" r:id="rId4"/>
+    <p:sldId id="319" r:id="rId5"/>
   </p:sldIdLst>
   <p:sldSz cx="12192000" cy="6858000"/>
-  <p:notesSz cx="6858000" cy="9144000"/>
+  <p:notesSz cx="6802438" cy="9937750"/>
   <p:defaultTextStyle>
     <a:defPPr>
       <a:defRPr lang="ja-JP"/>
@@ -104,11 +110,397 @@
       </a:defRPr>
     </a:lvl9pPr>
   </p:defaultTextStyle>
+  <p:extLst>
+    <p:ext uri="{EFAFB233-063F-42B5-8137-9DF3F51BA10A}">
+      <p15:sldGuideLst xmlns:p15="http://schemas.microsoft.com/office/powerpoint/2012/main"/>
+    </p:ext>
+  </p:extLst>
 </p:presentation>
 </file>
 
+<file path=ppt/notesMasters/notesMaster1.xml><?xml version="1.0" encoding="utf-8"?>
+<p:notesMaster xmlns:a="http://schemas.openxmlformats.org/drawingml/2006/main" xmlns:r="http://schemas.openxmlformats.org/officeDocument/2006/relationships" xmlns:p="http://schemas.openxmlformats.org/presentationml/2006/main">
+  <p:cSld>
+    <p:bg>
+      <p:bgRef idx="1001">
+        <a:schemeClr val="bg1"/>
+      </p:bgRef>
+    </p:bg>
+    <p:spTree>
+      <p:nvGrpSpPr>
+        <p:cNvPr id="1" name=""/>
+        <p:cNvGrpSpPr/>
+        <p:nvPr/>
+      </p:nvGrpSpPr>
+      <p:grpSpPr>
+        <a:xfrm>
+          <a:off x="0" y="0"/>
+          <a:ext cx="0" cy="0"/>
+          <a:chOff x="0" y="0"/>
+          <a:chExt cx="0" cy="0"/>
+        </a:xfrm>
+      </p:grpSpPr>
+      <p:sp>
+        <p:nvSpPr>
+          <p:cNvPr id="2" name="ヘッダー プレースホルダー 1"/>
+          <p:cNvSpPr>
+            <a:spLocks noGrp="1"/>
+          </p:cNvSpPr>
+          <p:nvPr>
+            <p:ph type="hdr" sz="quarter"/>
+          </p:nvPr>
+        </p:nvSpPr>
+        <p:spPr>
+          <a:xfrm>
+            <a:off x="0" y="0"/>
+            <a:ext cx="2947723" cy="498613"/>
+          </a:xfrm>
+          <a:prstGeom prst="rect">
+            <a:avLst/>
+          </a:prstGeom>
+        </p:spPr>
+        <p:txBody>
+          <a:bodyPr vert="horz" lIns="91440" tIns="45720" rIns="91440" bIns="45720" rtlCol="0"/>
+          <a:lstStyle>
+            <a:lvl1pPr algn="l">
+              <a:defRPr sz="1200"/>
+            </a:lvl1pPr>
+          </a:lstStyle>
+          <a:p>
+            <a:endParaRPr kumimoji="1" lang="ja-JP" altLang="en-US"/>
+          </a:p>
+        </p:txBody>
+      </p:sp>
+      <p:sp>
+        <p:nvSpPr>
+          <p:cNvPr id="3" name="日付プレースホルダー 2"/>
+          <p:cNvSpPr>
+            <a:spLocks noGrp="1"/>
+          </p:cNvSpPr>
+          <p:nvPr>
+            <p:ph type="dt" idx="1"/>
+          </p:nvPr>
+        </p:nvSpPr>
+        <p:spPr>
+          <a:xfrm>
+            <a:off x="3853141" y="0"/>
+            <a:ext cx="2947723" cy="498613"/>
+          </a:xfrm>
+          <a:prstGeom prst="rect">
+            <a:avLst/>
+          </a:prstGeom>
+        </p:spPr>
+        <p:txBody>
+          <a:bodyPr vert="horz" lIns="91440" tIns="45720" rIns="91440" bIns="45720" rtlCol="0"/>
+          <a:lstStyle>
+            <a:lvl1pPr algn="r">
+              <a:defRPr sz="1200"/>
+            </a:lvl1pPr>
+          </a:lstStyle>
+          <a:p>
+            <a:fld id="{1B9496A5-7C6D-4562-83AD-78E6F1D02C8F}" type="datetimeFigureOut">
+              <a:rPr kumimoji="1" lang="ja-JP" altLang="en-US" smtClean="0"/>
+              <a:t>2026/8/31</a:t>
+            </a:fld>
+            <a:endParaRPr kumimoji="1" lang="ja-JP" altLang="en-US"/>
+          </a:p>
+        </p:txBody>
+      </p:sp>
+      <p:sp>
+        <p:nvSpPr>
+          <p:cNvPr id="4" name="スライド イメージ プレースホルダー 3"/>
+          <p:cNvSpPr>
+            <a:spLocks noGrp="1" noRot="1" noChangeAspect="1"/>
+          </p:cNvSpPr>
+          <p:nvPr>
+            <p:ph type="sldImg" idx="2"/>
+          </p:nvPr>
+        </p:nvSpPr>
+        <p:spPr>
+          <a:xfrm>
+            <a:off x="422275" y="1243013"/>
+            <a:ext cx="5959475" cy="3352800"/>
+          </a:xfrm>
+          <a:prstGeom prst="rect">
+            <a:avLst/>
+          </a:prstGeom>
+          <a:noFill/>
+          <a:ln w="12700">
+            <a:solidFill>
+              <a:prstClr val="black"/>
+            </a:solidFill>
+          </a:ln>
+        </p:spPr>
+        <p:txBody>
+          <a:bodyPr vert="horz" lIns="91440" tIns="45720" rIns="91440" bIns="45720" rtlCol="0" anchor="ctr"/>
+          <a:lstStyle/>
+          <a:p>
+            <a:endParaRPr lang="ja-JP" altLang="en-US"/>
+          </a:p>
+        </p:txBody>
+      </p:sp>
+      <p:sp>
+        <p:nvSpPr>
+          <p:cNvPr id="5" name="ノート プレースホルダー 4"/>
+          <p:cNvSpPr>
+            <a:spLocks noGrp="1"/>
+          </p:cNvSpPr>
+          <p:nvPr>
+            <p:ph type="body" sz="quarter" idx="3"/>
+          </p:nvPr>
+        </p:nvSpPr>
+        <p:spPr>
+          <a:xfrm>
+            <a:off x="680244" y="4782542"/>
+            <a:ext cx="5441950" cy="3912989"/>
+          </a:xfrm>
+          <a:prstGeom prst="rect">
+            <a:avLst/>
+          </a:prstGeom>
+        </p:spPr>
+        <p:txBody>
+          <a:bodyPr vert="horz" lIns="91440" tIns="45720" rIns="91440" bIns="45720" rtlCol="0"/>
+          <a:lstStyle/>
+          <a:p>
+            <a:pPr lvl="0"/>
+            <a:r>
+              <a:rPr kumimoji="1" lang="ja-JP" altLang="en-US"/>
+              <a:t>マスター テキストの書式設定</a:t>
+            </a:r>
+          </a:p>
+          <a:p>
+            <a:pPr lvl="1"/>
+            <a:r>
+              <a:rPr kumimoji="1" lang="ja-JP" altLang="en-US"/>
+              <a:t>第 </a:t>
+            </a:r>
+            <a:r>
+              <a:rPr kumimoji="1" lang="en-US" altLang="ja-JP"/>
+              <a:t>2 </a:t>
+            </a:r>
+            <a:r>
+              <a:rPr kumimoji="1" lang="ja-JP" altLang="en-US"/>
+              <a:t>レベル</a:t>
+            </a:r>
+          </a:p>
+          <a:p>
+            <a:pPr lvl="2"/>
+            <a:r>
+              <a:rPr kumimoji="1" lang="ja-JP" altLang="en-US"/>
+              <a:t>第 </a:t>
+            </a:r>
+            <a:r>
+              <a:rPr kumimoji="1" lang="en-US" altLang="ja-JP"/>
+              <a:t>3 </a:t>
+            </a:r>
+            <a:r>
+              <a:rPr kumimoji="1" lang="ja-JP" altLang="en-US"/>
+              <a:t>レベル</a:t>
+            </a:r>
+          </a:p>
+          <a:p>
+            <a:pPr lvl="3"/>
+            <a:r>
+              <a:rPr kumimoji="1" lang="ja-JP" altLang="en-US"/>
+              <a:t>第 </a:t>
+            </a:r>
+            <a:r>
+              <a:rPr kumimoji="1" lang="en-US" altLang="ja-JP"/>
+              <a:t>4 </a:t>
+            </a:r>
+            <a:r>
+              <a:rPr kumimoji="1" lang="ja-JP" altLang="en-US"/>
+              <a:t>レベル</a:t>
+            </a:r>
+          </a:p>
+          <a:p>
+            <a:pPr lvl="4"/>
+            <a:r>
+              <a:rPr kumimoji="1" lang="ja-JP" altLang="en-US"/>
+              <a:t>第 </a:t>
+            </a:r>
+            <a:r>
+              <a:rPr kumimoji="1" lang="en-US" altLang="ja-JP"/>
+              <a:t>5 </a:t>
+            </a:r>
+            <a:r>
+              <a:rPr kumimoji="1" lang="ja-JP" altLang="en-US"/>
+              <a:t>レベル</a:t>
+            </a:r>
+          </a:p>
+        </p:txBody>
+      </p:sp>
+      <p:sp>
+        <p:nvSpPr>
+          <p:cNvPr id="6" name="フッター プレースホルダー 5"/>
+          <p:cNvSpPr>
+            <a:spLocks noGrp="1"/>
+          </p:cNvSpPr>
+          <p:nvPr>
+            <p:ph type="ftr" sz="quarter" idx="4"/>
+          </p:nvPr>
+        </p:nvSpPr>
+        <p:spPr>
+          <a:xfrm>
+            <a:off x="0" y="9439138"/>
+            <a:ext cx="2947723" cy="498612"/>
+          </a:xfrm>
+          <a:prstGeom prst="rect">
+            <a:avLst/>
+          </a:prstGeom>
+        </p:spPr>
+        <p:txBody>
+          <a:bodyPr vert="horz" lIns="91440" tIns="45720" rIns="91440" bIns="45720" rtlCol="0" anchor="b"/>
+          <a:lstStyle>
+            <a:lvl1pPr algn="l">
+              <a:defRPr sz="1200"/>
+            </a:lvl1pPr>
+          </a:lstStyle>
+          <a:p>
+            <a:endParaRPr kumimoji="1" lang="ja-JP" altLang="en-US"/>
+          </a:p>
+        </p:txBody>
+      </p:sp>
+      <p:sp>
+        <p:nvSpPr>
+          <p:cNvPr id="7" name="スライド番号プレースホルダー 6"/>
+          <p:cNvSpPr>
+            <a:spLocks noGrp="1"/>
+          </p:cNvSpPr>
+          <p:nvPr>
+            <p:ph type="sldNum" sz="quarter" idx="5"/>
+          </p:nvPr>
+        </p:nvSpPr>
+        <p:spPr>
+          <a:xfrm>
+            <a:off x="3853141" y="9439138"/>
+            <a:ext cx="2947723" cy="498612"/>
+          </a:xfrm>
+          <a:prstGeom prst="rect">
+            <a:avLst/>
+          </a:prstGeom>
+        </p:spPr>
+        <p:txBody>
+          <a:bodyPr vert="horz" lIns="91440" tIns="45720" rIns="91440" bIns="45720" rtlCol="0" anchor="b"/>
+          <a:lstStyle>
+            <a:lvl1pPr algn="r">
+              <a:defRPr sz="1200"/>
+            </a:lvl1pPr>
+          </a:lstStyle>
+          <a:p>
+            <a:fld id="{5A38E0EF-4404-48A5-A14D-C28912D88EC3}" type="slidenum">
+              <a:rPr kumimoji="1" lang="ja-JP" altLang="en-US" smtClean="0"/>
+              <a:t>‹#›</a:t>
+            </a:fld>
+            <a:endParaRPr kumimoji="1" lang="ja-JP" altLang="en-US"/>
+          </a:p>
+        </p:txBody>
+      </p:sp>
+    </p:spTree>
+    <p:extLst>
+      <p:ext uri="{BB962C8B-B14F-4D97-AF65-F5344CB8AC3E}">
+        <p14:creationId xmlns:p14="http://schemas.microsoft.com/office/powerpoint/2010/main" val="3306017700"/>
+      </p:ext>
+    </p:extLst>
+  </p:cSld>
+  <p:clrMap bg1="lt1" tx1="dk1" bg2="lt2" tx2="dk2" accent1="accent1" accent2="accent2" accent3="accent3" accent4="accent4" accent5="accent5" accent6="accent6" hlink="hlink" folHlink="folHlink"/>
+  <p:notesStyle>
+    <a:lvl1pPr marL="0" algn="l" defTabSz="914400" rtl="0" eaLnBrk="1" latinLnBrk="0" hangingPunct="1">
+      <a:defRPr kumimoji="1" sz="1200" kern="1200">
+        <a:solidFill>
+          <a:schemeClr val="tx1"/>
+        </a:solidFill>
+        <a:latin typeface="+mn-lt"/>
+        <a:ea typeface="+mn-ea"/>
+        <a:cs typeface="+mn-cs"/>
+      </a:defRPr>
+    </a:lvl1pPr>
+    <a:lvl2pPr marL="457200" algn="l" defTabSz="914400" rtl="0" eaLnBrk="1" latinLnBrk="0" hangingPunct="1">
+      <a:defRPr kumimoji="1" sz="1200" kern="1200">
+        <a:solidFill>
+          <a:schemeClr val="tx1"/>
+        </a:solidFill>
+        <a:latin typeface="+mn-lt"/>
+        <a:ea typeface="+mn-ea"/>
+        <a:cs typeface="+mn-cs"/>
+      </a:defRPr>
+    </a:lvl2pPr>
+    <a:lvl3pPr marL="914400" algn="l" defTabSz="914400" rtl="0" eaLnBrk="1" latinLnBrk="0" hangingPunct="1">
+      <a:defRPr kumimoji="1" sz="1200" kern="1200">
+        <a:solidFill>
+          <a:schemeClr val="tx1"/>
+        </a:solidFill>
+        <a:latin typeface="+mn-lt"/>
+        <a:ea typeface="+mn-ea"/>
+        <a:cs typeface="+mn-cs"/>
+      </a:defRPr>
+    </a:lvl3pPr>
+    <a:lvl4pPr marL="1371600" algn="l" defTabSz="914400" rtl="0" eaLnBrk="1" latinLnBrk="0" hangingPunct="1">
+      <a:defRPr kumimoji="1" sz="1200" kern="1200">
+        <a:solidFill>
+          <a:schemeClr val="tx1"/>
+        </a:solidFill>
+        <a:latin typeface="+mn-lt"/>
+        <a:ea typeface="+mn-ea"/>
+        <a:cs typeface="+mn-cs"/>
+      </a:defRPr>
+    </a:lvl4pPr>
+    <a:lvl5pPr marL="1828800" algn="l" defTabSz="914400" rtl="0" eaLnBrk="1" latinLnBrk="0" hangingPunct="1">
+      <a:defRPr kumimoji="1" sz="1200" kern="1200">
+        <a:solidFill>
+          <a:schemeClr val="tx1"/>
+        </a:solidFill>
+        <a:latin typeface="+mn-lt"/>
+        <a:ea typeface="+mn-ea"/>
+        <a:cs typeface="+mn-cs"/>
+      </a:defRPr>
+    </a:lvl5pPr>
+    <a:lvl6pPr marL="2286000" algn="l" defTabSz="914400" rtl="0" eaLnBrk="1" latinLnBrk="0" hangingPunct="1">
+      <a:defRPr kumimoji="1" sz="1200" kern="1200">
+        <a:solidFill>
+          <a:schemeClr val="tx1"/>
+        </a:solidFill>
+        <a:latin typeface="+mn-lt"/>
+        <a:ea typeface="+mn-ea"/>
+        <a:cs typeface="+mn-cs"/>
+      </a:defRPr>
+    </a:lvl6pPr>
+    <a:lvl7pPr marL="2743200" algn="l" defTabSz="914400" rtl="0" eaLnBrk="1" latinLnBrk="0" hangingPunct="1">
+      <a:defRPr kumimoji="1" sz="1200" kern="1200">
+        <a:solidFill>
+          <a:schemeClr val="tx1"/>
+        </a:solidFill>
+        <a:latin typeface="+mn-lt"/>
+        <a:ea typeface="+mn-ea"/>
+        <a:cs typeface="+mn-cs"/>
+      </a:defRPr>
+    </a:lvl7pPr>
+    <a:lvl8pPr marL="3200400" algn="l" defTabSz="914400" rtl="0" eaLnBrk="1" latinLnBrk="0" hangingPunct="1">
+      <a:defRPr kumimoji="1" sz="1200" kern="1200">
+        <a:solidFill>
+          <a:schemeClr val="tx1"/>
+        </a:solidFill>
+        <a:latin typeface="+mn-lt"/>
+        <a:ea typeface="+mn-ea"/>
+        <a:cs typeface="+mn-cs"/>
+      </a:defRPr>
+    </a:lvl8pPr>
+    <a:lvl9pPr marL="3657600" algn="l" defTabSz="914400" rtl="0" eaLnBrk="1" latinLnBrk="0" hangingPunct="1">
+      <a:defRPr kumimoji="1" sz="1200" kern="1200">
+        <a:solidFill>
+          <a:schemeClr val="tx1"/>
+        </a:solidFill>
+        <a:latin typeface="+mn-lt"/>
+        <a:ea typeface="+mn-ea"/>
+        <a:cs typeface="+mn-cs"/>
+      </a:defRPr>
+    </a:lvl9pPr>
+  </p:notesStyle>
+</p:notesMaster>
+</file>
+
 <file path=ppt/slideLayouts/slideLayout1.xml><?xml version="1.0" encoding="utf-8"?>
-<p:sldLayout xmlns:a="http://schemas.openxmlformats.org/drawingml/2006/main" xmlns:r="http://schemas.openxmlformats.org/officeDocument/2006/relationships" xmlns:p="http://schemas.openxmlformats.org/presentationml/2006/main" type="title" preserve="1">
+<p:sldLayout xmlns:a="http://schemas.openxmlformats.org/drawingml/2006/main" xmlns:r="http://schemas.openxmlformats.org/officeDocument/2006/relationships" xmlns:p="http://schemas.openxmlformats.org/presentationml/2006/main" showMasterSp="0" type="title" preserve="1">
   <p:cSld name="タイトル スライド">
     <p:spTree>
       <p:nvGrpSpPr>
@@ -126,15 +518,131 @@
       </p:grpSpPr>
       <p:sp>
         <p:nvSpPr>
-          <p:cNvPr id="2" name="タイトル 1">
-            <a:extLst>
-              <a:ext uri="{FF2B5EF4-FFF2-40B4-BE49-F238E27FC236}">
-                <a16:creationId xmlns:a16="http://schemas.microsoft.com/office/drawing/2014/main" id="{098778FB-0784-771F-4072-7F1784348AB7}"/>
-              </a:ext>
-            </a:extLst>
-          </p:cNvPr>
-          <p:cNvSpPr>
-            <a:spLocks noGrp="1"/>
+          <p:cNvPr id="4" name="Freeform 7"/>
+          <p:cNvSpPr>
+            <a:spLocks noChangeArrowheads="1"/>
+          </p:cNvSpPr>
+          <p:nvPr/>
+        </p:nvSpPr>
+        <p:spPr bwMode="auto">
+          <a:xfrm>
+            <a:off x="812800" y="1219200"/>
+            <a:ext cx="10566400" cy="914400"/>
+          </a:xfrm>
+          <a:custGeom>
+            <a:avLst/>
+            <a:gdLst>
+              <a:gd name="T0" fmla="*/ 0 w 1000"/>
+              <a:gd name="T1" fmla="*/ 836127360 h 1000"/>
+              <a:gd name="T2" fmla="*/ 0 w 1000"/>
+              <a:gd name="T3" fmla="*/ 0 h 1000"/>
+              <a:gd name="T4" fmla="*/ 2147483647 w 1000"/>
+              <a:gd name="T5" fmla="*/ 0 h 1000"/>
+              <a:gd name="T6" fmla="*/ 0 60000 65536"/>
+              <a:gd name="T7" fmla="*/ 0 60000 65536"/>
+              <a:gd name="T8" fmla="*/ 0 60000 65536"/>
+            </a:gdLst>
+            <a:ahLst/>
+            <a:cxnLst>
+              <a:cxn ang="T6">
+                <a:pos x="T0" y="T1"/>
+              </a:cxn>
+              <a:cxn ang="T7">
+                <a:pos x="T2" y="T3"/>
+              </a:cxn>
+              <a:cxn ang="T8">
+                <a:pos x="T4" y="T5"/>
+              </a:cxn>
+            </a:cxnLst>
+            <a:rect l="0" t="0" r="r" b="b"/>
+            <a:pathLst>
+              <a:path w="1000" h="1000">
+                <a:moveTo>
+                  <a:pt x="0" y="1000"/>
+                </a:moveTo>
+                <a:lnTo>
+                  <a:pt x="0" y="0"/>
+                </a:lnTo>
+                <a:lnTo>
+                  <a:pt x="1000" y="0"/>
+                </a:lnTo>
+              </a:path>
+            </a:pathLst>
+          </a:custGeom>
+          <a:noFill/>
+          <a:ln w="25400" cap="flat" cmpd="sng">
+            <a:solidFill>
+              <a:schemeClr val="accent1"/>
+            </a:solidFill>
+            <a:prstDash val="solid"/>
+            <a:miter lim="800000"/>
+            <a:headEnd/>
+            <a:tailEnd/>
+          </a:ln>
+          <a:extLst>
+            <a:ext uri="{909E8E84-426E-40DD-AFC4-6F175D3DCCD1}">
+              <a14:hiddenFill xmlns:a14="http://schemas.microsoft.com/office/drawing/2010/main">
+                <a:solidFill>
+                  <a:srgbClr val="FFFFFF"/>
+                </a:solidFill>
+              </a14:hiddenFill>
+            </a:ext>
+          </a:extLst>
+        </p:spPr>
+        <p:txBody>
+          <a:bodyPr/>
+          <a:lstStyle/>
+          <a:p>
+            <a:endParaRPr lang="ja-JP" altLang="en-US" sz="1800" dirty="0"/>
+          </a:p>
+        </p:txBody>
+      </p:sp>
+      <p:sp>
+        <p:nvSpPr>
+          <p:cNvPr id="5" name="Line 8"/>
+          <p:cNvSpPr>
+            <a:spLocks noChangeShapeType="1"/>
+          </p:cNvSpPr>
+          <p:nvPr/>
+        </p:nvSpPr>
+        <p:spPr bwMode="auto">
+          <a:xfrm>
+            <a:off x="2641601" y="3962400"/>
+            <a:ext cx="8682567" cy="0"/>
+          </a:xfrm>
+          <a:prstGeom prst="line">
+            <a:avLst/>
+          </a:prstGeom>
+          <a:noFill/>
+          <a:ln w="19050">
+            <a:solidFill>
+              <a:schemeClr val="accent1"/>
+            </a:solidFill>
+            <a:round/>
+            <a:headEnd/>
+            <a:tailEnd/>
+          </a:ln>
+          <a:extLst>
+            <a:ext uri="{909E8E84-426E-40DD-AFC4-6F175D3DCCD1}">
+              <a14:hiddenFill xmlns:a14="http://schemas.microsoft.com/office/drawing/2010/main">
+                <a:noFill/>
+              </a14:hiddenFill>
+            </a:ext>
+          </a:extLst>
+        </p:spPr>
+        <p:txBody>
+          <a:bodyPr/>
+          <a:lstStyle/>
+          <a:p>
+            <a:endParaRPr lang="ja-JP" altLang="en-US" sz="1800" dirty="0"/>
+          </a:p>
+        </p:txBody>
+      </p:sp>
+      <p:sp>
+        <p:nvSpPr>
+          <p:cNvPr id="391170" name="Rectangle 2"/>
+          <p:cNvSpPr>
+            <a:spLocks noGrp="1" noChangeArrowheads="1"/>
           </p:cNvSpPr>
           <p:nvPr>
             <p:ph type="ctrTitle"/>
@@ -142,20 +650,20 @@
         </p:nvSpPr>
         <p:spPr>
           <a:xfrm>
-            <a:off x="1524000" y="1122363"/>
-            <a:ext cx="9144000" cy="2387600"/>
+            <a:off x="1219201" y="1524000"/>
+            <a:ext cx="10164233" cy="1752600"/>
           </a:xfrm>
         </p:spPr>
         <p:txBody>
-          <a:bodyPr anchor="b"/>
+          <a:bodyPr/>
           <a:lstStyle>
-            <a:lvl1pPr algn="ctr">
-              <a:defRPr sz="6000"/>
+            <a:lvl1pPr>
+              <a:defRPr sz="5000"/>
             </a:lvl1pPr>
           </a:lstStyle>
           <a:p>
             <a:r>
-              <a:rPr kumimoji="1" lang="ja-JP" altLang="en-US"/>
+              <a:rPr lang="ja-JP" altLang="en-US"/>
               <a:t>マスター タイトルの書式設定</a:t>
             </a:r>
           </a:p>
@@ -163,15 +671,9 @@
       </p:sp>
       <p:sp>
         <p:nvSpPr>
-          <p:cNvPr id="3" name="字幕 2">
-            <a:extLst>
-              <a:ext uri="{FF2B5EF4-FFF2-40B4-BE49-F238E27FC236}">
-                <a16:creationId xmlns:a16="http://schemas.microsoft.com/office/drawing/2014/main" id="{21125756-6753-8578-0DF3-84B53278D7F8}"/>
-              </a:ext>
-            </a:extLst>
-          </p:cNvPr>
-          <p:cNvSpPr>
-            <a:spLocks noGrp="1"/>
+          <p:cNvPr id="391171" name="Rectangle 3"/>
+          <p:cNvSpPr>
+            <a:spLocks noGrp="1" noChangeArrowheads="1"/>
           </p:cNvSpPr>
           <p:nvPr>
             <p:ph type="subTitle" idx="1"/>
@@ -179,53 +681,26 @@
         </p:nvSpPr>
         <p:spPr>
           <a:xfrm>
-            <a:off x="1524000" y="3602038"/>
-            <a:ext cx="9144000" cy="1655762"/>
+            <a:off x="2641600" y="3962400"/>
+            <a:ext cx="8737600" cy="1752600"/>
           </a:xfrm>
         </p:spPr>
         <p:txBody>
           <a:bodyPr/>
           <a:lstStyle>
             <a:lvl1pPr marL="0" indent="0" algn="ctr">
-              <a:buNone/>
-              <a:defRPr sz="2400"/>
+              <a:buFont typeface="Wingdings" pitchFamily="2" charset="2"/>
+              <a:buNone/>
+              <a:defRPr sz="3000">
+                <a:solidFill>
+                  <a:schemeClr val="tx2"/>
+                </a:solidFill>
+              </a:defRPr>
             </a:lvl1pPr>
-            <a:lvl2pPr marL="457200" indent="0" algn="ctr">
-              <a:buNone/>
-              <a:defRPr sz="2000"/>
-            </a:lvl2pPr>
-            <a:lvl3pPr marL="914400" indent="0" algn="ctr">
-              <a:buNone/>
-              <a:defRPr sz="1800"/>
-            </a:lvl3pPr>
-            <a:lvl4pPr marL="1371600" indent="0" algn="ctr">
-              <a:buNone/>
-              <a:defRPr sz="1600"/>
-            </a:lvl4pPr>
-            <a:lvl5pPr marL="1828800" indent="0" algn="ctr">
-              <a:buNone/>
-              <a:defRPr sz="1600"/>
-            </a:lvl5pPr>
-            <a:lvl6pPr marL="2286000" indent="0" algn="ctr">
-              <a:buNone/>
-              <a:defRPr sz="1600"/>
-            </a:lvl6pPr>
-            <a:lvl7pPr marL="2743200" indent="0" algn="ctr">
-              <a:buNone/>
-              <a:defRPr sz="1600"/>
-            </a:lvl7pPr>
-            <a:lvl8pPr marL="3200400" indent="0" algn="ctr">
-              <a:buNone/>
-              <a:defRPr sz="1600"/>
-            </a:lvl8pPr>
-            <a:lvl9pPr marL="3657600" indent="0" algn="ctr">
-              <a:buNone/>
-              <a:defRPr sz="1600"/>
-            </a:lvl9pPr>
           </a:lstStyle>
           <a:p>
             <a:r>
-              <a:rPr kumimoji="1" lang="ja-JP" altLang="en-US"/>
+              <a:rPr lang="ja-JP" altLang="en-US"/>
               <a:t>マスター サブタイトルの書式設定</a:t>
             </a:r>
           </a:p>
@@ -233,91 +708,102 @@
       </p:sp>
       <p:sp>
         <p:nvSpPr>
-          <p:cNvPr id="4" name="日付プレースホルダー 3">
-            <a:extLst>
-              <a:ext uri="{FF2B5EF4-FFF2-40B4-BE49-F238E27FC236}">
-                <a16:creationId xmlns:a16="http://schemas.microsoft.com/office/drawing/2014/main" id="{3720AEDD-1AF3-58E2-64F9-8B4AC0A8B896}"/>
-              </a:ext>
-            </a:extLst>
-          </p:cNvPr>
-          <p:cNvSpPr>
-            <a:spLocks noGrp="1"/>
+          <p:cNvPr id="6" name="Rectangle 4"/>
+          <p:cNvSpPr>
+            <a:spLocks noGrp="1" noChangeArrowheads="1"/>
           </p:cNvSpPr>
           <p:nvPr>
             <p:ph type="dt" sz="half" idx="10"/>
           </p:nvPr>
         </p:nvSpPr>
-        <p:spPr/>
+        <p:spPr>
+          <a:xfrm>
+            <a:off x="609600" y="6243638"/>
+            <a:ext cx="2844800" cy="457200"/>
+          </a:xfrm>
+        </p:spPr>
         <p:txBody>
           <a:bodyPr/>
-          <a:lstStyle/>
-          <a:p>
-            <a:fld id="{6617D3FC-E227-49CD-9B33-753CA2C6CDCB}" type="datetimeFigureOut">
-              <a:rPr kumimoji="1" lang="ja-JP" altLang="en-US" smtClean="0"/>
+          <a:lstStyle>
+            <a:lvl1pPr>
+              <a:defRPr/>
+            </a:lvl1pPr>
+          </a:lstStyle>
+          <a:p>
+            <a:fld id="{5BBCB299-525B-C043-8ABF-E2AB50D107C3}" type="datetimeFigureOut">
+              <a:rPr lang="ja-JP" altLang="en-US" smtClean="0"/>
+              <a:pPr/>
               <a:t>2026/8/31</a:t>
             </a:fld>
-            <a:endParaRPr kumimoji="1" lang="ja-JP" altLang="en-US"/>
-          </a:p>
-        </p:txBody>
-      </p:sp>
-      <p:sp>
-        <p:nvSpPr>
-          <p:cNvPr id="5" name="フッター プレースホルダー 4">
-            <a:extLst>
-              <a:ext uri="{FF2B5EF4-FFF2-40B4-BE49-F238E27FC236}">
-                <a16:creationId xmlns:a16="http://schemas.microsoft.com/office/drawing/2014/main" id="{CCBD3F40-D68D-6234-02CB-7137B1A4A50D}"/>
-              </a:ext>
-            </a:extLst>
-          </p:cNvPr>
-          <p:cNvSpPr>
-            <a:spLocks noGrp="1"/>
+            <a:endParaRPr lang="ja-JP" altLang="en-US" dirty="0"/>
+          </a:p>
+        </p:txBody>
+      </p:sp>
+      <p:sp>
+        <p:nvSpPr>
+          <p:cNvPr id="7" name="Rectangle 5"/>
+          <p:cNvSpPr>
+            <a:spLocks noGrp="1" noChangeArrowheads="1"/>
           </p:cNvSpPr>
           <p:nvPr>
             <p:ph type="ftr" sz="quarter" idx="11"/>
           </p:nvPr>
         </p:nvSpPr>
-        <p:spPr/>
+        <p:spPr>
+          <a:xfrm>
+            <a:off x="4165600" y="6243638"/>
+            <a:ext cx="3860800" cy="457200"/>
+          </a:xfrm>
+        </p:spPr>
         <p:txBody>
           <a:bodyPr/>
-          <a:lstStyle/>
-          <a:p>
-            <a:endParaRPr kumimoji="1" lang="ja-JP" altLang="en-US"/>
-          </a:p>
-        </p:txBody>
-      </p:sp>
-      <p:sp>
-        <p:nvSpPr>
-          <p:cNvPr id="6" name="スライド番号プレースホルダー 5">
-            <a:extLst>
-              <a:ext uri="{FF2B5EF4-FFF2-40B4-BE49-F238E27FC236}">
-                <a16:creationId xmlns:a16="http://schemas.microsoft.com/office/drawing/2014/main" id="{54E08D70-D446-A158-0064-376FF9E21EF7}"/>
-              </a:ext>
-            </a:extLst>
-          </p:cNvPr>
-          <p:cNvSpPr>
-            <a:spLocks noGrp="1"/>
+          <a:lstStyle>
+            <a:lvl1pPr>
+              <a:defRPr/>
+            </a:lvl1pPr>
+          </a:lstStyle>
+          <a:p>
+            <a:endParaRPr lang="ja-JP" altLang="en-US" dirty="0"/>
+          </a:p>
+        </p:txBody>
+      </p:sp>
+      <p:sp>
+        <p:nvSpPr>
+          <p:cNvPr id="8" name="Rectangle 6"/>
+          <p:cNvSpPr>
+            <a:spLocks noGrp="1" noChangeArrowheads="1"/>
           </p:cNvSpPr>
           <p:nvPr>
             <p:ph type="sldNum" sz="quarter" idx="12"/>
           </p:nvPr>
         </p:nvSpPr>
-        <p:spPr/>
+        <p:spPr>
+          <a:xfrm>
+            <a:off x="8737600" y="6243638"/>
+            <a:ext cx="2844800" cy="457200"/>
+          </a:xfrm>
+        </p:spPr>
         <p:txBody>
           <a:bodyPr/>
-          <a:lstStyle/>
-          <a:p>
-            <a:fld id="{01C0817E-3A9A-4621-AB56-BCE6DE2A21FA}" type="slidenum">
-              <a:rPr kumimoji="1" lang="ja-JP" altLang="en-US" smtClean="0"/>
+          <a:lstStyle>
+            <a:lvl1pPr>
+              <a:defRPr/>
+            </a:lvl1pPr>
+          </a:lstStyle>
+          <a:p>
+            <a:fld id="{A602DE73-0B5E-8446-9073-5A6DE92C9AAA}" type="slidenum">
+              <a:rPr lang="ja-JP" altLang="en-US" smtClean="0"/>
+              <a:pPr/>
               <a:t>‹#›</a:t>
             </a:fld>
-            <a:endParaRPr kumimoji="1" lang="ja-JP" altLang="en-US"/>
+            <a:endParaRPr lang="ja-JP" altLang="en-US" dirty="0"/>
           </a:p>
         </p:txBody>
       </p:sp>
     </p:spTree>
     <p:extLst>
       <p:ext uri="{BB962C8B-B14F-4D97-AF65-F5344CB8AC3E}">
-        <p14:creationId xmlns:p14="http://schemas.microsoft.com/office/powerpoint/2010/main" val="4044402490"/>
+        <p14:creationId xmlns:p14="http://schemas.microsoft.com/office/powerpoint/2010/main" val="2875419336"/>
       </p:ext>
     </p:extLst>
   </p:cSld>
@@ -346,13 +832,7 @@
       </p:grpSpPr>
       <p:sp>
         <p:nvSpPr>
-          <p:cNvPr id="2" name="タイトル 1">
-            <a:extLst>
-              <a:ext uri="{FF2B5EF4-FFF2-40B4-BE49-F238E27FC236}">
-                <a16:creationId xmlns:a16="http://schemas.microsoft.com/office/drawing/2014/main" id="{47CDFCC1-D708-E4B3-809D-B0E69E6B4E7F}"/>
-              </a:ext>
-            </a:extLst>
-          </p:cNvPr>
+          <p:cNvPr id="2" name="タイトル 1"/>
           <p:cNvSpPr>
             <a:spLocks noGrp="1"/>
           </p:cNvSpPr>
@@ -366,7 +846,7 @@
           <a:lstStyle/>
           <a:p>
             <a:r>
-              <a:rPr kumimoji="1" lang="ja-JP" altLang="en-US"/>
+              <a:rPr lang="ja-JP" altLang="en-US"/>
               <a:t>マスター タイトルの書式設定</a:t>
             </a:r>
           </a:p>
@@ -374,13 +854,7 @@
       </p:sp>
       <p:sp>
         <p:nvSpPr>
-          <p:cNvPr id="3" name="縦書きテキスト プレースホルダー 2">
-            <a:extLst>
-              <a:ext uri="{FF2B5EF4-FFF2-40B4-BE49-F238E27FC236}">
-                <a16:creationId xmlns:a16="http://schemas.microsoft.com/office/drawing/2014/main" id="{56813E28-D3E0-DF7F-612F-CAE456832E0F}"/>
-              </a:ext>
-            </a:extLst>
-          </p:cNvPr>
+          <p:cNvPr id="3" name="縦書きテキスト プレースホルダ 2"/>
           <p:cNvSpPr>
             <a:spLocks noGrp="1"/>
           </p:cNvSpPr>
@@ -395,67 +869,67 @@
           <a:p>
             <a:pPr lvl="0"/>
             <a:r>
-              <a:rPr kumimoji="1" lang="ja-JP" altLang="en-US"/>
+              <a:rPr lang="ja-JP" altLang="en-US"/>
               <a:t>マスター テキストの書式設定</a:t>
             </a:r>
           </a:p>
           <a:p>
             <a:pPr lvl="1"/>
             <a:r>
-              <a:rPr kumimoji="1" lang="ja-JP" altLang="en-US"/>
+              <a:rPr lang="ja-JP" altLang="en-US"/>
               <a:t>第 </a:t>
             </a:r>
             <a:r>
-              <a:rPr kumimoji="1" lang="en-US" altLang="ja-JP"/>
+              <a:rPr lang="en-US" altLang="ja-JP"/>
               <a:t>2 </a:t>
             </a:r>
             <a:r>
-              <a:rPr kumimoji="1" lang="ja-JP" altLang="en-US"/>
+              <a:rPr lang="ja-JP" altLang="en-US"/>
               <a:t>レベル</a:t>
             </a:r>
           </a:p>
           <a:p>
             <a:pPr lvl="2"/>
             <a:r>
-              <a:rPr kumimoji="1" lang="ja-JP" altLang="en-US"/>
+              <a:rPr lang="ja-JP" altLang="en-US"/>
               <a:t>第 </a:t>
             </a:r>
             <a:r>
-              <a:rPr kumimoji="1" lang="en-US" altLang="ja-JP"/>
+              <a:rPr lang="en-US" altLang="ja-JP"/>
               <a:t>3 </a:t>
             </a:r>
             <a:r>
-              <a:rPr kumimoji="1" lang="ja-JP" altLang="en-US"/>
+              <a:rPr lang="ja-JP" altLang="en-US"/>
               <a:t>レベル</a:t>
             </a:r>
           </a:p>
           <a:p>
             <a:pPr lvl="3"/>
             <a:r>
-              <a:rPr kumimoji="1" lang="ja-JP" altLang="en-US"/>
+              <a:rPr lang="ja-JP" altLang="en-US"/>
               <a:t>第 </a:t>
             </a:r>
             <a:r>
-              <a:rPr kumimoji="1" lang="en-US" altLang="ja-JP"/>
+              <a:rPr lang="en-US" altLang="ja-JP"/>
               <a:t>4 </a:t>
             </a:r>
             <a:r>
-              <a:rPr kumimoji="1" lang="ja-JP" altLang="en-US"/>
+              <a:rPr lang="ja-JP" altLang="en-US"/>
               <a:t>レベル</a:t>
             </a:r>
           </a:p>
           <a:p>
             <a:pPr lvl="4"/>
             <a:r>
-              <a:rPr kumimoji="1" lang="ja-JP" altLang="en-US"/>
+              <a:rPr lang="ja-JP" altLang="en-US"/>
               <a:t>第 </a:t>
             </a:r>
             <a:r>
-              <a:rPr kumimoji="1" lang="en-US" altLang="ja-JP"/>
+              <a:rPr lang="en-US" altLang="ja-JP"/>
               <a:t>5 </a:t>
             </a:r>
             <a:r>
-              <a:rPr kumimoji="1" lang="ja-JP" altLang="en-US"/>
+              <a:rPr lang="ja-JP" altLang="en-US"/>
               <a:t>レベル</a:t>
             </a:r>
           </a:p>
@@ -463,91 +937,93 @@
       </p:sp>
       <p:sp>
         <p:nvSpPr>
-          <p:cNvPr id="4" name="日付プレースホルダー 3">
-            <a:extLst>
-              <a:ext uri="{FF2B5EF4-FFF2-40B4-BE49-F238E27FC236}">
-                <a16:creationId xmlns:a16="http://schemas.microsoft.com/office/drawing/2014/main" id="{8E310163-852C-F4E1-94E1-8C83EA966706}"/>
-              </a:ext>
-            </a:extLst>
-          </p:cNvPr>
-          <p:cNvSpPr>
-            <a:spLocks noGrp="1"/>
+          <p:cNvPr id="4" name="Rectangle 4"/>
+          <p:cNvSpPr>
+            <a:spLocks noGrp="1" noChangeArrowheads="1"/>
           </p:cNvSpPr>
           <p:nvPr>
             <p:ph type="dt" sz="half" idx="10"/>
           </p:nvPr>
         </p:nvSpPr>
-        <p:spPr/>
+        <p:spPr>
+          <a:ln/>
+        </p:spPr>
         <p:txBody>
           <a:bodyPr/>
-          <a:lstStyle/>
-          <a:p>
-            <a:fld id="{6617D3FC-E227-49CD-9B33-753CA2C6CDCB}" type="datetimeFigureOut">
-              <a:rPr kumimoji="1" lang="ja-JP" altLang="en-US" smtClean="0"/>
+          <a:lstStyle>
+            <a:lvl1pPr>
+              <a:defRPr/>
+            </a:lvl1pPr>
+          </a:lstStyle>
+          <a:p>
+            <a:fld id="{5BBCB299-525B-C043-8ABF-E2AB50D107C3}" type="datetimeFigureOut">
+              <a:rPr lang="ja-JP" altLang="en-US" smtClean="0"/>
+              <a:pPr/>
               <a:t>2026/8/31</a:t>
             </a:fld>
-            <a:endParaRPr kumimoji="1" lang="ja-JP" altLang="en-US"/>
-          </a:p>
-        </p:txBody>
-      </p:sp>
-      <p:sp>
-        <p:nvSpPr>
-          <p:cNvPr id="5" name="フッター プレースホルダー 4">
-            <a:extLst>
-              <a:ext uri="{FF2B5EF4-FFF2-40B4-BE49-F238E27FC236}">
-                <a16:creationId xmlns:a16="http://schemas.microsoft.com/office/drawing/2014/main" id="{3C74D0C6-F020-66A8-DEF5-6700CFFE0FC3}"/>
-              </a:ext>
-            </a:extLst>
-          </p:cNvPr>
-          <p:cNvSpPr>
-            <a:spLocks noGrp="1"/>
+            <a:endParaRPr lang="ja-JP" altLang="en-US" dirty="0"/>
+          </a:p>
+        </p:txBody>
+      </p:sp>
+      <p:sp>
+        <p:nvSpPr>
+          <p:cNvPr id="5" name="Rectangle 5"/>
+          <p:cNvSpPr>
+            <a:spLocks noGrp="1" noChangeArrowheads="1"/>
           </p:cNvSpPr>
           <p:nvPr>
             <p:ph type="ftr" sz="quarter" idx="11"/>
           </p:nvPr>
         </p:nvSpPr>
-        <p:spPr/>
+        <p:spPr>
+          <a:ln/>
+        </p:spPr>
         <p:txBody>
           <a:bodyPr/>
-          <a:lstStyle/>
-          <a:p>
-            <a:endParaRPr kumimoji="1" lang="ja-JP" altLang="en-US"/>
-          </a:p>
-        </p:txBody>
-      </p:sp>
-      <p:sp>
-        <p:nvSpPr>
-          <p:cNvPr id="6" name="スライド番号プレースホルダー 5">
-            <a:extLst>
-              <a:ext uri="{FF2B5EF4-FFF2-40B4-BE49-F238E27FC236}">
-                <a16:creationId xmlns:a16="http://schemas.microsoft.com/office/drawing/2014/main" id="{63595A0E-3524-134C-27DD-EDB22F617CD9}"/>
-              </a:ext>
-            </a:extLst>
-          </p:cNvPr>
-          <p:cNvSpPr>
-            <a:spLocks noGrp="1"/>
+          <a:lstStyle>
+            <a:lvl1pPr>
+              <a:defRPr/>
+            </a:lvl1pPr>
+          </a:lstStyle>
+          <a:p>
+            <a:endParaRPr lang="ja-JP" altLang="en-US" dirty="0"/>
+          </a:p>
+        </p:txBody>
+      </p:sp>
+      <p:sp>
+        <p:nvSpPr>
+          <p:cNvPr id="6" name="Rectangle 6"/>
+          <p:cNvSpPr>
+            <a:spLocks noGrp="1" noChangeArrowheads="1"/>
           </p:cNvSpPr>
           <p:nvPr>
             <p:ph type="sldNum" sz="quarter" idx="12"/>
           </p:nvPr>
         </p:nvSpPr>
-        <p:spPr/>
+        <p:spPr>
+          <a:ln/>
+        </p:spPr>
         <p:txBody>
           <a:bodyPr/>
-          <a:lstStyle/>
-          <a:p>
-            <a:fld id="{01C0817E-3A9A-4621-AB56-BCE6DE2A21FA}" type="slidenum">
-              <a:rPr kumimoji="1" lang="ja-JP" altLang="en-US" smtClean="0"/>
+          <a:lstStyle>
+            <a:lvl1pPr>
+              <a:defRPr/>
+            </a:lvl1pPr>
+          </a:lstStyle>
+          <a:p>
+            <a:fld id="{A602DE73-0B5E-8446-9073-5A6DE92C9AAA}" type="slidenum">
+              <a:rPr lang="ja-JP" altLang="en-US" smtClean="0"/>
+              <a:pPr/>
               <a:t>‹#›</a:t>
             </a:fld>
-            <a:endParaRPr kumimoji="1" lang="ja-JP" altLang="en-US"/>
+            <a:endParaRPr lang="ja-JP" altLang="en-US" dirty="0"/>
           </a:p>
         </p:txBody>
       </p:sp>
     </p:spTree>
     <p:extLst>
       <p:ext uri="{BB962C8B-B14F-4D97-AF65-F5344CB8AC3E}">
-        <p14:creationId xmlns:p14="http://schemas.microsoft.com/office/powerpoint/2010/main" val="3661376440"/>
+        <p14:creationId xmlns:p14="http://schemas.microsoft.com/office/powerpoint/2010/main" val="1200769614"/>
       </p:ext>
     </p:extLst>
   </p:cSld>
@@ -559,7 +1035,7 @@
 
 <file path=ppt/slideLayouts/slideLayout11.xml><?xml version="1.0" encoding="utf-8"?>
 <p:sldLayout xmlns:a="http://schemas.openxmlformats.org/drawingml/2006/main" xmlns:r="http://schemas.openxmlformats.org/officeDocument/2006/relationships" xmlns:p="http://schemas.openxmlformats.org/presentationml/2006/main" type="vertTitleAndTx" preserve="1">
-  <p:cSld name="縦書きタイトルと&#10;縦書きテキスト">
+  <p:cSld name="縦書きタイトルと縦書きテキスト">
     <p:spTree>
       <p:nvGrpSpPr>
         <p:cNvPr id="1" name=""/>
@@ -576,13 +1052,7 @@
       </p:grpSpPr>
       <p:sp>
         <p:nvSpPr>
-          <p:cNvPr id="2" name="縦書きタイトル 1">
-            <a:extLst>
-              <a:ext uri="{FF2B5EF4-FFF2-40B4-BE49-F238E27FC236}">
-                <a16:creationId xmlns:a16="http://schemas.microsoft.com/office/drawing/2014/main" id="{D82167F0-66FA-7842-271E-D152EAE647D9}"/>
-              </a:ext>
-            </a:extLst>
-          </p:cNvPr>
+          <p:cNvPr id="2" name="縦書きタイトル 1"/>
           <p:cNvSpPr>
             <a:spLocks noGrp="1"/>
           </p:cNvSpPr>
@@ -592,8 +1062,8 @@
         </p:nvSpPr>
         <p:spPr>
           <a:xfrm>
-            <a:off x="8724900" y="365125"/>
-            <a:ext cx="2628900" cy="5811838"/>
+            <a:off x="8839200" y="277814"/>
+            <a:ext cx="2743200" cy="6103937"/>
           </a:xfrm>
         </p:spPr>
         <p:txBody>
@@ -601,7 +1071,7 @@
           <a:lstStyle/>
           <a:p>
             <a:r>
-              <a:rPr kumimoji="1" lang="ja-JP" altLang="en-US"/>
+              <a:rPr lang="ja-JP" altLang="en-US"/>
               <a:t>マスター タイトルの書式設定</a:t>
             </a:r>
           </a:p>
@@ -609,13 +1079,7 @@
       </p:sp>
       <p:sp>
         <p:nvSpPr>
-          <p:cNvPr id="3" name="縦書きテキスト プレースホルダー 2">
-            <a:extLst>
-              <a:ext uri="{FF2B5EF4-FFF2-40B4-BE49-F238E27FC236}">
-                <a16:creationId xmlns:a16="http://schemas.microsoft.com/office/drawing/2014/main" id="{82A10615-6B3B-EDBB-5D78-0F68980D2AA6}"/>
-              </a:ext>
-            </a:extLst>
-          </p:cNvPr>
+          <p:cNvPr id="3" name="縦書きテキスト プレースホルダ 2"/>
           <p:cNvSpPr>
             <a:spLocks noGrp="1"/>
           </p:cNvSpPr>
@@ -625,8 +1089,8 @@
         </p:nvSpPr>
         <p:spPr>
           <a:xfrm>
-            <a:off x="838200" y="365125"/>
-            <a:ext cx="7734300" cy="5811838"/>
+            <a:off x="609600" y="277814"/>
+            <a:ext cx="8026400" cy="6103937"/>
           </a:xfrm>
         </p:spPr>
         <p:txBody>
@@ -635,67 +1099,67 @@
           <a:p>
             <a:pPr lvl="0"/>
             <a:r>
-              <a:rPr kumimoji="1" lang="ja-JP" altLang="en-US"/>
+              <a:rPr lang="ja-JP" altLang="en-US"/>
               <a:t>マスター テキストの書式設定</a:t>
             </a:r>
           </a:p>
           <a:p>
             <a:pPr lvl="1"/>
             <a:r>
-              <a:rPr kumimoji="1" lang="ja-JP" altLang="en-US"/>
+              <a:rPr lang="ja-JP" altLang="en-US"/>
               <a:t>第 </a:t>
             </a:r>
             <a:r>
-              <a:rPr kumimoji="1" lang="en-US" altLang="ja-JP"/>
+              <a:rPr lang="en-US" altLang="ja-JP"/>
               <a:t>2 </a:t>
             </a:r>
             <a:r>
-              <a:rPr kumimoji="1" lang="ja-JP" altLang="en-US"/>
+              <a:rPr lang="ja-JP" altLang="en-US"/>
               <a:t>レベル</a:t>
             </a:r>
           </a:p>
           <a:p>
             <a:pPr lvl="2"/>
             <a:r>
-              <a:rPr kumimoji="1" lang="ja-JP" altLang="en-US"/>
+              <a:rPr lang="ja-JP" altLang="en-US"/>
               <a:t>第 </a:t>
             </a:r>
             <a:r>
-              <a:rPr kumimoji="1" lang="en-US" altLang="ja-JP"/>
+              <a:rPr lang="en-US" altLang="ja-JP"/>
               <a:t>3 </a:t>
             </a:r>
             <a:r>
-              <a:rPr kumimoji="1" lang="ja-JP" altLang="en-US"/>
+              <a:rPr lang="ja-JP" altLang="en-US"/>
               <a:t>レベル</a:t>
             </a:r>
           </a:p>
           <a:p>
             <a:pPr lvl="3"/>
             <a:r>
-              <a:rPr kumimoji="1" lang="ja-JP" altLang="en-US"/>
+              <a:rPr lang="ja-JP" altLang="en-US"/>
               <a:t>第 </a:t>
             </a:r>
             <a:r>
-              <a:rPr kumimoji="1" lang="en-US" altLang="ja-JP"/>
+              <a:rPr lang="en-US" altLang="ja-JP"/>
               <a:t>4 </a:t>
             </a:r>
             <a:r>
-              <a:rPr kumimoji="1" lang="ja-JP" altLang="en-US"/>
+              <a:rPr lang="ja-JP" altLang="en-US"/>
               <a:t>レベル</a:t>
             </a:r>
           </a:p>
           <a:p>
             <a:pPr lvl="4"/>
             <a:r>
-              <a:rPr kumimoji="1" lang="ja-JP" altLang="en-US"/>
+              <a:rPr lang="ja-JP" altLang="en-US"/>
               <a:t>第 </a:t>
             </a:r>
             <a:r>
-              <a:rPr kumimoji="1" lang="en-US" altLang="ja-JP"/>
+              <a:rPr lang="en-US" altLang="ja-JP"/>
               <a:t>5 </a:t>
             </a:r>
             <a:r>
-              <a:rPr kumimoji="1" lang="ja-JP" altLang="en-US"/>
+              <a:rPr lang="ja-JP" altLang="en-US"/>
               <a:t>レベル</a:t>
             </a:r>
           </a:p>
@@ -703,91 +1167,411 @@
       </p:sp>
       <p:sp>
         <p:nvSpPr>
-          <p:cNvPr id="4" name="日付プレースホルダー 3">
-            <a:extLst>
-              <a:ext uri="{FF2B5EF4-FFF2-40B4-BE49-F238E27FC236}">
-                <a16:creationId xmlns:a16="http://schemas.microsoft.com/office/drawing/2014/main" id="{63520B89-2545-4600-7AA0-66AF04AA98AF}"/>
-              </a:ext>
-            </a:extLst>
-          </p:cNvPr>
-          <p:cNvSpPr>
-            <a:spLocks noGrp="1"/>
+          <p:cNvPr id="4" name="Rectangle 4"/>
+          <p:cNvSpPr>
+            <a:spLocks noGrp="1" noChangeArrowheads="1"/>
           </p:cNvSpPr>
           <p:nvPr>
             <p:ph type="dt" sz="half" idx="10"/>
           </p:nvPr>
         </p:nvSpPr>
-        <p:spPr/>
+        <p:spPr>
+          <a:ln/>
+        </p:spPr>
         <p:txBody>
           <a:bodyPr/>
-          <a:lstStyle/>
-          <a:p>
-            <a:fld id="{6617D3FC-E227-49CD-9B33-753CA2C6CDCB}" type="datetimeFigureOut">
-              <a:rPr kumimoji="1" lang="ja-JP" altLang="en-US" smtClean="0"/>
+          <a:lstStyle>
+            <a:lvl1pPr>
+              <a:defRPr/>
+            </a:lvl1pPr>
+          </a:lstStyle>
+          <a:p>
+            <a:fld id="{5BBCB299-525B-C043-8ABF-E2AB50D107C3}" type="datetimeFigureOut">
+              <a:rPr lang="ja-JP" altLang="en-US" smtClean="0"/>
+              <a:pPr/>
               <a:t>2026/8/31</a:t>
             </a:fld>
-            <a:endParaRPr kumimoji="1" lang="ja-JP" altLang="en-US"/>
-          </a:p>
-        </p:txBody>
-      </p:sp>
-      <p:sp>
-        <p:nvSpPr>
-          <p:cNvPr id="5" name="フッター プレースホルダー 4">
-            <a:extLst>
-              <a:ext uri="{FF2B5EF4-FFF2-40B4-BE49-F238E27FC236}">
-                <a16:creationId xmlns:a16="http://schemas.microsoft.com/office/drawing/2014/main" id="{56A325B7-F710-EEAF-17DC-E84A635D7CE1}"/>
-              </a:ext>
-            </a:extLst>
-          </p:cNvPr>
-          <p:cNvSpPr>
-            <a:spLocks noGrp="1"/>
+            <a:endParaRPr lang="ja-JP" altLang="en-US" dirty="0"/>
+          </a:p>
+        </p:txBody>
+      </p:sp>
+      <p:sp>
+        <p:nvSpPr>
+          <p:cNvPr id="5" name="Rectangle 5"/>
+          <p:cNvSpPr>
+            <a:spLocks noGrp="1" noChangeArrowheads="1"/>
           </p:cNvSpPr>
           <p:nvPr>
             <p:ph type="ftr" sz="quarter" idx="11"/>
           </p:nvPr>
         </p:nvSpPr>
-        <p:spPr/>
+        <p:spPr>
+          <a:ln/>
+        </p:spPr>
         <p:txBody>
           <a:bodyPr/>
-          <a:lstStyle/>
-          <a:p>
-            <a:endParaRPr kumimoji="1" lang="ja-JP" altLang="en-US"/>
-          </a:p>
-        </p:txBody>
-      </p:sp>
-      <p:sp>
-        <p:nvSpPr>
-          <p:cNvPr id="6" name="スライド番号プレースホルダー 5">
-            <a:extLst>
-              <a:ext uri="{FF2B5EF4-FFF2-40B4-BE49-F238E27FC236}">
-                <a16:creationId xmlns:a16="http://schemas.microsoft.com/office/drawing/2014/main" id="{2091432D-7CA4-6A97-962D-99C481AA836D}"/>
-              </a:ext>
-            </a:extLst>
-          </p:cNvPr>
-          <p:cNvSpPr>
-            <a:spLocks noGrp="1"/>
+          <a:lstStyle>
+            <a:lvl1pPr>
+              <a:defRPr/>
+            </a:lvl1pPr>
+          </a:lstStyle>
+          <a:p>
+            <a:endParaRPr lang="ja-JP" altLang="en-US" dirty="0"/>
+          </a:p>
+        </p:txBody>
+      </p:sp>
+      <p:sp>
+        <p:nvSpPr>
+          <p:cNvPr id="6" name="Rectangle 6"/>
+          <p:cNvSpPr>
+            <a:spLocks noGrp="1" noChangeArrowheads="1"/>
           </p:cNvSpPr>
           <p:nvPr>
             <p:ph type="sldNum" sz="quarter" idx="12"/>
           </p:nvPr>
         </p:nvSpPr>
-        <p:spPr/>
+        <p:spPr>
+          <a:ln/>
+        </p:spPr>
         <p:txBody>
           <a:bodyPr/>
-          <a:lstStyle/>
-          <a:p>
-            <a:fld id="{01C0817E-3A9A-4621-AB56-BCE6DE2A21FA}" type="slidenum">
-              <a:rPr kumimoji="1" lang="ja-JP" altLang="en-US" smtClean="0"/>
+          <a:lstStyle>
+            <a:lvl1pPr>
+              <a:defRPr/>
+            </a:lvl1pPr>
+          </a:lstStyle>
+          <a:p>
+            <a:fld id="{A602DE73-0B5E-8446-9073-5A6DE92C9AAA}" type="slidenum">
+              <a:rPr lang="ja-JP" altLang="en-US" smtClean="0"/>
+              <a:pPr/>
               <a:t>‹#›</a:t>
             </a:fld>
-            <a:endParaRPr kumimoji="1" lang="ja-JP" altLang="en-US"/>
+            <a:endParaRPr lang="ja-JP" altLang="en-US" dirty="0"/>
           </a:p>
         </p:txBody>
       </p:sp>
     </p:spTree>
     <p:extLst>
       <p:ext uri="{BB962C8B-B14F-4D97-AF65-F5344CB8AC3E}">
-        <p14:creationId xmlns:p14="http://schemas.microsoft.com/office/powerpoint/2010/main" val="718724861"/>
+        <p14:creationId xmlns:p14="http://schemas.microsoft.com/office/powerpoint/2010/main" val="3487313087"/>
+      </p:ext>
+    </p:extLst>
+  </p:cSld>
+  <p:clrMapOvr>
+    <a:masterClrMapping/>
+  </p:clrMapOvr>
+</p:sldLayout>
+</file>
+
+<file path=ppt/slideLayouts/slideLayout12.xml><?xml version="1.0" encoding="utf-8"?>
+<p:sldLayout xmlns:a="http://schemas.openxmlformats.org/drawingml/2006/main" xmlns:r="http://schemas.openxmlformats.org/officeDocument/2006/relationships" xmlns:p="http://schemas.openxmlformats.org/presentationml/2006/main" type="txAndObj" preserve="1">
+  <p:cSld name="タイトル、テキスト、コンテンツ">
+    <p:spTree>
+      <p:nvGrpSpPr>
+        <p:cNvPr id="1" name=""/>
+        <p:cNvGrpSpPr/>
+        <p:nvPr/>
+      </p:nvGrpSpPr>
+      <p:grpSpPr>
+        <a:xfrm>
+          <a:off x="0" y="0"/>
+          <a:ext cx="0" cy="0"/>
+          <a:chOff x="0" y="0"/>
+          <a:chExt cx="0" cy="0"/>
+        </a:xfrm>
+      </p:grpSpPr>
+      <p:sp>
+        <p:nvSpPr>
+          <p:cNvPr id="2" name="タイトル 1"/>
+          <p:cNvSpPr>
+            <a:spLocks noGrp="1"/>
+          </p:cNvSpPr>
+          <p:nvPr>
+            <p:ph type="title"/>
+          </p:nvPr>
+        </p:nvSpPr>
+        <p:spPr>
+          <a:xfrm>
+            <a:off x="609600" y="277814"/>
+            <a:ext cx="10972800" cy="847725"/>
+          </a:xfrm>
+        </p:spPr>
+        <p:txBody>
+          <a:bodyPr/>
+          <a:lstStyle/>
+          <a:p>
+            <a:r>
+              <a:rPr lang="ja-JP" altLang="en-US"/>
+              <a:t>マスター タイトルの書式設定</a:t>
+            </a:r>
+          </a:p>
+        </p:txBody>
+      </p:sp>
+      <p:sp>
+        <p:nvSpPr>
+          <p:cNvPr id="3" name="テキスト プレースホルダ 2"/>
+          <p:cNvSpPr>
+            <a:spLocks noGrp="1"/>
+          </p:cNvSpPr>
+          <p:nvPr>
+            <p:ph type="body" sz="half" idx="1"/>
+          </p:nvPr>
+        </p:nvSpPr>
+        <p:spPr>
+          <a:xfrm>
+            <a:off x="609600" y="1268414"/>
+            <a:ext cx="5384800" cy="5113337"/>
+          </a:xfrm>
+        </p:spPr>
+        <p:txBody>
+          <a:bodyPr/>
+          <a:lstStyle/>
+          <a:p>
+            <a:pPr lvl="0"/>
+            <a:r>
+              <a:rPr lang="ja-JP" altLang="en-US"/>
+              <a:t>マスター テキストの書式設定</a:t>
+            </a:r>
+          </a:p>
+          <a:p>
+            <a:pPr lvl="1"/>
+            <a:r>
+              <a:rPr lang="ja-JP" altLang="en-US"/>
+              <a:t>第 </a:t>
+            </a:r>
+            <a:r>
+              <a:rPr lang="en-US" altLang="ja-JP"/>
+              <a:t>2 </a:t>
+            </a:r>
+            <a:r>
+              <a:rPr lang="ja-JP" altLang="en-US"/>
+              <a:t>レベル</a:t>
+            </a:r>
+          </a:p>
+          <a:p>
+            <a:pPr lvl="2"/>
+            <a:r>
+              <a:rPr lang="ja-JP" altLang="en-US"/>
+              <a:t>第 </a:t>
+            </a:r>
+            <a:r>
+              <a:rPr lang="en-US" altLang="ja-JP"/>
+              <a:t>3 </a:t>
+            </a:r>
+            <a:r>
+              <a:rPr lang="ja-JP" altLang="en-US"/>
+              <a:t>レベル</a:t>
+            </a:r>
+          </a:p>
+          <a:p>
+            <a:pPr lvl="3"/>
+            <a:r>
+              <a:rPr lang="ja-JP" altLang="en-US"/>
+              <a:t>第 </a:t>
+            </a:r>
+            <a:r>
+              <a:rPr lang="en-US" altLang="ja-JP"/>
+              <a:t>4 </a:t>
+            </a:r>
+            <a:r>
+              <a:rPr lang="ja-JP" altLang="en-US"/>
+              <a:t>レベル</a:t>
+            </a:r>
+          </a:p>
+          <a:p>
+            <a:pPr lvl="4"/>
+            <a:r>
+              <a:rPr lang="ja-JP" altLang="en-US"/>
+              <a:t>第 </a:t>
+            </a:r>
+            <a:r>
+              <a:rPr lang="en-US" altLang="ja-JP"/>
+              <a:t>5 </a:t>
+            </a:r>
+            <a:r>
+              <a:rPr lang="ja-JP" altLang="en-US"/>
+              <a:t>レベル</a:t>
+            </a:r>
+          </a:p>
+        </p:txBody>
+      </p:sp>
+      <p:sp>
+        <p:nvSpPr>
+          <p:cNvPr id="4" name="コンテンツ プレースホルダ 3"/>
+          <p:cNvSpPr>
+            <a:spLocks noGrp="1"/>
+          </p:cNvSpPr>
+          <p:nvPr>
+            <p:ph sz="half" idx="2"/>
+          </p:nvPr>
+        </p:nvSpPr>
+        <p:spPr>
+          <a:xfrm>
+            <a:off x="6197600" y="1268414"/>
+            <a:ext cx="5384800" cy="5113337"/>
+          </a:xfrm>
+        </p:spPr>
+        <p:txBody>
+          <a:bodyPr/>
+          <a:lstStyle/>
+          <a:p>
+            <a:pPr lvl="0"/>
+            <a:r>
+              <a:rPr lang="ja-JP" altLang="en-US"/>
+              <a:t>マスター テキストの書式設定</a:t>
+            </a:r>
+          </a:p>
+          <a:p>
+            <a:pPr lvl="1"/>
+            <a:r>
+              <a:rPr lang="ja-JP" altLang="en-US"/>
+              <a:t>第 </a:t>
+            </a:r>
+            <a:r>
+              <a:rPr lang="en-US" altLang="ja-JP"/>
+              <a:t>2 </a:t>
+            </a:r>
+            <a:r>
+              <a:rPr lang="ja-JP" altLang="en-US"/>
+              <a:t>レベル</a:t>
+            </a:r>
+          </a:p>
+          <a:p>
+            <a:pPr lvl="2"/>
+            <a:r>
+              <a:rPr lang="ja-JP" altLang="en-US"/>
+              <a:t>第 </a:t>
+            </a:r>
+            <a:r>
+              <a:rPr lang="en-US" altLang="ja-JP"/>
+              <a:t>3 </a:t>
+            </a:r>
+            <a:r>
+              <a:rPr lang="ja-JP" altLang="en-US"/>
+              <a:t>レベル</a:t>
+            </a:r>
+          </a:p>
+          <a:p>
+            <a:pPr lvl="3"/>
+            <a:r>
+              <a:rPr lang="ja-JP" altLang="en-US"/>
+              <a:t>第 </a:t>
+            </a:r>
+            <a:r>
+              <a:rPr lang="en-US" altLang="ja-JP"/>
+              <a:t>4 </a:t>
+            </a:r>
+            <a:r>
+              <a:rPr lang="ja-JP" altLang="en-US"/>
+              <a:t>レベル</a:t>
+            </a:r>
+          </a:p>
+          <a:p>
+            <a:pPr lvl="4"/>
+            <a:r>
+              <a:rPr lang="ja-JP" altLang="en-US"/>
+              <a:t>第 </a:t>
+            </a:r>
+            <a:r>
+              <a:rPr lang="en-US" altLang="ja-JP"/>
+              <a:t>5 </a:t>
+            </a:r>
+            <a:r>
+              <a:rPr lang="ja-JP" altLang="en-US"/>
+              <a:t>レベル</a:t>
+            </a:r>
+          </a:p>
+        </p:txBody>
+      </p:sp>
+      <p:sp>
+        <p:nvSpPr>
+          <p:cNvPr id="5" name="Rectangle 4"/>
+          <p:cNvSpPr>
+            <a:spLocks noGrp="1" noChangeArrowheads="1"/>
+          </p:cNvSpPr>
+          <p:nvPr>
+            <p:ph type="dt" sz="half" idx="10"/>
+          </p:nvPr>
+        </p:nvSpPr>
+        <p:spPr>
+          <a:ln/>
+        </p:spPr>
+        <p:txBody>
+          <a:bodyPr/>
+          <a:lstStyle>
+            <a:lvl1pPr>
+              <a:defRPr/>
+            </a:lvl1pPr>
+          </a:lstStyle>
+          <a:p>
+            <a:fld id="{5BBCB299-525B-C043-8ABF-E2AB50D107C3}" type="datetimeFigureOut">
+              <a:rPr lang="ja-JP" altLang="en-US" smtClean="0"/>
+              <a:pPr/>
+              <a:t>2026/8/31</a:t>
+            </a:fld>
+            <a:endParaRPr lang="ja-JP" altLang="en-US" dirty="0"/>
+          </a:p>
+        </p:txBody>
+      </p:sp>
+      <p:sp>
+        <p:nvSpPr>
+          <p:cNvPr id="6" name="Rectangle 5"/>
+          <p:cNvSpPr>
+            <a:spLocks noGrp="1" noChangeArrowheads="1"/>
+          </p:cNvSpPr>
+          <p:nvPr>
+            <p:ph type="ftr" sz="quarter" idx="11"/>
+          </p:nvPr>
+        </p:nvSpPr>
+        <p:spPr>
+          <a:ln/>
+        </p:spPr>
+        <p:txBody>
+          <a:bodyPr/>
+          <a:lstStyle>
+            <a:lvl1pPr>
+              <a:defRPr/>
+            </a:lvl1pPr>
+          </a:lstStyle>
+          <a:p>
+            <a:endParaRPr lang="ja-JP" altLang="en-US" dirty="0"/>
+          </a:p>
+        </p:txBody>
+      </p:sp>
+      <p:sp>
+        <p:nvSpPr>
+          <p:cNvPr id="7" name="Rectangle 6"/>
+          <p:cNvSpPr>
+            <a:spLocks noGrp="1" noChangeArrowheads="1"/>
+          </p:cNvSpPr>
+          <p:nvPr>
+            <p:ph type="sldNum" sz="quarter" idx="12"/>
+          </p:nvPr>
+        </p:nvSpPr>
+        <p:spPr>
+          <a:ln/>
+        </p:spPr>
+        <p:txBody>
+          <a:bodyPr/>
+          <a:lstStyle>
+            <a:lvl1pPr>
+              <a:defRPr/>
+            </a:lvl1pPr>
+          </a:lstStyle>
+          <a:p>
+            <a:fld id="{A602DE73-0B5E-8446-9073-5A6DE92C9AAA}" type="slidenum">
+              <a:rPr lang="ja-JP" altLang="en-US" smtClean="0"/>
+              <a:pPr/>
+              <a:t>‹#›</a:t>
+            </a:fld>
+            <a:endParaRPr lang="ja-JP" altLang="en-US" dirty="0"/>
+          </a:p>
+        </p:txBody>
+      </p:sp>
+    </p:spTree>
+    <p:extLst>
+      <p:ext uri="{BB962C8B-B14F-4D97-AF65-F5344CB8AC3E}">
+        <p14:creationId xmlns:p14="http://schemas.microsoft.com/office/powerpoint/2010/main" val="746309877"/>
       </p:ext>
     </p:extLst>
   </p:cSld>
@@ -816,13 +1600,7 @@
       </p:grpSpPr>
       <p:sp>
         <p:nvSpPr>
-          <p:cNvPr id="2" name="タイトル 1">
-            <a:extLst>
-              <a:ext uri="{FF2B5EF4-FFF2-40B4-BE49-F238E27FC236}">
-                <a16:creationId xmlns:a16="http://schemas.microsoft.com/office/drawing/2014/main" id="{DE0AC555-7A83-CC9C-A673-80614BB0153A}"/>
-              </a:ext>
-            </a:extLst>
-          </p:cNvPr>
+          <p:cNvPr id="2" name="タイトル 1"/>
           <p:cNvSpPr>
             <a:spLocks noGrp="1"/>
           </p:cNvSpPr>
@@ -836,7 +1614,7 @@
           <a:lstStyle/>
           <a:p>
             <a:r>
-              <a:rPr kumimoji="1" lang="ja-JP" altLang="en-US"/>
+              <a:rPr lang="ja-JP" altLang="en-US"/>
               <a:t>マスター タイトルの書式設定</a:t>
             </a:r>
           </a:p>
@@ -844,13 +1622,7 @@
       </p:sp>
       <p:sp>
         <p:nvSpPr>
-          <p:cNvPr id="3" name="コンテンツ プレースホルダー 2">
-            <a:extLst>
-              <a:ext uri="{FF2B5EF4-FFF2-40B4-BE49-F238E27FC236}">
-                <a16:creationId xmlns:a16="http://schemas.microsoft.com/office/drawing/2014/main" id="{65D02B87-59D8-159C-4CD6-6D2E9A0157D1}"/>
-              </a:ext>
-            </a:extLst>
-          </p:cNvPr>
+          <p:cNvPr id="3" name="コンテンツ プレースホルダ 2"/>
           <p:cNvSpPr>
             <a:spLocks noGrp="1"/>
           </p:cNvSpPr>
@@ -865,67 +1637,67 @@
           <a:p>
             <a:pPr lvl="0"/>
             <a:r>
-              <a:rPr kumimoji="1" lang="ja-JP" altLang="en-US"/>
+              <a:rPr lang="ja-JP" altLang="en-US"/>
               <a:t>マスター テキストの書式設定</a:t>
             </a:r>
           </a:p>
           <a:p>
             <a:pPr lvl="1"/>
             <a:r>
-              <a:rPr kumimoji="1" lang="ja-JP" altLang="en-US"/>
+              <a:rPr lang="ja-JP" altLang="en-US"/>
               <a:t>第 </a:t>
             </a:r>
             <a:r>
-              <a:rPr kumimoji="1" lang="en-US" altLang="ja-JP"/>
+              <a:rPr lang="en-US" altLang="ja-JP"/>
               <a:t>2 </a:t>
             </a:r>
             <a:r>
-              <a:rPr kumimoji="1" lang="ja-JP" altLang="en-US"/>
+              <a:rPr lang="ja-JP" altLang="en-US"/>
               <a:t>レベル</a:t>
             </a:r>
           </a:p>
           <a:p>
             <a:pPr lvl="2"/>
             <a:r>
-              <a:rPr kumimoji="1" lang="ja-JP" altLang="en-US"/>
+              <a:rPr lang="ja-JP" altLang="en-US"/>
               <a:t>第 </a:t>
             </a:r>
             <a:r>
-              <a:rPr kumimoji="1" lang="en-US" altLang="ja-JP"/>
+              <a:rPr lang="en-US" altLang="ja-JP"/>
               <a:t>3 </a:t>
             </a:r>
             <a:r>
-              <a:rPr kumimoji="1" lang="ja-JP" altLang="en-US"/>
+              <a:rPr lang="ja-JP" altLang="en-US"/>
               <a:t>レベル</a:t>
             </a:r>
           </a:p>
           <a:p>
             <a:pPr lvl="3"/>
             <a:r>
-              <a:rPr kumimoji="1" lang="ja-JP" altLang="en-US"/>
+              <a:rPr lang="ja-JP" altLang="en-US"/>
               <a:t>第 </a:t>
             </a:r>
             <a:r>
-              <a:rPr kumimoji="1" lang="en-US" altLang="ja-JP"/>
+              <a:rPr lang="en-US" altLang="ja-JP"/>
               <a:t>4 </a:t>
             </a:r>
             <a:r>
-              <a:rPr kumimoji="1" lang="ja-JP" altLang="en-US"/>
+              <a:rPr lang="ja-JP" altLang="en-US"/>
               <a:t>レベル</a:t>
             </a:r>
           </a:p>
           <a:p>
             <a:pPr lvl="4"/>
             <a:r>
-              <a:rPr kumimoji="1" lang="ja-JP" altLang="en-US"/>
+              <a:rPr lang="ja-JP" altLang="en-US"/>
               <a:t>第 </a:t>
             </a:r>
             <a:r>
-              <a:rPr kumimoji="1" lang="en-US" altLang="ja-JP"/>
+              <a:rPr lang="en-US" altLang="ja-JP"/>
               <a:t>5 </a:t>
             </a:r>
             <a:r>
-              <a:rPr kumimoji="1" lang="ja-JP" altLang="en-US"/>
+              <a:rPr lang="ja-JP" altLang="en-US"/>
               <a:t>レベル</a:t>
             </a:r>
           </a:p>
@@ -933,91 +1705,93 @@
       </p:sp>
       <p:sp>
         <p:nvSpPr>
-          <p:cNvPr id="4" name="日付プレースホルダー 3">
-            <a:extLst>
-              <a:ext uri="{FF2B5EF4-FFF2-40B4-BE49-F238E27FC236}">
-                <a16:creationId xmlns:a16="http://schemas.microsoft.com/office/drawing/2014/main" id="{AB006C0F-DCBE-9B89-AABA-74A2EFD52D05}"/>
-              </a:ext>
-            </a:extLst>
-          </p:cNvPr>
-          <p:cNvSpPr>
-            <a:spLocks noGrp="1"/>
+          <p:cNvPr id="4" name="Rectangle 4"/>
+          <p:cNvSpPr>
+            <a:spLocks noGrp="1" noChangeArrowheads="1"/>
           </p:cNvSpPr>
           <p:nvPr>
             <p:ph type="dt" sz="half" idx="10"/>
           </p:nvPr>
         </p:nvSpPr>
-        <p:spPr/>
+        <p:spPr>
+          <a:ln/>
+        </p:spPr>
         <p:txBody>
           <a:bodyPr/>
-          <a:lstStyle/>
-          <a:p>
-            <a:fld id="{6617D3FC-E227-49CD-9B33-753CA2C6CDCB}" type="datetimeFigureOut">
-              <a:rPr kumimoji="1" lang="ja-JP" altLang="en-US" smtClean="0"/>
+          <a:lstStyle>
+            <a:lvl1pPr>
+              <a:defRPr/>
+            </a:lvl1pPr>
+          </a:lstStyle>
+          <a:p>
+            <a:fld id="{5BBCB299-525B-C043-8ABF-E2AB50D107C3}" type="datetimeFigureOut">
+              <a:rPr lang="ja-JP" altLang="en-US" smtClean="0"/>
+              <a:pPr/>
               <a:t>2026/8/31</a:t>
             </a:fld>
-            <a:endParaRPr kumimoji="1" lang="ja-JP" altLang="en-US"/>
-          </a:p>
-        </p:txBody>
-      </p:sp>
-      <p:sp>
-        <p:nvSpPr>
-          <p:cNvPr id="5" name="フッター プレースホルダー 4">
-            <a:extLst>
-              <a:ext uri="{FF2B5EF4-FFF2-40B4-BE49-F238E27FC236}">
-                <a16:creationId xmlns:a16="http://schemas.microsoft.com/office/drawing/2014/main" id="{5C03C332-6B8F-D2D3-BBA1-43A678AEA67C}"/>
-              </a:ext>
-            </a:extLst>
-          </p:cNvPr>
-          <p:cNvSpPr>
-            <a:spLocks noGrp="1"/>
+            <a:endParaRPr lang="ja-JP" altLang="en-US" dirty="0"/>
+          </a:p>
+        </p:txBody>
+      </p:sp>
+      <p:sp>
+        <p:nvSpPr>
+          <p:cNvPr id="5" name="Rectangle 5"/>
+          <p:cNvSpPr>
+            <a:spLocks noGrp="1" noChangeArrowheads="1"/>
           </p:cNvSpPr>
           <p:nvPr>
             <p:ph type="ftr" sz="quarter" idx="11"/>
           </p:nvPr>
         </p:nvSpPr>
-        <p:spPr/>
+        <p:spPr>
+          <a:ln/>
+        </p:spPr>
         <p:txBody>
           <a:bodyPr/>
-          <a:lstStyle/>
-          <a:p>
-            <a:endParaRPr kumimoji="1" lang="ja-JP" altLang="en-US"/>
-          </a:p>
-        </p:txBody>
-      </p:sp>
-      <p:sp>
-        <p:nvSpPr>
-          <p:cNvPr id="6" name="スライド番号プレースホルダー 5">
-            <a:extLst>
-              <a:ext uri="{FF2B5EF4-FFF2-40B4-BE49-F238E27FC236}">
-                <a16:creationId xmlns:a16="http://schemas.microsoft.com/office/drawing/2014/main" id="{24C92CA1-BFE9-4F4A-BC01-43D9F431063E}"/>
-              </a:ext>
-            </a:extLst>
-          </p:cNvPr>
-          <p:cNvSpPr>
-            <a:spLocks noGrp="1"/>
+          <a:lstStyle>
+            <a:lvl1pPr>
+              <a:defRPr/>
+            </a:lvl1pPr>
+          </a:lstStyle>
+          <a:p>
+            <a:endParaRPr lang="ja-JP" altLang="en-US" dirty="0"/>
+          </a:p>
+        </p:txBody>
+      </p:sp>
+      <p:sp>
+        <p:nvSpPr>
+          <p:cNvPr id="6" name="Rectangle 6"/>
+          <p:cNvSpPr>
+            <a:spLocks noGrp="1" noChangeArrowheads="1"/>
           </p:cNvSpPr>
           <p:nvPr>
             <p:ph type="sldNum" sz="quarter" idx="12"/>
           </p:nvPr>
         </p:nvSpPr>
-        <p:spPr/>
+        <p:spPr>
+          <a:ln/>
+        </p:spPr>
         <p:txBody>
           <a:bodyPr/>
-          <a:lstStyle/>
-          <a:p>
-            <a:fld id="{01C0817E-3A9A-4621-AB56-BCE6DE2A21FA}" type="slidenum">
-              <a:rPr kumimoji="1" lang="ja-JP" altLang="en-US" smtClean="0"/>
+          <a:lstStyle>
+            <a:lvl1pPr>
+              <a:defRPr/>
+            </a:lvl1pPr>
+          </a:lstStyle>
+          <a:p>
+            <a:fld id="{A602DE73-0B5E-8446-9073-5A6DE92C9AAA}" type="slidenum">
+              <a:rPr lang="ja-JP" altLang="en-US" smtClean="0"/>
+              <a:pPr/>
               <a:t>‹#›</a:t>
             </a:fld>
-            <a:endParaRPr kumimoji="1" lang="ja-JP" altLang="en-US"/>
+            <a:endParaRPr lang="ja-JP" altLang="en-US" dirty="0"/>
           </a:p>
         </p:txBody>
       </p:sp>
     </p:spTree>
     <p:extLst>
       <p:ext uri="{BB962C8B-B14F-4D97-AF65-F5344CB8AC3E}">
-        <p14:creationId xmlns:p14="http://schemas.microsoft.com/office/powerpoint/2010/main" val="1372969601"/>
+        <p14:creationId xmlns:p14="http://schemas.microsoft.com/office/powerpoint/2010/main" val="1775418896"/>
       </p:ext>
     </p:extLst>
   </p:cSld>
@@ -1046,13 +1820,7 @@
       </p:grpSpPr>
       <p:sp>
         <p:nvSpPr>
-          <p:cNvPr id="2" name="タイトル 1">
-            <a:extLst>
-              <a:ext uri="{FF2B5EF4-FFF2-40B4-BE49-F238E27FC236}">
-                <a16:creationId xmlns:a16="http://schemas.microsoft.com/office/drawing/2014/main" id="{3F1C485E-4127-7572-77FA-5B15C154E37D}"/>
-              </a:ext>
-            </a:extLst>
-          </p:cNvPr>
+          <p:cNvPr id="2" name="タイトル 1"/>
           <p:cNvSpPr>
             <a:spLocks noGrp="1"/>
           </p:cNvSpPr>
@@ -1062,237 +1830,179 @@
         </p:nvSpPr>
         <p:spPr>
           <a:xfrm>
-            <a:off x="831850" y="1709738"/>
-            <a:ext cx="10515600" cy="2852737"/>
+            <a:off x="963084" y="4406901"/>
+            <a:ext cx="10363200" cy="1362075"/>
+          </a:xfrm>
+        </p:spPr>
+        <p:txBody>
+          <a:bodyPr/>
+          <a:lstStyle>
+            <a:lvl1pPr algn="l">
+              <a:defRPr sz="4000" b="1" cap="all"/>
+            </a:lvl1pPr>
+          </a:lstStyle>
+          <a:p>
+            <a:r>
+              <a:rPr lang="ja-JP" altLang="en-US"/>
+              <a:t>マスター タイトルの書式設定</a:t>
+            </a:r>
+          </a:p>
+        </p:txBody>
+      </p:sp>
+      <p:sp>
+        <p:nvSpPr>
+          <p:cNvPr id="3" name="テキスト プレースホルダ 2"/>
+          <p:cNvSpPr>
+            <a:spLocks noGrp="1"/>
+          </p:cNvSpPr>
+          <p:nvPr>
+            <p:ph type="body" idx="1"/>
+          </p:nvPr>
+        </p:nvSpPr>
+        <p:spPr>
+          <a:xfrm>
+            <a:off x="963084" y="2906713"/>
+            <a:ext cx="10363200" cy="1500187"/>
           </a:xfrm>
         </p:spPr>
         <p:txBody>
           <a:bodyPr anchor="b"/>
           <a:lstStyle>
+            <a:lvl1pPr marL="0" indent="0">
+              <a:buNone/>
+              <a:defRPr sz="2000"/>
+            </a:lvl1pPr>
+            <a:lvl2pPr marL="457200" indent="0">
+              <a:buNone/>
+              <a:defRPr sz="1800"/>
+            </a:lvl2pPr>
+            <a:lvl3pPr marL="914400" indent="0">
+              <a:buNone/>
+              <a:defRPr sz="1600"/>
+            </a:lvl3pPr>
+            <a:lvl4pPr marL="1371600" indent="0">
+              <a:buNone/>
+              <a:defRPr sz="1400"/>
+            </a:lvl4pPr>
+            <a:lvl5pPr marL="1828800" indent="0">
+              <a:buNone/>
+              <a:defRPr sz="1400"/>
+            </a:lvl5pPr>
+            <a:lvl6pPr marL="2286000" indent="0">
+              <a:buNone/>
+              <a:defRPr sz="1400"/>
+            </a:lvl6pPr>
+            <a:lvl7pPr marL="2743200" indent="0">
+              <a:buNone/>
+              <a:defRPr sz="1400"/>
+            </a:lvl7pPr>
+            <a:lvl8pPr marL="3200400" indent="0">
+              <a:buNone/>
+              <a:defRPr sz="1400"/>
+            </a:lvl8pPr>
+            <a:lvl9pPr marL="3657600" indent="0">
+              <a:buNone/>
+              <a:defRPr sz="1400"/>
+            </a:lvl9pPr>
+          </a:lstStyle>
+          <a:p>
+            <a:pPr lvl="0"/>
+            <a:r>
+              <a:rPr lang="ja-JP" altLang="en-US"/>
+              <a:t>マスター テキストの書式設定</a:t>
+            </a:r>
+          </a:p>
+        </p:txBody>
+      </p:sp>
+      <p:sp>
+        <p:nvSpPr>
+          <p:cNvPr id="4" name="Rectangle 4"/>
+          <p:cNvSpPr>
+            <a:spLocks noGrp="1" noChangeArrowheads="1"/>
+          </p:cNvSpPr>
+          <p:nvPr>
+            <p:ph type="dt" sz="half" idx="10"/>
+          </p:nvPr>
+        </p:nvSpPr>
+        <p:spPr>
+          <a:ln/>
+        </p:spPr>
+        <p:txBody>
+          <a:bodyPr/>
+          <a:lstStyle>
             <a:lvl1pPr>
-              <a:defRPr sz="6000"/>
+              <a:defRPr/>
             </a:lvl1pPr>
           </a:lstStyle>
           <a:p>
-            <a:r>
-              <a:rPr kumimoji="1" lang="ja-JP" altLang="en-US"/>
-              <a:t>マスター タイトルの書式設定</a:t>
-            </a:r>
-          </a:p>
-        </p:txBody>
-      </p:sp>
-      <p:sp>
-        <p:nvSpPr>
-          <p:cNvPr id="3" name="テキスト プレースホルダー 2">
-            <a:extLst>
-              <a:ext uri="{FF2B5EF4-FFF2-40B4-BE49-F238E27FC236}">
-                <a16:creationId xmlns:a16="http://schemas.microsoft.com/office/drawing/2014/main" id="{87898D90-35C3-23D5-4C7B-70509B4E4E70}"/>
-              </a:ext>
-            </a:extLst>
-          </p:cNvPr>
-          <p:cNvSpPr>
-            <a:spLocks noGrp="1"/>
-          </p:cNvSpPr>
-          <p:nvPr>
-            <p:ph type="body" idx="1"/>
+            <a:fld id="{5BBCB299-525B-C043-8ABF-E2AB50D107C3}" type="datetimeFigureOut">
+              <a:rPr lang="ja-JP" altLang="en-US" smtClean="0"/>
+              <a:pPr/>
+              <a:t>2026/8/31</a:t>
+            </a:fld>
+            <a:endParaRPr lang="ja-JP" altLang="en-US" dirty="0"/>
+          </a:p>
+        </p:txBody>
+      </p:sp>
+      <p:sp>
+        <p:nvSpPr>
+          <p:cNvPr id="5" name="Rectangle 5"/>
+          <p:cNvSpPr>
+            <a:spLocks noGrp="1" noChangeArrowheads="1"/>
+          </p:cNvSpPr>
+          <p:nvPr>
+            <p:ph type="ftr" sz="quarter" idx="11"/>
           </p:nvPr>
         </p:nvSpPr>
         <p:spPr>
-          <a:xfrm>
-            <a:off x="831850" y="4589463"/>
-            <a:ext cx="10515600" cy="1500187"/>
-          </a:xfrm>
+          <a:ln/>
         </p:spPr>
         <p:txBody>
           <a:bodyPr/>
           <a:lstStyle>
-            <a:lvl1pPr marL="0" indent="0">
-              <a:buNone/>
-              <a:defRPr sz="2400">
-                <a:solidFill>
-                  <a:schemeClr val="tx1">
-                    <a:tint val="75000"/>
-                  </a:schemeClr>
-                </a:solidFill>
-              </a:defRPr>
+            <a:lvl1pPr>
+              <a:defRPr/>
             </a:lvl1pPr>
-            <a:lvl2pPr marL="457200" indent="0">
-              <a:buNone/>
-              <a:defRPr sz="2000">
-                <a:solidFill>
-                  <a:schemeClr val="tx1">
-                    <a:tint val="75000"/>
-                  </a:schemeClr>
-                </a:solidFill>
-              </a:defRPr>
-            </a:lvl2pPr>
-            <a:lvl3pPr marL="914400" indent="0">
-              <a:buNone/>
-              <a:defRPr sz="1800">
-                <a:solidFill>
-                  <a:schemeClr val="tx1">
-                    <a:tint val="75000"/>
-                  </a:schemeClr>
-                </a:solidFill>
-              </a:defRPr>
-            </a:lvl3pPr>
-            <a:lvl4pPr marL="1371600" indent="0">
-              <a:buNone/>
-              <a:defRPr sz="1600">
-                <a:solidFill>
-                  <a:schemeClr val="tx1">
-                    <a:tint val="75000"/>
-                  </a:schemeClr>
-                </a:solidFill>
-              </a:defRPr>
-            </a:lvl4pPr>
-            <a:lvl5pPr marL="1828800" indent="0">
-              <a:buNone/>
-              <a:defRPr sz="1600">
-                <a:solidFill>
-                  <a:schemeClr val="tx1">
-                    <a:tint val="75000"/>
-                  </a:schemeClr>
-                </a:solidFill>
-              </a:defRPr>
-            </a:lvl5pPr>
-            <a:lvl6pPr marL="2286000" indent="0">
-              <a:buNone/>
-              <a:defRPr sz="1600">
-                <a:solidFill>
-                  <a:schemeClr val="tx1">
-                    <a:tint val="75000"/>
-                  </a:schemeClr>
-                </a:solidFill>
-              </a:defRPr>
-            </a:lvl6pPr>
-            <a:lvl7pPr marL="2743200" indent="0">
-              <a:buNone/>
-              <a:defRPr sz="1600">
-                <a:solidFill>
-                  <a:schemeClr val="tx1">
-                    <a:tint val="75000"/>
-                  </a:schemeClr>
-                </a:solidFill>
-              </a:defRPr>
-            </a:lvl7pPr>
-            <a:lvl8pPr marL="3200400" indent="0">
-              <a:buNone/>
-              <a:defRPr sz="1600">
-                <a:solidFill>
-                  <a:schemeClr val="tx1">
-                    <a:tint val="75000"/>
-                  </a:schemeClr>
-                </a:solidFill>
-              </a:defRPr>
-            </a:lvl8pPr>
-            <a:lvl9pPr marL="3657600" indent="0">
-              <a:buNone/>
-              <a:defRPr sz="1600">
-                <a:solidFill>
-                  <a:schemeClr val="tx1">
-                    <a:tint val="75000"/>
-                  </a:schemeClr>
-                </a:solidFill>
-              </a:defRPr>
-            </a:lvl9pPr>
           </a:lstStyle>
           <a:p>
-            <a:pPr lvl="0"/>
-            <a:r>
-              <a:rPr kumimoji="1" lang="ja-JP" altLang="en-US"/>
-              <a:t>マスター テキストの書式設定</a:t>
-            </a:r>
-          </a:p>
-        </p:txBody>
-      </p:sp>
-      <p:sp>
-        <p:nvSpPr>
-          <p:cNvPr id="4" name="日付プレースホルダー 3">
-            <a:extLst>
-              <a:ext uri="{FF2B5EF4-FFF2-40B4-BE49-F238E27FC236}">
-                <a16:creationId xmlns:a16="http://schemas.microsoft.com/office/drawing/2014/main" id="{C0CB1195-27DD-C849-1340-EC83B16F6437}"/>
-              </a:ext>
-            </a:extLst>
-          </p:cNvPr>
-          <p:cNvSpPr>
-            <a:spLocks noGrp="1"/>
-          </p:cNvSpPr>
-          <p:nvPr>
-            <p:ph type="dt" sz="half" idx="10"/>
-          </p:nvPr>
-        </p:nvSpPr>
-        <p:spPr/>
+            <a:endParaRPr lang="ja-JP" altLang="en-US" dirty="0"/>
+          </a:p>
+        </p:txBody>
+      </p:sp>
+      <p:sp>
+        <p:nvSpPr>
+          <p:cNvPr id="6" name="Rectangle 6"/>
+          <p:cNvSpPr>
+            <a:spLocks noGrp="1" noChangeArrowheads="1"/>
+          </p:cNvSpPr>
+          <p:nvPr>
+            <p:ph type="sldNum" sz="quarter" idx="12"/>
+          </p:nvPr>
+        </p:nvSpPr>
+        <p:spPr>
+          <a:ln/>
+        </p:spPr>
         <p:txBody>
           <a:bodyPr/>
-          <a:lstStyle/>
-          <a:p>
-            <a:fld id="{6617D3FC-E227-49CD-9B33-753CA2C6CDCB}" type="datetimeFigureOut">
-              <a:rPr kumimoji="1" lang="ja-JP" altLang="en-US" smtClean="0"/>
-              <a:t>2026/8/31</a:t>
-            </a:fld>
-            <a:endParaRPr kumimoji="1" lang="ja-JP" altLang="en-US"/>
-          </a:p>
-        </p:txBody>
-      </p:sp>
-      <p:sp>
-        <p:nvSpPr>
-          <p:cNvPr id="5" name="フッター プレースホルダー 4">
-            <a:extLst>
-              <a:ext uri="{FF2B5EF4-FFF2-40B4-BE49-F238E27FC236}">
-                <a16:creationId xmlns:a16="http://schemas.microsoft.com/office/drawing/2014/main" id="{F63762C6-61B4-1C1F-1CE8-1EBC1A60002B}"/>
-              </a:ext>
-            </a:extLst>
-          </p:cNvPr>
-          <p:cNvSpPr>
-            <a:spLocks noGrp="1"/>
-          </p:cNvSpPr>
-          <p:nvPr>
-            <p:ph type="ftr" sz="quarter" idx="11"/>
-          </p:nvPr>
-        </p:nvSpPr>
-        <p:spPr/>
-        <p:txBody>
-          <a:bodyPr/>
-          <a:lstStyle/>
-          <a:p>
-            <a:endParaRPr kumimoji="1" lang="ja-JP" altLang="en-US"/>
-          </a:p>
-        </p:txBody>
-      </p:sp>
-      <p:sp>
-        <p:nvSpPr>
-          <p:cNvPr id="6" name="スライド番号プレースホルダー 5">
-            <a:extLst>
-              <a:ext uri="{FF2B5EF4-FFF2-40B4-BE49-F238E27FC236}">
-                <a16:creationId xmlns:a16="http://schemas.microsoft.com/office/drawing/2014/main" id="{A558200F-30C2-DF24-0594-B51BE1401556}"/>
-              </a:ext>
-            </a:extLst>
-          </p:cNvPr>
-          <p:cNvSpPr>
-            <a:spLocks noGrp="1"/>
-          </p:cNvSpPr>
-          <p:nvPr>
-            <p:ph type="sldNum" sz="quarter" idx="12"/>
-          </p:nvPr>
-        </p:nvSpPr>
-        <p:spPr/>
-        <p:txBody>
-          <a:bodyPr/>
-          <a:lstStyle/>
-          <a:p>
-            <a:fld id="{01C0817E-3A9A-4621-AB56-BCE6DE2A21FA}" type="slidenum">
-              <a:rPr kumimoji="1" lang="ja-JP" altLang="en-US" smtClean="0"/>
+          <a:lstStyle>
+            <a:lvl1pPr>
+              <a:defRPr/>
+            </a:lvl1pPr>
+          </a:lstStyle>
+          <a:p>
+            <a:fld id="{A602DE73-0B5E-8446-9073-5A6DE92C9AAA}" type="slidenum">
+              <a:rPr lang="ja-JP" altLang="en-US" smtClean="0"/>
+              <a:pPr/>
               <a:t>‹#›</a:t>
             </a:fld>
-            <a:endParaRPr kumimoji="1" lang="ja-JP" altLang="en-US"/>
+            <a:endParaRPr lang="ja-JP" altLang="en-US" dirty="0"/>
           </a:p>
         </p:txBody>
       </p:sp>
     </p:spTree>
     <p:extLst>
       <p:ext uri="{BB962C8B-B14F-4D97-AF65-F5344CB8AC3E}">
-        <p14:creationId xmlns:p14="http://schemas.microsoft.com/office/powerpoint/2010/main" val="2890944272"/>
+        <p14:creationId xmlns:p14="http://schemas.microsoft.com/office/powerpoint/2010/main" val="918734212"/>
       </p:ext>
     </p:extLst>
   </p:cSld>
@@ -1321,13 +2031,7 @@
       </p:grpSpPr>
       <p:sp>
         <p:nvSpPr>
-          <p:cNvPr id="2" name="タイトル 1">
-            <a:extLst>
-              <a:ext uri="{FF2B5EF4-FFF2-40B4-BE49-F238E27FC236}">
-                <a16:creationId xmlns:a16="http://schemas.microsoft.com/office/drawing/2014/main" id="{8755CD43-7E4B-2A40-FB41-52E2096B84B0}"/>
-              </a:ext>
-            </a:extLst>
-          </p:cNvPr>
+          <p:cNvPr id="2" name="タイトル 1"/>
           <p:cNvSpPr>
             <a:spLocks noGrp="1"/>
           </p:cNvSpPr>
@@ -1341,7 +2045,7 @@
           <a:lstStyle/>
           <a:p>
             <a:r>
-              <a:rPr kumimoji="1" lang="ja-JP" altLang="en-US"/>
+              <a:rPr lang="ja-JP" altLang="en-US"/>
               <a:t>マスター タイトルの書式設定</a:t>
             </a:r>
           </a:p>
@@ -1349,13 +2053,7 @@
       </p:sp>
       <p:sp>
         <p:nvSpPr>
-          <p:cNvPr id="3" name="コンテンツ プレースホルダー 2">
-            <a:extLst>
-              <a:ext uri="{FF2B5EF4-FFF2-40B4-BE49-F238E27FC236}">
-                <a16:creationId xmlns:a16="http://schemas.microsoft.com/office/drawing/2014/main" id="{B1C4ABDD-8DDC-C63D-9ABE-3A81B219CDDC}"/>
-              </a:ext>
-            </a:extLst>
-          </p:cNvPr>
+          <p:cNvPr id="3" name="コンテンツ プレースホルダ 2"/>
           <p:cNvSpPr>
             <a:spLocks noGrp="1"/>
           </p:cNvSpPr>
@@ -1365,77 +2063,105 @@
         </p:nvSpPr>
         <p:spPr>
           <a:xfrm>
-            <a:off x="838200" y="1825625"/>
-            <a:ext cx="5181600" cy="4351338"/>
+            <a:off x="609600" y="1268414"/>
+            <a:ext cx="5384800" cy="5113337"/>
           </a:xfrm>
         </p:spPr>
         <p:txBody>
           <a:bodyPr/>
-          <a:lstStyle/>
+          <a:lstStyle>
+            <a:lvl1pPr>
+              <a:defRPr sz="2800"/>
+            </a:lvl1pPr>
+            <a:lvl2pPr>
+              <a:defRPr sz="2400"/>
+            </a:lvl2pPr>
+            <a:lvl3pPr>
+              <a:defRPr sz="2000"/>
+            </a:lvl3pPr>
+            <a:lvl4pPr>
+              <a:defRPr sz="1800"/>
+            </a:lvl4pPr>
+            <a:lvl5pPr>
+              <a:defRPr sz="1800"/>
+            </a:lvl5pPr>
+            <a:lvl6pPr>
+              <a:defRPr sz="1800"/>
+            </a:lvl6pPr>
+            <a:lvl7pPr>
+              <a:defRPr sz="1800"/>
+            </a:lvl7pPr>
+            <a:lvl8pPr>
+              <a:defRPr sz="1800"/>
+            </a:lvl8pPr>
+            <a:lvl9pPr>
+              <a:defRPr sz="1800"/>
+            </a:lvl9pPr>
+          </a:lstStyle>
           <a:p>
             <a:pPr lvl="0"/>
             <a:r>
-              <a:rPr kumimoji="1" lang="ja-JP" altLang="en-US"/>
+              <a:rPr lang="ja-JP" altLang="en-US"/>
               <a:t>マスター テキストの書式設定</a:t>
             </a:r>
           </a:p>
           <a:p>
             <a:pPr lvl="1"/>
             <a:r>
-              <a:rPr kumimoji="1" lang="ja-JP" altLang="en-US"/>
+              <a:rPr lang="ja-JP" altLang="en-US"/>
               <a:t>第 </a:t>
             </a:r>
             <a:r>
-              <a:rPr kumimoji="1" lang="en-US" altLang="ja-JP"/>
+              <a:rPr lang="en-US" altLang="ja-JP"/>
               <a:t>2 </a:t>
             </a:r>
             <a:r>
-              <a:rPr kumimoji="1" lang="ja-JP" altLang="en-US"/>
+              <a:rPr lang="ja-JP" altLang="en-US"/>
               <a:t>レベル</a:t>
             </a:r>
           </a:p>
           <a:p>
             <a:pPr lvl="2"/>
             <a:r>
-              <a:rPr kumimoji="1" lang="ja-JP" altLang="en-US"/>
+              <a:rPr lang="ja-JP" altLang="en-US"/>
               <a:t>第 </a:t>
             </a:r>
             <a:r>
-              <a:rPr kumimoji="1" lang="en-US" altLang="ja-JP"/>
+              <a:rPr lang="en-US" altLang="ja-JP"/>
               <a:t>3 </a:t>
             </a:r>
             <a:r>
-              <a:rPr kumimoji="1" lang="ja-JP" altLang="en-US"/>
+              <a:rPr lang="ja-JP" altLang="en-US"/>
               <a:t>レベル</a:t>
             </a:r>
           </a:p>
           <a:p>
             <a:pPr lvl="3"/>
             <a:r>
-              <a:rPr kumimoji="1" lang="ja-JP" altLang="en-US"/>
+              <a:rPr lang="ja-JP" altLang="en-US"/>
               <a:t>第 </a:t>
             </a:r>
             <a:r>
-              <a:rPr kumimoji="1" lang="en-US" altLang="ja-JP"/>
+              <a:rPr lang="en-US" altLang="ja-JP"/>
               <a:t>4 </a:t>
             </a:r>
             <a:r>
-              <a:rPr kumimoji="1" lang="ja-JP" altLang="en-US"/>
+              <a:rPr lang="ja-JP" altLang="en-US"/>
               <a:t>レベル</a:t>
             </a:r>
           </a:p>
           <a:p>
             <a:pPr lvl="4"/>
             <a:r>
-              <a:rPr kumimoji="1" lang="ja-JP" altLang="en-US"/>
+              <a:rPr lang="ja-JP" altLang="en-US"/>
               <a:t>第 </a:t>
             </a:r>
             <a:r>
-              <a:rPr kumimoji="1" lang="en-US" altLang="ja-JP"/>
+              <a:rPr lang="en-US" altLang="ja-JP"/>
               <a:t>5 </a:t>
             </a:r>
             <a:r>
-              <a:rPr kumimoji="1" lang="ja-JP" altLang="en-US"/>
+              <a:rPr lang="ja-JP" altLang="en-US"/>
               <a:t>レベル</a:t>
             </a:r>
           </a:p>
@@ -1443,13 +2169,7 @@
       </p:sp>
       <p:sp>
         <p:nvSpPr>
-          <p:cNvPr id="4" name="コンテンツ プレースホルダー 3">
-            <a:extLst>
-              <a:ext uri="{FF2B5EF4-FFF2-40B4-BE49-F238E27FC236}">
-                <a16:creationId xmlns:a16="http://schemas.microsoft.com/office/drawing/2014/main" id="{08D69D3A-CAC1-F2FD-76D8-55A170EB2297}"/>
-              </a:ext>
-            </a:extLst>
-          </p:cNvPr>
+          <p:cNvPr id="4" name="コンテンツ プレースホルダ 3"/>
           <p:cNvSpPr>
             <a:spLocks noGrp="1"/>
           </p:cNvSpPr>
@@ -1459,77 +2179,105 @@
         </p:nvSpPr>
         <p:spPr>
           <a:xfrm>
-            <a:off x="6172200" y="1825625"/>
-            <a:ext cx="5181600" cy="4351338"/>
+            <a:off x="6197600" y="1268414"/>
+            <a:ext cx="5384800" cy="5113337"/>
           </a:xfrm>
         </p:spPr>
         <p:txBody>
           <a:bodyPr/>
-          <a:lstStyle/>
+          <a:lstStyle>
+            <a:lvl1pPr>
+              <a:defRPr sz="2800"/>
+            </a:lvl1pPr>
+            <a:lvl2pPr>
+              <a:defRPr sz="2400"/>
+            </a:lvl2pPr>
+            <a:lvl3pPr>
+              <a:defRPr sz="2000"/>
+            </a:lvl3pPr>
+            <a:lvl4pPr>
+              <a:defRPr sz="1800"/>
+            </a:lvl4pPr>
+            <a:lvl5pPr>
+              <a:defRPr sz="1800"/>
+            </a:lvl5pPr>
+            <a:lvl6pPr>
+              <a:defRPr sz="1800"/>
+            </a:lvl6pPr>
+            <a:lvl7pPr>
+              <a:defRPr sz="1800"/>
+            </a:lvl7pPr>
+            <a:lvl8pPr>
+              <a:defRPr sz="1800"/>
+            </a:lvl8pPr>
+            <a:lvl9pPr>
+              <a:defRPr sz="1800"/>
+            </a:lvl9pPr>
+          </a:lstStyle>
           <a:p>
             <a:pPr lvl="0"/>
             <a:r>
-              <a:rPr kumimoji="1" lang="ja-JP" altLang="en-US"/>
+              <a:rPr lang="ja-JP" altLang="en-US"/>
               <a:t>マスター テキストの書式設定</a:t>
             </a:r>
           </a:p>
           <a:p>
             <a:pPr lvl="1"/>
             <a:r>
-              <a:rPr kumimoji="1" lang="ja-JP" altLang="en-US"/>
+              <a:rPr lang="ja-JP" altLang="en-US"/>
               <a:t>第 </a:t>
             </a:r>
             <a:r>
-              <a:rPr kumimoji="1" lang="en-US" altLang="ja-JP"/>
+              <a:rPr lang="en-US" altLang="ja-JP"/>
               <a:t>2 </a:t>
             </a:r>
             <a:r>
-              <a:rPr kumimoji="1" lang="ja-JP" altLang="en-US"/>
+              <a:rPr lang="ja-JP" altLang="en-US"/>
               <a:t>レベル</a:t>
             </a:r>
           </a:p>
           <a:p>
             <a:pPr lvl="2"/>
             <a:r>
-              <a:rPr kumimoji="1" lang="ja-JP" altLang="en-US"/>
+              <a:rPr lang="ja-JP" altLang="en-US"/>
               <a:t>第 </a:t>
             </a:r>
             <a:r>
-              <a:rPr kumimoji="1" lang="en-US" altLang="ja-JP"/>
+              <a:rPr lang="en-US" altLang="ja-JP"/>
               <a:t>3 </a:t>
             </a:r>
             <a:r>
-              <a:rPr kumimoji="1" lang="ja-JP" altLang="en-US"/>
+              <a:rPr lang="ja-JP" altLang="en-US"/>
               <a:t>レベル</a:t>
             </a:r>
           </a:p>
           <a:p>
             <a:pPr lvl="3"/>
             <a:r>
-              <a:rPr kumimoji="1" lang="ja-JP" altLang="en-US"/>
+              <a:rPr lang="ja-JP" altLang="en-US"/>
               <a:t>第 </a:t>
             </a:r>
             <a:r>
-              <a:rPr kumimoji="1" lang="en-US" altLang="ja-JP"/>
+              <a:rPr lang="en-US" altLang="ja-JP"/>
               <a:t>4 </a:t>
             </a:r>
             <a:r>
-              <a:rPr kumimoji="1" lang="ja-JP" altLang="en-US"/>
+              <a:rPr lang="ja-JP" altLang="en-US"/>
               <a:t>レベル</a:t>
             </a:r>
           </a:p>
           <a:p>
             <a:pPr lvl="4"/>
             <a:r>
-              <a:rPr kumimoji="1" lang="ja-JP" altLang="en-US"/>
+              <a:rPr lang="ja-JP" altLang="en-US"/>
               <a:t>第 </a:t>
             </a:r>
             <a:r>
-              <a:rPr kumimoji="1" lang="en-US" altLang="ja-JP"/>
+              <a:rPr lang="en-US" altLang="ja-JP"/>
               <a:t>5 </a:t>
             </a:r>
             <a:r>
-              <a:rPr kumimoji="1" lang="ja-JP" altLang="en-US"/>
+              <a:rPr lang="ja-JP" altLang="en-US"/>
               <a:t>レベル</a:t>
             </a:r>
           </a:p>
@@ -1537,91 +2285,93 @@
       </p:sp>
       <p:sp>
         <p:nvSpPr>
-          <p:cNvPr id="5" name="日付プレースホルダー 4">
-            <a:extLst>
-              <a:ext uri="{FF2B5EF4-FFF2-40B4-BE49-F238E27FC236}">
-                <a16:creationId xmlns:a16="http://schemas.microsoft.com/office/drawing/2014/main" id="{3D8E8BDC-92DD-188F-8EF0-193A183EE08F}"/>
-              </a:ext>
-            </a:extLst>
-          </p:cNvPr>
-          <p:cNvSpPr>
-            <a:spLocks noGrp="1"/>
+          <p:cNvPr id="5" name="Rectangle 4"/>
+          <p:cNvSpPr>
+            <a:spLocks noGrp="1" noChangeArrowheads="1"/>
           </p:cNvSpPr>
           <p:nvPr>
             <p:ph type="dt" sz="half" idx="10"/>
           </p:nvPr>
         </p:nvSpPr>
-        <p:spPr/>
+        <p:spPr>
+          <a:ln/>
+        </p:spPr>
         <p:txBody>
           <a:bodyPr/>
-          <a:lstStyle/>
-          <a:p>
-            <a:fld id="{6617D3FC-E227-49CD-9B33-753CA2C6CDCB}" type="datetimeFigureOut">
-              <a:rPr kumimoji="1" lang="ja-JP" altLang="en-US" smtClean="0"/>
+          <a:lstStyle>
+            <a:lvl1pPr>
+              <a:defRPr/>
+            </a:lvl1pPr>
+          </a:lstStyle>
+          <a:p>
+            <a:fld id="{5BBCB299-525B-C043-8ABF-E2AB50D107C3}" type="datetimeFigureOut">
+              <a:rPr lang="ja-JP" altLang="en-US" smtClean="0"/>
+              <a:pPr/>
               <a:t>2026/8/31</a:t>
             </a:fld>
-            <a:endParaRPr kumimoji="1" lang="ja-JP" altLang="en-US"/>
-          </a:p>
-        </p:txBody>
-      </p:sp>
-      <p:sp>
-        <p:nvSpPr>
-          <p:cNvPr id="6" name="フッター プレースホルダー 5">
-            <a:extLst>
-              <a:ext uri="{FF2B5EF4-FFF2-40B4-BE49-F238E27FC236}">
-                <a16:creationId xmlns:a16="http://schemas.microsoft.com/office/drawing/2014/main" id="{2D3D4C96-C5A2-A7F7-CE81-C7B3061C3D8D}"/>
-              </a:ext>
-            </a:extLst>
-          </p:cNvPr>
-          <p:cNvSpPr>
-            <a:spLocks noGrp="1"/>
+            <a:endParaRPr lang="ja-JP" altLang="en-US" dirty="0"/>
+          </a:p>
+        </p:txBody>
+      </p:sp>
+      <p:sp>
+        <p:nvSpPr>
+          <p:cNvPr id="6" name="Rectangle 5"/>
+          <p:cNvSpPr>
+            <a:spLocks noGrp="1" noChangeArrowheads="1"/>
           </p:cNvSpPr>
           <p:nvPr>
             <p:ph type="ftr" sz="quarter" idx="11"/>
           </p:nvPr>
         </p:nvSpPr>
-        <p:spPr/>
+        <p:spPr>
+          <a:ln/>
+        </p:spPr>
         <p:txBody>
           <a:bodyPr/>
-          <a:lstStyle/>
-          <a:p>
-            <a:endParaRPr kumimoji="1" lang="ja-JP" altLang="en-US"/>
-          </a:p>
-        </p:txBody>
-      </p:sp>
-      <p:sp>
-        <p:nvSpPr>
-          <p:cNvPr id="7" name="スライド番号プレースホルダー 6">
-            <a:extLst>
-              <a:ext uri="{FF2B5EF4-FFF2-40B4-BE49-F238E27FC236}">
-                <a16:creationId xmlns:a16="http://schemas.microsoft.com/office/drawing/2014/main" id="{6334A118-C78B-7DDE-0407-74436B417F1C}"/>
-              </a:ext>
-            </a:extLst>
-          </p:cNvPr>
-          <p:cNvSpPr>
-            <a:spLocks noGrp="1"/>
+          <a:lstStyle>
+            <a:lvl1pPr>
+              <a:defRPr/>
+            </a:lvl1pPr>
+          </a:lstStyle>
+          <a:p>
+            <a:endParaRPr lang="ja-JP" altLang="en-US" dirty="0"/>
+          </a:p>
+        </p:txBody>
+      </p:sp>
+      <p:sp>
+        <p:nvSpPr>
+          <p:cNvPr id="7" name="Rectangle 6"/>
+          <p:cNvSpPr>
+            <a:spLocks noGrp="1" noChangeArrowheads="1"/>
           </p:cNvSpPr>
           <p:nvPr>
             <p:ph type="sldNum" sz="quarter" idx="12"/>
           </p:nvPr>
         </p:nvSpPr>
-        <p:spPr/>
+        <p:spPr>
+          <a:ln/>
+        </p:spPr>
         <p:txBody>
           <a:bodyPr/>
-          <a:lstStyle/>
-          <a:p>
-            <a:fld id="{01C0817E-3A9A-4621-AB56-BCE6DE2A21FA}" type="slidenum">
-              <a:rPr kumimoji="1" lang="ja-JP" altLang="en-US" smtClean="0"/>
+          <a:lstStyle>
+            <a:lvl1pPr>
+              <a:defRPr/>
+            </a:lvl1pPr>
+          </a:lstStyle>
+          <a:p>
+            <a:fld id="{A602DE73-0B5E-8446-9073-5A6DE92C9AAA}" type="slidenum">
+              <a:rPr lang="ja-JP" altLang="en-US" smtClean="0"/>
+              <a:pPr/>
               <a:t>‹#›</a:t>
             </a:fld>
-            <a:endParaRPr kumimoji="1" lang="ja-JP" altLang="en-US"/>
+            <a:endParaRPr lang="ja-JP" altLang="en-US" dirty="0"/>
           </a:p>
         </p:txBody>
       </p:sp>
     </p:spTree>
     <p:extLst>
       <p:ext uri="{BB962C8B-B14F-4D97-AF65-F5344CB8AC3E}">
-        <p14:creationId xmlns:p14="http://schemas.microsoft.com/office/powerpoint/2010/main" val="646530345"/>
+        <p14:creationId xmlns:p14="http://schemas.microsoft.com/office/powerpoint/2010/main" val="2964112213"/>
       </p:ext>
     </p:extLst>
   </p:cSld>
@@ -1650,13 +2400,7 @@
       </p:grpSpPr>
       <p:sp>
         <p:nvSpPr>
-          <p:cNvPr id="2" name="タイトル 1">
-            <a:extLst>
-              <a:ext uri="{FF2B5EF4-FFF2-40B4-BE49-F238E27FC236}">
-                <a16:creationId xmlns:a16="http://schemas.microsoft.com/office/drawing/2014/main" id="{CF3094AB-0C6A-7B4A-E0E9-27E37723C885}"/>
-              </a:ext>
-            </a:extLst>
-          </p:cNvPr>
+          <p:cNvPr id="2" name="タイトル 1"/>
           <p:cNvSpPr>
             <a:spLocks noGrp="1"/>
           </p:cNvSpPr>
@@ -1666,16 +2410,20 @@
         </p:nvSpPr>
         <p:spPr>
           <a:xfrm>
-            <a:off x="839788" y="365125"/>
-            <a:ext cx="10515600" cy="1325563"/>
+            <a:off x="609600" y="274638"/>
+            <a:ext cx="10972800" cy="1143000"/>
           </a:xfrm>
         </p:spPr>
         <p:txBody>
           <a:bodyPr/>
-          <a:lstStyle/>
-          <a:p>
-            <a:r>
-              <a:rPr kumimoji="1" lang="ja-JP" altLang="en-US"/>
+          <a:lstStyle>
+            <a:lvl1pPr>
+              <a:defRPr/>
+            </a:lvl1pPr>
+          </a:lstStyle>
+          <a:p>
+            <a:r>
+              <a:rPr lang="ja-JP" altLang="en-US"/>
               <a:t>マスター タイトルの書式設定</a:t>
             </a:r>
           </a:p>
@@ -1683,13 +2431,7 @@
       </p:sp>
       <p:sp>
         <p:nvSpPr>
-          <p:cNvPr id="3" name="テキスト プレースホルダー 2">
-            <a:extLst>
-              <a:ext uri="{FF2B5EF4-FFF2-40B4-BE49-F238E27FC236}">
-                <a16:creationId xmlns:a16="http://schemas.microsoft.com/office/drawing/2014/main" id="{BB222C43-88F6-C535-D2AE-55A89907FF50}"/>
-              </a:ext>
-            </a:extLst>
-          </p:cNvPr>
+          <p:cNvPr id="3" name="テキスト プレースホルダ 2"/>
           <p:cNvSpPr>
             <a:spLocks noGrp="1"/>
           </p:cNvSpPr>
@@ -1699,8 +2441,8 @@
         </p:nvSpPr>
         <p:spPr>
           <a:xfrm>
-            <a:off x="839788" y="1681163"/>
-            <a:ext cx="5157787" cy="823912"/>
+            <a:off x="609600" y="1535113"/>
+            <a:ext cx="5386917" cy="639762"/>
           </a:xfrm>
         </p:spPr>
         <p:txBody>
@@ -1746,7 +2488,7 @@
           <a:p>
             <a:pPr lvl="0"/>
             <a:r>
-              <a:rPr kumimoji="1" lang="ja-JP" altLang="en-US"/>
+              <a:rPr lang="ja-JP" altLang="en-US"/>
               <a:t>マスター テキストの書式設定</a:t>
             </a:r>
           </a:p>
@@ -1754,13 +2496,7 @@
       </p:sp>
       <p:sp>
         <p:nvSpPr>
-          <p:cNvPr id="4" name="コンテンツ プレースホルダー 3">
-            <a:extLst>
-              <a:ext uri="{FF2B5EF4-FFF2-40B4-BE49-F238E27FC236}">
-                <a16:creationId xmlns:a16="http://schemas.microsoft.com/office/drawing/2014/main" id="{B44549FC-7240-83D9-F4B8-1C1A1CD2761D}"/>
-              </a:ext>
-            </a:extLst>
-          </p:cNvPr>
+          <p:cNvPr id="4" name="コンテンツ プレースホルダ 3"/>
           <p:cNvSpPr>
             <a:spLocks noGrp="1"/>
           </p:cNvSpPr>
@@ -1770,77 +2506,105 @@
         </p:nvSpPr>
         <p:spPr>
           <a:xfrm>
-            <a:off x="839788" y="2505075"/>
-            <a:ext cx="5157787" cy="3684588"/>
+            <a:off x="609600" y="2174875"/>
+            <a:ext cx="5386917" cy="3951288"/>
           </a:xfrm>
         </p:spPr>
         <p:txBody>
           <a:bodyPr/>
-          <a:lstStyle/>
+          <a:lstStyle>
+            <a:lvl1pPr>
+              <a:defRPr sz="2400"/>
+            </a:lvl1pPr>
+            <a:lvl2pPr>
+              <a:defRPr sz="2000"/>
+            </a:lvl2pPr>
+            <a:lvl3pPr>
+              <a:defRPr sz="1800"/>
+            </a:lvl3pPr>
+            <a:lvl4pPr>
+              <a:defRPr sz="1600"/>
+            </a:lvl4pPr>
+            <a:lvl5pPr>
+              <a:defRPr sz="1600"/>
+            </a:lvl5pPr>
+            <a:lvl6pPr>
+              <a:defRPr sz="1600"/>
+            </a:lvl6pPr>
+            <a:lvl7pPr>
+              <a:defRPr sz="1600"/>
+            </a:lvl7pPr>
+            <a:lvl8pPr>
+              <a:defRPr sz="1600"/>
+            </a:lvl8pPr>
+            <a:lvl9pPr>
+              <a:defRPr sz="1600"/>
+            </a:lvl9pPr>
+          </a:lstStyle>
           <a:p>
             <a:pPr lvl="0"/>
             <a:r>
-              <a:rPr kumimoji="1" lang="ja-JP" altLang="en-US"/>
+              <a:rPr lang="ja-JP" altLang="en-US"/>
               <a:t>マスター テキストの書式設定</a:t>
             </a:r>
           </a:p>
           <a:p>
             <a:pPr lvl="1"/>
             <a:r>
-              <a:rPr kumimoji="1" lang="ja-JP" altLang="en-US"/>
+              <a:rPr lang="ja-JP" altLang="en-US"/>
               <a:t>第 </a:t>
             </a:r>
             <a:r>
-              <a:rPr kumimoji="1" lang="en-US" altLang="ja-JP"/>
+              <a:rPr lang="en-US" altLang="ja-JP"/>
               <a:t>2 </a:t>
             </a:r>
             <a:r>
-              <a:rPr kumimoji="1" lang="ja-JP" altLang="en-US"/>
+              <a:rPr lang="ja-JP" altLang="en-US"/>
               <a:t>レベル</a:t>
             </a:r>
           </a:p>
           <a:p>
             <a:pPr lvl="2"/>
             <a:r>
-              <a:rPr kumimoji="1" lang="ja-JP" altLang="en-US"/>
+              <a:rPr lang="ja-JP" altLang="en-US"/>
               <a:t>第 </a:t>
             </a:r>
             <a:r>
-              <a:rPr kumimoji="1" lang="en-US" altLang="ja-JP"/>
+              <a:rPr lang="en-US" altLang="ja-JP"/>
               <a:t>3 </a:t>
             </a:r>
             <a:r>
-              <a:rPr kumimoji="1" lang="ja-JP" altLang="en-US"/>
+              <a:rPr lang="ja-JP" altLang="en-US"/>
               <a:t>レベル</a:t>
             </a:r>
           </a:p>
           <a:p>
             <a:pPr lvl="3"/>
             <a:r>
-              <a:rPr kumimoji="1" lang="ja-JP" altLang="en-US"/>
+              <a:rPr lang="ja-JP" altLang="en-US"/>
               <a:t>第 </a:t>
             </a:r>
             <a:r>
-              <a:rPr kumimoji="1" lang="en-US" altLang="ja-JP"/>
+              <a:rPr lang="en-US" altLang="ja-JP"/>
               <a:t>4 </a:t>
             </a:r>
             <a:r>
-              <a:rPr kumimoji="1" lang="ja-JP" altLang="en-US"/>
+              <a:rPr lang="ja-JP" altLang="en-US"/>
               <a:t>レベル</a:t>
             </a:r>
           </a:p>
           <a:p>
             <a:pPr lvl="4"/>
             <a:r>
-              <a:rPr kumimoji="1" lang="ja-JP" altLang="en-US"/>
+              <a:rPr lang="ja-JP" altLang="en-US"/>
               <a:t>第 </a:t>
             </a:r>
             <a:r>
-              <a:rPr kumimoji="1" lang="en-US" altLang="ja-JP"/>
+              <a:rPr lang="en-US" altLang="ja-JP"/>
               <a:t>5 </a:t>
             </a:r>
             <a:r>
-              <a:rPr kumimoji="1" lang="ja-JP" altLang="en-US"/>
+              <a:rPr lang="ja-JP" altLang="en-US"/>
               <a:t>レベル</a:t>
             </a:r>
           </a:p>
@@ -1848,13 +2612,7 @@
       </p:sp>
       <p:sp>
         <p:nvSpPr>
-          <p:cNvPr id="5" name="テキスト プレースホルダー 4">
-            <a:extLst>
-              <a:ext uri="{FF2B5EF4-FFF2-40B4-BE49-F238E27FC236}">
-                <a16:creationId xmlns:a16="http://schemas.microsoft.com/office/drawing/2014/main" id="{BA7941AA-CAA8-D1D2-C73C-A99A550306BB}"/>
-              </a:ext>
-            </a:extLst>
-          </p:cNvPr>
+          <p:cNvPr id="5" name="テキスト プレースホルダ 4"/>
           <p:cNvSpPr>
             <a:spLocks noGrp="1"/>
           </p:cNvSpPr>
@@ -1864,8 +2622,8 @@
         </p:nvSpPr>
         <p:spPr>
           <a:xfrm>
-            <a:off x="6172200" y="1681163"/>
-            <a:ext cx="5183188" cy="823912"/>
+            <a:off x="6193368" y="1535113"/>
+            <a:ext cx="5389033" cy="639762"/>
           </a:xfrm>
         </p:spPr>
         <p:txBody>
@@ -1911,7 +2669,7 @@
           <a:p>
             <a:pPr lvl="0"/>
             <a:r>
-              <a:rPr kumimoji="1" lang="ja-JP" altLang="en-US"/>
+              <a:rPr lang="ja-JP" altLang="en-US"/>
               <a:t>マスター テキストの書式設定</a:t>
             </a:r>
           </a:p>
@@ -1919,13 +2677,7 @@
       </p:sp>
       <p:sp>
         <p:nvSpPr>
-          <p:cNvPr id="6" name="コンテンツ プレースホルダー 5">
-            <a:extLst>
-              <a:ext uri="{FF2B5EF4-FFF2-40B4-BE49-F238E27FC236}">
-                <a16:creationId xmlns:a16="http://schemas.microsoft.com/office/drawing/2014/main" id="{27ACFE05-01EF-811E-D4E5-6E577592F551}"/>
-              </a:ext>
-            </a:extLst>
-          </p:cNvPr>
+          <p:cNvPr id="6" name="コンテンツ プレースホルダ 5"/>
           <p:cNvSpPr>
             <a:spLocks noGrp="1"/>
           </p:cNvSpPr>
@@ -1935,77 +2687,105 @@
         </p:nvSpPr>
         <p:spPr>
           <a:xfrm>
-            <a:off x="6172200" y="2505075"/>
-            <a:ext cx="5183188" cy="3684588"/>
+            <a:off x="6193368" y="2174875"/>
+            <a:ext cx="5389033" cy="3951288"/>
           </a:xfrm>
         </p:spPr>
         <p:txBody>
           <a:bodyPr/>
-          <a:lstStyle/>
+          <a:lstStyle>
+            <a:lvl1pPr>
+              <a:defRPr sz="2400"/>
+            </a:lvl1pPr>
+            <a:lvl2pPr>
+              <a:defRPr sz="2000"/>
+            </a:lvl2pPr>
+            <a:lvl3pPr>
+              <a:defRPr sz="1800"/>
+            </a:lvl3pPr>
+            <a:lvl4pPr>
+              <a:defRPr sz="1600"/>
+            </a:lvl4pPr>
+            <a:lvl5pPr>
+              <a:defRPr sz="1600"/>
+            </a:lvl5pPr>
+            <a:lvl6pPr>
+              <a:defRPr sz="1600"/>
+            </a:lvl6pPr>
+            <a:lvl7pPr>
+              <a:defRPr sz="1600"/>
+            </a:lvl7pPr>
+            <a:lvl8pPr>
+              <a:defRPr sz="1600"/>
+            </a:lvl8pPr>
+            <a:lvl9pPr>
+              <a:defRPr sz="1600"/>
+            </a:lvl9pPr>
+          </a:lstStyle>
           <a:p>
             <a:pPr lvl="0"/>
             <a:r>
-              <a:rPr kumimoji="1" lang="ja-JP" altLang="en-US"/>
+              <a:rPr lang="ja-JP" altLang="en-US"/>
               <a:t>マスター テキストの書式設定</a:t>
             </a:r>
           </a:p>
           <a:p>
             <a:pPr lvl="1"/>
             <a:r>
-              <a:rPr kumimoji="1" lang="ja-JP" altLang="en-US"/>
+              <a:rPr lang="ja-JP" altLang="en-US"/>
               <a:t>第 </a:t>
             </a:r>
             <a:r>
-              <a:rPr kumimoji="1" lang="en-US" altLang="ja-JP"/>
+              <a:rPr lang="en-US" altLang="ja-JP"/>
               <a:t>2 </a:t>
             </a:r>
             <a:r>
-              <a:rPr kumimoji="1" lang="ja-JP" altLang="en-US"/>
+              <a:rPr lang="ja-JP" altLang="en-US"/>
               <a:t>レベル</a:t>
             </a:r>
           </a:p>
           <a:p>
             <a:pPr lvl="2"/>
             <a:r>
-              <a:rPr kumimoji="1" lang="ja-JP" altLang="en-US"/>
+              <a:rPr lang="ja-JP" altLang="en-US"/>
               <a:t>第 </a:t>
             </a:r>
             <a:r>
-              <a:rPr kumimoji="1" lang="en-US" altLang="ja-JP"/>
+              <a:rPr lang="en-US" altLang="ja-JP"/>
               <a:t>3 </a:t>
             </a:r>
             <a:r>
-              <a:rPr kumimoji="1" lang="ja-JP" altLang="en-US"/>
+              <a:rPr lang="ja-JP" altLang="en-US"/>
               <a:t>レベル</a:t>
             </a:r>
           </a:p>
           <a:p>
             <a:pPr lvl="3"/>
             <a:r>
-              <a:rPr kumimoji="1" lang="ja-JP" altLang="en-US"/>
+              <a:rPr lang="ja-JP" altLang="en-US"/>
               <a:t>第 </a:t>
             </a:r>
             <a:r>
-              <a:rPr kumimoji="1" lang="en-US" altLang="ja-JP"/>
+              <a:rPr lang="en-US" altLang="ja-JP"/>
               <a:t>4 </a:t>
             </a:r>
             <a:r>
-              <a:rPr kumimoji="1" lang="ja-JP" altLang="en-US"/>
+              <a:rPr lang="ja-JP" altLang="en-US"/>
               <a:t>レベル</a:t>
             </a:r>
           </a:p>
           <a:p>
             <a:pPr lvl="4"/>
             <a:r>
-              <a:rPr kumimoji="1" lang="ja-JP" altLang="en-US"/>
+              <a:rPr lang="ja-JP" altLang="en-US"/>
               <a:t>第 </a:t>
             </a:r>
             <a:r>
-              <a:rPr kumimoji="1" lang="en-US" altLang="ja-JP"/>
+              <a:rPr lang="en-US" altLang="ja-JP"/>
               <a:t>5 </a:t>
             </a:r>
             <a:r>
-              <a:rPr kumimoji="1" lang="ja-JP" altLang="en-US"/>
+              <a:rPr lang="ja-JP" altLang="en-US"/>
               <a:t>レベル</a:t>
             </a:r>
           </a:p>
@@ -2013,91 +2793,93 @@
       </p:sp>
       <p:sp>
         <p:nvSpPr>
-          <p:cNvPr id="7" name="日付プレースホルダー 6">
-            <a:extLst>
-              <a:ext uri="{FF2B5EF4-FFF2-40B4-BE49-F238E27FC236}">
-                <a16:creationId xmlns:a16="http://schemas.microsoft.com/office/drawing/2014/main" id="{75A9E958-9173-D526-3C4B-0DBC329172D6}"/>
-              </a:ext>
-            </a:extLst>
-          </p:cNvPr>
-          <p:cNvSpPr>
-            <a:spLocks noGrp="1"/>
+          <p:cNvPr id="7" name="Rectangle 4"/>
+          <p:cNvSpPr>
+            <a:spLocks noGrp="1" noChangeArrowheads="1"/>
           </p:cNvSpPr>
           <p:nvPr>
             <p:ph type="dt" sz="half" idx="10"/>
           </p:nvPr>
         </p:nvSpPr>
-        <p:spPr/>
+        <p:spPr>
+          <a:ln/>
+        </p:spPr>
         <p:txBody>
           <a:bodyPr/>
-          <a:lstStyle/>
-          <a:p>
-            <a:fld id="{6617D3FC-E227-49CD-9B33-753CA2C6CDCB}" type="datetimeFigureOut">
-              <a:rPr kumimoji="1" lang="ja-JP" altLang="en-US" smtClean="0"/>
+          <a:lstStyle>
+            <a:lvl1pPr>
+              <a:defRPr/>
+            </a:lvl1pPr>
+          </a:lstStyle>
+          <a:p>
+            <a:fld id="{5BBCB299-525B-C043-8ABF-E2AB50D107C3}" type="datetimeFigureOut">
+              <a:rPr lang="ja-JP" altLang="en-US" smtClean="0"/>
+              <a:pPr/>
               <a:t>2026/8/31</a:t>
             </a:fld>
-            <a:endParaRPr kumimoji="1" lang="ja-JP" altLang="en-US"/>
-          </a:p>
-        </p:txBody>
-      </p:sp>
-      <p:sp>
-        <p:nvSpPr>
-          <p:cNvPr id="8" name="フッター プレースホルダー 7">
-            <a:extLst>
-              <a:ext uri="{FF2B5EF4-FFF2-40B4-BE49-F238E27FC236}">
-                <a16:creationId xmlns:a16="http://schemas.microsoft.com/office/drawing/2014/main" id="{F293BB3A-CFEB-E361-80CA-3206A7AA7125}"/>
-              </a:ext>
-            </a:extLst>
-          </p:cNvPr>
-          <p:cNvSpPr>
-            <a:spLocks noGrp="1"/>
+            <a:endParaRPr lang="ja-JP" altLang="en-US" dirty="0"/>
+          </a:p>
+        </p:txBody>
+      </p:sp>
+      <p:sp>
+        <p:nvSpPr>
+          <p:cNvPr id="8" name="Rectangle 5"/>
+          <p:cNvSpPr>
+            <a:spLocks noGrp="1" noChangeArrowheads="1"/>
           </p:cNvSpPr>
           <p:nvPr>
             <p:ph type="ftr" sz="quarter" idx="11"/>
           </p:nvPr>
         </p:nvSpPr>
-        <p:spPr/>
+        <p:spPr>
+          <a:ln/>
+        </p:spPr>
         <p:txBody>
           <a:bodyPr/>
-          <a:lstStyle/>
-          <a:p>
-            <a:endParaRPr kumimoji="1" lang="ja-JP" altLang="en-US"/>
-          </a:p>
-        </p:txBody>
-      </p:sp>
-      <p:sp>
-        <p:nvSpPr>
-          <p:cNvPr id="9" name="スライド番号プレースホルダー 8">
-            <a:extLst>
-              <a:ext uri="{FF2B5EF4-FFF2-40B4-BE49-F238E27FC236}">
-                <a16:creationId xmlns:a16="http://schemas.microsoft.com/office/drawing/2014/main" id="{8248F0BA-988A-7D3D-0AA1-C38C7EB5DF35}"/>
-              </a:ext>
-            </a:extLst>
-          </p:cNvPr>
-          <p:cNvSpPr>
-            <a:spLocks noGrp="1"/>
+          <a:lstStyle>
+            <a:lvl1pPr>
+              <a:defRPr/>
+            </a:lvl1pPr>
+          </a:lstStyle>
+          <a:p>
+            <a:endParaRPr lang="ja-JP" altLang="en-US" dirty="0"/>
+          </a:p>
+        </p:txBody>
+      </p:sp>
+      <p:sp>
+        <p:nvSpPr>
+          <p:cNvPr id="9" name="Rectangle 6"/>
+          <p:cNvSpPr>
+            <a:spLocks noGrp="1" noChangeArrowheads="1"/>
           </p:cNvSpPr>
           <p:nvPr>
             <p:ph type="sldNum" sz="quarter" idx="12"/>
           </p:nvPr>
         </p:nvSpPr>
-        <p:spPr/>
+        <p:spPr>
+          <a:ln/>
+        </p:spPr>
         <p:txBody>
           <a:bodyPr/>
-          <a:lstStyle/>
-          <a:p>
-            <a:fld id="{01C0817E-3A9A-4621-AB56-BCE6DE2A21FA}" type="slidenum">
-              <a:rPr kumimoji="1" lang="ja-JP" altLang="en-US" smtClean="0"/>
+          <a:lstStyle>
+            <a:lvl1pPr>
+              <a:defRPr/>
+            </a:lvl1pPr>
+          </a:lstStyle>
+          <a:p>
+            <a:fld id="{A602DE73-0B5E-8446-9073-5A6DE92C9AAA}" type="slidenum">
+              <a:rPr lang="ja-JP" altLang="en-US" smtClean="0"/>
+              <a:pPr/>
               <a:t>‹#›</a:t>
             </a:fld>
-            <a:endParaRPr kumimoji="1" lang="ja-JP" altLang="en-US"/>
+            <a:endParaRPr lang="ja-JP" altLang="en-US" dirty="0"/>
           </a:p>
         </p:txBody>
       </p:sp>
     </p:spTree>
     <p:extLst>
       <p:ext uri="{BB962C8B-B14F-4D97-AF65-F5344CB8AC3E}">
-        <p14:creationId xmlns:p14="http://schemas.microsoft.com/office/powerpoint/2010/main" val="852546279"/>
+        <p14:creationId xmlns:p14="http://schemas.microsoft.com/office/powerpoint/2010/main" val="2207199528"/>
       </p:ext>
     </p:extLst>
   </p:cSld>
@@ -2126,13 +2908,7 @@
       </p:grpSpPr>
       <p:sp>
         <p:nvSpPr>
-          <p:cNvPr id="2" name="タイトル 1">
-            <a:extLst>
-              <a:ext uri="{FF2B5EF4-FFF2-40B4-BE49-F238E27FC236}">
-                <a16:creationId xmlns:a16="http://schemas.microsoft.com/office/drawing/2014/main" id="{1CB8EFBE-8945-554C-FE33-3C760F6C8A85}"/>
-              </a:ext>
-            </a:extLst>
-          </p:cNvPr>
+          <p:cNvPr id="2" name="タイトル 1"/>
           <p:cNvSpPr>
             <a:spLocks noGrp="1"/>
           </p:cNvSpPr>
@@ -2146,7 +2922,7 @@
           <a:lstStyle/>
           <a:p>
             <a:r>
-              <a:rPr kumimoji="1" lang="ja-JP" altLang="en-US"/>
+              <a:rPr lang="ja-JP" altLang="en-US"/>
               <a:t>マスター タイトルの書式設定</a:t>
             </a:r>
           </a:p>
@@ -2154,91 +2930,93 @@
       </p:sp>
       <p:sp>
         <p:nvSpPr>
-          <p:cNvPr id="3" name="日付プレースホルダー 2">
-            <a:extLst>
-              <a:ext uri="{FF2B5EF4-FFF2-40B4-BE49-F238E27FC236}">
-                <a16:creationId xmlns:a16="http://schemas.microsoft.com/office/drawing/2014/main" id="{6E1C59BE-4DEB-9298-C4C0-2152E2923D4B}"/>
-              </a:ext>
-            </a:extLst>
-          </p:cNvPr>
-          <p:cNvSpPr>
-            <a:spLocks noGrp="1"/>
+          <p:cNvPr id="3" name="Rectangle 4"/>
+          <p:cNvSpPr>
+            <a:spLocks noGrp="1" noChangeArrowheads="1"/>
           </p:cNvSpPr>
           <p:nvPr>
             <p:ph type="dt" sz="half" idx="10"/>
           </p:nvPr>
         </p:nvSpPr>
-        <p:spPr/>
+        <p:spPr>
+          <a:ln/>
+        </p:spPr>
         <p:txBody>
           <a:bodyPr/>
-          <a:lstStyle/>
-          <a:p>
-            <a:fld id="{6617D3FC-E227-49CD-9B33-753CA2C6CDCB}" type="datetimeFigureOut">
-              <a:rPr kumimoji="1" lang="ja-JP" altLang="en-US" smtClean="0"/>
+          <a:lstStyle>
+            <a:lvl1pPr>
+              <a:defRPr/>
+            </a:lvl1pPr>
+          </a:lstStyle>
+          <a:p>
+            <a:fld id="{5BBCB299-525B-C043-8ABF-E2AB50D107C3}" type="datetimeFigureOut">
+              <a:rPr lang="ja-JP" altLang="en-US" smtClean="0"/>
+              <a:pPr/>
               <a:t>2026/8/31</a:t>
             </a:fld>
-            <a:endParaRPr kumimoji="1" lang="ja-JP" altLang="en-US"/>
-          </a:p>
-        </p:txBody>
-      </p:sp>
-      <p:sp>
-        <p:nvSpPr>
-          <p:cNvPr id="4" name="フッター プレースホルダー 3">
-            <a:extLst>
-              <a:ext uri="{FF2B5EF4-FFF2-40B4-BE49-F238E27FC236}">
-                <a16:creationId xmlns:a16="http://schemas.microsoft.com/office/drawing/2014/main" id="{87CFF010-DD71-E186-A693-EF4A06F2213D}"/>
-              </a:ext>
-            </a:extLst>
-          </p:cNvPr>
-          <p:cNvSpPr>
-            <a:spLocks noGrp="1"/>
+            <a:endParaRPr lang="ja-JP" altLang="en-US" dirty="0"/>
+          </a:p>
+        </p:txBody>
+      </p:sp>
+      <p:sp>
+        <p:nvSpPr>
+          <p:cNvPr id="4" name="Rectangle 5"/>
+          <p:cNvSpPr>
+            <a:spLocks noGrp="1" noChangeArrowheads="1"/>
           </p:cNvSpPr>
           <p:nvPr>
             <p:ph type="ftr" sz="quarter" idx="11"/>
           </p:nvPr>
         </p:nvSpPr>
-        <p:spPr/>
+        <p:spPr>
+          <a:ln/>
+        </p:spPr>
         <p:txBody>
           <a:bodyPr/>
-          <a:lstStyle/>
-          <a:p>
-            <a:endParaRPr kumimoji="1" lang="ja-JP" altLang="en-US"/>
-          </a:p>
-        </p:txBody>
-      </p:sp>
-      <p:sp>
-        <p:nvSpPr>
-          <p:cNvPr id="5" name="スライド番号プレースホルダー 4">
-            <a:extLst>
-              <a:ext uri="{FF2B5EF4-FFF2-40B4-BE49-F238E27FC236}">
-                <a16:creationId xmlns:a16="http://schemas.microsoft.com/office/drawing/2014/main" id="{F2C3887C-8A91-0277-C4AA-D524226BF875}"/>
-              </a:ext>
-            </a:extLst>
-          </p:cNvPr>
-          <p:cNvSpPr>
-            <a:spLocks noGrp="1"/>
+          <a:lstStyle>
+            <a:lvl1pPr>
+              <a:defRPr/>
+            </a:lvl1pPr>
+          </a:lstStyle>
+          <a:p>
+            <a:endParaRPr lang="ja-JP" altLang="en-US" dirty="0"/>
+          </a:p>
+        </p:txBody>
+      </p:sp>
+      <p:sp>
+        <p:nvSpPr>
+          <p:cNvPr id="5" name="Rectangle 6"/>
+          <p:cNvSpPr>
+            <a:spLocks noGrp="1" noChangeArrowheads="1"/>
           </p:cNvSpPr>
           <p:nvPr>
             <p:ph type="sldNum" sz="quarter" idx="12"/>
           </p:nvPr>
         </p:nvSpPr>
-        <p:spPr/>
+        <p:spPr>
+          <a:ln/>
+        </p:spPr>
         <p:txBody>
           <a:bodyPr/>
-          <a:lstStyle/>
-          <a:p>
-            <a:fld id="{01C0817E-3A9A-4621-AB56-BCE6DE2A21FA}" type="slidenum">
-              <a:rPr kumimoji="1" lang="ja-JP" altLang="en-US" smtClean="0"/>
+          <a:lstStyle>
+            <a:lvl1pPr>
+              <a:defRPr/>
+            </a:lvl1pPr>
+          </a:lstStyle>
+          <a:p>
+            <a:fld id="{A602DE73-0B5E-8446-9073-5A6DE92C9AAA}" type="slidenum">
+              <a:rPr lang="ja-JP" altLang="en-US" smtClean="0"/>
+              <a:pPr/>
               <a:t>‹#›</a:t>
             </a:fld>
-            <a:endParaRPr kumimoji="1" lang="ja-JP" altLang="en-US"/>
+            <a:endParaRPr lang="ja-JP" altLang="en-US" dirty="0"/>
           </a:p>
         </p:txBody>
       </p:sp>
     </p:spTree>
     <p:extLst>
       <p:ext uri="{BB962C8B-B14F-4D97-AF65-F5344CB8AC3E}">
-        <p14:creationId xmlns:p14="http://schemas.microsoft.com/office/powerpoint/2010/main" val="2077778267"/>
+        <p14:creationId xmlns:p14="http://schemas.microsoft.com/office/powerpoint/2010/main" val="2325466028"/>
       </p:ext>
     </p:extLst>
   </p:cSld>
@@ -2267,91 +3045,93 @@
       </p:grpSpPr>
       <p:sp>
         <p:nvSpPr>
-          <p:cNvPr id="2" name="日付プレースホルダー 1">
-            <a:extLst>
-              <a:ext uri="{FF2B5EF4-FFF2-40B4-BE49-F238E27FC236}">
-                <a16:creationId xmlns:a16="http://schemas.microsoft.com/office/drawing/2014/main" id="{36E4ABAA-B0F6-1E24-7916-606C86B284D2}"/>
-              </a:ext>
-            </a:extLst>
-          </p:cNvPr>
-          <p:cNvSpPr>
-            <a:spLocks noGrp="1"/>
+          <p:cNvPr id="2" name="Rectangle 4"/>
+          <p:cNvSpPr>
+            <a:spLocks noGrp="1" noChangeArrowheads="1"/>
           </p:cNvSpPr>
           <p:nvPr>
             <p:ph type="dt" sz="half" idx="10"/>
           </p:nvPr>
         </p:nvSpPr>
-        <p:spPr/>
+        <p:spPr>
+          <a:ln/>
+        </p:spPr>
         <p:txBody>
           <a:bodyPr/>
-          <a:lstStyle/>
-          <a:p>
-            <a:fld id="{6617D3FC-E227-49CD-9B33-753CA2C6CDCB}" type="datetimeFigureOut">
-              <a:rPr kumimoji="1" lang="ja-JP" altLang="en-US" smtClean="0"/>
+          <a:lstStyle>
+            <a:lvl1pPr>
+              <a:defRPr/>
+            </a:lvl1pPr>
+          </a:lstStyle>
+          <a:p>
+            <a:fld id="{5BBCB299-525B-C043-8ABF-E2AB50D107C3}" type="datetimeFigureOut">
+              <a:rPr lang="ja-JP" altLang="en-US" smtClean="0"/>
+              <a:pPr/>
               <a:t>2026/8/31</a:t>
             </a:fld>
-            <a:endParaRPr kumimoji="1" lang="ja-JP" altLang="en-US"/>
-          </a:p>
-        </p:txBody>
-      </p:sp>
-      <p:sp>
-        <p:nvSpPr>
-          <p:cNvPr id="3" name="フッター プレースホルダー 2">
-            <a:extLst>
-              <a:ext uri="{FF2B5EF4-FFF2-40B4-BE49-F238E27FC236}">
-                <a16:creationId xmlns:a16="http://schemas.microsoft.com/office/drawing/2014/main" id="{40F6880E-441F-7ECB-0A6E-416B5CAF9022}"/>
-              </a:ext>
-            </a:extLst>
-          </p:cNvPr>
-          <p:cNvSpPr>
-            <a:spLocks noGrp="1"/>
+            <a:endParaRPr lang="ja-JP" altLang="en-US" dirty="0"/>
+          </a:p>
+        </p:txBody>
+      </p:sp>
+      <p:sp>
+        <p:nvSpPr>
+          <p:cNvPr id="3" name="Rectangle 5"/>
+          <p:cNvSpPr>
+            <a:spLocks noGrp="1" noChangeArrowheads="1"/>
           </p:cNvSpPr>
           <p:nvPr>
             <p:ph type="ftr" sz="quarter" idx="11"/>
           </p:nvPr>
         </p:nvSpPr>
-        <p:spPr/>
+        <p:spPr>
+          <a:ln/>
+        </p:spPr>
         <p:txBody>
           <a:bodyPr/>
-          <a:lstStyle/>
-          <a:p>
-            <a:endParaRPr kumimoji="1" lang="ja-JP" altLang="en-US"/>
-          </a:p>
-        </p:txBody>
-      </p:sp>
-      <p:sp>
-        <p:nvSpPr>
-          <p:cNvPr id="4" name="スライド番号プレースホルダー 3">
-            <a:extLst>
-              <a:ext uri="{FF2B5EF4-FFF2-40B4-BE49-F238E27FC236}">
-                <a16:creationId xmlns:a16="http://schemas.microsoft.com/office/drawing/2014/main" id="{1FFB2FFE-D9F3-5829-4113-60BFA971A332}"/>
-              </a:ext>
-            </a:extLst>
-          </p:cNvPr>
-          <p:cNvSpPr>
-            <a:spLocks noGrp="1"/>
+          <a:lstStyle>
+            <a:lvl1pPr>
+              <a:defRPr/>
+            </a:lvl1pPr>
+          </a:lstStyle>
+          <a:p>
+            <a:endParaRPr lang="ja-JP" altLang="en-US" dirty="0"/>
+          </a:p>
+        </p:txBody>
+      </p:sp>
+      <p:sp>
+        <p:nvSpPr>
+          <p:cNvPr id="4" name="Rectangle 6"/>
+          <p:cNvSpPr>
+            <a:spLocks noGrp="1" noChangeArrowheads="1"/>
           </p:cNvSpPr>
           <p:nvPr>
             <p:ph type="sldNum" sz="quarter" idx="12"/>
           </p:nvPr>
         </p:nvSpPr>
-        <p:spPr/>
+        <p:spPr>
+          <a:ln/>
+        </p:spPr>
         <p:txBody>
           <a:bodyPr/>
-          <a:lstStyle/>
-          <a:p>
-            <a:fld id="{01C0817E-3A9A-4621-AB56-BCE6DE2A21FA}" type="slidenum">
-              <a:rPr kumimoji="1" lang="ja-JP" altLang="en-US" smtClean="0"/>
+          <a:lstStyle>
+            <a:lvl1pPr>
+              <a:defRPr/>
+            </a:lvl1pPr>
+          </a:lstStyle>
+          <a:p>
+            <a:fld id="{A602DE73-0B5E-8446-9073-5A6DE92C9AAA}" type="slidenum">
+              <a:rPr lang="ja-JP" altLang="en-US" smtClean="0"/>
+              <a:pPr/>
               <a:t>‹#›</a:t>
             </a:fld>
-            <a:endParaRPr kumimoji="1" lang="ja-JP" altLang="en-US"/>
+            <a:endParaRPr lang="ja-JP" altLang="en-US" dirty="0"/>
           </a:p>
         </p:txBody>
       </p:sp>
     </p:spTree>
     <p:extLst>
       <p:ext uri="{BB962C8B-B14F-4D97-AF65-F5344CB8AC3E}">
-        <p14:creationId xmlns:p14="http://schemas.microsoft.com/office/powerpoint/2010/main" val="453644274"/>
+        <p14:creationId xmlns:p14="http://schemas.microsoft.com/office/powerpoint/2010/main" val="3898770991"/>
       </p:ext>
     </p:extLst>
   </p:cSld>
@@ -2380,13 +3160,7 @@
       </p:grpSpPr>
       <p:sp>
         <p:nvSpPr>
-          <p:cNvPr id="2" name="タイトル 1">
-            <a:extLst>
-              <a:ext uri="{FF2B5EF4-FFF2-40B4-BE49-F238E27FC236}">
-                <a16:creationId xmlns:a16="http://schemas.microsoft.com/office/drawing/2014/main" id="{44D75030-25EB-208B-0E22-12847B40F67E}"/>
-              </a:ext>
-            </a:extLst>
-          </p:cNvPr>
+          <p:cNvPr id="2" name="タイトル 1"/>
           <p:cNvSpPr>
             <a:spLocks noGrp="1"/>
           </p:cNvSpPr>
@@ -2396,20 +3170,20 @@
         </p:nvSpPr>
         <p:spPr>
           <a:xfrm>
-            <a:off x="839788" y="457200"/>
-            <a:ext cx="3932237" cy="1600200"/>
+            <a:off x="609601" y="273050"/>
+            <a:ext cx="4011084" cy="1162050"/>
           </a:xfrm>
         </p:spPr>
         <p:txBody>
           <a:bodyPr anchor="b"/>
           <a:lstStyle>
-            <a:lvl1pPr>
-              <a:defRPr sz="3200"/>
+            <a:lvl1pPr algn="l">
+              <a:defRPr sz="2000" b="1"/>
             </a:lvl1pPr>
           </a:lstStyle>
           <a:p>
             <a:r>
-              <a:rPr kumimoji="1" lang="ja-JP" altLang="en-US"/>
+              <a:rPr lang="ja-JP" altLang="en-US"/>
               <a:t>マスター タイトルの書式設定</a:t>
             </a:r>
           </a:p>
@@ -2417,13 +3191,7 @@
       </p:sp>
       <p:sp>
         <p:nvSpPr>
-          <p:cNvPr id="3" name="コンテンツ プレースホルダー 2">
-            <a:extLst>
-              <a:ext uri="{FF2B5EF4-FFF2-40B4-BE49-F238E27FC236}">
-                <a16:creationId xmlns:a16="http://schemas.microsoft.com/office/drawing/2014/main" id="{A780386B-F2D7-4DB6-4887-106921D83CE0}"/>
-              </a:ext>
-            </a:extLst>
-          </p:cNvPr>
+          <p:cNvPr id="3" name="コンテンツ プレースホルダ 2"/>
           <p:cNvSpPr>
             <a:spLocks noGrp="1"/>
           </p:cNvSpPr>
@@ -2433,8 +3201,8 @@
         </p:nvSpPr>
         <p:spPr>
           <a:xfrm>
-            <a:off x="5183188" y="987425"/>
-            <a:ext cx="6172200" cy="4873625"/>
+            <a:off x="4766733" y="273051"/>
+            <a:ext cx="6815667" cy="5853113"/>
           </a:xfrm>
         </p:spPr>
         <p:txBody>
@@ -2471,67 +3239,67 @@
           <a:p>
             <a:pPr lvl="0"/>
             <a:r>
-              <a:rPr kumimoji="1" lang="ja-JP" altLang="en-US"/>
+              <a:rPr lang="ja-JP" altLang="en-US"/>
               <a:t>マスター テキストの書式設定</a:t>
             </a:r>
           </a:p>
           <a:p>
             <a:pPr lvl="1"/>
             <a:r>
-              <a:rPr kumimoji="1" lang="ja-JP" altLang="en-US"/>
+              <a:rPr lang="ja-JP" altLang="en-US"/>
               <a:t>第 </a:t>
             </a:r>
             <a:r>
-              <a:rPr kumimoji="1" lang="en-US" altLang="ja-JP"/>
+              <a:rPr lang="en-US" altLang="ja-JP"/>
               <a:t>2 </a:t>
             </a:r>
             <a:r>
-              <a:rPr kumimoji="1" lang="ja-JP" altLang="en-US"/>
+              <a:rPr lang="ja-JP" altLang="en-US"/>
               <a:t>レベル</a:t>
             </a:r>
           </a:p>
           <a:p>
             <a:pPr lvl="2"/>
             <a:r>
-              <a:rPr kumimoji="1" lang="ja-JP" altLang="en-US"/>
+              <a:rPr lang="ja-JP" altLang="en-US"/>
               <a:t>第 </a:t>
             </a:r>
             <a:r>
-              <a:rPr kumimoji="1" lang="en-US" altLang="ja-JP"/>
+              <a:rPr lang="en-US" altLang="ja-JP"/>
               <a:t>3 </a:t>
             </a:r>
             <a:r>
-              <a:rPr kumimoji="1" lang="ja-JP" altLang="en-US"/>
+              <a:rPr lang="ja-JP" altLang="en-US"/>
               <a:t>レベル</a:t>
             </a:r>
           </a:p>
           <a:p>
             <a:pPr lvl="3"/>
             <a:r>
-              <a:rPr kumimoji="1" lang="ja-JP" altLang="en-US"/>
+              <a:rPr lang="ja-JP" altLang="en-US"/>
               <a:t>第 </a:t>
             </a:r>
             <a:r>
-              <a:rPr kumimoji="1" lang="en-US" altLang="ja-JP"/>
+              <a:rPr lang="en-US" altLang="ja-JP"/>
               <a:t>4 </a:t>
             </a:r>
             <a:r>
-              <a:rPr kumimoji="1" lang="ja-JP" altLang="en-US"/>
+              <a:rPr lang="ja-JP" altLang="en-US"/>
               <a:t>レベル</a:t>
             </a:r>
           </a:p>
           <a:p>
             <a:pPr lvl="4"/>
             <a:r>
-              <a:rPr kumimoji="1" lang="ja-JP" altLang="en-US"/>
+              <a:rPr lang="ja-JP" altLang="en-US"/>
               <a:t>第 </a:t>
             </a:r>
             <a:r>
-              <a:rPr kumimoji="1" lang="en-US" altLang="ja-JP"/>
+              <a:rPr lang="en-US" altLang="ja-JP"/>
               <a:t>5 </a:t>
             </a:r>
             <a:r>
-              <a:rPr kumimoji="1" lang="ja-JP" altLang="en-US"/>
+              <a:rPr lang="ja-JP" altLang="en-US"/>
               <a:t>レベル</a:t>
             </a:r>
           </a:p>
@@ -2539,13 +3307,7 @@
       </p:sp>
       <p:sp>
         <p:nvSpPr>
-          <p:cNvPr id="4" name="テキスト プレースホルダー 3">
-            <a:extLst>
-              <a:ext uri="{FF2B5EF4-FFF2-40B4-BE49-F238E27FC236}">
-                <a16:creationId xmlns:a16="http://schemas.microsoft.com/office/drawing/2014/main" id="{F84F539E-0F68-D026-4A6F-F2DC18FF80AD}"/>
-              </a:ext>
-            </a:extLst>
-          </p:cNvPr>
+          <p:cNvPr id="4" name="テキスト プレースホルダ 3"/>
           <p:cNvSpPr>
             <a:spLocks noGrp="1"/>
           </p:cNvSpPr>
@@ -2555,8 +3317,8 @@
         </p:nvSpPr>
         <p:spPr>
           <a:xfrm>
-            <a:off x="839788" y="2057400"/>
-            <a:ext cx="3932237" cy="3811588"/>
+            <a:off x="609601" y="1435101"/>
+            <a:ext cx="4011084" cy="4691063"/>
           </a:xfrm>
         </p:spPr>
         <p:txBody>
@@ -2564,45 +3326,45 @@
           <a:lstStyle>
             <a:lvl1pPr marL="0" indent="0">
               <a:buNone/>
-              <a:defRPr sz="1600"/>
+              <a:defRPr sz="1400"/>
             </a:lvl1pPr>
             <a:lvl2pPr marL="457200" indent="0">
               <a:buNone/>
-              <a:defRPr sz="1400"/>
+              <a:defRPr sz="1200"/>
             </a:lvl2pPr>
             <a:lvl3pPr marL="914400" indent="0">
               <a:buNone/>
-              <a:defRPr sz="1200"/>
+              <a:defRPr sz="1000"/>
             </a:lvl3pPr>
             <a:lvl4pPr marL="1371600" indent="0">
               <a:buNone/>
-              <a:defRPr sz="1000"/>
+              <a:defRPr sz="900"/>
             </a:lvl4pPr>
             <a:lvl5pPr marL="1828800" indent="0">
               <a:buNone/>
-              <a:defRPr sz="1000"/>
+              <a:defRPr sz="900"/>
             </a:lvl5pPr>
             <a:lvl6pPr marL="2286000" indent="0">
               <a:buNone/>
-              <a:defRPr sz="1000"/>
+              <a:defRPr sz="900"/>
             </a:lvl6pPr>
             <a:lvl7pPr marL="2743200" indent="0">
               <a:buNone/>
-              <a:defRPr sz="1000"/>
+              <a:defRPr sz="900"/>
             </a:lvl7pPr>
             <a:lvl8pPr marL="3200400" indent="0">
               <a:buNone/>
-              <a:defRPr sz="1000"/>
+              <a:defRPr sz="900"/>
             </a:lvl8pPr>
             <a:lvl9pPr marL="3657600" indent="0">
               <a:buNone/>
-              <a:defRPr sz="1000"/>
+              <a:defRPr sz="900"/>
             </a:lvl9pPr>
           </a:lstStyle>
           <a:p>
             <a:pPr lvl="0"/>
             <a:r>
-              <a:rPr kumimoji="1" lang="ja-JP" altLang="en-US"/>
+              <a:rPr lang="ja-JP" altLang="en-US"/>
               <a:t>マスター テキストの書式設定</a:t>
             </a:r>
           </a:p>
@@ -2610,91 +3372,93 @@
       </p:sp>
       <p:sp>
         <p:nvSpPr>
-          <p:cNvPr id="5" name="日付プレースホルダー 4">
-            <a:extLst>
-              <a:ext uri="{FF2B5EF4-FFF2-40B4-BE49-F238E27FC236}">
-                <a16:creationId xmlns:a16="http://schemas.microsoft.com/office/drawing/2014/main" id="{F5EFAA0B-FC4A-3587-BA09-ED66FBC5D39E}"/>
-              </a:ext>
-            </a:extLst>
-          </p:cNvPr>
-          <p:cNvSpPr>
-            <a:spLocks noGrp="1"/>
+          <p:cNvPr id="5" name="Rectangle 4"/>
+          <p:cNvSpPr>
+            <a:spLocks noGrp="1" noChangeArrowheads="1"/>
           </p:cNvSpPr>
           <p:nvPr>
             <p:ph type="dt" sz="half" idx="10"/>
           </p:nvPr>
         </p:nvSpPr>
-        <p:spPr/>
+        <p:spPr>
+          <a:ln/>
+        </p:spPr>
         <p:txBody>
           <a:bodyPr/>
-          <a:lstStyle/>
-          <a:p>
-            <a:fld id="{6617D3FC-E227-49CD-9B33-753CA2C6CDCB}" type="datetimeFigureOut">
-              <a:rPr kumimoji="1" lang="ja-JP" altLang="en-US" smtClean="0"/>
+          <a:lstStyle>
+            <a:lvl1pPr>
+              <a:defRPr/>
+            </a:lvl1pPr>
+          </a:lstStyle>
+          <a:p>
+            <a:fld id="{5BBCB299-525B-C043-8ABF-E2AB50D107C3}" type="datetimeFigureOut">
+              <a:rPr lang="ja-JP" altLang="en-US" smtClean="0"/>
+              <a:pPr/>
               <a:t>2026/8/31</a:t>
             </a:fld>
-            <a:endParaRPr kumimoji="1" lang="ja-JP" altLang="en-US"/>
-          </a:p>
-        </p:txBody>
-      </p:sp>
-      <p:sp>
-        <p:nvSpPr>
-          <p:cNvPr id="6" name="フッター プレースホルダー 5">
-            <a:extLst>
-              <a:ext uri="{FF2B5EF4-FFF2-40B4-BE49-F238E27FC236}">
-                <a16:creationId xmlns:a16="http://schemas.microsoft.com/office/drawing/2014/main" id="{CCC937B8-0849-152E-C37F-0CFD49D895AE}"/>
-              </a:ext>
-            </a:extLst>
-          </p:cNvPr>
-          <p:cNvSpPr>
-            <a:spLocks noGrp="1"/>
+            <a:endParaRPr lang="ja-JP" altLang="en-US" dirty="0"/>
+          </a:p>
+        </p:txBody>
+      </p:sp>
+      <p:sp>
+        <p:nvSpPr>
+          <p:cNvPr id="6" name="Rectangle 5"/>
+          <p:cNvSpPr>
+            <a:spLocks noGrp="1" noChangeArrowheads="1"/>
           </p:cNvSpPr>
           <p:nvPr>
             <p:ph type="ftr" sz="quarter" idx="11"/>
           </p:nvPr>
         </p:nvSpPr>
-        <p:spPr/>
+        <p:spPr>
+          <a:ln/>
+        </p:spPr>
         <p:txBody>
           <a:bodyPr/>
-          <a:lstStyle/>
-          <a:p>
-            <a:endParaRPr kumimoji="1" lang="ja-JP" altLang="en-US"/>
-          </a:p>
-        </p:txBody>
-      </p:sp>
-      <p:sp>
-        <p:nvSpPr>
-          <p:cNvPr id="7" name="スライド番号プレースホルダー 6">
-            <a:extLst>
-              <a:ext uri="{FF2B5EF4-FFF2-40B4-BE49-F238E27FC236}">
-                <a16:creationId xmlns:a16="http://schemas.microsoft.com/office/drawing/2014/main" id="{3916359B-0112-1147-6AA7-08C1D30127DA}"/>
-              </a:ext>
-            </a:extLst>
-          </p:cNvPr>
-          <p:cNvSpPr>
-            <a:spLocks noGrp="1"/>
+          <a:lstStyle>
+            <a:lvl1pPr>
+              <a:defRPr/>
+            </a:lvl1pPr>
+          </a:lstStyle>
+          <a:p>
+            <a:endParaRPr lang="ja-JP" altLang="en-US" dirty="0"/>
+          </a:p>
+        </p:txBody>
+      </p:sp>
+      <p:sp>
+        <p:nvSpPr>
+          <p:cNvPr id="7" name="Rectangle 6"/>
+          <p:cNvSpPr>
+            <a:spLocks noGrp="1" noChangeArrowheads="1"/>
           </p:cNvSpPr>
           <p:nvPr>
             <p:ph type="sldNum" sz="quarter" idx="12"/>
           </p:nvPr>
         </p:nvSpPr>
-        <p:spPr/>
+        <p:spPr>
+          <a:ln/>
+        </p:spPr>
         <p:txBody>
           <a:bodyPr/>
-          <a:lstStyle/>
-          <a:p>
-            <a:fld id="{01C0817E-3A9A-4621-AB56-BCE6DE2A21FA}" type="slidenum">
-              <a:rPr kumimoji="1" lang="ja-JP" altLang="en-US" smtClean="0"/>
+          <a:lstStyle>
+            <a:lvl1pPr>
+              <a:defRPr/>
+            </a:lvl1pPr>
+          </a:lstStyle>
+          <a:p>
+            <a:fld id="{A602DE73-0B5E-8446-9073-5A6DE92C9AAA}" type="slidenum">
+              <a:rPr lang="ja-JP" altLang="en-US" smtClean="0"/>
+              <a:pPr/>
               <a:t>‹#›</a:t>
             </a:fld>
-            <a:endParaRPr kumimoji="1" lang="ja-JP" altLang="en-US"/>
+            <a:endParaRPr lang="ja-JP" altLang="en-US" dirty="0"/>
           </a:p>
         </p:txBody>
       </p:sp>
     </p:spTree>
     <p:extLst>
       <p:ext uri="{BB962C8B-B14F-4D97-AF65-F5344CB8AC3E}">
-        <p14:creationId xmlns:p14="http://schemas.microsoft.com/office/powerpoint/2010/main" val="1154924192"/>
+        <p14:creationId xmlns:p14="http://schemas.microsoft.com/office/powerpoint/2010/main" val="2968321901"/>
       </p:ext>
     </p:extLst>
   </p:cSld>
@@ -2723,13 +3487,7 @@
       </p:grpSpPr>
       <p:sp>
         <p:nvSpPr>
-          <p:cNvPr id="2" name="タイトル 1">
-            <a:extLst>
-              <a:ext uri="{FF2B5EF4-FFF2-40B4-BE49-F238E27FC236}">
-                <a16:creationId xmlns:a16="http://schemas.microsoft.com/office/drawing/2014/main" id="{809E3447-9E56-E00D-EB15-82CA0421EEC1}"/>
-              </a:ext>
-            </a:extLst>
-          </p:cNvPr>
+          <p:cNvPr id="2" name="タイトル 1"/>
           <p:cNvSpPr>
             <a:spLocks noGrp="1"/>
           </p:cNvSpPr>
@@ -2739,20 +3497,20 @@
         </p:nvSpPr>
         <p:spPr>
           <a:xfrm>
-            <a:off x="839788" y="457200"/>
-            <a:ext cx="3932237" cy="1600200"/>
+            <a:off x="2389717" y="4800600"/>
+            <a:ext cx="7315200" cy="566738"/>
           </a:xfrm>
         </p:spPr>
         <p:txBody>
           <a:bodyPr anchor="b"/>
           <a:lstStyle>
-            <a:lvl1pPr>
-              <a:defRPr sz="3200"/>
+            <a:lvl1pPr algn="l">
+              <a:defRPr sz="2000" b="1"/>
             </a:lvl1pPr>
           </a:lstStyle>
           <a:p>
             <a:r>
-              <a:rPr kumimoji="1" lang="ja-JP" altLang="en-US"/>
+              <a:rPr lang="ja-JP" altLang="en-US"/>
               <a:t>マスター タイトルの書式設定</a:t>
             </a:r>
           </a:p>
@@ -2760,13 +3518,7 @@
       </p:sp>
       <p:sp>
         <p:nvSpPr>
-          <p:cNvPr id="3" name="図プレースホルダー 2">
-            <a:extLst>
-              <a:ext uri="{FF2B5EF4-FFF2-40B4-BE49-F238E27FC236}">
-                <a16:creationId xmlns:a16="http://schemas.microsoft.com/office/drawing/2014/main" id="{4ACE080B-FEFC-64D1-3446-20BD845D1B44}"/>
-              </a:ext>
-            </a:extLst>
-          </p:cNvPr>
+          <p:cNvPr id="3" name="図プレースホルダ 2"/>
           <p:cNvSpPr>
             <a:spLocks noGrp="1"/>
           </p:cNvSpPr>
@@ -2776,8 +3528,8 @@
         </p:nvSpPr>
         <p:spPr>
           <a:xfrm>
-            <a:off x="5183188" y="987425"/>
-            <a:ext cx="6172200" cy="4873625"/>
+            <a:off x="2389717" y="612775"/>
+            <a:ext cx="7315200" cy="4114800"/>
           </a:xfrm>
         </p:spPr>
         <p:txBody>
@@ -2821,19 +3573,17 @@
             </a:lvl9pPr>
           </a:lstStyle>
           <a:p>
-            <a:endParaRPr kumimoji="1" lang="ja-JP" altLang="en-US"/>
-          </a:p>
-        </p:txBody>
-      </p:sp>
-      <p:sp>
-        <p:nvSpPr>
-          <p:cNvPr id="4" name="テキスト プレースホルダー 3">
-            <a:extLst>
-              <a:ext uri="{FF2B5EF4-FFF2-40B4-BE49-F238E27FC236}">
-                <a16:creationId xmlns:a16="http://schemas.microsoft.com/office/drawing/2014/main" id="{967724E5-66FB-7394-E18B-5BD5C3335894}"/>
-              </a:ext>
-            </a:extLst>
-          </p:cNvPr>
+            <a:pPr lvl="0"/>
+            <a:r>
+              <a:rPr lang="ja-JP" altLang="en-US" noProof="0" dirty="0"/>
+              <a:t>アイコンをクリックして図を追加</a:t>
+            </a:r>
+          </a:p>
+        </p:txBody>
+      </p:sp>
+      <p:sp>
+        <p:nvSpPr>
+          <p:cNvPr id="4" name="テキスト プレースホルダ 3"/>
           <p:cNvSpPr>
             <a:spLocks noGrp="1"/>
           </p:cNvSpPr>
@@ -2843,8 +3593,8 @@
         </p:nvSpPr>
         <p:spPr>
           <a:xfrm>
-            <a:off x="839788" y="2057400"/>
-            <a:ext cx="3932237" cy="3811588"/>
+            <a:off x="2389717" y="5367338"/>
+            <a:ext cx="7315200" cy="804862"/>
           </a:xfrm>
         </p:spPr>
         <p:txBody>
@@ -2852,45 +3602,45 @@
           <a:lstStyle>
             <a:lvl1pPr marL="0" indent="0">
               <a:buNone/>
-              <a:defRPr sz="1600"/>
+              <a:defRPr sz="1400"/>
             </a:lvl1pPr>
             <a:lvl2pPr marL="457200" indent="0">
               <a:buNone/>
-              <a:defRPr sz="1400"/>
+              <a:defRPr sz="1200"/>
             </a:lvl2pPr>
             <a:lvl3pPr marL="914400" indent="0">
               <a:buNone/>
-              <a:defRPr sz="1200"/>
+              <a:defRPr sz="1000"/>
             </a:lvl3pPr>
             <a:lvl4pPr marL="1371600" indent="0">
               <a:buNone/>
-              <a:defRPr sz="1000"/>
+              <a:defRPr sz="900"/>
             </a:lvl4pPr>
             <a:lvl5pPr marL="1828800" indent="0">
               <a:buNone/>
-              <a:defRPr sz="1000"/>
+              <a:defRPr sz="900"/>
             </a:lvl5pPr>
             <a:lvl6pPr marL="2286000" indent="0">
               <a:buNone/>
-              <a:defRPr sz="1000"/>
+              <a:defRPr sz="900"/>
             </a:lvl6pPr>
             <a:lvl7pPr marL="2743200" indent="0">
               <a:buNone/>
-              <a:defRPr sz="1000"/>
+              <a:defRPr sz="900"/>
             </a:lvl7pPr>
             <a:lvl8pPr marL="3200400" indent="0">
               <a:buNone/>
-              <a:defRPr sz="1000"/>
+              <a:defRPr sz="900"/>
             </a:lvl8pPr>
             <a:lvl9pPr marL="3657600" indent="0">
               <a:buNone/>
-              <a:defRPr sz="1000"/>
+              <a:defRPr sz="900"/>
             </a:lvl9pPr>
           </a:lstStyle>
           <a:p>
             <a:pPr lvl="0"/>
             <a:r>
-              <a:rPr kumimoji="1" lang="ja-JP" altLang="en-US"/>
+              <a:rPr lang="ja-JP" altLang="en-US"/>
               <a:t>マスター テキストの書式設定</a:t>
             </a:r>
           </a:p>
@@ -2898,91 +3648,93 @@
       </p:sp>
       <p:sp>
         <p:nvSpPr>
-          <p:cNvPr id="5" name="日付プレースホルダー 4">
-            <a:extLst>
-              <a:ext uri="{FF2B5EF4-FFF2-40B4-BE49-F238E27FC236}">
-                <a16:creationId xmlns:a16="http://schemas.microsoft.com/office/drawing/2014/main" id="{A6B28632-3182-9A9E-E784-BCCCE5617169}"/>
-              </a:ext>
-            </a:extLst>
-          </p:cNvPr>
-          <p:cNvSpPr>
-            <a:spLocks noGrp="1"/>
+          <p:cNvPr id="5" name="Rectangle 4"/>
+          <p:cNvSpPr>
+            <a:spLocks noGrp="1" noChangeArrowheads="1"/>
           </p:cNvSpPr>
           <p:nvPr>
             <p:ph type="dt" sz="half" idx="10"/>
           </p:nvPr>
         </p:nvSpPr>
-        <p:spPr/>
+        <p:spPr>
+          <a:ln/>
+        </p:spPr>
         <p:txBody>
           <a:bodyPr/>
-          <a:lstStyle/>
-          <a:p>
-            <a:fld id="{6617D3FC-E227-49CD-9B33-753CA2C6CDCB}" type="datetimeFigureOut">
-              <a:rPr kumimoji="1" lang="ja-JP" altLang="en-US" smtClean="0"/>
+          <a:lstStyle>
+            <a:lvl1pPr>
+              <a:defRPr/>
+            </a:lvl1pPr>
+          </a:lstStyle>
+          <a:p>
+            <a:fld id="{5BBCB299-525B-C043-8ABF-E2AB50D107C3}" type="datetimeFigureOut">
+              <a:rPr lang="ja-JP" altLang="en-US" smtClean="0"/>
+              <a:pPr/>
               <a:t>2026/8/31</a:t>
             </a:fld>
-            <a:endParaRPr kumimoji="1" lang="ja-JP" altLang="en-US"/>
-          </a:p>
-        </p:txBody>
-      </p:sp>
-      <p:sp>
-        <p:nvSpPr>
-          <p:cNvPr id="6" name="フッター プレースホルダー 5">
-            <a:extLst>
-              <a:ext uri="{FF2B5EF4-FFF2-40B4-BE49-F238E27FC236}">
-                <a16:creationId xmlns:a16="http://schemas.microsoft.com/office/drawing/2014/main" id="{58FDE1C5-58AD-1041-1AE5-FC91A67AD1A2}"/>
-              </a:ext>
-            </a:extLst>
-          </p:cNvPr>
-          <p:cNvSpPr>
-            <a:spLocks noGrp="1"/>
+            <a:endParaRPr lang="ja-JP" altLang="en-US" dirty="0"/>
+          </a:p>
+        </p:txBody>
+      </p:sp>
+      <p:sp>
+        <p:nvSpPr>
+          <p:cNvPr id="6" name="Rectangle 5"/>
+          <p:cNvSpPr>
+            <a:spLocks noGrp="1" noChangeArrowheads="1"/>
           </p:cNvSpPr>
           <p:nvPr>
             <p:ph type="ftr" sz="quarter" idx="11"/>
           </p:nvPr>
         </p:nvSpPr>
-        <p:spPr/>
+        <p:spPr>
+          <a:ln/>
+        </p:spPr>
         <p:txBody>
           <a:bodyPr/>
-          <a:lstStyle/>
-          <a:p>
-            <a:endParaRPr kumimoji="1" lang="ja-JP" altLang="en-US"/>
-          </a:p>
-        </p:txBody>
-      </p:sp>
-      <p:sp>
-        <p:nvSpPr>
-          <p:cNvPr id="7" name="スライド番号プレースホルダー 6">
-            <a:extLst>
-              <a:ext uri="{FF2B5EF4-FFF2-40B4-BE49-F238E27FC236}">
-                <a16:creationId xmlns:a16="http://schemas.microsoft.com/office/drawing/2014/main" id="{C397DF9C-AFFB-0113-1A3B-B4C529A19C51}"/>
-              </a:ext>
-            </a:extLst>
-          </p:cNvPr>
-          <p:cNvSpPr>
-            <a:spLocks noGrp="1"/>
+          <a:lstStyle>
+            <a:lvl1pPr>
+              <a:defRPr/>
+            </a:lvl1pPr>
+          </a:lstStyle>
+          <a:p>
+            <a:endParaRPr lang="ja-JP" altLang="en-US" dirty="0"/>
+          </a:p>
+        </p:txBody>
+      </p:sp>
+      <p:sp>
+        <p:nvSpPr>
+          <p:cNvPr id="7" name="Rectangle 6"/>
+          <p:cNvSpPr>
+            <a:spLocks noGrp="1" noChangeArrowheads="1"/>
           </p:cNvSpPr>
           <p:nvPr>
             <p:ph type="sldNum" sz="quarter" idx="12"/>
           </p:nvPr>
         </p:nvSpPr>
-        <p:spPr/>
+        <p:spPr>
+          <a:ln/>
+        </p:spPr>
         <p:txBody>
           <a:bodyPr/>
-          <a:lstStyle/>
-          <a:p>
-            <a:fld id="{01C0817E-3A9A-4621-AB56-BCE6DE2A21FA}" type="slidenum">
-              <a:rPr kumimoji="1" lang="ja-JP" altLang="en-US" smtClean="0"/>
+          <a:lstStyle>
+            <a:lvl1pPr>
+              <a:defRPr/>
+            </a:lvl1pPr>
+          </a:lstStyle>
+          <a:p>
+            <a:fld id="{A602DE73-0B5E-8446-9073-5A6DE92C9AAA}" type="slidenum">
+              <a:rPr lang="ja-JP" altLang="en-US" smtClean="0"/>
+              <a:pPr/>
               <a:t>‹#›</a:t>
             </a:fld>
-            <a:endParaRPr kumimoji="1" lang="ja-JP" altLang="en-US"/>
+            <a:endParaRPr lang="ja-JP" altLang="en-US" dirty="0"/>
           </a:p>
         </p:txBody>
       </p:sp>
     </p:spTree>
     <p:extLst>
       <p:ext uri="{BB962C8B-B14F-4D97-AF65-F5344CB8AC3E}">
-        <p14:creationId xmlns:p14="http://schemas.microsoft.com/office/powerpoint/2010/main" val="2353831041"/>
+        <p14:creationId xmlns:p14="http://schemas.microsoft.com/office/powerpoint/2010/main" val="1837721380"/>
       </p:ext>
     </p:extLst>
   </p:cSld>
@@ -2996,9 +3748,12 @@
 <p:sldMaster xmlns:a="http://schemas.openxmlformats.org/drawingml/2006/main" xmlns:r="http://schemas.openxmlformats.org/officeDocument/2006/relationships" xmlns:p="http://schemas.openxmlformats.org/presentationml/2006/main">
   <p:cSld>
     <p:bg>
-      <p:bgRef idx="1001">
-        <a:schemeClr val="bg1"/>
-      </p:bgRef>
+      <p:bgPr>
+        <a:solidFill>
+          <a:schemeClr val="bg1"/>
+        </a:solidFill>
+        <a:effectLst/>
+      </p:bgPr>
     </p:bg>
     <p:spTree>
       <p:nvGrpSpPr>
@@ -3016,136 +3771,175 @@
       </p:grpSpPr>
       <p:sp>
         <p:nvSpPr>
-          <p:cNvPr id="2" name="タイトル プレースホルダー 1">
-            <a:extLst>
-              <a:ext uri="{FF2B5EF4-FFF2-40B4-BE49-F238E27FC236}">
-                <a16:creationId xmlns:a16="http://schemas.microsoft.com/office/drawing/2014/main" id="{466B07C9-9434-6BED-DC69-A6A46EB2405D}"/>
-              </a:ext>
-            </a:extLst>
-          </p:cNvPr>
-          <p:cNvSpPr>
-            <a:spLocks noGrp="1"/>
+          <p:cNvPr id="1026" name="Rectangle 2"/>
+          <p:cNvSpPr>
+            <a:spLocks noGrp="1" noChangeArrowheads="1"/>
           </p:cNvSpPr>
           <p:nvPr>
             <p:ph type="title"/>
           </p:nvPr>
         </p:nvSpPr>
-        <p:spPr>
+        <p:spPr bwMode="auto">
           <a:xfrm>
-            <a:off x="838200" y="365125"/>
-            <a:ext cx="10515600" cy="1325563"/>
+            <a:off x="609600" y="277814"/>
+            <a:ext cx="10972800" cy="847725"/>
           </a:xfrm>
           <a:prstGeom prst="rect">
             <a:avLst/>
           </a:prstGeom>
-        </p:spPr>
-        <p:txBody>
-          <a:bodyPr vert="horz" lIns="91440" tIns="45720" rIns="91440" bIns="45720" rtlCol="0" anchor="ctr">
-            <a:normAutofit/>
+          <a:noFill/>
+          <a:ln>
+            <a:noFill/>
+          </a:ln>
+          <a:extLst>
+            <a:ext uri="{909E8E84-426E-40DD-AFC4-6F175D3DCCD1}">
+              <a14:hiddenFill xmlns:a14="http://schemas.microsoft.com/office/drawing/2010/main">
+                <a:solidFill>
+                  <a:srgbClr val="FFFFFF"/>
+                </a:solidFill>
+              </a14:hiddenFill>
+            </a:ext>
+            <a:ext uri="{91240B29-F687-4F45-9708-019B960494DF}">
+              <a14:hiddenLine xmlns:a14="http://schemas.microsoft.com/office/drawing/2010/main" w="9525">
+                <a:solidFill>
+                  <a:srgbClr val="000000"/>
+                </a:solidFill>
+                <a:miter lim="800000"/>
+                <a:headEnd/>
+                <a:tailEnd/>
+              </a14:hiddenLine>
+            </a:ext>
+          </a:extLst>
+        </p:spPr>
+        <p:txBody>
+          <a:bodyPr vert="horz" wrap="square" lIns="91440" tIns="45720" rIns="91440" bIns="45720" numCol="1" anchor="t" anchorCtr="0" compatLnSpc="1">
+            <a:prstTxWarp prst="textNoShape">
+              <a:avLst/>
+            </a:prstTxWarp>
           </a:bodyPr>
           <a:lstStyle/>
           <a:p>
-            <a:r>
-              <a:rPr kumimoji="1" lang="ja-JP" altLang="en-US"/>
-              <a:t>マスター タイトルの書式設定</a:t>
-            </a:r>
-          </a:p>
-        </p:txBody>
-      </p:sp>
-      <p:sp>
-        <p:nvSpPr>
-          <p:cNvPr id="3" name="テキスト プレースホルダー 2">
-            <a:extLst>
-              <a:ext uri="{FF2B5EF4-FFF2-40B4-BE49-F238E27FC236}">
-                <a16:creationId xmlns:a16="http://schemas.microsoft.com/office/drawing/2014/main" id="{41F6A27B-C978-0252-83C6-499F04A0E1E4}"/>
-              </a:ext>
-            </a:extLst>
-          </p:cNvPr>
-          <p:cNvSpPr>
-            <a:spLocks noGrp="1"/>
+            <a:pPr lvl="0"/>
+            <a:r>
+              <a:rPr lang="ja-JP" altLang="en-US"/>
+              <a:t>マスタ タイトルの書式設定</a:t>
+            </a:r>
+          </a:p>
+        </p:txBody>
+      </p:sp>
+      <p:sp>
+        <p:nvSpPr>
+          <p:cNvPr id="1027" name="Rectangle 3"/>
+          <p:cNvSpPr>
+            <a:spLocks noGrp="1" noChangeArrowheads="1"/>
           </p:cNvSpPr>
           <p:nvPr>
             <p:ph type="body" idx="1"/>
           </p:nvPr>
         </p:nvSpPr>
-        <p:spPr>
+        <p:spPr bwMode="auto">
           <a:xfrm>
-            <a:off x="838200" y="1825625"/>
-            <a:ext cx="10515600" cy="4351338"/>
+            <a:off x="609600" y="1268414"/>
+            <a:ext cx="10972800" cy="5113337"/>
           </a:xfrm>
           <a:prstGeom prst="rect">
             <a:avLst/>
           </a:prstGeom>
-        </p:spPr>
-        <p:txBody>
-          <a:bodyPr vert="horz" lIns="91440" tIns="45720" rIns="91440" bIns="45720" rtlCol="0">
-            <a:normAutofit/>
+          <a:noFill/>
+          <a:ln>
+            <a:noFill/>
+          </a:ln>
+          <a:extLst>
+            <a:ext uri="{909E8E84-426E-40DD-AFC4-6F175D3DCCD1}">
+              <a14:hiddenFill xmlns:a14="http://schemas.microsoft.com/office/drawing/2010/main">
+                <a:solidFill>
+                  <a:srgbClr val="FFFFFF"/>
+                </a:solidFill>
+              </a14:hiddenFill>
+            </a:ext>
+            <a:ext uri="{91240B29-F687-4F45-9708-019B960494DF}">
+              <a14:hiddenLine xmlns:a14="http://schemas.microsoft.com/office/drawing/2010/main" w="9525">
+                <a:solidFill>
+                  <a:srgbClr val="000000"/>
+                </a:solidFill>
+                <a:miter lim="800000"/>
+                <a:headEnd/>
+                <a:tailEnd/>
+              </a14:hiddenLine>
+            </a:ext>
+          </a:extLst>
+        </p:spPr>
+        <p:txBody>
+          <a:bodyPr vert="horz" wrap="square" lIns="91440" tIns="45720" rIns="91440" bIns="45720" numCol="1" anchor="t" anchorCtr="0" compatLnSpc="1">
+            <a:prstTxWarp prst="textNoShape">
+              <a:avLst/>
+            </a:prstTxWarp>
           </a:bodyPr>
           <a:lstStyle/>
           <a:p>
             <a:pPr lvl="0"/>
             <a:r>
-              <a:rPr kumimoji="1" lang="ja-JP" altLang="en-US"/>
-              <a:t>マスター テキストの書式設定</a:t>
+              <a:rPr lang="ja-JP" altLang="en-US"/>
+              <a:t>マスタ テキストの書式設定</a:t>
             </a:r>
           </a:p>
           <a:p>
             <a:pPr lvl="1"/>
             <a:r>
-              <a:rPr kumimoji="1" lang="ja-JP" altLang="en-US"/>
+              <a:rPr lang="ja-JP" altLang="en-US"/>
               <a:t>第 </a:t>
             </a:r>
             <a:r>
-              <a:rPr kumimoji="1" lang="en-US" altLang="ja-JP"/>
+              <a:rPr lang="en-US" altLang="ja-JP"/>
               <a:t>2 </a:t>
             </a:r>
             <a:r>
-              <a:rPr kumimoji="1" lang="ja-JP" altLang="en-US"/>
+              <a:rPr lang="ja-JP" altLang="en-US"/>
               <a:t>レベル</a:t>
             </a:r>
           </a:p>
           <a:p>
             <a:pPr lvl="2"/>
             <a:r>
-              <a:rPr kumimoji="1" lang="ja-JP" altLang="en-US"/>
+              <a:rPr lang="ja-JP" altLang="en-US"/>
               <a:t>第 </a:t>
             </a:r>
             <a:r>
-              <a:rPr kumimoji="1" lang="en-US" altLang="ja-JP"/>
+              <a:rPr lang="en-US" altLang="ja-JP"/>
               <a:t>3 </a:t>
             </a:r>
             <a:r>
-              <a:rPr kumimoji="1" lang="ja-JP" altLang="en-US"/>
+              <a:rPr lang="ja-JP" altLang="en-US"/>
               <a:t>レベル</a:t>
             </a:r>
           </a:p>
           <a:p>
             <a:pPr lvl="3"/>
             <a:r>
-              <a:rPr kumimoji="1" lang="ja-JP" altLang="en-US"/>
+              <a:rPr lang="ja-JP" altLang="en-US"/>
               <a:t>第 </a:t>
             </a:r>
             <a:r>
-              <a:rPr kumimoji="1" lang="en-US" altLang="ja-JP"/>
+              <a:rPr lang="en-US" altLang="ja-JP"/>
               <a:t>4 </a:t>
             </a:r>
             <a:r>
-              <a:rPr kumimoji="1" lang="ja-JP" altLang="en-US"/>
+              <a:rPr lang="ja-JP" altLang="en-US"/>
               <a:t>レベル</a:t>
             </a:r>
           </a:p>
           <a:p>
             <a:pPr lvl="4"/>
             <a:r>
-              <a:rPr kumimoji="1" lang="ja-JP" altLang="en-US"/>
+              <a:rPr lang="ja-JP" altLang="en-US"/>
               <a:t>第 </a:t>
             </a:r>
             <a:r>
-              <a:rPr kumimoji="1" lang="en-US" altLang="ja-JP"/>
+              <a:rPr lang="en-US" altLang="ja-JP"/>
               <a:t>5 </a:t>
             </a:r>
             <a:r>
-              <a:rPr kumimoji="1" lang="ja-JP" altLang="en-US"/>
+              <a:rPr lang="ja-JP" altLang="en-US"/>
               <a:t>レベル</a:t>
             </a:r>
           </a:p>
@@ -3153,193 +3947,450 @@
       </p:sp>
       <p:sp>
         <p:nvSpPr>
-          <p:cNvPr id="4" name="日付プレースホルダー 3">
-            <a:extLst>
-              <a:ext uri="{FF2B5EF4-FFF2-40B4-BE49-F238E27FC236}">
-                <a16:creationId xmlns:a16="http://schemas.microsoft.com/office/drawing/2014/main" id="{39849B85-4520-0D45-0223-F7BA6AA34D47}"/>
-              </a:ext>
-            </a:extLst>
-          </p:cNvPr>
-          <p:cNvSpPr>
-            <a:spLocks noGrp="1"/>
+          <p:cNvPr id="390148" name="Rectangle 4"/>
+          <p:cNvSpPr>
+            <a:spLocks noGrp="1" noChangeArrowheads="1"/>
           </p:cNvSpPr>
           <p:nvPr>
             <p:ph type="dt" sz="half" idx="2"/>
           </p:nvPr>
         </p:nvSpPr>
-        <p:spPr>
+        <p:spPr bwMode="auto">
           <a:xfrm>
-            <a:off x="838200" y="6356350"/>
-            <a:ext cx="2743200" cy="365125"/>
+            <a:off x="609600" y="6357938"/>
+            <a:ext cx="2844800" cy="457200"/>
           </a:xfrm>
           <a:prstGeom prst="rect">
             <a:avLst/>
           </a:prstGeom>
-        </p:spPr>
-        <p:txBody>
-          <a:bodyPr vert="horz" lIns="91440" tIns="45720" rIns="91440" bIns="45720" rtlCol="0" anchor="ctr"/>
+          <a:noFill/>
+          <a:ln w="9525">
+            <a:noFill/>
+            <a:miter lim="800000"/>
+            <a:headEnd/>
+            <a:tailEnd/>
+          </a:ln>
+          <a:effectLst/>
+        </p:spPr>
+        <p:txBody>
+          <a:bodyPr vert="horz" wrap="square" lIns="91440" tIns="45720" rIns="91440" bIns="45720" numCol="1" anchor="b" anchorCtr="0" compatLnSpc="1">
+            <a:prstTxWarp prst="textNoShape">
+              <a:avLst/>
+            </a:prstTxWarp>
+          </a:bodyPr>
           <a:lstStyle>
-            <a:lvl1pPr algn="l">
-              <a:defRPr sz="1200">
-                <a:solidFill>
-                  <a:schemeClr val="tx1">
-                    <a:tint val="75000"/>
-                  </a:schemeClr>
-                </a:solidFill>
+            <a:lvl1pPr>
+              <a:defRPr kumimoji="0" sz="1200">
+                <a:latin typeface="+mj-lt"/>
+                <a:ea typeface="ＭＳ Ｐゴシック" pitchFamily="50" charset="-128"/>
               </a:defRPr>
             </a:lvl1pPr>
           </a:lstStyle>
           <a:p>
-            <a:fld id="{6617D3FC-E227-49CD-9B33-753CA2C6CDCB}" type="datetimeFigureOut">
-              <a:rPr kumimoji="1" lang="ja-JP" altLang="en-US" smtClean="0"/>
+            <a:fld id="{5BBCB299-525B-C043-8ABF-E2AB50D107C3}" type="datetimeFigureOut">
+              <a:rPr lang="ja-JP" altLang="en-US" smtClean="0"/>
+              <a:pPr/>
               <a:t>2026/8/31</a:t>
             </a:fld>
-            <a:endParaRPr kumimoji="1" lang="ja-JP" altLang="en-US"/>
-          </a:p>
-        </p:txBody>
-      </p:sp>
-      <p:sp>
-        <p:nvSpPr>
-          <p:cNvPr id="5" name="フッター プレースホルダー 4">
-            <a:extLst>
-              <a:ext uri="{FF2B5EF4-FFF2-40B4-BE49-F238E27FC236}">
-                <a16:creationId xmlns:a16="http://schemas.microsoft.com/office/drawing/2014/main" id="{DABEC0B1-18D9-C9DE-48A7-0AA1DE59F166}"/>
-              </a:ext>
-            </a:extLst>
-          </p:cNvPr>
-          <p:cNvSpPr>
-            <a:spLocks noGrp="1"/>
+            <a:endParaRPr lang="ja-JP" altLang="en-US" dirty="0"/>
+          </a:p>
+        </p:txBody>
+      </p:sp>
+      <p:sp>
+        <p:nvSpPr>
+          <p:cNvPr id="390149" name="Rectangle 5"/>
+          <p:cNvSpPr>
+            <a:spLocks noGrp="1" noChangeArrowheads="1"/>
           </p:cNvSpPr>
           <p:nvPr>
             <p:ph type="ftr" sz="quarter" idx="3"/>
           </p:nvPr>
         </p:nvSpPr>
-        <p:spPr>
+        <p:spPr bwMode="auto">
           <a:xfrm>
-            <a:off x="4038600" y="6356350"/>
-            <a:ext cx="4114800" cy="365125"/>
+            <a:off x="4165600" y="6362700"/>
+            <a:ext cx="3860800" cy="457200"/>
           </a:xfrm>
           <a:prstGeom prst="rect">
             <a:avLst/>
           </a:prstGeom>
-        </p:spPr>
-        <p:txBody>
-          <a:bodyPr vert="horz" lIns="91440" tIns="45720" rIns="91440" bIns="45720" rtlCol="0" anchor="ctr"/>
+          <a:noFill/>
+          <a:ln w="9525">
+            <a:noFill/>
+            <a:miter lim="800000"/>
+            <a:headEnd/>
+            <a:tailEnd/>
+          </a:ln>
+          <a:effectLst/>
+        </p:spPr>
+        <p:txBody>
+          <a:bodyPr vert="horz" wrap="square" lIns="91440" tIns="45720" rIns="91440" bIns="45720" numCol="1" anchor="b" anchorCtr="0" compatLnSpc="1">
+            <a:prstTxWarp prst="textNoShape">
+              <a:avLst/>
+            </a:prstTxWarp>
+          </a:bodyPr>
           <a:lstStyle>
             <a:lvl1pPr algn="ctr">
-              <a:defRPr sz="1200">
-                <a:solidFill>
-                  <a:schemeClr val="tx1">
-                    <a:tint val="75000"/>
-                  </a:schemeClr>
-                </a:solidFill>
+              <a:defRPr kumimoji="0" sz="1200">
+                <a:latin typeface="+mj-lt"/>
+                <a:ea typeface="ＭＳ Ｐゴシック" pitchFamily="50" charset="-128"/>
               </a:defRPr>
             </a:lvl1pPr>
           </a:lstStyle>
           <a:p>
-            <a:endParaRPr kumimoji="1" lang="ja-JP" altLang="en-US"/>
-          </a:p>
-        </p:txBody>
-      </p:sp>
-      <p:sp>
-        <p:nvSpPr>
-          <p:cNvPr id="6" name="スライド番号プレースホルダー 5">
-            <a:extLst>
-              <a:ext uri="{FF2B5EF4-FFF2-40B4-BE49-F238E27FC236}">
-                <a16:creationId xmlns:a16="http://schemas.microsoft.com/office/drawing/2014/main" id="{6AC8196B-030B-63F1-F186-83FA8518FDE2}"/>
-              </a:ext>
-            </a:extLst>
-          </p:cNvPr>
-          <p:cNvSpPr>
-            <a:spLocks noGrp="1"/>
+            <a:endParaRPr lang="ja-JP" altLang="en-US" dirty="0"/>
+          </a:p>
+        </p:txBody>
+      </p:sp>
+      <p:sp>
+        <p:nvSpPr>
+          <p:cNvPr id="390150" name="Rectangle 6"/>
+          <p:cNvSpPr>
+            <a:spLocks noGrp="1" noChangeArrowheads="1"/>
           </p:cNvSpPr>
           <p:nvPr>
             <p:ph type="sldNum" sz="quarter" idx="4"/>
           </p:nvPr>
         </p:nvSpPr>
-        <p:spPr>
+        <p:spPr bwMode="auto">
           <a:xfrm>
-            <a:off x="8610600" y="6356350"/>
-            <a:ext cx="2743200" cy="365125"/>
+            <a:off x="8737600" y="6357938"/>
+            <a:ext cx="2844800" cy="457200"/>
           </a:xfrm>
           <a:prstGeom prst="rect">
             <a:avLst/>
           </a:prstGeom>
-        </p:spPr>
-        <p:txBody>
-          <a:bodyPr vert="horz" lIns="91440" tIns="45720" rIns="91440" bIns="45720" rtlCol="0" anchor="ctr"/>
+          <a:noFill/>
+          <a:ln w="9525">
+            <a:noFill/>
+            <a:miter lim="800000"/>
+            <a:headEnd/>
+            <a:tailEnd/>
+          </a:ln>
+          <a:effectLst/>
+        </p:spPr>
+        <p:txBody>
+          <a:bodyPr vert="horz" wrap="square" lIns="91440" tIns="45720" rIns="91440" bIns="45720" numCol="1" anchor="b" anchorCtr="0" compatLnSpc="1">
+            <a:prstTxWarp prst="textNoShape">
+              <a:avLst/>
+            </a:prstTxWarp>
+          </a:bodyPr>
           <a:lstStyle>
             <a:lvl1pPr algn="r">
-              <a:defRPr sz="1200">
-                <a:solidFill>
-                  <a:schemeClr val="tx1">
-                    <a:tint val="75000"/>
-                  </a:schemeClr>
-                </a:solidFill>
+              <a:defRPr kumimoji="0" sz="1200">
+                <a:latin typeface="+mj-lt"/>
+                <a:ea typeface="ＭＳ Ｐゴシック" pitchFamily="50" charset="-128"/>
               </a:defRPr>
             </a:lvl1pPr>
           </a:lstStyle>
           <a:p>
-            <a:fld id="{01C0817E-3A9A-4621-AB56-BCE6DE2A21FA}" type="slidenum">
-              <a:rPr kumimoji="1" lang="ja-JP" altLang="en-US" smtClean="0"/>
+            <a:fld id="{A602DE73-0B5E-8446-9073-5A6DE92C9AAA}" type="slidenum">
+              <a:rPr lang="ja-JP" altLang="en-US" smtClean="0"/>
+              <a:pPr/>
               <a:t>‹#›</a:t>
             </a:fld>
-            <a:endParaRPr kumimoji="1" lang="ja-JP" altLang="en-US"/>
+            <a:endParaRPr lang="ja-JP" altLang="en-US" dirty="0"/>
+          </a:p>
+        </p:txBody>
+      </p:sp>
+      <p:sp>
+        <p:nvSpPr>
+          <p:cNvPr id="1031" name="Freeform 7"/>
+          <p:cNvSpPr>
+            <a:spLocks noChangeArrowheads="1"/>
+          </p:cNvSpPr>
+          <p:nvPr/>
+        </p:nvSpPr>
+        <p:spPr bwMode="auto">
+          <a:xfrm>
+            <a:off x="508000" y="228600"/>
+            <a:ext cx="10972800" cy="609600"/>
+          </a:xfrm>
+          <a:custGeom>
+            <a:avLst/>
+            <a:gdLst>
+              <a:gd name="T0" fmla="*/ 0 w 1000"/>
+              <a:gd name="T1" fmla="*/ 371612160 h 1000"/>
+              <a:gd name="T2" fmla="*/ 0 w 1000"/>
+              <a:gd name="T3" fmla="*/ 0 h 1000"/>
+              <a:gd name="T4" fmla="*/ 2147483647 w 1000"/>
+              <a:gd name="T5" fmla="*/ 0 h 1000"/>
+              <a:gd name="T6" fmla="*/ 0 60000 65536"/>
+              <a:gd name="T7" fmla="*/ 0 60000 65536"/>
+              <a:gd name="T8" fmla="*/ 0 60000 65536"/>
+            </a:gdLst>
+            <a:ahLst/>
+            <a:cxnLst>
+              <a:cxn ang="T6">
+                <a:pos x="T0" y="T1"/>
+              </a:cxn>
+              <a:cxn ang="T7">
+                <a:pos x="T2" y="T3"/>
+              </a:cxn>
+              <a:cxn ang="T8">
+                <a:pos x="T4" y="T5"/>
+              </a:cxn>
+            </a:cxnLst>
+            <a:rect l="0" t="0" r="r" b="b"/>
+            <a:pathLst>
+              <a:path w="1000" h="1000">
+                <a:moveTo>
+                  <a:pt x="0" y="1000"/>
+                </a:moveTo>
+                <a:lnTo>
+                  <a:pt x="0" y="0"/>
+                </a:lnTo>
+                <a:lnTo>
+                  <a:pt x="1000" y="0"/>
+                </a:lnTo>
+              </a:path>
+            </a:pathLst>
+          </a:custGeom>
+          <a:noFill/>
+          <a:ln w="19050" cap="flat" cmpd="sng">
+            <a:solidFill>
+              <a:schemeClr val="accent1"/>
+            </a:solidFill>
+            <a:prstDash val="solid"/>
+            <a:miter lim="800000"/>
+            <a:headEnd/>
+            <a:tailEnd/>
+          </a:ln>
+          <a:extLst>
+            <a:ext uri="{909E8E84-426E-40DD-AFC4-6F175D3DCCD1}">
+              <a14:hiddenFill xmlns:a14="http://schemas.microsoft.com/office/drawing/2010/main">
+                <a:solidFill>
+                  <a:srgbClr val="FFFFFF"/>
+                </a:solidFill>
+              </a14:hiddenFill>
+            </a:ext>
+          </a:extLst>
+        </p:spPr>
+        <p:txBody>
+          <a:bodyPr/>
+          <a:lstStyle/>
+          <a:p>
+            <a:endParaRPr lang="ja-JP" altLang="en-US" sz="1800" dirty="0"/>
+          </a:p>
+        </p:txBody>
+      </p:sp>
+      <p:sp>
+        <p:nvSpPr>
+          <p:cNvPr id="1032" name="Line 8"/>
+          <p:cNvSpPr>
+            <a:spLocks noChangeShapeType="1"/>
+          </p:cNvSpPr>
+          <p:nvPr/>
+        </p:nvSpPr>
+        <p:spPr bwMode="auto">
+          <a:xfrm>
+            <a:off x="609600" y="6457950"/>
+            <a:ext cx="10972800" cy="0"/>
+          </a:xfrm>
+          <a:prstGeom prst="line">
+            <a:avLst/>
+          </a:prstGeom>
+          <a:noFill/>
+          <a:ln w="19050">
+            <a:solidFill>
+              <a:schemeClr val="accent1"/>
+            </a:solidFill>
+            <a:round/>
+            <a:headEnd/>
+            <a:tailEnd/>
+          </a:ln>
+          <a:extLst>
+            <a:ext uri="{909E8E84-426E-40DD-AFC4-6F175D3DCCD1}">
+              <a14:hiddenFill xmlns:a14="http://schemas.microsoft.com/office/drawing/2010/main">
+                <a:noFill/>
+              </a14:hiddenFill>
+            </a:ext>
+          </a:extLst>
+        </p:spPr>
+        <p:txBody>
+          <a:bodyPr/>
+          <a:lstStyle/>
+          <a:p>
+            <a:endParaRPr lang="ja-JP" altLang="en-US" sz="1800" dirty="0"/>
           </a:p>
         </p:txBody>
       </p:sp>
     </p:spTree>
     <p:extLst>
       <p:ext uri="{BB962C8B-B14F-4D97-AF65-F5344CB8AC3E}">
-        <p14:creationId xmlns:p14="http://schemas.microsoft.com/office/powerpoint/2010/main" val="1267895078"/>
+        <p14:creationId xmlns:p14="http://schemas.microsoft.com/office/powerpoint/2010/main" val="2106680493"/>
       </p:ext>
     </p:extLst>
   </p:cSld>
   <p:clrMap bg1="lt1" tx1="dk1" bg2="lt2" tx2="dk2" accent1="accent1" accent2="accent2" accent3="accent3" accent4="accent4" accent5="accent5" accent6="accent6" hlink="hlink" folHlink="folHlink"/>
   <p:sldLayoutIdLst>
-    <p:sldLayoutId id="2147483649" r:id="rId1"/>
-    <p:sldLayoutId id="2147483650" r:id="rId2"/>
-    <p:sldLayoutId id="2147483651" r:id="rId3"/>
-    <p:sldLayoutId id="2147483652" r:id="rId4"/>
-    <p:sldLayoutId id="2147483653" r:id="rId5"/>
-    <p:sldLayoutId id="2147483654" r:id="rId6"/>
-    <p:sldLayoutId id="2147483655" r:id="rId7"/>
-    <p:sldLayoutId id="2147483656" r:id="rId8"/>
-    <p:sldLayoutId id="2147483657" r:id="rId9"/>
-    <p:sldLayoutId id="2147483658" r:id="rId10"/>
-    <p:sldLayoutId id="2147483659" r:id="rId11"/>
+    <p:sldLayoutId id="2147483661" r:id="rId1"/>
+    <p:sldLayoutId id="2147483662" r:id="rId2"/>
+    <p:sldLayoutId id="2147483663" r:id="rId3"/>
+    <p:sldLayoutId id="2147483664" r:id="rId4"/>
+    <p:sldLayoutId id="2147483665" r:id="rId5"/>
+    <p:sldLayoutId id="2147483666" r:id="rId6"/>
+    <p:sldLayoutId id="2147483667" r:id="rId7"/>
+    <p:sldLayoutId id="2147483668" r:id="rId8"/>
+    <p:sldLayoutId id="2147483669" r:id="rId9"/>
+    <p:sldLayoutId id="2147483670" r:id="rId10"/>
+    <p:sldLayoutId id="2147483671" r:id="rId11"/>
+    <p:sldLayoutId id="2147483672" r:id="rId12"/>
   </p:sldLayoutIdLst>
   <p:txStyles>
     <p:titleStyle>
-      <a:lvl1pPr algn="l" defTabSz="914400" rtl="0" eaLnBrk="1" latinLnBrk="0" hangingPunct="1">
-        <a:lnSpc>
-          <a:spcPct val="90000"/>
-        </a:lnSpc>
+      <a:lvl1pPr algn="ctr" rtl="0" eaLnBrk="1" fontAlgn="base" hangingPunct="1">
         <a:spcBef>
           <a:spcPct val="0"/>
         </a:spcBef>
-        <a:buNone/>
-        <a:defRPr kumimoji="1" sz="4400" kern="1200">
+        <a:spcAft>
+          <a:spcPct val="0"/>
+        </a:spcAft>
+        <a:defRPr kumimoji="1" sz="4200">
           <a:solidFill>
-            <a:schemeClr val="tx1"/>
+            <a:schemeClr val="tx2"/>
           </a:solidFill>
           <a:latin typeface="+mj-lt"/>
           <a:ea typeface="+mj-ea"/>
           <a:cs typeface="+mj-cs"/>
         </a:defRPr>
       </a:lvl1pPr>
+      <a:lvl2pPr algn="ctr" rtl="0" eaLnBrk="1" fontAlgn="base" hangingPunct="1">
+        <a:spcBef>
+          <a:spcPct val="0"/>
+        </a:spcBef>
+        <a:spcAft>
+          <a:spcPct val="0"/>
+        </a:spcAft>
+        <a:defRPr kumimoji="1" sz="4200">
+          <a:solidFill>
+            <a:schemeClr val="tx2"/>
+          </a:solidFill>
+          <a:latin typeface="Garamond" pitchFamily="18" charset="0"/>
+          <a:ea typeface="ＭＳ Ｐゴシック" pitchFamily="50" charset="-128"/>
+        </a:defRPr>
+      </a:lvl2pPr>
+      <a:lvl3pPr algn="ctr" rtl="0" eaLnBrk="1" fontAlgn="base" hangingPunct="1">
+        <a:spcBef>
+          <a:spcPct val="0"/>
+        </a:spcBef>
+        <a:spcAft>
+          <a:spcPct val="0"/>
+        </a:spcAft>
+        <a:defRPr kumimoji="1" sz="4200">
+          <a:solidFill>
+            <a:schemeClr val="tx2"/>
+          </a:solidFill>
+          <a:latin typeface="Garamond" pitchFamily="18" charset="0"/>
+          <a:ea typeface="ＭＳ Ｐゴシック" pitchFamily="50" charset="-128"/>
+        </a:defRPr>
+      </a:lvl3pPr>
+      <a:lvl4pPr algn="ctr" rtl="0" eaLnBrk="1" fontAlgn="base" hangingPunct="1">
+        <a:spcBef>
+          <a:spcPct val="0"/>
+        </a:spcBef>
+        <a:spcAft>
+          <a:spcPct val="0"/>
+        </a:spcAft>
+        <a:defRPr kumimoji="1" sz="4200">
+          <a:solidFill>
+            <a:schemeClr val="tx2"/>
+          </a:solidFill>
+          <a:latin typeface="Garamond" pitchFamily="18" charset="0"/>
+          <a:ea typeface="ＭＳ Ｐゴシック" pitchFamily="50" charset="-128"/>
+        </a:defRPr>
+      </a:lvl4pPr>
+      <a:lvl5pPr algn="ctr" rtl="0" eaLnBrk="1" fontAlgn="base" hangingPunct="1">
+        <a:spcBef>
+          <a:spcPct val="0"/>
+        </a:spcBef>
+        <a:spcAft>
+          <a:spcPct val="0"/>
+        </a:spcAft>
+        <a:defRPr kumimoji="1" sz="4200">
+          <a:solidFill>
+            <a:schemeClr val="tx2"/>
+          </a:solidFill>
+          <a:latin typeface="Garamond" pitchFamily="18" charset="0"/>
+          <a:ea typeface="ＭＳ Ｐゴシック" pitchFamily="50" charset="-128"/>
+        </a:defRPr>
+      </a:lvl5pPr>
+      <a:lvl6pPr marL="457200" algn="ctr" rtl="0" eaLnBrk="1" fontAlgn="base" hangingPunct="1">
+        <a:spcBef>
+          <a:spcPct val="0"/>
+        </a:spcBef>
+        <a:spcAft>
+          <a:spcPct val="0"/>
+        </a:spcAft>
+        <a:defRPr kumimoji="1" sz="4200">
+          <a:solidFill>
+            <a:schemeClr val="tx2"/>
+          </a:solidFill>
+          <a:latin typeface="Garamond" pitchFamily="18" charset="0"/>
+          <a:ea typeface="ＭＳ Ｐゴシック" pitchFamily="50" charset="-128"/>
+        </a:defRPr>
+      </a:lvl6pPr>
+      <a:lvl7pPr marL="914400" algn="ctr" rtl="0" eaLnBrk="1" fontAlgn="base" hangingPunct="1">
+        <a:spcBef>
+          <a:spcPct val="0"/>
+        </a:spcBef>
+        <a:spcAft>
+          <a:spcPct val="0"/>
+        </a:spcAft>
+        <a:defRPr kumimoji="1" sz="4200">
+          <a:solidFill>
+            <a:schemeClr val="tx2"/>
+          </a:solidFill>
+          <a:latin typeface="Garamond" pitchFamily="18" charset="0"/>
+          <a:ea typeface="ＭＳ Ｐゴシック" pitchFamily="50" charset="-128"/>
+        </a:defRPr>
+      </a:lvl7pPr>
+      <a:lvl8pPr marL="1371600" algn="ctr" rtl="0" eaLnBrk="1" fontAlgn="base" hangingPunct="1">
+        <a:spcBef>
+          <a:spcPct val="0"/>
+        </a:spcBef>
+        <a:spcAft>
+          <a:spcPct val="0"/>
+        </a:spcAft>
+        <a:defRPr kumimoji="1" sz="4200">
+          <a:solidFill>
+            <a:schemeClr val="tx2"/>
+          </a:solidFill>
+          <a:latin typeface="Garamond" pitchFamily="18" charset="0"/>
+          <a:ea typeface="ＭＳ Ｐゴシック" pitchFamily="50" charset="-128"/>
+        </a:defRPr>
+      </a:lvl8pPr>
+      <a:lvl9pPr marL="1828800" algn="ctr" rtl="0" eaLnBrk="1" fontAlgn="base" hangingPunct="1">
+        <a:spcBef>
+          <a:spcPct val="0"/>
+        </a:spcBef>
+        <a:spcAft>
+          <a:spcPct val="0"/>
+        </a:spcAft>
+        <a:defRPr kumimoji="1" sz="4200">
+          <a:solidFill>
+            <a:schemeClr val="tx2"/>
+          </a:solidFill>
+          <a:latin typeface="Garamond" pitchFamily="18" charset="0"/>
+          <a:ea typeface="ＭＳ Ｐゴシック" pitchFamily="50" charset="-128"/>
+        </a:defRPr>
+      </a:lvl9pPr>
     </p:titleStyle>
     <p:bodyStyle>
-      <a:lvl1pPr marL="228600" indent="-228600" algn="l" defTabSz="914400" rtl="0" eaLnBrk="1" latinLnBrk="0" hangingPunct="1">
-        <a:lnSpc>
-          <a:spcPct val="90000"/>
-        </a:lnSpc>
+      <a:lvl1pPr marL="342900" indent="-342900" algn="l" rtl="0" eaLnBrk="1" fontAlgn="base" hangingPunct="1">
         <a:spcBef>
-          <a:spcPts val="1000"/>
+          <a:spcPct val="20000"/>
         </a:spcBef>
-        <a:buFont typeface="Arial" panose="020B0604020202020204" pitchFamily="34" charset="0"/>
-        <a:buChar char="•"/>
-        <a:defRPr kumimoji="1" sz="2800" kern="1200">
+        <a:spcAft>
+          <a:spcPct val="0"/>
+        </a:spcAft>
+        <a:buClr>
+          <a:schemeClr val="accent1"/>
+        </a:buClr>
+        <a:buSzPct val="65000"/>
+        <a:buFont typeface="Wingdings" pitchFamily="2" charset="2"/>
+        <a:buChar char="n"/>
+        <a:defRPr kumimoji="1" sz="3200">
           <a:solidFill>
             <a:schemeClr val="tx1"/>
           </a:solidFill>
@@ -3348,148 +4399,172 @@
           <a:cs typeface="+mn-cs"/>
         </a:defRPr>
       </a:lvl1pPr>
-      <a:lvl2pPr marL="685800" indent="-228600" algn="l" defTabSz="914400" rtl="0" eaLnBrk="1" latinLnBrk="0" hangingPunct="1">
-        <a:lnSpc>
-          <a:spcPct val="90000"/>
-        </a:lnSpc>
+      <a:lvl2pPr marL="669925" indent="-325438" algn="l" rtl="0" eaLnBrk="1" fontAlgn="base" hangingPunct="1">
         <a:spcBef>
-          <a:spcPts val="500"/>
+          <a:spcPct val="20000"/>
         </a:spcBef>
-        <a:buFont typeface="Arial" panose="020B0604020202020204" pitchFamily="34" charset="0"/>
-        <a:buChar char="•"/>
-        <a:defRPr kumimoji="1" sz="2400" kern="1200">
+        <a:spcAft>
+          <a:spcPct val="0"/>
+        </a:spcAft>
+        <a:buClr>
+          <a:schemeClr val="accent2"/>
+        </a:buClr>
+        <a:buSzPct val="60000"/>
+        <a:buFont typeface="Wingdings" pitchFamily="2" charset="2"/>
+        <a:buChar char="q"/>
+        <a:defRPr kumimoji="1" sz="2800">
           <a:solidFill>
             <a:schemeClr val="tx1"/>
           </a:solidFill>
           <a:latin typeface="+mn-lt"/>
           <a:ea typeface="+mn-ea"/>
-          <a:cs typeface="+mn-cs"/>
         </a:defRPr>
       </a:lvl2pPr>
-      <a:lvl3pPr marL="1143000" indent="-228600" algn="l" defTabSz="914400" rtl="0" eaLnBrk="1" latinLnBrk="0" hangingPunct="1">
-        <a:lnSpc>
-          <a:spcPct val="90000"/>
-        </a:lnSpc>
+      <a:lvl3pPr marL="1022350" indent="-350838" algn="l" rtl="0" eaLnBrk="1" fontAlgn="base" hangingPunct="1">
         <a:spcBef>
-          <a:spcPts val="500"/>
+          <a:spcPct val="20000"/>
         </a:spcBef>
-        <a:buFont typeface="Arial" panose="020B0604020202020204" pitchFamily="34" charset="0"/>
-        <a:buChar char="•"/>
-        <a:defRPr kumimoji="1" sz="2000" kern="1200">
+        <a:spcAft>
+          <a:spcPct val="0"/>
+        </a:spcAft>
+        <a:buClr>
+          <a:schemeClr val="accent1"/>
+        </a:buClr>
+        <a:buSzPct val="65000"/>
+        <a:buFont typeface="Wingdings" pitchFamily="2" charset="2"/>
+        <a:buChar char="n"/>
+        <a:defRPr kumimoji="1" sz="2400">
           <a:solidFill>
             <a:schemeClr val="tx1"/>
           </a:solidFill>
           <a:latin typeface="+mn-lt"/>
           <a:ea typeface="+mn-ea"/>
-          <a:cs typeface="+mn-cs"/>
         </a:defRPr>
       </a:lvl3pPr>
-      <a:lvl4pPr marL="1600200" indent="-228600" algn="l" defTabSz="914400" rtl="0" eaLnBrk="1" latinLnBrk="0" hangingPunct="1">
-        <a:lnSpc>
-          <a:spcPct val="90000"/>
-        </a:lnSpc>
+      <a:lvl4pPr marL="1339850" indent="-315913" algn="l" rtl="0" eaLnBrk="1" fontAlgn="base" hangingPunct="1">
         <a:spcBef>
-          <a:spcPts val="500"/>
+          <a:spcPct val="20000"/>
         </a:spcBef>
-        <a:buFont typeface="Arial" panose="020B0604020202020204" pitchFamily="34" charset="0"/>
-        <a:buChar char="•"/>
-        <a:defRPr kumimoji="1" sz="1800" kern="1200">
+        <a:spcAft>
+          <a:spcPct val="0"/>
+        </a:spcAft>
+        <a:buClr>
+          <a:schemeClr val="accent2"/>
+        </a:buClr>
+        <a:buSzPct val="70000"/>
+        <a:buFont typeface="Wingdings" pitchFamily="2" charset="2"/>
+        <a:buChar char="q"/>
+        <a:defRPr kumimoji="1" sz="2000">
           <a:solidFill>
             <a:schemeClr val="tx1"/>
           </a:solidFill>
           <a:latin typeface="+mn-lt"/>
           <a:ea typeface="+mn-ea"/>
-          <a:cs typeface="+mn-cs"/>
         </a:defRPr>
       </a:lvl4pPr>
-      <a:lvl5pPr marL="2057400" indent="-228600" algn="l" defTabSz="914400" rtl="0" eaLnBrk="1" latinLnBrk="0" hangingPunct="1">
-        <a:lnSpc>
-          <a:spcPct val="90000"/>
-        </a:lnSpc>
+      <a:lvl5pPr marL="1681163" indent="-339725" algn="l" rtl="0" eaLnBrk="1" fontAlgn="base" hangingPunct="1">
         <a:spcBef>
-          <a:spcPts val="500"/>
+          <a:spcPct val="20000"/>
         </a:spcBef>
-        <a:buFont typeface="Arial" panose="020B0604020202020204" pitchFamily="34" charset="0"/>
-        <a:buChar char="•"/>
-        <a:defRPr kumimoji="1" sz="1800" kern="1200">
+        <a:spcAft>
+          <a:spcPct val="0"/>
+        </a:spcAft>
+        <a:buClr>
+          <a:schemeClr val="accent1"/>
+        </a:buClr>
+        <a:buSzPct val="75000"/>
+        <a:buFont typeface="Wingdings" pitchFamily="2" charset="2"/>
+        <a:buChar char="§"/>
+        <a:defRPr kumimoji="1">
           <a:solidFill>
             <a:schemeClr val="tx1"/>
           </a:solidFill>
           <a:latin typeface="+mn-lt"/>
           <a:ea typeface="+mn-ea"/>
-          <a:cs typeface="+mn-cs"/>
         </a:defRPr>
       </a:lvl5pPr>
-      <a:lvl6pPr marL="2514600" indent="-228600" algn="l" defTabSz="914400" rtl="0" eaLnBrk="1" latinLnBrk="0" hangingPunct="1">
-        <a:lnSpc>
-          <a:spcPct val="90000"/>
-        </a:lnSpc>
+      <a:lvl6pPr marL="2138363" indent="-339725" algn="l" rtl="0" eaLnBrk="1" fontAlgn="base" hangingPunct="1">
         <a:spcBef>
-          <a:spcPts val="500"/>
+          <a:spcPct val="20000"/>
         </a:spcBef>
-        <a:buFont typeface="Arial" panose="020B0604020202020204" pitchFamily="34" charset="0"/>
-        <a:buChar char="•"/>
-        <a:defRPr kumimoji="1" sz="1800" kern="1200">
+        <a:spcAft>
+          <a:spcPct val="0"/>
+        </a:spcAft>
+        <a:buClr>
+          <a:schemeClr val="accent1"/>
+        </a:buClr>
+        <a:buSzPct val="75000"/>
+        <a:buFont typeface="Wingdings" pitchFamily="2" charset="2"/>
+        <a:buChar char="§"/>
+        <a:defRPr kumimoji="1">
           <a:solidFill>
             <a:schemeClr val="tx1"/>
           </a:solidFill>
           <a:latin typeface="+mn-lt"/>
           <a:ea typeface="+mn-ea"/>
-          <a:cs typeface="+mn-cs"/>
         </a:defRPr>
       </a:lvl6pPr>
-      <a:lvl7pPr marL="2971800" indent="-228600" algn="l" defTabSz="914400" rtl="0" eaLnBrk="1" latinLnBrk="0" hangingPunct="1">
-        <a:lnSpc>
-          <a:spcPct val="90000"/>
-        </a:lnSpc>
+      <a:lvl7pPr marL="2595563" indent="-339725" algn="l" rtl="0" eaLnBrk="1" fontAlgn="base" hangingPunct="1">
         <a:spcBef>
-          <a:spcPts val="500"/>
+          <a:spcPct val="20000"/>
         </a:spcBef>
-        <a:buFont typeface="Arial" panose="020B0604020202020204" pitchFamily="34" charset="0"/>
-        <a:buChar char="•"/>
-        <a:defRPr kumimoji="1" sz="1800" kern="1200">
+        <a:spcAft>
+          <a:spcPct val="0"/>
+        </a:spcAft>
+        <a:buClr>
+          <a:schemeClr val="accent1"/>
+        </a:buClr>
+        <a:buSzPct val="75000"/>
+        <a:buFont typeface="Wingdings" pitchFamily="2" charset="2"/>
+        <a:buChar char="§"/>
+        <a:defRPr kumimoji="1">
           <a:solidFill>
             <a:schemeClr val="tx1"/>
           </a:solidFill>
           <a:latin typeface="+mn-lt"/>
           <a:ea typeface="+mn-ea"/>
-          <a:cs typeface="+mn-cs"/>
         </a:defRPr>
       </a:lvl7pPr>
-      <a:lvl8pPr marL="3429000" indent="-228600" algn="l" defTabSz="914400" rtl="0" eaLnBrk="1" latinLnBrk="0" hangingPunct="1">
-        <a:lnSpc>
-          <a:spcPct val="90000"/>
-        </a:lnSpc>
+      <a:lvl8pPr marL="3052763" indent="-339725" algn="l" rtl="0" eaLnBrk="1" fontAlgn="base" hangingPunct="1">
         <a:spcBef>
-          <a:spcPts val="500"/>
+          <a:spcPct val="20000"/>
         </a:spcBef>
-        <a:buFont typeface="Arial" panose="020B0604020202020204" pitchFamily="34" charset="0"/>
-        <a:buChar char="•"/>
-        <a:defRPr kumimoji="1" sz="1800" kern="1200">
+        <a:spcAft>
+          <a:spcPct val="0"/>
+        </a:spcAft>
+        <a:buClr>
+          <a:schemeClr val="accent1"/>
+        </a:buClr>
+        <a:buSzPct val="75000"/>
+        <a:buFont typeface="Wingdings" pitchFamily="2" charset="2"/>
+        <a:buChar char="§"/>
+        <a:defRPr kumimoji="1">
           <a:solidFill>
             <a:schemeClr val="tx1"/>
           </a:solidFill>
           <a:latin typeface="+mn-lt"/>
           <a:ea typeface="+mn-ea"/>
-          <a:cs typeface="+mn-cs"/>
         </a:defRPr>
       </a:lvl8pPr>
-      <a:lvl9pPr marL="3886200" indent="-228600" algn="l" defTabSz="914400" rtl="0" eaLnBrk="1" latinLnBrk="0" hangingPunct="1">
-        <a:lnSpc>
-          <a:spcPct val="90000"/>
-        </a:lnSpc>
+      <a:lvl9pPr marL="3509963" indent="-339725" algn="l" rtl="0" eaLnBrk="1" fontAlgn="base" hangingPunct="1">
         <a:spcBef>
-          <a:spcPts val="500"/>
+          <a:spcPct val="20000"/>
         </a:spcBef>
-        <a:buFont typeface="Arial" panose="020B0604020202020204" pitchFamily="34" charset="0"/>
-        <a:buChar char="•"/>
-        <a:defRPr kumimoji="1" sz="1800" kern="1200">
+        <a:spcAft>
+          <a:spcPct val="0"/>
+        </a:spcAft>
+        <a:buClr>
+          <a:schemeClr val="accent1"/>
+        </a:buClr>
+        <a:buSzPct val="75000"/>
+        <a:buFont typeface="Wingdings" pitchFamily="2" charset="2"/>
+        <a:buChar char="§"/>
+        <a:defRPr kumimoji="1">
           <a:solidFill>
             <a:schemeClr val="tx1"/>
           </a:solidFill>
           <a:latin typeface="+mn-lt"/>
           <a:ea typeface="+mn-ea"/>
-          <a:cs typeface="+mn-cs"/>
         </a:defRPr>
       </a:lvl9pPr>
     </p:bodyStyle>
@@ -3611,10 +4686,188 @@
       </p:grpSpPr>
       <p:sp>
         <p:nvSpPr>
+          <p:cNvPr id="6" name="タイトル 5">
+            <a:extLst>
+              <a:ext uri="{FF2B5EF4-FFF2-40B4-BE49-F238E27FC236}">
+                <a16:creationId xmlns:a16="http://schemas.microsoft.com/office/drawing/2014/main" id="{4C1ADB73-28C1-6E47-5D23-27F5F3205864}"/>
+              </a:ext>
+            </a:extLst>
+          </p:cNvPr>
+          <p:cNvSpPr>
+            <a:spLocks noGrp="1"/>
+          </p:cNvSpPr>
+          <p:nvPr>
+            <p:ph type="ctrTitle"/>
+          </p:nvPr>
+        </p:nvSpPr>
+        <p:spPr>
+          <a:xfrm>
+            <a:off x="637978" y="1683757"/>
+            <a:ext cx="10916043" cy="2043211"/>
+          </a:xfrm>
+        </p:spPr>
+        <p:txBody>
+          <a:bodyPr anchor="ctr">
+            <a:noAutofit/>
+          </a:bodyPr>
+          <a:lstStyle/>
+          <a:p>
+            <a:r>
+              <a:rPr lang="ja-JP" altLang="en-US" sz="4000" dirty="0">
+                <a:latin typeface="+mj-ea"/>
+              </a:rPr>
+              <a:t>「</a:t>
+            </a:r>
+            <a:r>
+              <a:rPr lang="en-US" altLang="ja-JP" sz="4000" dirty="0">
+                <a:latin typeface="+mj-ea"/>
+              </a:rPr>
+              <a:t>Python</a:t>
+            </a:r>
+            <a:r>
+              <a:rPr lang="ja-JP" altLang="en-US" sz="4000" dirty="0">
+                <a:latin typeface="+mj-ea"/>
+              </a:rPr>
+              <a:t>が動く</a:t>
+            </a:r>
+            <a:r>
+              <a:rPr lang="en-US" altLang="ja-JP" sz="4000" dirty="0" err="1">
+                <a:latin typeface="+mj-ea"/>
+              </a:rPr>
+              <a:t>Gogle</a:t>
+            </a:r>
+            <a:r>
+              <a:rPr lang="en-US" altLang="ja-JP" sz="4000" dirty="0">
+                <a:latin typeface="+mj-ea"/>
+              </a:rPr>
+              <a:t> </a:t>
+            </a:r>
+            <a:r>
+              <a:rPr lang="en-US" altLang="ja-JP" sz="4000" dirty="0" err="1">
+                <a:latin typeface="+mj-ea"/>
+              </a:rPr>
+              <a:t>Colab</a:t>
+            </a:r>
+            <a:r>
+              <a:rPr lang="ja-JP" altLang="en-US" sz="4000" dirty="0">
+                <a:latin typeface="+mj-ea"/>
+              </a:rPr>
+              <a:t>で</a:t>
+            </a:r>
+            <a:r>
+              <a:rPr lang="en-US" altLang="ja-JP" sz="4000" dirty="0">
+                <a:latin typeface="+mj-ea"/>
+              </a:rPr>
+              <a:t>AI</a:t>
+            </a:r>
+            <a:r>
+              <a:rPr lang="ja-JP" altLang="en-US" sz="4000" dirty="0">
+                <a:latin typeface="+mj-ea"/>
+              </a:rPr>
+              <a:t>自習ドリル」</a:t>
+            </a:r>
+            <a:br>
+              <a:rPr lang="en-US" altLang="ja-JP" sz="4000" dirty="0">
+                <a:latin typeface="+mj-ea"/>
+              </a:rPr>
+            </a:br>
+            <a:r>
+              <a:rPr lang="ja-JP" altLang="en-US" sz="4000" dirty="0">
+                <a:latin typeface="+mj-ea"/>
+              </a:rPr>
+              <a:t>第１部３章演習</a:t>
+            </a:r>
+          </a:p>
+        </p:txBody>
+      </p:sp>
+      <p:sp>
+        <p:nvSpPr>
+          <p:cNvPr id="7" name="字幕 6">
+            <a:extLst>
+              <a:ext uri="{FF2B5EF4-FFF2-40B4-BE49-F238E27FC236}">
+                <a16:creationId xmlns:a16="http://schemas.microsoft.com/office/drawing/2014/main" id="{1FB1DF19-9957-EF38-B101-A60D1BC60FB9}"/>
+              </a:ext>
+            </a:extLst>
+          </p:cNvPr>
+          <p:cNvSpPr>
+            <a:spLocks noGrp="1"/>
+          </p:cNvSpPr>
+          <p:nvPr>
+            <p:ph type="subTitle" idx="1"/>
+          </p:nvPr>
+        </p:nvSpPr>
+        <p:spPr>
+          <a:xfrm>
+            <a:off x="1985108" y="3892062"/>
+            <a:ext cx="8737600" cy="1752600"/>
+          </a:xfrm>
+        </p:spPr>
+        <p:txBody>
+          <a:bodyPr/>
+          <a:lstStyle/>
+          <a:p>
+            <a:endParaRPr lang="en-US" altLang="ja-JP" dirty="0"/>
+          </a:p>
+          <a:p>
+            <a:endParaRPr lang="en-US" altLang="ja-JP" dirty="0">
+              <a:latin typeface="メイリオ" panose="020B0604030504040204" pitchFamily="50" charset="-128"/>
+              <a:ea typeface="メイリオ" panose="020B0604030504040204" pitchFamily="50" charset="-128"/>
+            </a:endParaRPr>
+          </a:p>
+          <a:p>
+            <a:r>
+              <a:rPr lang="en-US" altLang="ja-JP" dirty="0">
+                <a:latin typeface="+mj-ea"/>
+                <a:ea typeface="+mj-ea"/>
+              </a:rPr>
+              <a:t>24510171 </a:t>
+            </a:r>
+            <a:r>
+              <a:rPr lang="ja-JP" altLang="en-US" dirty="0">
+                <a:latin typeface="+mj-ea"/>
+                <a:ea typeface="+mj-ea"/>
+              </a:rPr>
+              <a:t>永井芽衣</a:t>
+            </a:r>
+          </a:p>
+        </p:txBody>
+      </p:sp>
+    </p:spTree>
+    <p:extLst>
+      <p:ext uri="{BB962C8B-B14F-4D97-AF65-F5344CB8AC3E}">
+        <p14:creationId xmlns:p14="http://schemas.microsoft.com/office/powerpoint/2010/main" val="3150873403"/>
+      </p:ext>
+    </p:extLst>
+  </p:cSld>
+  <p:clrMapOvr>
+    <a:masterClrMapping/>
+  </p:clrMapOvr>
+</p:sld>
+</file>
+
+<file path=ppt/slides/slide2.xml><?xml version="1.0" encoding="utf-8"?>
+<p:sld xmlns:a="http://schemas.openxmlformats.org/drawingml/2006/main" xmlns:r="http://schemas.openxmlformats.org/officeDocument/2006/relationships" xmlns:p="http://schemas.openxmlformats.org/presentationml/2006/main">
+  <p:cSld>
+    <p:spTree>
+      <p:nvGrpSpPr>
+        <p:cNvPr id="1" name=""/>
+        <p:cNvGrpSpPr/>
+        <p:nvPr/>
+      </p:nvGrpSpPr>
+      <p:grpSpPr>
+        <a:xfrm>
+          <a:off x="0" y="0"/>
+          <a:ext cx="0" cy="0"/>
+          <a:chOff x="0" y="0"/>
+          <a:chExt cx="0" cy="0"/>
+        </a:xfrm>
+      </p:grpSpPr>
+      <p:sp>
+        <p:nvSpPr>
           <p:cNvPr id="2" name="タイトル 1">
             <a:extLst>
               <a:ext uri="{FF2B5EF4-FFF2-40B4-BE49-F238E27FC236}">
-                <a16:creationId xmlns:a16="http://schemas.microsoft.com/office/drawing/2014/main" id="{E84F4B3E-BC2D-2B7B-682A-B01E4D62C56F}"/>
+                <a16:creationId xmlns:a16="http://schemas.microsoft.com/office/drawing/2014/main" id="{C700D9D6-997E-C24A-B95B-87D9AB47BF46}"/>
               </a:ext>
             </a:extLst>
           </p:cNvPr>
@@ -3622,7 +4875,7 @@
             <a:spLocks noGrp="1"/>
           </p:cNvSpPr>
           <p:nvPr>
-            <p:ph type="ctrTitle"/>
+            <p:ph type="title"/>
           </p:nvPr>
         </p:nvSpPr>
         <p:spPr/>
@@ -3630,39 +4883,1116 @@
           <a:bodyPr/>
           <a:lstStyle/>
           <a:p>
-            <a:endParaRPr kumimoji="1" lang="ja-JP" altLang="en-US"/>
-          </a:p>
-        </p:txBody>
-      </p:sp>
-      <p:sp>
-        <p:nvSpPr>
-          <p:cNvPr id="3" name="字幕 2">
+            <a:r>
+              <a:rPr kumimoji="1" lang="en-US" altLang="ja-JP" dirty="0" err="1"/>
+              <a:t>elephant.ipynb</a:t>
+            </a:r>
+            <a:endParaRPr kumimoji="1" lang="ja-JP" altLang="en-US" dirty="0"/>
+          </a:p>
+        </p:txBody>
+      </p:sp>
+      <p:sp>
+        <p:nvSpPr>
+          <p:cNvPr id="84" name="字幕 2">
             <a:extLst>
               <a:ext uri="{FF2B5EF4-FFF2-40B4-BE49-F238E27FC236}">
-                <a16:creationId xmlns:a16="http://schemas.microsoft.com/office/drawing/2014/main" id="{9661739C-F198-A074-652C-3DBD321AE0D7}"/>
+                <a16:creationId xmlns:a16="http://schemas.microsoft.com/office/drawing/2014/main" id="{006B75A2-CA46-5FE5-299D-BC113BF87D99}"/>
               </a:ext>
             </a:extLst>
           </p:cNvPr>
-          <p:cNvSpPr>
-            <a:spLocks noGrp="1"/>
-          </p:cNvSpPr>
-          <p:nvPr>
-            <p:ph type="subTitle" idx="1"/>
-          </p:nvPr>
-        </p:nvSpPr>
-        <p:spPr/>
+          <p:cNvSpPr txBox="1">
+            <a:spLocks/>
+          </p:cNvSpPr>
+          <p:nvPr/>
+        </p:nvSpPr>
+        <p:spPr>
+          <a:xfrm>
+            <a:off x="884439" y="1097282"/>
+            <a:ext cx="9391483" cy="5446283"/>
+          </a:xfrm>
+          <a:prstGeom prst="rect">
+            <a:avLst/>
+          </a:prstGeom>
+        </p:spPr>
+        <p:txBody>
+          <a:bodyPr vert="horz" lIns="91440" tIns="45720" rIns="91440" bIns="45720" rtlCol="0">
+            <a:normAutofit/>
+          </a:bodyPr>
+          <a:lstStyle>
+            <a:lvl1pPr marL="0" indent="0" algn="ctr" defTabSz="914400" rtl="0" eaLnBrk="1" latinLnBrk="0" hangingPunct="1">
+              <a:lnSpc>
+                <a:spcPct val="90000"/>
+              </a:lnSpc>
+              <a:spcBef>
+                <a:spcPts val="1000"/>
+              </a:spcBef>
+              <a:buFont typeface="Arial" panose="020B0604020202020204" pitchFamily="34" charset="0"/>
+              <a:buNone/>
+              <a:defRPr kumimoji="1" sz="2400" kern="1200">
+                <a:solidFill>
+                  <a:schemeClr val="tx1"/>
+                </a:solidFill>
+                <a:latin typeface="+mn-lt"/>
+                <a:ea typeface="+mn-ea"/>
+                <a:cs typeface="+mn-cs"/>
+              </a:defRPr>
+            </a:lvl1pPr>
+            <a:lvl2pPr marL="457200" indent="0" algn="ctr" defTabSz="914400" rtl="0" eaLnBrk="1" latinLnBrk="0" hangingPunct="1">
+              <a:lnSpc>
+                <a:spcPct val="90000"/>
+              </a:lnSpc>
+              <a:spcBef>
+                <a:spcPts val="500"/>
+              </a:spcBef>
+              <a:buFont typeface="Arial" panose="020B0604020202020204" pitchFamily="34" charset="0"/>
+              <a:buNone/>
+              <a:defRPr kumimoji="1" sz="2000" kern="1200">
+                <a:solidFill>
+                  <a:schemeClr val="tx1"/>
+                </a:solidFill>
+                <a:latin typeface="+mn-lt"/>
+                <a:ea typeface="+mn-ea"/>
+                <a:cs typeface="+mn-cs"/>
+              </a:defRPr>
+            </a:lvl2pPr>
+            <a:lvl3pPr marL="914400" indent="0" algn="ctr" defTabSz="914400" rtl="0" eaLnBrk="1" latinLnBrk="0" hangingPunct="1">
+              <a:lnSpc>
+                <a:spcPct val="90000"/>
+              </a:lnSpc>
+              <a:spcBef>
+                <a:spcPts val="500"/>
+              </a:spcBef>
+              <a:buFont typeface="Arial" panose="020B0604020202020204" pitchFamily="34" charset="0"/>
+              <a:buNone/>
+              <a:defRPr kumimoji="1" sz="1800" kern="1200">
+                <a:solidFill>
+                  <a:schemeClr val="tx1"/>
+                </a:solidFill>
+                <a:latin typeface="+mn-lt"/>
+                <a:ea typeface="+mn-ea"/>
+                <a:cs typeface="+mn-cs"/>
+              </a:defRPr>
+            </a:lvl3pPr>
+            <a:lvl4pPr marL="1371600" indent="0" algn="ctr" defTabSz="914400" rtl="0" eaLnBrk="1" latinLnBrk="0" hangingPunct="1">
+              <a:lnSpc>
+                <a:spcPct val="90000"/>
+              </a:lnSpc>
+              <a:spcBef>
+                <a:spcPts val="500"/>
+              </a:spcBef>
+              <a:buFont typeface="Arial" panose="020B0604020202020204" pitchFamily="34" charset="0"/>
+              <a:buNone/>
+              <a:defRPr kumimoji="1" sz="1600" kern="1200">
+                <a:solidFill>
+                  <a:schemeClr val="tx1"/>
+                </a:solidFill>
+                <a:latin typeface="+mn-lt"/>
+                <a:ea typeface="+mn-ea"/>
+                <a:cs typeface="+mn-cs"/>
+              </a:defRPr>
+            </a:lvl4pPr>
+            <a:lvl5pPr marL="1828800" indent="0" algn="ctr" defTabSz="914400" rtl="0" eaLnBrk="1" latinLnBrk="0" hangingPunct="1">
+              <a:lnSpc>
+                <a:spcPct val="90000"/>
+              </a:lnSpc>
+              <a:spcBef>
+                <a:spcPts val="500"/>
+              </a:spcBef>
+              <a:buFont typeface="Arial" panose="020B0604020202020204" pitchFamily="34" charset="0"/>
+              <a:buNone/>
+              <a:defRPr kumimoji="1" sz="1600" kern="1200">
+                <a:solidFill>
+                  <a:schemeClr val="tx1"/>
+                </a:solidFill>
+                <a:latin typeface="+mn-lt"/>
+                <a:ea typeface="+mn-ea"/>
+                <a:cs typeface="+mn-cs"/>
+              </a:defRPr>
+            </a:lvl5pPr>
+            <a:lvl6pPr marL="2286000" indent="0" algn="ctr" defTabSz="914400" rtl="0" eaLnBrk="1" latinLnBrk="0" hangingPunct="1">
+              <a:lnSpc>
+                <a:spcPct val="90000"/>
+              </a:lnSpc>
+              <a:spcBef>
+                <a:spcPts val="500"/>
+              </a:spcBef>
+              <a:buFont typeface="Arial" panose="020B0604020202020204" pitchFamily="34" charset="0"/>
+              <a:buNone/>
+              <a:defRPr kumimoji="1" sz="1600" kern="1200">
+                <a:solidFill>
+                  <a:schemeClr val="tx1"/>
+                </a:solidFill>
+                <a:latin typeface="+mn-lt"/>
+                <a:ea typeface="+mn-ea"/>
+                <a:cs typeface="+mn-cs"/>
+              </a:defRPr>
+            </a:lvl6pPr>
+            <a:lvl7pPr marL="2743200" indent="0" algn="ctr" defTabSz="914400" rtl="0" eaLnBrk="1" latinLnBrk="0" hangingPunct="1">
+              <a:lnSpc>
+                <a:spcPct val="90000"/>
+              </a:lnSpc>
+              <a:spcBef>
+                <a:spcPts val="500"/>
+              </a:spcBef>
+              <a:buFont typeface="Arial" panose="020B0604020202020204" pitchFamily="34" charset="0"/>
+              <a:buNone/>
+              <a:defRPr kumimoji="1" sz="1600" kern="1200">
+                <a:solidFill>
+                  <a:schemeClr val="tx1"/>
+                </a:solidFill>
+                <a:latin typeface="+mn-lt"/>
+                <a:ea typeface="+mn-ea"/>
+                <a:cs typeface="+mn-cs"/>
+              </a:defRPr>
+            </a:lvl7pPr>
+            <a:lvl8pPr marL="3200400" indent="0" algn="ctr" defTabSz="914400" rtl="0" eaLnBrk="1" latinLnBrk="0" hangingPunct="1">
+              <a:lnSpc>
+                <a:spcPct val="90000"/>
+              </a:lnSpc>
+              <a:spcBef>
+                <a:spcPts val="500"/>
+              </a:spcBef>
+              <a:buFont typeface="Arial" panose="020B0604020202020204" pitchFamily="34" charset="0"/>
+              <a:buNone/>
+              <a:defRPr kumimoji="1" sz="1600" kern="1200">
+                <a:solidFill>
+                  <a:schemeClr val="tx1"/>
+                </a:solidFill>
+                <a:latin typeface="+mn-lt"/>
+                <a:ea typeface="+mn-ea"/>
+                <a:cs typeface="+mn-cs"/>
+              </a:defRPr>
+            </a:lvl8pPr>
+            <a:lvl9pPr marL="3657600" indent="0" algn="ctr" defTabSz="914400" rtl="0" eaLnBrk="1" latinLnBrk="0" hangingPunct="1">
+              <a:lnSpc>
+                <a:spcPct val="90000"/>
+              </a:lnSpc>
+              <a:spcBef>
+                <a:spcPts val="500"/>
+              </a:spcBef>
+              <a:buFont typeface="Arial" panose="020B0604020202020204" pitchFamily="34" charset="0"/>
+              <a:buNone/>
+              <a:defRPr kumimoji="1" sz="1600" kern="1200">
+                <a:solidFill>
+                  <a:schemeClr val="tx1"/>
+                </a:solidFill>
+                <a:latin typeface="+mn-lt"/>
+                <a:ea typeface="+mn-ea"/>
+                <a:cs typeface="+mn-cs"/>
+              </a:defRPr>
+            </a:lvl9pPr>
+          </a:lstStyle>
+          <a:p>
+            <a:pPr marL="0" marR="0" lvl="0" indent="0" algn="l" defTabSz="914400" rtl="0" eaLnBrk="1" fontAlgn="auto" latinLnBrk="0" hangingPunct="1">
+              <a:lnSpc>
+                <a:spcPct val="90000"/>
+              </a:lnSpc>
+              <a:spcBef>
+                <a:spcPts val="1000"/>
+              </a:spcBef>
+              <a:spcAft>
+                <a:spcPts val="0"/>
+              </a:spcAft>
+              <a:buClrTx/>
+              <a:buSzTx/>
+              <a:buFont typeface="Arial" panose="020B0604020202020204" pitchFamily="34" charset="0"/>
+              <a:buNone/>
+              <a:tabLst/>
+              <a:defRPr/>
+            </a:pPr>
+            <a:r>
+              <a:rPr kumimoji="1" lang="ja-JP" altLang="en-US" sz="2000" b="0" i="0" u="none" strike="noStrike" kern="1200" cap="none" spc="0" normalizeH="0" baseline="0" noProof="0">
+                <a:ln>
+                  <a:noFill/>
+                </a:ln>
+                <a:solidFill>
+                  <a:srgbClr val="FFC000">
+                    <a:lumMod val="75000"/>
+                  </a:srgbClr>
+                </a:solidFill>
+                <a:effectLst/>
+                <a:uLnTx/>
+                <a:uFillTx/>
+                <a:latin typeface="メイリオ" panose="020B0604030504040204" pitchFamily="50" charset="-128"/>
+                <a:ea typeface="メイリオ" panose="020B0604030504040204" pitchFamily="50" charset="-128"/>
+                <a:cs typeface="+mn-cs"/>
+              </a:rPr>
+              <a:t>　</a:t>
+            </a:r>
+            <a:endParaRPr kumimoji="1" lang="en-US" altLang="ja-JP" sz="2000" b="0" i="0" u="none" strike="noStrike" kern="1200" cap="none" spc="0" normalizeH="0" baseline="0" noProof="0">
+              <a:ln>
+                <a:noFill/>
+              </a:ln>
+              <a:solidFill>
+                <a:srgbClr val="FFC000">
+                  <a:lumMod val="75000"/>
+                </a:srgbClr>
+              </a:solidFill>
+              <a:effectLst/>
+              <a:uLnTx/>
+              <a:uFillTx/>
+              <a:latin typeface="メイリオ" panose="020B0604030504040204" pitchFamily="50" charset="-128"/>
+              <a:ea typeface="メイリオ" panose="020B0604030504040204" pitchFamily="50" charset="-128"/>
+              <a:cs typeface="+mn-cs"/>
+            </a:endParaRPr>
+          </a:p>
+          <a:p>
+            <a:pPr marL="0" marR="0" lvl="0" indent="0" algn="l" defTabSz="914400" rtl="0" eaLnBrk="1" fontAlgn="auto" latinLnBrk="0" hangingPunct="1">
+              <a:lnSpc>
+                <a:spcPct val="90000"/>
+              </a:lnSpc>
+              <a:spcBef>
+                <a:spcPts val="1000"/>
+              </a:spcBef>
+              <a:spcAft>
+                <a:spcPts val="0"/>
+              </a:spcAft>
+              <a:buClrTx/>
+              <a:buSzTx/>
+              <a:buFont typeface="Arial" panose="020B0604020202020204" pitchFamily="34" charset="0"/>
+              <a:buNone/>
+              <a:tabLst/>
+              <a:defRPr/>
+            </a:pPr>
+            <a:endParaRPr kumimoji="1" lang="ja-JP" altLang="en-US" sz="2000" b="0" i="0" u="none" strike="noStrike" kern="1200" cap="none" spc="0" normalizeH="0" baseline="0" noProof="0" dirty="0">
+              <a:ln>
+                <a:noFill/>
+              </a:ln>
+              <a:solidFill>
+                <a:srgbClr val="FFC000">
+                  <a:lumMod val="75000"/>
+                </a:srgbClr>
+              </a:solidFill>
+              <a:effectLst/>
+              <a:uLnTx/>
+              <a:uFillTx/>
+              <a:latin typeface="メイリオ" panose="020B0604030504040204" pitchFamily="50" charset="-128"/>
+              <a:ea typeface="メイリオ" panose="020B0604030504040204" pitchFamily="50" charset="-128"/>
+              <a:cs typeface="+mn-cs"/>
+            </a:endParaRPr>
+          </a:p>
+        </p:txBody>
+      </p:sp>
+      <p:sp>
+        <p:nvSpPr>
+          <p:cNvPr id="5" name="コンテンツ プレースホルダー 2">
+            <a:extLst>
+              <a:ext uri="{FF2B5EF4-FFF2-40B4-BE49-F238E27FC236}">
+                <a16:creationId xmlns:a16="http://schemas.microsoft.com/office/drawing/2014/main" id="{983A2FE9-2C8C-266F-4107-E97A3399D805}"/>
+              </a:ext>
+            </a:extLst>
+          </p:cNvPr>
+          <p:cNvSpPr txBox="1">
+            <a:spLocks/>
+          </p:cNvSpPr>
+          <p:nvPr/>
+        </p:nvSpPr>
+        <p:spPr>
+          <a:xfrm>
+            <a:off x="609600" y="1268414"/>
+            <a:ext cx="10972800" cy="5113337"/>
+          </a:xfrm>
+          <a:prstGeom prst="rect">
+            <a:avLst/>
+          </a:prstGeom>
+        </p:spPr>
         <p:txBody>
           <a:bodyPr/>
-          <a:lstStyle/>
-          <a:p>
-            <a:endParaRPr kumimoji="1" lang="ja-JP" altLang="en-US"/>
+          <a:lstStyle>
+            <a:lvl1pPr marL="342900" indent="-342900" algn="l" rtl="0" eaLnBrk="1" fontAlgn="base" hangingPunct="1">
+              <a:spcBef>
+                <a:spcPct val="20000"/>
+              </a:spcBef>
+              <a:spcAft>
+                <a:spcPct val="0"/>
+              </a:spcAft>
+              <a:buClr>
+                <a:schemeClr val="accent1"/>
+              </a:buClr>
+              <a:buSzPct val="65000"/>
+              <a:buFont typeface="Wingdings" pitchFamily="2" charset="2"/>
+              <a:buChar char="n"/>
+              <a:defRPr kumimoji="1" sz="3200">
+                <a:solidFill>
+                  <a:schemeClr val="tx1"/>
+                </a:solidFill>
+                <a:latin typeface="+mn-lt"/>
+                <a:ea typeface="+mn-ea"/>
+                <a:cs typeface="+mn-cs"/>
+              </a:defRPr>
+            </a:lvl1pPr>
+            <a:lvl2pPr marL="669925" indent="-325438" algn="l" rtl="0" eaLnBrk="1" fontAlgn="base" hangingPunct="1">
+              <a:spcBef>
+                <a:spcPct val="20000"/>
+              </a:spcBef>
+              <a:spcAft>
+                <a:spcPct val="0"/>
+              </a:spcAft>
+              <a:buClr>
+                <a:schemeClr val="accent2"/>
+              </a:buClr>
+              <a:buSzPct val="60000"/>
+              <a:buFont typeface="Wingdings" pitchFamily="2" charset="2"/>
+              <a:buChar char="q"/>
+              <a:defRPr kumimoji="1" sz="2800">
+                <a:solidFill>
+                  <a:schemeClr val="tx1"/>
+                </a:solidFill>
+                <a:latin typeface="+mn-lt"/>
+                <a:ea typeface="+mn-ea"/>
+              </a:defRPr>
+            </a:lvl2pPr>
+            <a:lvl3pPr marL="1022350" indent="-350838" algn="l" rtl="0" eaLnBrk="1" fontAlgn="base" hangingPunct="1">
+              <a:spcBef>
+                <a:spcPct val="20000"/>
+              </a:spcBef>
+              <a:spcAft>
+                <a:spcPct val="0"/>
+              </a:spcAft>
+              <a:buClr>
+                <a:schemeClr val="accent1"/>
+              </a:buClr>
+              <a:buSzPct val="65000"/>
+              <a:buFont typeface="Wingdings" pitchFamily="2" charset="2"/>
+              <a:buChar char="n"/>
+              <a:defRPr kumimoji="1" sz="2400">
+                <a:solidFill>
+                  <a:schemeClr val="tx1"/>
+                </a:solidFill>
+                <a:latin typeface="+mn-lt"/>
+                <a:ea typeface="+mn-ea"/>
+              </a:defRPr>
+            </a:lvl3pPr>
+            <a:lvl4pPr marL="1339850" indent="-315913" algn="l" rtl="0" eaLnBrk="1" fontAlgn="base" hangingPunct="1">
+              <a:spcBef>
+                <a:spcPct val="20000"/>
+              </a:spcBef>
+              <a:spcAft>
+                <a:spcPct val="0"/>
+              </a:spcAft>
+              <a:buClr>
+                <a:schemeClr val="accent2"/>
+              </a:buClr>
+              <a:buSzPct val="70000"/>
+              <a:buFont typeface="Wingdings" pitchFamily="2" charset="2"/>
+              <a:buChar char="q"/>
+              <a:defRPr kumimoji="1" sz="2000">
+                <a:solidFill>
+                  <a:schemeClr val="tx1"/>
+                </a:solidFill>
+                <a:latin typeface="+mn-lt"/>
+                <a:ea typeface="+mn-ea"/>
+              </a:defRPr>
+            </a:lvl4pPr>
+            <a:lvl5pPr marL="1681163" indent="-339725" algn="l" rtl="0" eaLnBrk="1" fontAlgn="base" hangingPunct="1">
+              <a:spcBef>
+                <a:spcPct val="20000"/>
+              </a:spcBef>
+              <a:spcAft>
+                <a:spcPct val="0"/>
+              </a:spcAft>
+              <a:buClr>
+                <a:schemeClr val="accent1"/>
+              </a:buClr>
+              <a:buSzPct val="75000"/>
+              <a:buFont typeface="Wingdings" pitchFamily="2" charset="2"/>
+              <a:buChar char="§"/>
+              <a:defRPr kumimoji="1">
+                <a:solidFill>
+                  <a:schemeClr val="tx1"/>
+                </a:solidFill>
+                <a:latin typeface="+mn-lt"/>
+                <a:ea typeface="+mn-ea"/>
+              </a:defRPr>
+            </a:lvl5pPr>
+            <a:lvl6pPr marL="2138363" indent="-339725" algn="l" rtl="0" eaLnBrk="1" fontAlgn="base" hangingPunct="1">
+              <a:spcBef>
+                <a:spcPct val="20000"/>
+              </a:spcBef>
+              <a:spcAft>
+                <a:spcPct val="0"/>
+              </a:spcAft>
+              <a:buClr>
+                <a:schemeClr val="accent1"/>
+              </a:buClr>
+              <a:buSzPct val="75000"/>
+              <a:buFont typeface="Wingdings" pitchFamily="2" charset="2"/>
+              <a:buChar char="§"/>
+              <a:defRPr kumimoji="1">
+                <a:solidFill>
+                  <a:schemeClr val="tx1"/>
+                </a:solidFill>
+                <a:latin typeface="+mn-lt"/>
+                <a:ea typeface="+mn-ea"/>
+              </a:defRPr>
+            </a:lvl6pPr>
+            <a:lvl7pPr marL="2595563" indent="-339725" algn="l" rtl="0" eaLnBrk="1" fontAlgn="base" hangingPunct="1">
+              <a:spcBef>
+                <a:spcPct val="20000"/>
+              </a:spcBef>
+              <a:spcAft>
+                <a:spcPct val="0"/>
+              </a:spcAft>
+              <a:buClr>
+                <a:schemeClr val="accent1"/>
+              </a:buClr>
+              <a:buSzPct val="75000"/>
+              <a:buFont typeface="Wingdings" pitchFamily="2" charset="2"/>
+              <a:buChar char="§"/>
+              <a:defRPr kumimoji="1">
+                <a:solidFill>
+                  <a:schemeClr val="tx1"/>
+                </a:solidFill>
+                <a:latin typeface="+mn-lt"/>
+                <a:ea typeface="+mn-ea"/>
+              </a:defRPr>
+            </a:lvl7pPr>
+            <a:lvl8pPr marL="3052763" indent="-339725" algn="l" rtl="0" eaLnBrk="1" fontAlgn="base" hangingPunct="1">
+              <a:spcBef>
+                <a:spcPct val="20000"/>
+              </a:spcBef>
+              <a:spcAft>
+                <a:spcPct val="0"/>
+              </a:spcAft>
+              <a:buClr>
+                <a:schemeClr val="accent1"/>
+              </a:buClr>
+              <a:buSzPct val="75000"/>
+              <a:buFont typeface="Wingdings" pitchFamily="2" charset="2"/>
+              <a:buChar char="§"/>
+              <a:defRPr kumimoji="1">
+                <a:solidFill>
+                  <a:schemeClr val="tx1"/>
+                </a:solidFill>
+                <a:latin typeface="+mn-lt"/>
+                <a:ea typeface="+mn-ea"/>
+              </a:defRPr>
+            </a:lvl8pPr>
+            <a:lvl9pPr marL="3509963" indent="-339725" algn="l" rtl="0" eaLnBrk="1" fontAlgn="base" hangingPunct="1">
+              <a:spcBef>
+                <a:spcPct val="20000"/>
+              </a:spcBef>
+              <a:spcAft>
+                <a:spcPct val="0"/>
+              </a:spcAft>
+              <a:buClr>
+                <a:schemeClr val="accent1"/>
+              </a:buClr>
+              <a:buSzPct val="75000"/>
+              <a:buFont typeface="Wingdings" pitchFamily="2" charset="2"/>
+              <a:buChar char="§"/>
+              <a:defRPr kumimoji="1">
+                <a:solidFill>
+                  <a:schemeClr val="tx1"/>
+                </a:solidFill>
+                <a:latin typeface="+mn-lt"/>
+                <a:ea typeface="+mn-ea"/>
+              </a:defRPr>
+            </a:lvl9pPr>
+          </a:lstStyle>
+          <a:p>
+            <a:endParaRPr lang="ja-JP" altLang="en-US" kern="0" dirty="0"/>
           </a:p>
         </p:txBody>
       </p:sp>
     </p:spTree>
     <p:extLst>
       <p:ext uri="{BB962C8B-B14F-4D97-AF65-F5344CB8AC3E}">
-        <p14:creationId xmlns:p14="http://schemas.microsoft.com/office/powerpoint/2010/main" val="2063169751"/>
+        <p14:creationId xmlns:p14="http://schemas.microsoft.com/office/powerpoint/2010/main" val="1162395091"/>
+      </p:ext>
+    </p:extLst>
+  </p:cSld>
+  <p:clrMapOvr>
+    <a:masterClrMapping/>
+  </p:clrMapOvr>
+</p:sld>
+</file>
+
+<file path=ppt/slides/slide3.xml><?xml version="1.0" encoding="utf-8"?>
+<p:sld xmlns:a="http://schemas.openxmlformats.org/drawingml/2006/main" xmlns:r="http://schemas.openxmlformats.org/officeDocument/2006/relationships" xmlns:p="http://schemas.openxmlformats.org/presentationml/2006/main">
+  <p:cSld>
+    <p:spTree>
+      <p:nvGrpSpPr>
+        <p:cNvPr id="1" name=""/>
+        <p:cNvGrpSpPr/>
+        <p:nvPr/>
+      </p:nvGrpSpPr>
+      <p:grpSpPr>
+        <a:xfrm>
+          <a:off x="0" y="0"/>
+          <a:ext cx="0" cy="0"/>
+          <a:chOff x="0" y="0"/>
+          <a:chExt cx="0" cy="0"/>
+        </a:xfrm>
+      </p:grpSpPr>
+      <p:sp>
+        <p:nvSpPr>
+          <p:cNvPr id="2" name="タイトル 1">
+            <a:extLst>
+              <a:ext uri="{FF2B5EF4-FFF2-40B4-BE49-F238E27FC236}">
+                <a16:creationId xmlns:a16="http://schemas.microsoft.com/office/drawing/2014/main" id="{1716551B-8A21-6A35-F000-25A7BD13172B}"/>
+              </a:ext>
+            </a:extLst>
+          </p:cNvPr>
+          <p:cNvSpPr>
+            <a:spLocks noGrp="1"/>
+          </p:cNvSpPr>
+          <p:nvPr>
+            <p:ph type="title"/>
+          </p:nvPr>
+        </p:nvSpPr>
+        <p:spPr/>
+        <p:txBody>
+          <a:bodyPr/>
+          <a:lstStyle/>
+          <a:p>
+            <a:endParaRPr kumimoji="1" lang="ja-JP" altLang="en-US"/>
+          </a:p>
+        </p:txBody>
+      </p:sp>
+      <p:sp>
+        <p:nvSpPr>
+          <p:cNvPr id="3" name="コンテンツ プレースホルダー 2">
+            <a:extLst>
+              <a:ext uri="{FF2B5EF4-FFF2-40B4-BE49-F238E27FC236}">
+                <a16:creationId xmlns:a16="http://schemas.microsoft.com/office/drawing/2014/main" id="{B9EB4E70-4B14-A2ED-DB1E-3CC1EF7EEA85}"/>
+              </a:ext>
+            </a:extLst>
+          </p:cNvPr>
+          <p:cNvSpPr txBox="1">
+            <a:spLocks/>
+          </p:cNvSpPr>
+          <p:nvPr/>
+        </p:nvSpPr>
+        <p:spPr>
+          <a:xfrm>
+            <a:off x="609600" y="1268414"/>
+            <a:ext cx="10972800" cy="5113337"/>
+          </a:xfrm>
+          <a:prstGeom prst="rect">
+            <a:avLst/>
+          </a:prstGeom>
+        </p:spPr>
+        <p:txBody>
+          <a:bodyPr/>
+          <a:lstStyle>
+            <a:lvl1pPr marL="342900" indent="-342900" algn="l" rtl="0" eaLnBrk="1" fontAlgn="base" hangingPunct="1">
+              <a:spcBef>
+                <a:spcPct val="20000"/>
+              </a:spcBef>
+              <a:spcAft>
+                <a:spcPct val="0"/>
+              </a:spcAft>
+              <a:buClr>
+                <a:schemeClr val="accent1"/>
+              </a:buClr>
+              <a:buSzPct val="65000"/>
+              <a:buFont typeface="Wingdings" pitchFamily="2" charset="2"/>
+              <a:buChar char="n"/>
+              <a:defRPr kumimoji="1" sz="3200">
+                <a:solidFill>
+                  <a:schemeClr val="tx1"/>
+                </a:solidFill>
+                <a:latin typeface="+mn-lt"/>
+                <a:ea typeface="+mn-ea"/>
+                <a:cs typeface="+mn-cs"/>
+              </a:defRPr>
+            </a:lvl1pPr>
+            <a:lvl2pPr marL="669925" indent="-325438" algn="l" rtl="0" eaLnBrk="1" fontAlgn="base" hangingPunct="1">
+              <a:spcBef>
+                <a:spcPct val="20000"/>
+              </a:spcBef>
+              <a:spcAft>
+                <a:spcPct val="0"/>
+              </a:spcAft>
+              <a:buClr>
+                <a:schemeClr val="accent2"/>
+              </a:buClr>
+              <a:buSzPct val="60000"/>
+              <a:buFont typeface="Wingdings" pitchFamily="2" charset="2"/>
+              <a:buChar char="q"/>
+              <a:defRPr kumimoji="1" sz="2800">
+                <a:solidFill>
+                  <a:schemeClr val="tx1"/>
+                </a:solidFill>
+                <a:latin typeface="+mn-lt"/>
+                <a:ea typeface="+mn-ea"/>
+              </a:defRPr>
+            </a:lvl2pPr>
+            <a:lvl3pPr marL="1022350" indent="-350838" algn="l" rtl="0" eaLnBrk="1" fontAlgn="base" hangingPunct="1">
+              <a:spcBef>
+                <a:spcPct val="20000"/>
+              </a:spcBef>
+              <a:spcAft>
+                <a:spcPct val="0"/>
+              </a:spcAft>
+              <a:buClr>
+                <a:schemeClr val="accent1"/>
+              </a:buClr>
+              <a:buSzPct val="65000"/>
+              <a:buFont typeface="Wingdings" pitchFamily="2" charset="2"/>
+              <a:buChar char="n"/>
+              <a:defRPr kumimoji="1" sz="2400">
+                <a:solidFill>
+                  <a:schemeClr val="tx1"/>
+                </a:solidFill>
+                <a:latin typeface="+mn-lt"/>
+                <a:ea typeface="+mn-ea"/>
+              </a:defRPr>
+            </a:lvl3pPr>
+            <a:lvl4pPr marL="1339850" indent="-315913" algn="l" rtl="0" eaLnBrk="1" fontAlgn="base" hangingPunct="1">
+              <a:spcBef>
+                <a:spcPct val="20000"/>
+              </a:spcBef>
+              <a:spcAft>
+                <a:spcPct val="0"/>
+              </a:spcAft>
+              <a:buClr>
+                <a:schemeClr val="accent2"/>
+              </a:buClr>
+              <a:buSzPct val="70000"/>
+              <a:buFont typeface="Wingdings" pitchFamily="2" charset="2"/>
+              <a:buChar char="q"/>
+              <a:defRPr kumimoji="1" sz="2000">
+                <a:solidFill>
+                  <a:schemeClr val="tx1"/>
+                </a:solidFill>
+                <a:latin typeface="+mn-lt"/>
+                <a:ea typeface="+mn-ea"/>
+              </a:defRPr>
+            </a:lvl4pPr>
+            <a:lvl5pPr marL="1681163" indent="-339725" algn="l" rtl="0" eaLnBrk="1" fontAlgn="base" hangingPunct="1">
+              <a:spcBef>
+                <a:spcPct val="20000"/>
+              </a:spcBef>
+              <a:spcAft>
+                <a:spcPct val="0"/>
+              </a:spcAft>
+              <a:buClr>
+                <a:schemeClr val="accent1"/>
+              </a:buClr>
+              <a:buSzPct val="75000"/>
+              <a:buFont typeface="Wingdings" pitchFamily="2" charset="2"/>
+              <a:buChar char="§"/>
+              <a:defRPr kumimoji="1">
+                <a:solidFill>
+                  <a:schemeClr val="tx1"/>
+                </a:solidFill>
+                <a:latin typeface="+mn-lt"/>
+                <a:ea typeface="+mn-ea"/>
+              </a:defRPr>
+            </a:lvl5pPr>
+            <a:lvl6pPr marL="2138363" indent="-339725" algn="l" rtl="0" eaLnBrk="1" fontAlgn="base" hangingPunct="1">
+              <a:spcBef>
+                <a:spcPct val="20000"/>
+              </a:spcBef>
+              <a:spcAft>
+                <a:spcPct val="0"/>
+              </a:spcAft>
+              <a:buClr>
+                <a:schemeClr val="accent1"/>
+              </a:buClr>
+              <a:buSzPct val="75000"/>
+              <a:buFont typeface="Wingdings" pitchFamily="2" charset="2"/>
+              <a:buChar char="§"/>
+              <a:defRPr kumimoji="1">
+                <a:solidFill>
+                  <a:schemeClr val="tx1"/>
+                </a:solidFill>
+                <a:latin typeface="+mn-lt"/>
+                <a:ea typeface="+mn-ea"/>
+              </a:defRPr>
+            </a:lvl6pPr>
+            <a:lvl7pPr marL="2595563" indent="-339725" algn="l" rtl="0" eaLnBrk="1" fontAlgn="base" hangingPunct="1">
+              <a:spcBef>
+                <a:spcPct val="20000"/>
+              </a:spcBef>
+              <a:spcAft>
+                <a:spcPct val="0"/>
+              </a:spcAft>
+              <a:buClr>
+                <a:schemeClr val="accent1"/>
+              </a:buClr>
+              <a:buSzPct val="75000"/>
+              <a:buFont typeface="Wingdings" pitchFamily="2" charset="2"/>
+              <a:buChar char="§"/>
+              <a:defRPr kumimoji="1">
+                <a:solidFill>
+                  <a:schemeClr val="tx1"/>
+                </a:solidFill>
+                <a:latin typeface="+mn-lt"/>
+                <a:ea typeface="+mn-ea"/>
+              </a:defRPr>
+            </a:lvl7pPr>
+            <a:lvl8pPr marL="3052763" indent="-339725" algn="l" rtl="0" eaLnBrk="1" fontAlgn="base" hangingPunct="1">
+              <a:spcBef>
+                <a:spcPct val="20000"/>
+              </a:spcBef>
+              <a:spcAft>
+                <a:spcPct val="0"/>
+              </a:spcAft>
+              <a:buClr>
+                <a:schemeClr val="accent1"/>
+              </a:buClr>
+              <a:buSzPct val="75000"/>
+              <a:buFont typeface="Wingdings" pitchFamily="2" charset="2"/>
+              <a:buChar char="§"/>
+              <a:defRPr kumimoji="1">
+                <a:solidFill>
+                  <a:schemeClr val="tx1"/>
+                </a:solidFill>
+                <a:latin typeface="+mn-lt"/>
+                <a:ea typeface="+mn-ea"/>
+              </a:defRPr>
+            </a:lvl8pPr>
+            <a:lvl9pPr marL="3509963" indent="-339725" algn="l" rtl="0" eaLnBrk="1" fontAlgn="base" hangingPunct="1">
+              <a:spcBef>
+                <a:spcPct val="20000"/>
+              </a:spcBef>
+              <a:spcAft>
+                <a:spcPct val="0"/>
+              </a:spcAft>
+              <a:buClr>
+                <a:schemeClr val="accent1"/>
+              </a:buClr>
+              <a:buSzPct val="75000"/>
+              <a:buFont typeface="Wingdings" pitchFamily="2" charset="2"/>
+              <a:buChar char="§"/>
+              <a:defRPr kumimoji="1">
+                <a:solidFill>
+                  <a:schemeClr val="tx1"/>
+                </a:solidFill>
+                <a:latin typeface="+mn-lt"/>
+                <a:ea typeface="+mn-ea"/>
+              </a:defRPr>
+            </a:lvl9pPr>
+          </a:lstStyle>
+          <a:p>
+            <a:endParaRPr lang="ja-JP" altLang="en-US" kern="0" dirty="0"/>
+          </a:p>
+        </p:txBody>
+      </p:sp>
+    </p:spTree>
+    <p:extLst>
+      <p:ext uri="{BB962C8B-B14F-4D97-AF65-F5344CB8AC3E}">
+        <p14:creationId xmlns:p14="http://schemas.microsoft.com/office/powerpoint/2010/main" val="3384297948"/>
+      </p:ext>
+    </p:extLst>
+  </p:cSld>
+  <p:clrMapOvr>
+    <a:masterClrMapping/>
+  </p:clrMapOvr>
+</p:sld>
+</file>
+
+<file path=ppt/slides/slide4.xml><?xml version="1.0" encoding="utf-8"?>
+<p:sld xmlns:a="http://schemas.openxmlformats.org/drawingml/2006/main" xmlns:r="http://schemas.openxmlformats.org/officeDocument/2006/relationships" xmlns:p="http://schemas.openxmlformats.org/presentationml/2006/main">
+  <p:cSld>
+    <p:spTree>
+      <p:nvGrpSpPr>
+        <p:cNvPr id="1" name="">
+          <a:extLst>
+            <a:ext uri="{FF2B5EF4-FFF2-40B4-BE49-F238E27FC236}">
+              <a16:creationId xmlns:a16="http://schemas.microsoft.com/office/drawing/2014/main" id="{BD22EEB9-D52F-262D-9932-339045E0736E}"/>
+            </a:ext>
+          </a:extLst>
+        </p:cNvPr>
+        <p:cNvGrpSpPr/>
+        <p:nvPr/>
+      </p:nvGrpSpPr>
+      <p:grpSpPr>
+        <a:xfrm>
+          <a:off x="0" y="0"/>
+          <a:ext cx="0" cy="0"/>
+          <a:chOff x="0" y="0"/>
+          <a:chExt cx="0" cy="0"/>
+        </a:xfrm>
+      </p:grpSpPr>
+      <p:sp>
+        <p:nvSpPr>
+          <p:cNvPr id="2" name="タイトル 1">
+            <a:extLst>
+              <a:ext uri="{FF2B5EF4-FFF2-40B4-BE49-F238E27FC236}">
+                <a16:creationId xmlns:a16="http://schemas.microsoft.com/office/drawing/2014/main" id="{DF11AD8D-36A1-5DF0-654C-7D5CB301EF39}"/>
+              </a:ext>
+            </a:extLst>
+          </p:cNvPr>
+          <p:cNvSpPr>
+            <a:spLocks noGrp="1"/>
+          </p:cNvSpPr>
+          <p:nvPr>
+            <p:ph type="title"/>
+          </p:nvPr>
+        </p:nvSpPr>
+        <p:spPr/>
+        <p:txBody>
+          <a:bodyPr/>
+          <a:lstStyle/>
+          <a:p>
+            <a:r>
+              <a:rPr kumimoji="1" lang="ja-JP" altLang="en-US" dirty="0"/>
+              <a:t>参考文献</a:t>
+            </a:r>
+          </a:p>
+        </p:txBody>
+      </p:sp>
+      <p:sp>
+        <p:nvSpPr>
+          <p:cNvPr id="3" name="コンテンツ プレースホルダー 2">
+            <a:extLst>
+              <a:ext uri="{FF2B5EF4-FFF2-40B4-BE49-F238E27FC236}">
+                <a16:creationId xmlns:a16="http://schemas.microsoft.com/office/drawing/2014/main" id="{1E819672-D17E-DF8C-DEA2-084BC6C49B5F}"/>
+              </a:ext>
+            </a:extLst>
+          </p:cNvPr>
+          <p:cNvSpPr>
+            <a:spLocks noGrp="1"/>
+          </p:cNvSpPr>
+          <p:nvPr>
+            <p:ph idx="1"/>
+          </p:nvPr>
+        </p:nvSpPr>
+        <p:spPr/>
+        <p:txBody>
+          <a:bodyPr/>
+          <a:lstStyle/>
+          <a:p>
+            <a:endParaRPr kumimoji="1" lang="ja-JP" altLang="en-US" dirty="0"/>
+          </a:p>
+        </p:txBody>
+      </p:sp>
+      <p:sp>
+        <p:nvSpPr>
+          <p:cNvPr id="7" name="字幕 2">
+            <a:extLst>
+              <a:ext uri="{FF2B5EF4-FFF2-40B4-BE49-F238E27FC236}">
+                <a16:creationId xmlns:a16="http://schemas.microsoft.com/office/drawing/2014/main" id="{99641A50-23CB-2877-6685-B6FDD180F290}"/>
+              </a:ext>
+            </a:extLst>
+          </p:cNvPr>
+          <p:cNvSpPr txBox="1">
+            <a:spLocks/>
+          </p:cNvSpPr>
+          <p:nvPr/>
+        </p:nvSpPr>
+        <p:spPr>
+          <a:xfrm>
+            <a:off x="719541" y="2386173"/>
+            <a:ext cx="10992128" cy="1837679"/>
+          </a:xfrm>
+          <a:prstGeom prst="rect">
+            <a:avLst/>
+          </a:prstGeom>
+        </p:spPr>
+        <p:txBody>
+          <a:bodyPr vert="horz" lIns="91440" tIns="45720" rIns="91440" bIns="45720" rtlCol="0">
+            <a:normAutofit/>
+          </a:bodyPr>
+          <a:lstStyle>
+            <a:lvl1pPr marL="0" indent="0" algn="ctr" defTabSz="914400" rtl="0" eaLnBrk="1" latinLnBrk="0" hangingPunct="1">
+              <a:lnSpc>
+                <a:spcPct val="90000"/>
+              </a:lnSpc>
+              <a:spcBef>
+                <a:spcPts val="1000"/>
+              </a:spcBef>
+              <a:buFont typeface="Arial" panose="020B0604020202020204" pitchFamily="34" charset="0"/>
+              <a:buNone/>
+              <a:defRPr kumimoji="1" sz="2400" kern="1200">
+                <a:solidFill>
+                  <a:schemeClr val="tx1"/>
+                </a:solidFill>
+                <a:latin typeface="+mn-lt"/>
+                <a:ea typeface="+mn-ea"/>
+                <a:cs typeface="+mn-cs"/>
+              </a:defRPr>
+            </a:lvl1pPr>
+            <a:lvl2pPr marL="457200" indent="0" algn="ctr" defTabSz="914400" rtl="0" eaLnBrk="1" latinLnBrk="0" hangingPunct="1">
+              <a:lnSpc>
+                <a:spcPct val="90000"/>
+              </a:lnSpc>
+              <a:spcBef>
+                <a:spcPts val="500"/>
+              </a:spcBef>
+              <a:buFont typeface="Arial" panose="020B0604020202020204" pitchFamily="34" charset="0"/>
+              <a:buNone/>
+              <a:defRPr kumimoji="1" sz="2000" kern="1200">
+                <a:solidFill>
+                  <a:schemeClr val="tx1"/>
+                </a:solidFill>
+                <a:latin typeface="+mn-lt"/>
+                <a:ea typeface="+mn-ea"/>
+                <a:cs typeface="+mn-cs"/>
+              </a:defRPr>
+            </a:lvl2pPr>
+            <a:lvl3pPr marL="914400" indent="0" algn="ctr" defTabSz="914400" rtl="0" eaLnBrk="1" latinLnBrk="0" hangingPunct="1">
+              <a:lnSpc>
+                <a:spcPct val="90000"/>
+              </a:lnSpc>
+              <a:spcBef>
+                <a:spcPts val="500"/>
+              </a:spcBef>
+              <a:buFont typeface="Arial" panose="020B0604020202020204" pitchFamily="34" charset="0"/>
+              <a:buNone/>
+              <a:defRPr kumimoji="1" sz="1800" kern="1200">
+                <a:solidFill>
+                  <a:schemeClr val="tx1"/>
+                </a:solidFill>
+                <a:latin typeface="+mn-lt"/>
+                <a:ea typeface="+mn-ea"/>
+                <a:cs typeface="+mn-cs"/>
+              </a:defRPr>
+            </a:lvl3pPr>
+            <a:lvl4pPr marL="1371600" indent="0" algn="ctr" defTabSz="914400" rtl="0" eaLnBrk="1" latinLnBrk="0" hangingPunct="1">
+              <a:lnSpc>
+                <a:spcPct val="90000"/>
+              </a:lnSpc>
+              <a:spcBef>
+                <a:spcPts val="500"/>
+              </a:spcBef>
+              <a:buFont typeface="Arial" panose="020B0604020202020204" pitchFamily="34" charset="0"/>
+              <a:buNone/>
+              <a:defRPr kumimoji="1" sz="1600" kern="1200">
+                <a:solidFill>
+                  <a:schemeClr val="tx1"/>
+                </a:solidFill>
+                <a:latin typeface="+mn-lt"/>
+                <a:ea typeface="+mn-ea"/>
+                <a:cs typeface="+mn-cs"/>
+              </a:defRPr>
+            </a:lvl4pPr>
+            <a:lvl5pPr marL="1828800" indent="0" algn="ctr" defTabSz="914400" rtl="0" eaLnBrk="1" latinLnBrk="0" hangingPunct="1">
+              <a:lnSpc>
+                <a:spcPct val="90000"/>
+              </a:lnSpc>
+              <a:spcBef>
+                <a:spcPts val="500"/>
+              </a:spcBef>
+              <a:buFont typeface="Arial" panose="020B0604020202020204" pitchFamily="34" charset="0"/>
+              <a:buNone/>
+              <a:defRPr kumimoji="1" sz="1600" kern="1200">
+                <a:solidFill>
+                  <a:schemeClr val="tx1"/>
+                </a:solidFill>
+                <a:latin typeface="+mn-lt"/>
+                <a:ea typeface="+mn-ea"/>
+                <a:cs typeface="+mn-cs"/>
+              </a:defRPr>
+            </a:lvl5pPr>
+            <a:lvl6pPr marL="2286000" indent="0" algn="ctr" defTabSz="914400" rtl="0" eaLnBrk="1" latinLnBrk="0" hangingPunct="1">
+              <a:lnSpc>
+                <a:spcPct val="90000"/>
+              </a:lnSpc>
+              <a:spcBef>
+                <a:spcPts val="500"/>
+              </a:spcBef>
+              <a:buFont typeface="Arial" panose="020B0604020202020204" pitchFamily="34" charset="0"/>
+              <a:buNone/>
+              <a:defRPr kumimoji="1" sz="1600" kern="1200">
+                <a:solidFill>
+                  <a:schemeClr val="tx1"/>
+                </a:solidFill>
+                <a:latin typeface="+mn-lt"/>
+                <a:ea typeface="+mn-ea"/>
+                <a:cs typeface="+mn-cs"/>
+              </a:defRPr>
+            </a:lvl6pPr>
+            <a:lvl7pPr marL="2743200" indent="0" algn="ctr" defTabSz="914400" rtl="0" eaLnBrk="1" latinLnBrk="0" hangingPunct="1">
+              <a:lnSpc>
+                <a:spcPct val="90000"/>
+              </a:lnSpc>
+              <a:spcBef>
+                <a:spcPts val="500"/>
+              </a:spcBef>
+              <a:buFont typeface="Arial" panose="020B0604020202020204" pitchFamily="34" charset="0"/>
+              <a:buNone/>
+              <a:defRPr kumimoji="1" sz="1600" kern="1200">
+                <a:solidFill>
+                  <a:schemeClr val="tx1"/>
+                </a:solidFill>
+                <a:latin typeface="+mn-lt"/>
+                <a:ea typeface="+mn-ea"/>
+                <a:cs typeface="+mn-cs"/>
+              </a:defRPr>
+            </a:lvl7pPr>
+            <a:lvl8pPr marL="3200400" indent="0" algn="ctr" defTabSz="914400" rtl="0" eaLnBrk="1" latinLnBrk="0" hangingPunct="1">
+              <a:lnSpc>
+                <a:spcPct val="90000"/>
+              </a:lnSpc>
+              <a:spcBef>
+                <a:spcPts val="500"/>
+              </a:spcBef>
+              <a:buFont typeface="Arial" panose="020B0604020202020204" pitchFamily="34" charset="0"/>
+              <a:buNone/>
+              <a:defRPr kumimoji="1" sz="1600" kern="1200">
+                <a:solidFill>
+                  <a:schemeClr val="tx1"/>
+                </a:solidFill>
+                <a:latin typeface="+mn-lt"/>
+                <a:ea typeface="+mn-ea"/>
+                <a:cs typeface="+mn-cs"/>
+              </a:defRPr>
+            </a:lvl8pPr>
+            <a:lvl9pPr marL="3657600" indent="0" algn="ctr" defTabSz="914400" rtl="0" eaLnBrk="1" latinLnBrk="0" hangingPunct="1">
+              <a:lnSpc>
+                <a:spcPct val="90000"/>
+              </a:lnSpc>
+              <a:spcBef>
+                <a:spcPts val="500"/>
+              </a:spcBef>
+              <a:buFont typeface="Arial" panose="020B0604020202020204" pitchFamily="34" charset="0"/>
+              <a:buNone/>
+              <a:defRPr kumimoji="1" sz="1600" kern="1200">
+                <a:solidFill>
+                  <a:schemeClr val="tx1"/>
+                </a:solidFill>
+                <a:latin typeface="+mn-lt"/>
+                <a:ea typeface="+mn-ea"/>
+                <a:cs typeface="+mn-cs"/>
+              </a:defRPr>
+            </a:lvl9pPr>
+          </a:lstStyle>
+          <a:p>
+            <a:pPr marL="0" marR="0" lvl="0" indent="0" algn="l" defTabSz="914400" rtl="0" eaLnBrk="1" fontAlgn="auto" latinLnBrk="0" hangingPunct="1">
+              <a:lnSpc>
+                <a:spcPct val="90000"/>
+              </a:lnSpc>
+              <a:spcBef>
+                <a:spcPts val="1000"/>
+              </a:spcBef>
+              <a:spcAft>
+                <a:spcPts val="0"/>
+              </a:spcAft>
+              <a:buClrTx/>
+              <a:buSzTx/>
+              <a:buFont typeface="Arial" panose="020B0604020202020204" pitchFamily="34" charset="0"/>
+              <a:buNone/>
+              <a:tabLst/>
+              <a:defRPr/>
+            </a:pPr>
+            <a:endParaRPr kumimoji="1" lang="ja-JP" altLang="en-US" sz="2000" b="0" i="0" u="none" strike="noStrike" kern="1200" cap="none" spc="0" normalizeH="0" baseline="0" noProof="0" dirty="0">
+              <a:ln>
+                <a:noFill/>
+              </a:ln>
+              <a:solidFill>
+                <a:srgbClr val="FFC000">
+                  <a:lumMod val="75000"/>
+                </a:srgbClr>
+              </a:solidFill>
+              <a:effectLst/>
+              <a:uLnTx/>
+              <a:uFillTx/>
+              <a:latin typeface="メイリオ" panose="020B0604030504040204" pitchFamily="50" charset="-128"/>
+              <a:ea typeface="メイリオ" panose="020B0604030504040204" pitchFamily="50" charset="-128"/>
+              <a:cs typeface="+mn-cs"/>
+            </a:endParaRPr>
+          </a:p>
+        </p:txBody>
+      </p:sp>
+    </p:spTree>
+    <p:extLst>
+      <p:ext uri="{BB962C8B-B14F-4D97-AF65-F5344CB8AC3E}">
+        <p14:creationId xmlns:p14="http://schemas.microsoft.com/office/powerpoint/2010/main" val="3300878030"/>
       </p:ext>
     </p:extLst>
   </p:cSld>
@@ -3673,6 +6003,728 @@
 </file>
 
 <file path=ppt/theme/theme1.xml><?xml version="1.0" encoding="utf-8"?>
+<a:theme xmlns:a="http://schemas.openxmlformats.org/drawingml/2006/main" name="lecture">
+  <a:themeElements>
+    <a:clrScheme name="lecture 7">
+      <a:dk1>
+        <a:srgbClr val="000000"/>
+      </a:dk1>
+      <a:lt1>
+        <a:srgbClr val="FFFFFF"/>
+      </a:lt1>
+      <a:dk2>
+        <a:srgbClr val="006633"/>
+      </a:dk2>
+      <a:lt2>
+        <a:srgbClr val="5F5F5F"/>
+      </a:lt2>
+      <a:accent1>
+        <a:srgbClr val="CC9900"/>
+      </a:accent1>
+      <a:accent2>
+        <a:srgbClr val="3B812F"/>
+      </a:accent2>
+      <a:accent3>
+        <a:srgbClr val="FFFFFF"/>
+      </a:accent3>
+      <a:accent4>
+        <a:srgbClr val="000000"/>
+      </a:accent4>
+      <a:accent5>
+        <a:srgbClr val="E2CAAA"/>
+      </a:accent5>
+      <a:accent6>
+        <a:srgbClr val="35742A"/>
+      </a:accent6>
+      <a:hlink>
+        <a:srgbClr val="996600"/>
+      </a:hlink>
+      <a:folHlink>
+        <a:srgbClr val="AFBF39"/>
+      </a:folHlink>
+    </a:clrScheme>
+    <a:fontScheme name="lecture">
+      <a:majorFont>
+        <a:latin typeface="Garamond"/>
+        <a:ea typeface="ＭＳ Ｐゴシック"/>
+        <a:cs typeface=""/>
+      </a:majorFont>
+      <a:minorFont>
+        <a:latin typeface="Arial"/>
+        <a:ea typeface="ＭＳ Ｐゴシック"/>
+        <a:cs typeface=""/>
+      </a:minorFont>
+    </a:fontScheme>
+    <a:fmtScheme name="Office">
+      <a:fillStyleLst>
+        <a:solidFill>
+          <a:schemeClr val="phClr"/>
+        </a:solidFill>
+        <a:gradFill rotWithShape="1">
+          <a:gsLst>
+            <a:gs pos="0">
+              <a:schemeClr val="phClr">
+                <a:tint val="50000"/>
+                <a:satMod val="300000"/>
+              </a:schemeClr>
+            </a:gs>
+            <a:gs pos="35000">
+              <a:schemeClr val="phClr">
+                <a:tint val="37000"/>
+                <a:satMod val="300000"/>
+              </a:schemeClr>
+            </a:gs>
+            <a:gs pos="100000">
+              <a:schemeClr val="phClr">
+                <a:tint val="15000"/>
+                <a:satMod val="350000"/>
+              </a:schemeClr>
+            </a:gs>
+          </a:gsLst>
+          <a:lin ang="16200000" scaled="1"/>
+        </a:gradFill>
+        <a:gradFill rotWithShape="1">
+          <a:gsLst>
+            <a:gs pos="0">
+              <a:schemeClr val="phClr">
+                <a:shade val="51000"/>
+                <a:satMod val="130000"/>
+              </a:schemeClr>
+            </a:gs>
+            <a:gs pos="80000">
+              <a:schemeClr val="phClr">
+                <a:shade val="93000"/>
+                <a:satMod val="130000"/>
+              </a:schemeClr>
+            </a:gs>
+            <a:gs pos="100000">
+              <a:schemeClr val="phClr">
+                <a:shade val="94000"/>
+                <a:satMod val="135000"/>
+              </a:schemeClr>
+            </a:gs>
+          </a:gsLst>
+          <a:lin ang="16200000" scaled="0"/>
+        </a:gradFill>
+      </a:fillStyleLst>
+      <a:lnStyleLst>
+        <a:ln w="9525" cap="flat" cmpd="sng" algn="ctr">
+          <a:solidFill>
+            <a:schemeClr val="phClr">
+              <a:shade val="95000"/>
+              <a:satMod val="105000"/>
+            </a:schemeClr>
+          </a:solidFill>
+          <a:prstDash val="solid"/>
+        </a:ln>
+        <a:ln w="25400" cap="flat" cmpd="sng" algn="ctr">
+          <a:solidFill>
+            <a:schemeClr val="phClr"/>
+          </a:solidFill>
+          <a:prstDash val="solid"/>
+        </a:ln>
+        <a:ln w="38100" cap="flat" cmpd="sng" algn="ctr">
+          <a:solidFill>
+            <a:schemeClr val="phClr"/>
+          </a:solidFill>
+          <a:prstDash val="solid"/>
+        </a:ln>
+      </a:lnStyleLst>
+      <a:effectStyleLst>
+        <a:effectStyle>
+          <a:effectLst>
+            <a:outerShdw blurRad="40000" dist="20000" dir="5400000" rotWithShape="0">
+              <a:srgbClr val="000000">
+                <a:alpha val="38000"/>
+              </a:srgbClr>
+            </a:outerShdw>
+          </a:effectLst>
+        </a:effectStyle>
+        <a:effectStyle>
+          <a:effectLst>
+            <a:outerShdw blurRad="40000" dist="23000" dir="5400000" rotWithShape="0">
+              <a:srgbClr val="000000">
+                <a:alpha val="35000"/>
+              </a:srgbClr>
+            </a:outerShdw>
+          </a:effectLst>
+        </a:effectStyle>
+        <a:effectStyle>
+          <a:effectLst>
+            <a:outerShdw blurRad="40000" dist="23000" dir="5400000" rotWithShape="0">
+              <a:srgbClr val="000000">
+                <a:alpha val="35000"/>
+              </a:srgbClr>
+            </a:outerShdw>
+          </a:effectLst>
+          <a:scene3d>
+            <a:camera prst="orthographicFront">
+              <a:rot lat="0" lon="0" rev="0"/>
+            </a:camera>
+            <a:lightRig rig="threePt" dir="t">
+              <a:rot lat="0" lon="0" rev="1200000"/>
+            </a:lightRig>
+          </a:scene3d>
+          <a:sp3d>
+            <a:bevelT w="63500" h="25400"/>
+          </a:sp3d>
+        </a:effectStyle>
+      </a:effectStyleLst>
+      <a:bgFillStyleLst>
+        <a:solidFill>
+          <a:schemeClr val="phClr"/>
+        </a:solidFill>
+        <a:gradFill rotWithShape="1">
+          <a:gsLst>
+            <a:gs pos="0">
+              <a:schemeClr val="phClr">
+                <a:tint val="40000"/>
+                <a:satMod val="350000"/>
+              </a:schemeClr>
+            </a:gs>
+            <a:gs pos="40000">
+              <a:schemeClr val="phClr">
+                <a:tint val="45000"/>
+                <a:shade val="99000"/>
+                <a:satMod val="350000"/>
+              </a:schemeClr>
+            </a:gs>
+            <a:gs pos="100000">
+              <a:schemeClr val="phClr">
+                <a:shade val="20000"/>
+                <a:satMod val="255000"/>
+              </a:schemeClr>
+            </a:gs>
+          </a:gsLst>
+          <a:path path="circle">
+            <a:fillToRect l="50000" t="-80000" r="50000" b="180000"/>
+          </a:path>
+        </a:gradFill>
+        <a:gradFill rotWithShape="1">
+          <a:gsLst>
+            <a:gs pos="0">
+              <a:schemeClr val="phClr">
+                <a:tint val="80000"/>
+                <a:satMod val="300000"/>
+              </a:schemeClr>
+            </a:gs>
+            <a:gs pos="100000">
+              <a:schemeClr val="phClr">
+                <a:shade val="30000"/>
+                <a:satMod val="200000"/>
+              </a:schemeClr>
+            </a:gs>
+          </a:gsLst>
+          <a:path path="circle">
+            <a:fillToRect l="50000" t="50000" r="50000" b="50000"/>
+          </a:path>
+        </a:gradFill>
+      </a:bgFillStyleLst>
+    </a:fmtScheme>
+  </a:themeElements>
+  <a:objectDefaults>
+    <a:spDef>
+      <a:spPr bwMode="auto">
+        <a:xfrm>
+          <a:off x="0" y="0"/>
+          <a:ext cx="1" cy="1"/>
+        </a:xfrm>
+        <a:custGeom>
+          <a:avLst/>
+          <a:gdLst/>
+          <a:ahLst/>
+          <a:cxnLst/>
+          <a:rect l="0" t="0" r="0" b="0"/>
+          <a:pathLst/>
+        </a:custGeom>
+        <a:solidFill>
+          <a:schemeClr val="accent1"/>
+        </a:solidFill>
+        <a:ln w="9525" cap="flat" cmpd="sng" algn="ctr">
+          <a:solidFill>
+            <a:schemeClr val="tx1"/>
+          </a:solidFill>
+          <a:prstDash val="solid"/>
+          <a:miter lim="800000"/>
+          <a:headEnd type="none" w="med" len="med"/>
+          <a:tailEnd type="none" w="med" len="med"/>
+        </a:ln>
+        <a:effectLst/>
+      </a:spPr>
+      <a:bodyPr vert="horz" wrap="none" lIns="91440" tIns="45720" rIns="91440" bIns="45720" numCol="1" anchor="t" anchorCtr="0" compatLnSpc="1">
+        <a:prstTxWarp prst="textNoShape">
+          <a:avLst/>
+        </a:prstTxWarp>
+      </a:bodyPr>
+      <a:lstStyle>
+        <a:defPPr marL="0" marR="0" indent="0" algn="l" defTabSz="914400" rtl="0" eaLnBrk="1" fontAlgn="base" latinLnBrk="0" hangingPunct="1">
+          <a:lnSpc>
+            <a:spcPct val="100000"/>
+          </a:lnSpc>
+          <a:spcBef>
+            <a:spcPct val="0"/>
+          </a:spcBef>
+          <a:spcAft>
+            <a:spcPct val="0"/>
+          </a:spcAft>
+          <a:buClrTx/>
+          <a:buSzTx/>
+          <a:buFontTx/>
+          <a:buNone/>
+          <a:tabLst/>
+          <a:defRPr kumimoji="1" lang="ja-JP" altLang="en-US" sz="1800" b="0" i="0" u="none" strike="noStrike" cap="none" normalizeH="0" baseline="0" smtClean="0">
+            <a:ln>
+              <a:noFill/>
+            </a:ln>
+            <a:solidFill>
+              <a:schemeClr val="tx1"/>
+            </a:solidFill>
+            <a:effectLst/>
+            <a:latin typeface="Arial" charset="0"/>
+            <a:ea typeface="ＭＳ Ｐゴシック" pitchFamily="50" charset="-128"/>
+          </a:defRPr>
+        </a:defPPr>
+      </a:lstStyle>
+    </a:spDef>
+    <a:lnDef>
+      <a:spPr bwMode="auto">
+        <a:xfrm>
+          <a:off x="0" y="0"/>
+          <a:ext cx="1" cy="1"/>
+        </a:xfrm>
+        <a:custGeom>
+          <a:avLst/>
+          <a:gdLst/>
+          <a:ahLst/>
+          <a:cxnLst/>
+          <a:rect l="0" t="0" r="0" b="0"/>
+          <a:pathLst/>
+        </a:custGeom>
+        <a:solidFill>
+          <a:schemeClr val="accent1"/>
+        </a:solidFill>
+        <a:ln w="9525" cap="flat" cmpd="sng" algn="ctr">
+          <a:solidFill>
+            <a:schemeClr val="tx1"/>
+          </a:solidFill>
+          <a:prstDash val="solid"/>
+          <a:miter lim="800000"/>
+          <a:headEnd type="none" w="med" len="med"/>
+          <a:tailEnd type="none" w="med" len="med"/>
+        </a:ln>
+        <a:effectLst/>
+      </a:spPr>
+      <a:bodyPr vert="horz" wrap="none" lIns="91440" tIns="45720" rIns="91440" bIns="45720" numCol="1" anchor="t" anchorCtr="0" compatLnSpc="1">
+        <a:prstTxWarp prst="textNoShape">
+          <a:avLst/>
+        </a:prstTxWarp>
+      </a:bodyPr>
+      <a:lstStyle>
+        <a:defPPr marL="0" marR="0" indent="0" algn="l" defTabSz="914400" rtl="0" eaLnBrk="1" fontAlgn="base" latinLnBrk="0" hangingPunct="1">
+          <a:lnSpc>
+            <a:spcPct val="100000"/>
+          </a:lnSpc>
+          <a:spcBef>
+            <a:spcPct val="0"/>
+          </a:spcBef>
+          <a:spcAft>
+            <a:spcPct val="0"/>
+          </a:spcAft>
+          <a:buClrTx/>
+          <a:buSzTx/>
+          <a:buFontTx/>
+          <a:buNone/>
+          <a:tabLst/>
+          <a:defRPr kumimoji="1" lang="ja-JP" altLang="en-US" sz="1800" b="0" i="0" u="none" strike="noStrike" cap="none" normalizeH="0" baseline="0" smtClean="0">
+            <a:ln>
+              <a:noFill/>
+            </a:ln>
+            <a:solidFill>
+              <a:schemeClr val="tx1"/>
+            </a:solidFill>
+            <a:effectLst/>
+            <a:latin typeface="Arial" charset="0"/>
+            <a:ea typeface="ＭＳ Ｐゴシック" pitchFamily="50" charset="-128"/>
+          </a:defRPr>
+        </a:defPPr>
+      </a:lstStyle>
+    </a:lnDef>
+  </a:objectDefaults>
+  <a:extraClrSchemeLst>
+    <a:extraClrScheme>
+      <a:clrScheme name="lecture 1">
+        <a:dk1>
+          <a:srgbClr val="333333"/>
+        </a:dk1>
+        <a:lt1>
+          <a:srgbClr val="FFFFFF"/>
+        </a:lt1>
+        <a:dk2>
+          <a:srgbClr val="820000"/>
+        </a:dk2>
+        <a:lt2>
+          <a:srgbClr val="FFFFFF"/>
+        </a:lt2>
+        <a:accent1>
+          <a:srgbClr val="FF9900"/>
+        </a:accent1>
+        <a:accent2>
+          <a:srgbClr val="CC3300"/>
+        </a:accent2>
+        <a:accent3>
+          <a:srgbClr val="C1AAAA"/>
+        </a:accent3>
+        <a:accent4>
+          <a:srgbClr val="DADADA"/>
+        </a:accent4>
+        <a:accent5>
+          <a:srgbClr val="FFCAAA"/>
+        </a:accent5>
+        <a:accent6>
+          <a:srgbClr val="B92D00"/>
+        </a:accent6>
+        <a:hlink>
+          <a:srgbClr val="808080"/>
+        </a:hlink>
+        <a:folHlink>
+          <a:srgbClr val="666633"/>
+        </a:folHlink>
+      </a:clrScheme>
+      <a:clrMap bg1="dk2" tx1="lt1" bg2="dk1" tx2="lt2" accent1="accent1" accent2="accent2" accent3="accent3" accent4="accent4" accent5="accent5" accent6="accent6" hlink="hlink" folHlink="folHlink"/>
+    </a:extraClrScheme>
+    <a:extraClrScheme>
+      <a:clrScheme name="lecture 2">
+        <a:dk1>
+          <a:srgbClr val="333333"/>
+        </a:dk1>
+        <a:lt1>
+          <a:srgbClr val="CCCCFF"/>
+        </a:lt1>
+        <a:dk2>
+          <a:srgbClr val="0B0506"/>
+        </a:dk2>
+        <a:lt2>
+          <a:srgbClr val="FFFFFF"/>
+        </a:lt2>
+        <a:accent1>
+          <a:srgbClr val="3366CC"/>
+        </a:accent1>
+        <a:accent2>
+          <a:srgbClr val="3333CC"/>
+        </a:accent2>
+        <a:accent3>
+          <a:srgbClr val="AAAAAA"/>
+        </a:accent3>
+        <a:accent4>
+          <a:srgbClr val="AEAEDA"/>
+        </a:accent4>
+        <a:accent5>
+          <a:srgbClr val="ADB8E2"/>
+        </a:accent5>
+        <a:accent6>
+          <a:srgbClr val="2D2DB9"/>
+        </a:accent6>
+        <a:hlink>
+          <a:srgbClr val="808080"/>
+        </a:hlink>
+        <a:folHlink>
+          <a:srgbClr val="666633"/>
+        </a:folHlink>
+      </a:clrScheme>
+      <a:clrMap bg1="dk2" tx1="lt1" bg2="dk1" tx2="lt2" accent1="accent1" accent2="accent2" accent3="accent3" accent4="accent4" accent5="accent5" accent6="accent6" hlink="hlink" folHlink="folHlink"/>
+    </a:extraClrScheme>
+    <a:extraClrScheme>
+      <a:clrScheme name="lecture 3">
+        <a:dk1>
+          <a:srgbClr val="333333"/>
+        </a:dk1>
+        <a:lt1>
+          <a:srgbClr val="FFFFFF"/>
+        </a:lt1>
+        <a:dk2>
+          <a:srgbClr val="221013"/>
+        </a:dk2>
+        <a:lt2>
+          <a:srgbClr val="FFFFFF"/>
+        </a:lt2>
+        <a:accent1>
+          <a:srgbClr val="CC3300"/>
+        </a:accent1>
+        <a:accent2>
+          <a:srgbClr val="CC9900"/>
+        </a:accent2>
+        <a:accent3>
+          <a:srgbClr val="ABAAAA"/>
+        </a:accent3>
+        <a:accent4>
+          <a:srgbClr val="DADADA"/>
+        </a:accent4>
+        <a:accent5>
+          <a:srgbClr val="E2ADAA"/>
+        </a:accent5>
+        <a:accent6>
+          <a:srgbClr val="B98A00"/>
+        </a:accent6>
+        <a:hlink>
+          <a:srgbClr val="808080"/>
+        </a:hlink>
+        <a:folHlink>
+          <a:srgbClr val="666633"/>
+        </a:folHlink>
+      </a:clrScheme>
+      <a:clrMap bg1="dk2" tx1="lt1" bg2="dk1" tx2="lt2" accent1="accent1" accent2="accent2" accent3="accent3" accent4="accent4" accent5="accent5" accent6="accent6" hlink="hlink" folHlink="folHlink"/>
+    </a:extraClrScheme>
+    <a:extraClrScheme>
+      <a:clrScheme name="lecture 4">
+        <a:dk1>
+          <a:srgbClr val="11054B"/>
+        </a:dk1>
+        <a:lt1>
+          <a:srgbClr val="FFFFFF"/>
+        </a:lt1>
+        <a:dk2>
+          <a:srgbClr val="0000CC"/>
+        </a:dk2>
+        <a:lt2>
+          <a:srgbClr val="FFFFFF"/>
+        </a:lt2>
+        <a:accent1>
+          <a:srgbClr val="FF6600"/>
+        </a:accent1>
+        <a:accent2>
+          <a:srgbClr val="FF3300"/>
+        </a:accent2>
+        <a:accent3>
+          <a:srgbClr val="AAAAE2"/>
+        </a:accent3>
+        <a:accent4>
+          <a:srgbClr val="DADADA"/>
+        </a:accent4>
+        <a:accent5>
+          <a:srgbClr val="FFB8AA"/>
+        </a:accent5>
+        <a:accent6>
+          <a:srgbClr val="E72D00"/>
+        </a:accent6>
+        <a:hlink>
+          <a:srgbClr val="CC9900"/>
+        </a:hlink>
+        <a:folHlink>
+          <a:srgbClr val="B2B2B2"/>
+        </a:folHlink>
+      </a:clrScheme>
+      <a:clrMap bg1="dk2" tx1="lt1" bg2="dk1" tx2="lt2" accent1="accent1" accent2="accent2" accent3="accent3" accent4="accent4" accent5="accent5" accent6="accent6" hlink="hlink" folHlink="folHlink"/>
+    </a:extraClrScheme>
+    <a:extraClrScheme>
+      <a:clrScheme name="lecture 5">
+        <a:dk1>
+          <a:srgbClr val="9B8D65"/>
+        </a:dk1>
+        <a:lt1>
+          <a:srgbClr val="F8F8F8"/>
+        </a:lt1>
+        <a:dk2>
+          <a:srgbClr val="002600"/>
+        </a:dk2>
+        <a:lt2>
+          <a:srgbClr val="FAFACC"/>
+        </a:lt2>
+        <a:accent1>
+          <a:srgbClr val="CC9933"/>
+        </a:accent1>
+        <a:accent2>
+          <a:srgbClr val="8F9967"/>
+        </a:accent2>
+        <a:accent3>
+          <a:srgbClr val="AAACAA"/>
+        </a:accent3>
+        <a:accent4>
+          <a:srgbClr val="D4D4D4"/>
+        </a:accent4>
+        <a:accent5>
+          <a:srgbClr val="E2CAAD"/>
+        </a:accent5>
+        <a:accent6>
+          <a:srgbClr val="818A5D"/>
+        </a:accent6>
+        <a:hlink>
+          <a:srgbClr val="336600"/>
+        </a:hlink>
+        <a:folHlink>
+          <a:srgbClr val="808000"/>
+        </a:folHlink>
+      </a:clrScheme>
+      <a:clrMap bg1="dk2" tx1="lt1" bg2="dk1" tx2="lt2" accent1="accent1" accent2="accent2" accent3="accent3" accent4="accent4" accent5="accent5" accent6="accent6" hlink="hlink" folHlink="folHlink"/>
+    </a:extraClrScheme>
+    <a:extraClrScheme>
+      <a:clrScheme name="lecture 6">
+        <a:dk1>
+          <a:srgbClr val="333333"/>
+        </a:dk1>
+        <a:lt1>
+          <a:srgbClr val="FFFFFF"/>
+        </a:lt1>
+        <a:dk2>
+          <a:srgbClr val="006699"/>
+        </a:dk2>
+        <a:lt2>
+          <a:srgbClr val="FFFFFF"/>
+        </a:lt2>
+        <a:accent1>
+          <a:srgbClr val="CC9900"/>
+        </a:accent1>
+        <a:accent2>
+          <a:srgbClr val="FF9900"/>
+        </a:accent2>
+        <a:accent3>
+          <a:srgbClr val="AAB8CA"/>
+        </a:accent3>
+        <a:accent4>
+          <a:srgbClr val="DADADA"/>
+        </a:accent4>
+        <a:accent5>
+          <a:srgbClr val="E2CAAA"/>
+        </a:accent5>
+        <a:accent6>
+          <a:srgbClr val="E78A00"/>
+        </a:accent6>
+        <a:hlink>
+          <a:srgbClr val="FFCC00"/>
+        </a:hlink>
+        <a:folHlink>
+          <a:srgbClr val="706F37"/>
+        </a:folHlink>
+      </a:clrScheme>
+      <a:clrMap bg1="dk2" tx1="lt1" bg2="dk1" tx2="lt2" accent1="accent1" accent2="accent2" accent3="accent3" accent4="accent4" accent5="accent5" accent6="accent6" hlink="hlink" folHlink="folHlink"/>
+    </a:extraClrScheme>
+    <a:extraClrScheme>
+      <a:clrScheme name="lecture 7">
+        <a:dk1>
+          <a:srgbClr val="000000"/>
+        </a:dk1>
+        <a:lt1>
+          <a:srgbClr val="FFFFFF"/>
+        </a:lt1>
+        <a:dk2>
+          <a:srgbClr val="006633"/>
+        </a:dk2>
+        <a:lt2>
+          <a:srgbClr val="5F5F5F"/>
+        </a:lt2>
+        <a:accent1>
+          <a:srgbClr val="CC9900"/>
+        </a:accent1>
+        <a:accent2>
+          <a:srgbClr val="3B812F"/>
+        </a:accent2>
+        <a:accent3>
+          <a:srgbClr val="FFFFFF"/>
+        </a:accent3>
+        <a:accent4>
+          <a:srgbClr val="000000"/>
+        </a:accent4>
+        <a:accent5>
+          <a:srgbClr val="E2CAAA"/>
+        </a:accent5>
+        <a:accent6>
+          <a:srgbClr val="35742A"/>
+        </a:accent6>
+        <a:hlink>
+          <a:srgbClr val="996600"/>
+        </a:hlink>
+        <a:folHlink>
+          <a:srgbClr val="AFBF39"/>
+        </a:folHlink>
+      </a:clrScheme>
+      <a:clrMap bg1="lt1" tx1="dk1" bg2="lt2" tx2="dk2" accent1="accent1" accent2="accent2" accent3="accent3" accent4="accent4" accent5="accent5" accent6="accent6" hlink="hlink" folHlink="folHlink"/>
+    </a:extraClrScheme>
+    <a:extraClrScheme>
+      <a:clrScheme name="lecture 8">
+        <a:dk1>
+          <a:srgbClr val="000000"/>
+        </a:dk1>
+        <a:lt1>
+          <a:srgbClr val="FFFFFF"/>
+        </a:lt1>
+        <a:dk2>
+          <a:srgbClr val="CC0000"/>
+        </a:dk2>
+        <a:lt2>
+          <a:srgbClr val="666699"/>
+        </a:lt2>
+        <a:accent1>
+          <a:srgbClr val="808080"/>
+        </a:accent1>
+        <a:accent2>
+          <a:srgbClr val="999933"/>
+        </a:accent2>
+        <a:accent3>
+          <a:srgbClr val="FFFFFF"/>
+        </a:accent3>
+        <a:accent4>
+          <a:srgbClr val="000000"/>
+        </a:accent4>
+        <a:accent5>
+          <a:srgbClr val="C0C0C0"/>
+        </a:accent5>
+        <a:accent6>
+          <a:srgbClr val="8A8A2D"/>
+        </a:accent6>
+        <a:hlink>
+          <a:srgbClr val="4C6D80"/>
+        </a:hlink>
+        <a:folHlink>
+          <a:srgbClr val="B2B2B2"/>
+        </a:folHlink>
+      </a:clrScheme>
+      <a:clrMap bg1="lt1" tx1="dk1" bg2="lt2" tx2="dk2" accent1="accent1" accent2="accent2" accent3="accent3" accent4="accent4" accent5="accent5" accent6="accent6" hlink="hlink" folHlink="folHlink"/>
+    </a:extraClrScheme>
+    <a:extraClrScheme>
+      <a:clrScheme name="lecture 9">
+        <a:dk1>
+          <a:srgbClr val="000000"/>
+        </a:dk1>
+        <a:lt1>
+          <a:srgbClr val="FFFFFF"/>
+        </a:lt1>
+        <a:dk2>
+          <a:srgbClr val="003399"/>
+        </a:dk2>
+        <a:lt2>
+          <a:srgbClr val="666699"/>
+        </a:lt2>
+        <a:accent1>
+          <a:srgbClr val="009999"/>
+        </a:accent1>
+        <a:accent2>
+          <a:srgbClr val="4C6D4E"/>
+        </a:accent2>
+        <a:accent3>
+          <a:srgbClr val="FFFFFF"/>
+        </a:accent3>
+        <a:accent4>
+          <a:srgbClr val="000000"/>
+        </a:accent4>
+        <a:accent5>
+          <a:srgbClr val="AACACA"/>
+        </a:accent5>
+        <a:accent6>
+          <a:srgbClr val="446246"/>
+        </a:accent6>
+        <a:hlink>
+          <a:srgbClr val="4C6D80"/>
+        </a:hlink>
+        <a:folHlink>
+          <a:srgbClr val="B2B2B2"/>
+        </a:folHlink>
+      </a:clrScheme>
+      <a:clrMap bg1="lt1" tx1="dk1" bg2="lt2" tx2="dk2" accent1="accent1" accent2="accent2" accent3="accent3" accent4="accent4" accent5="accent5" accent6="accent6" hlink="hlink" folHlink="folHlink"/>
+    </a:extraClrScheme>
+  </a:extraClrSchemeLst>
+</a:theme>
+</file>
+
+<file path=ppt/theme/theme2.xml><?xml version="1.0" encoding="utf-8"?>
 <a:theme xmlns:a="http://schemas.openxmlformats.org/drawingml/2006/main" name="Office テーマ">
   <a:themeElements>
     <a:clrScheme name="Office">

--- a/GoogleColab.part3.pptx
+++ b/GoogleColab.part3.pptx
@@ -200,7 +200,7 @@
           <a:p>
             <a:fld id="{1B9496A5-7C6D-4562-83AD-78E6F1D02C8F}" type="datetimeFigureOut">
               <a:rPr kumimoji="1" lang="ja-JP" altLang="en-US" smtClean="0"/>
-              <a:t>2026/8/31</a:t>
+              <a:t>2026/9/2</a:t>
             </a:fld>
             <a:endParaRPr kumimoji="1" lang="ja-JP" altLang="en-US"/>
           </a:p>
@@ -733,7 +733,7 @@
             <a:fld id="{5BBCB299-525B-C043-8ABF-E2AB50D107C3}" type="datetimeFigureOut">
               <a:rPr lang="ja-JP" altLang="en-US" smtClean="0"/>
               <a:pPr/>
-              <a:t>2026/8/31</a:t>
+              <a:t>2026/9/2</a:t>
             </a:fld>
             <a:endParaRPr lang="ja-JP" altLang="en-US" dirty="0"/>
           </a:p>
@@ -959,7 +959,7 @@
             <a:fld id="{5BBCB299-525B-C043-8ABF-E2AB50D107C3}" type="datetimeFigureOut">
               <a:rPr lang="ja-JP" altLang="en-US" smtClean="0"/>
               <a:pPr/>
-              <a:t>2026/8/31</a:t>
+              <a:t>2026/9/2</a:t>
             </a:fld>
             <a:endParaRPr lang="ja-JP" altLang="en-US" dirty="0"/>
           </a:p>
@@ -1189,7 +1189,7 @@
             <a:fld id="{5BBCB299-525B-C043-8ABF-E2AB50D107C3}" type="datetimeFigureOut">
               <a:rPr lang="ja-JP" altLang="en-US" smtClean="0"/>
               <a:pPr/>
-              <a:t>2026/8/31</a:t>
+              <a:t>2026/9/2</a:t>
             </a:fld>
             <a:endParaRPr lang="ja-JP" altLang="en-US" dirty="0"/>
           </a:p>
@@ -1507,7 +1507,7 @@
             <a:fld id="{5BBCB299-525B-C043-8ABF-E2AB50D107C3}" type="datetimeFigureOut">
               <a:rPr lang="ja-JP" altLang="en-US" smtClean="0"/>
               <a:pPr/>
-              <a:t>2026/8/31</a:t>
+              <a:t>2026/9/2</a:t>
             </a:fld>
             <a:endParaRPr lang="ja-JP" altLang="en-US" dirty="0"/>
           </a:p>
@@ -1727,7 +1727,7 @@
             <a:fld id="{5BBCB299-525B-C043-8ABF-E2AB50D107C3}" type="datetimeFigureOut">
               <a:rPr lang="ja-JP" altLang="en-US" smtClean="0"/>
               <a:pPr/>
-              <a:t>2026/8/31</a:t>
+              <a:t>2026/9/2</a:t>
             </a:fld>
             <a:endParaRPr lang="ja-JP" altLang="en-US" dirty="0"/>
           </a:p>
@@ -1938,7 +1938,7 @@
             <a:fld id="{5BBCB299-525B-C043-8ABF-E2AB50D107C3}" type="datetimeFigureOut">
               <a:rPr lang="ja-JP" altLang="en-US" smtClean="0"/>
               <a:pPr/>
-              <a:t>2026/8/31</a:t>
+              <a:t>2026/9/2</a:t>
             </a:fld>
             <a:endParaRPr lang="ja-JP" altLang="en-US" dirty="0"/>
           </a:p>
@@ -2307,7 +2307,7 @@
             <a:fld id="{5BBCB299-525B-C043-8ABF-E2AB50D107C3}" type="datetimeFigureOut">
               <a:rPr lang="ja-JP" altLang="en-US" smtClean="0"/>
               <a:pPr/>
-              <a:t>2026/8/31</a:t>
+              <a:t>2026/9/2</a:t>
             </a:fld>
             <a:endParaRPr lang="ja-JP" altLang="en-US" dirty="0"/>
           </a:p>
@@ -2815,7 +2815,7 @@
             <a:fld id="{5BBCB299-525B-C043-8ABF-E2AB50D107C3}" type="datetimeFigureOut">
               <a:rPr lang="ja-JP" altLang="en-US" smtClean="0"/>
               <a:pPr/>
-              <a:t>2026/8/31</a:t>
+              <a:t>2026/9/2</a:t>
             </a:fld>
             <a:endParaRPr lang="ja-JP" altLang="en-US" dirty="0"/>
           </a:p>
@@ -2952,7 +2952,7 @@
             <a:fld id="{5BBCB299-525B-C043-8ABF-E2AB50D107C3}" type="datetimeFigureOut">
               <a:rPr lang="ja-JP" altLang="en-US" smtClean="0"/>
               <a:pPr/>
-              <a:t>2026/8/31</a:t>
+              <a:t>2026/9/2</a:t>
             </a:fld>
             <a:endParaRPr lang="ja-JP" altLang="en-US" dirty="0"/>
           </a:p>
@@ -3067,7 +3067,7 @@
             <a:fld id="{5BBCB299-525B-C043-8ABF-E2AB50D107C3}" type="datetimeFigureOut">
               <a:rPr lang="ja-JP" altLang="en-US" smtClean="0"/>
               <a:pPr/>
-              <a:t>2026/8/31</a:t>
+              <a:t>2026/9/2</a:t>
             </a:fld>
             <a:endParaRPr lang="ja-JP" altLang="en-US" dirty="0"/>
           </a:p>
@@ -3394,7 +3394,7 @@
             <a:fld id="{5BBCB299-525B-C043-8ABF-E2AB50D107C3}" type="datetimeFigureOut">
               <a:rPr lang="ja-JP" altLang="en-US" smtClean="0"/>
               <a:pPr/>
-              <a:t>2026/8/31</a:t>
+              <a:t>2026/9/2</a:t>
             </a:fld>
             <a:endParaRPr lang="ja-JP" altLang="en-US" dirty="0"/>
           </a:p>
@@ -3670,7 +3670,7 @@
             <a:fld id="{5BBCB299-525B-C043-8ABF-E2AB50D107C3}" type="datetimeFigureOut">
               <a:rPr lang="ja-JP" altLang="en-US" smtClean="0"/>
               <a:pPr/>
-              <a:t>2026/8/31</a:t>
+              <a:t>2026/9/2</a:t>
             </a:fld>
             <a:endParaRPr lang="ja-JP" altLang="en-US" dirty="0"/>
           </a:p>
@@ -3990,7 +3990,7 @@
             <a:fld id="{5BBCB299-525B-C043-8ABF-E2AB50D107C3}" type="datetimeFigureOut">
               <a:rPr lang="ja-JP" altLang="en-US" smtClean="0"/>
               <a:pPr/>
-              <a:t>2026/8/31</a:t>
+              <a:t>2026/9/2</a:t>
             </a:fld>
             <a:endParaRPr lang="ja-JP" altLang="en-US" dirty="0"/>
           </a:p>
@@ -5395,67 +5395,12 @@
           </a:p>
         </p:txBody>
       </p:sp>
-    </p:spTree>
-    <p:extLst>
-      <p:ext uri="{BB962C8B-B14F-4D97-AF65-F5344CB8AC3E}">
-        <p14:creationId xmlns:p14="http://schemas.microsoft.com/office/powerpoint/2010/main" val="1162395091"/>
-      </p:ext>
-    </p:extLst>
-  </p:cSld>
-  <p:clrMapOvr>
-    <a:masterClrMapping/>
-  </p:clrMapOvr>
-</p:sld>
-</file>
-
-<file path=ppt/slides/slide3.xml><?xml version="1.0" encoding="utf-8"?>
-<p:sld xmlns:a="http://schemas.openxmlformats.org/drawingml/2006/main" xmlns:r="http://schemas.openxmlformats.org/officeDocument/2006/relationships" xmlns:p="http://schemas.openxmlformats.org/presentationml/2006/main">
-  <p:cSld>
-    <p:spTree>
-      <p:nvGrpSpPr>
-        <p:cNvPr id="1" name=""/>
-        <p:cNvGrpSpPr/>
-        <p:nvPr/>
-      </p:nvGrpSpPr>
-      <p:grpSpPr>
-        <a:xfrm>
-          <a:off x="0" y="0"/>
-          <a:ext cx="0" cy="0"/>
-          <a:chOff x="0" y="0"/>
-          <a:chExt cx="0" cy="0"/>
-        </a:xfrm>
-      </p:grpSpPr>
-      <p:sp>
-        <p:nvSpPr>
-          <p:cNvPr id="2" name="タイトル 1">
-            <a:extLst>
-              <a:ext uri="{FF2B5EF4-FFF2-40B4-BE49-F238E27FC236}">
-                <a16:creationId xmlns:a16="http://schemas.microsoft.com/office/drawing/2014/main" id="{1716551B-8A21-6A35-F000-25A7BD13172B}"/>
-              </a:ext>
-            </a:extLst>
-          </p:cNvPr>
-          <p:cNvSpPr>
-            <a:spLocks noGrp="1"/>
-          </p:cNvSpPr>
-          <p:nvPr>
-            <p:ph type="title"/>
-          </p:nvPr>
-        </p:nvSpPr>
-        <p:spPr/>
-        <p:txBody>
-          <a:bodyPr/>
-          <a:lstStyle/>
-          <a:p>
-            <a:endParaRPr kumimoji="1" lang="ja-JP" altLang="en-US"/>
-          </a:p>
-        </p:txBody>
-      </p:sp>
       <p:sp>
         <p:nvSpPr>
           <p:cNvPr id="3" name="コンテンツ プレースホルダー 2">
             <a:extLst>
               <a:ext uri="{FF2B5EF4-FFF2-40B4-BE49-F238E27FC236}">
-                <a16:creationId xmlns:a16="http://schemas.microsoft.com/office/drawing/2014/main" id="{B9EB4E70-4B14-A2ED-DB1E-3CC1EF7EEA85}"/>
+                <a16:creationId xmlns:a16="http://schemas.microsoft.com/office/drawing/2014/main" id="{9015673B-D34F-6A06-286B-6B361B2EEE9B}"/>
               </a:ext>
             </a:extLst>
           </p:cNvPr>
@@ -5466,7 +5411,7 @@
         </p:nvSpPr>
         <p:spPr>
           <a:xfrm>
-            <a:off x="609600" y="1268414"/>
+            <a:off x="762000" y="1420814"/>
             <a:ext cx="10972800" cy="5113337"/>
           </a:xfrm>
           <a:prstGeom prst="rect">
@@ -5668,6 +5613,295 @@
             </a:lvl9pPr>
           </a:lstStyle>
           <a:p>
+            <a:r>
+              <a:rPr lang="en-US" altLang="ja-JP" kern="0" dirty="0"/>
+              <a:t>def</a:t>
+            </a:r>
+            <a:r>
+              <a:rPr lang="ja-JP" altLang="en-US" kern="0" dirty="0"/>
+              <a:t> </a:t>
+            </a:r>
+            <a:r>
+              <a:rPr lang="en-US" altLang="ja-JP" kern="0" dirty="0" err="1"/>
+              <a:t>min_val</a:t>
+            </a:r>
+            <a:endParaRPr lang="en-US" altLang="ja-JP" kern="0" dirty="0"/>
+          </a:p>
+        </p:txBody>
+      </p:sp>
+    </p:spTree>
+    <p:extLst>
+      <p:ext uri="{BB962C8B-B14F-4D97-AF65-F5344CB8AC3E}">
+        <p14:creationId xmlns:p14="http://schemas.microsoft.com/office/powerpoint/2010/main" val="1162395091"/>
+      </p:ext>
+    </p:extLst>
+  </p:cSld>
+  <p:clrMapOvr>
+    <a:masterClrMapping/>
+  </p:clrMapOvr>
+</p:sld>
+</file>
+
+<file path=ppt/slides/slide3.xml><?xml version="1.0" encoding="utf-8"?>
+<p:sld xmlns:a="http://schemas.openxmlformats.org/drawingml/2006/main" xmlns:r="http://schemas.openxmlformats.org/officeDocument/2006/relationships" xmlns:p="http://schemas.openxmlformats.org/presentationml/2006/main">
+  <p:cSld>
+    <p:spTree>
+      <p:nvGrpSpPr>
+        <p:cNvPr id="1" name=""/>
+        <p:cNvGrpSpPr/>
+        <p:nvPr/>
+      </p:nvGrpSpPr>
+      <p:grpSpPr>
+        <a:xfrm>
+          <a:off x="0" y="0"/>
+          <a:ext cx="0" cy="0"/>
+          <a:chOff x="0" y="0"/>
+          <a:chExt cx="0" cy="0"/>
+        </a:xfrm>
+      </p:grpSpPr>
+      <p:sp>
+        <p:nvSpPr>
+          <p:cNvPr id="2" name="タイトル 1">
+            <a:extLst>
+              <a:ext uri="{FF2B5EF4-FFF2-40B4-BE49-F238E27FC236}">
+                <a16:creationId xmlns:a16="http://schemas.microsoft.com/office/drawing/2014/main" id="{1716551B-8A21-6A35-F000-25A7BD13172B}"/>
+              </a:ext>
+            </a:extLst>
+          </p:cNvPr>
+          <p:cNvSpPr>
+            <a:spLocks noGrp="1"/>
+          </p:cNvSpPr>
+          <p:nvPr>
+            <p:ph type="title"/>
+          </p:nvPr>
+        </p:nvSpPr>
+        <p:spPr/>
+        <p:txBody>
+          <a:bodyPr/>
+          <a:lstStyle/>
+          <a:p>
+            <a:endParaRPr kumimoji="1" lang="ja-JP" altLang="en-US"/>
+          </a:p>
+        </p:txBody>
+      </p:sp>
+      <p:sp>
+        <p:nvSpPr>
+          <p:cNvPr id="3" name="コンテンツ プレースホルダー 2">
+            <a:extLst>
+              <a:ext uri="{FF2B5EF4-FFF2-40B4-BE49-F238E27FC236}">
+                <a16:creationId xmlns:a16="http://schemas.microsoft.com/office/drawing/2014/main" id="{B9EB4E70-4B14-A2ED-DB1E-3CC1EF7EEA85}"/>
+              </a:ext>
+            </a:extLst>
+          </p:cNvPr>
+          <p:cNvSpPr txBox="1">
+            <a:spLocks/>
+          </p:cNvSpPr>
+          <p:nvPr/>
+        </p:nvSpPr>
+        <p:spPr>
+          <a:xfrm>
+            <a:off x="609600" y="1268414"/>
+            <a:ext cx="10972800" cy="5113337"/>
+          </a:xfrm>
+          <a:prstGeom prst="rect">
+            <a:avLst/>
+          </a:prstGeom>
+        </p:spPr>
+        <p:txBody>
+          <a:bodyPr/>
+          <a:lstStyle>
+            <a:lvl1pPr marL="342900" indent="-342900" algn="l" rtl="0" eaLnBrk="1" fontAlgn="base" hangingPunct="1">
+              <a:spcBef>
+                <a:spcPct val="20000"/>
+              </a:spcBef>
+              <a:spcAft>
+                <a:spcPct val="0"/>
+              </a:spcAft>
+              <a:buClr>
+                <a:schemeClr val="accent1"/>
+              </a:buClr>
+              <a:buSzPct val="65000"/>
+              <a:buFont typeface="Wingdings" pitchFamily="2" charset="2"/>
+              <a:buChar char="n"/>
+              <a:defRPr kumimoji="1" sz="3200">
+                <a:solidFill>
+                  <a:schemeClr val="tx1"/>
+                </a:solidFill>
+                <a:latin typeface="+mn-lt"/>
+                <a:ea typeface="+mn-ea"/>
+                <a:cs typeface="+mn-cs"/>
+              </a:defRPr>
+            </a:lvl1pPr>
+            <a:lvl2pPr marL="669925" indent="-325438" algn="l" rtl="0" eaLnBrk="1" fontAlgn="base" hangingPunct="1">
+              <a:spcBef>
+                <a:spcPct val="20000"/>
+              </a:spcBef>
+              <a:spcAft>
+                <a:spcPct val="0"/>
+              </a:spcAft>
+              <a:buClr>
+                <a:schemeClr val="accent2"/>
+              </a:buClr>
+              <a:buSzPct val="60000"/>
+              <a:buFont typeface="Wingdings" pitchFamily="2" charset="2"/>
+              <a:buChar char="q"/>
+              <a:defRPr kumimoji="1" sz="2800">
+                <a:solidFill>
+                  <a:schemeClr val="tx1"/>
+                </a:solidFill>
+                <a:latin typeface="+mn-lt"/>
+                <a:ea typeface="+mn-ea"/>
+              </a:defRPr>
+            </a:lvl2pPr>
+            <a:lvl3pPr marL="1022350" indent="-350838" algn="l" rtl="0" eaLnBrk="1" fontAlgn="base" hangingPunct="1">
+              <a:spcBef>
+                <a:spcPct val="20000"/>
+              </a:spcBef>
+              <a:spcAft>
+                <a:spcPct val="0"/>
+              </a:spcAft>
+              <a:buClr>
+                <a:schemeClr val="accent1"/>
+              </a:buClr>
+              <a:buSzPct val="65000"/>
+              <a:buFont typeface="Wingdings" pitchFamily="2" charset="2"/>
+              <a:buChar char="n"/>
+              <a:defRPr kumimoji="1" sz="2400">
+                <a:solidFill>
+                  <a:schemeClr val="tx1"/>
+                </a:solidFill>
+                <a:latin typeface="+mn-lt"/>
+                <a:ea typeface="+mn-ea"/>
+              </a:defRPr>
+            </a:lvl3pPr>
+            <a:lvl4pPr marL="1339850" indent="-315913" algn="l" rtl="0" eaLnBrk="1" fontAlgn="base" hangingPunct="1">
+              <a:spcBef>
+                <a:spcPct val="20000"/>
+              </a:spcBef>
+              <a:spcAft>
+                <a:spcPct val="0"/>
+              </a:spcAft>
+              <a:buClr>
+                <a:schemeClr val="accent2"/>
+              </a:buClr>
+              <a:buSzPct val="70000"/>
+              <a:buFont typeface="Wingdings" pitchFamily="2" charset="2"/>
+              <a:buChar char="q"/>
+              <a:defRPr kumimoji="1" sz="2000">
+                <a:solidFill>
+                  <a:schemeClr val="tx1"/>
+                </a:solidFill>
+                <a:latin typeface="+mn-lt"/>
+                <a:ea typeface="+mn-ea"/>
+              </a:defRPr>
+            </a:lvl4pPr>
+            <a:lvl5pPr marL="1681163" indent="-339725" algn="l" rtl="0" eaLnBrk="1" fontAlgn="base" hangingPunct="1">
+              <a:spcBef>
+                <a:spcPct val="20000"/>
+              </a:spcBef>
+              <a:spcAft>
+                <a:spcPct val="0"/>
+              </a:spcAft>
+              <a:buClr>
+                <a:schemeClr val="accent1"/>
+              </a:buClr>
+              <a:buSzPct val="75000"/>
+              <a:buFont typeface="Wingdings" pitchFamily="2" charset="2"/>
+              <a:buChar char="§"/>
+              <a:defRPr kumimoji="1">
+                <a:solidFill>
+                  <a:schemeClr val="tx1"/>
+                </a:solidFill>
+                <a:latin typeface="+mn-lt"/>
+                <a:ea typeface="+mn-ea"/>
+              </a:defRPr>
+            </a:lvl5pPr>
+            <a:lvl6pPr marL="2138363" indent="-339725" algn="l" rtl="0" eaLnBrk="1" fontAlgn="base" hangingPunct="1">
+              <a:spcBef>
+                <a:spcPct val="20000"/>
+              </a:spcBef>
+              <a:spcAft>
+                <a:spcPct val="0"/>
+              </a:spcAft>
+              <a:buClr>
+                <a:schemeClr val="accent1"/>
+              </a:buClr>
+              <a:buSzPct val="75000"/>
+              <a:buFont typeface="Wingdings" pitchFamily="2" charset="2"/>
+              <a:buChar char="§"/>
+              <a:defRPr kumimoji="1">
+                <a:solidFill>
+                  <a:schemeClr val="tx1"/>
+                </a:solidFill>
+                <a:latin typeface="+mn-lt"/>
+                <a:ea typeface="+mn-ea"/>
+              </a:defRPr>
+            </a:lvl6pPr>
+            <a:lvl7pPr marL="2595563" indent="-339725" algn="l" rtl="0" eaLnBrk="1" fontAlgn="base" hangingPunct="1">
+              <a:spcBef>
+                <a:spcPct val="20000"/>
+              </a:spcBef>
+              <a:spcAft>
+                <a:spcPct val="0"/>
+              </a:spcAft>
+              <a:buClr>
+                <a:schemeClr val="accent1"/>
+              </a:buClr>
+              <a:buSzPct val="75000"/>
+              <a:buFont typeface="Wingdings" pitchFamily="2" charset="2"/>
+              <a:buChar char="§"/>
+              <a:defRPr kumimoji="1">
+                <a:solidFill>
+                  <a:schemeClr val="tx1"/>
+                </a:solidFill>
+                <a:latin typeface="+mn-lt"/>
+                <a:ea typeface="+mn-ea"/>
+              </a:defRPr>
+            </a:lvl7pPr>
+            <a:lvl8pPr marL="3052763" indent="-339725" algn="l" rtl="0" eaLnBrk="1" fontAlgn="base" hangingPunct="1">
+              <a:spcBef>
+                <a:spcPct val="20000"/>
+              </a:spcBef>
+              <a:spcAft>
+                <a:spcPct val="0"/>
+              </a:spcAft>
+              <a:buClr>
+                <a:schemeClr val="accent1"/>
+              </a:buClr>
+              <a:buSzPct val="75000"/>
+              <a:buFont typeface="Wingdings" pitchFamily="2" charset="2"/>
+              <a:buChar char="§"/>
+              <a:defRPr kumimoji="1">
+                <a:solidFill>
+                  <a:schemeClr val="tx1"/>
+                </a:solidFill>
+                <a:latin typeface="+mn-lt"/>
+                <a:ea typeface="+mn-ea"/>
+              </a:defRPr>
+            </a:lvl8pPr>
+            <a:lvl9pPr marL="3509963" indent="-339725" algn="l" rtl="0" eaLnBrk="1" fontAlgn="base" hangingPunct="1">
+              <a:spcBef>
+                <a:spcPct val="20000"/>
+              </a:spcBef>
+              <a:spcAft>
+                <a:spcPct val="0"/>
+              </a:spcAft>
+              <a:buClr>
+                <a:schemeClr val="accent1"/>
+              </a:buClr>
+              <a:buSzPct val="75000"/>
+              <a:buFont typeface="Wingdings" pitchFamily="2" charset="2"/>
+              <a:buChar char="§"/>
+              <a:defRPr kumimoji="1">
+                <a:solidFill>
+                  <a:schemeClr val="tx1"/>
+                </a:solidFill>
+                <a:latin typeface="+mn-lt"/>
+                <a:ea typeface="+mn-ea"/>
+              </a:defRPr>
+            </a:lvl9pPr>
+          </a:lstStyle>
+          <a:p>
             <a:endParaRPr lang="ja-JP" altLang="en-US" kern="0" dirty="0"/>
           </a:p>
         </p:txBody>
@@ -5757,7 +5991,10 @@
           <a:bodyPr/>
           <a:lstStyle/>
           <a:p>
-            <a:endParaRPr kumimoji="1" lang="ja-JP" altLang="en-US" dirty="0"/>
+            <a:r>
+              <a:rPr kumimoji="1" lang="ja-JP" altLang="en-US" dirty="0"/>
+              <a:t>あ</a:t>
+            </a:r>
           </a:p>
         </p:txBody>
       </p:sp>

--- a/GoogleColab.part3.pptx
+++ b/GoogleColab.part3.pptx
@@ -5,7 +5,7 @@
     <p:sldMasterId id="2147483660" r:id="rId1"/>
   </p:sldMasterIdLst>
   <p:notesMasterIdLst>
-    <p:notesMasterId r:id="rId10"/>
+    <p:notesMasterId r:id="rId11"/>
   </p:notesMasterIdLst>
   <p:sldIdLst>
     <p:sldId id="256" r:id="rId2"/>
@@ -15,7 +15,8 @@
     <p:sldId id="322" r:id="rId6"/>
     <p:sldId id="324" r:id="rId7"/>
     <p:sldId id="323" r:id="rId8"/>
-    <p:sldId id="319" r:id="rId9"/>
+    <p:sldId id="325" r:id="rId9"/>
+    <p:sldId id="319" r:id="rId10"/>
   </p:sldIdLst>
   <p:sldSz cx="12192000" cy="6858000"/>
   <p:notesSz cx="6802438" cy="9937750"/>
@@ -130,6 +131,7 @@
             <p14:sldId id="322"/>
             <p14:sldId id="324"/>
             <p14:sldId id="323"/>
+            <p14:sldId id="325"/>
           </p14:sldIdLst>
         </p14:section>
         <p14:section name="参考文献" id="{CFFDC787-557B-4910-97C6-D64501BECE89}">
@@ -5852,8 +5854,8 @@
           <a:chExt cx="0" cy="0"/>
         </a:xfrm>
       </p:grpSpPr>
-      <mc:AlternateContent xmlns:mc="http://schemas.openxmlformats.org/markup-compatibility/2006">
-        <mc:Choice xmlns:a14="http://schemas.microsoft.com/office/drawing/2010/main" Requires="a14">
+      <mc:AlternateContent xmlns:mc="http://schemas.openxmlformats.org/markup-compatibility/2006" xmlns:a14="http://schemas.microsoft.com/office/drawing/2010/main">
+        <mc:Choice Requires="a14">
           <p:sp>
             <p:nvSpPr>
               <p:cNvPr id="12" name="正方形/長方形 11">
@@ -5925,7 +5927,7 @@
                     <m:sSub>
                       <m:sSubPr>
                         <m:ctrlPr>
-                          <a:rPr lang="en-US" altLang="ja-JP" sz="1800" i="1" kern="0" dirty="0" smtClean="0">
+                          <a:rPr lang="en-US" altLang="ja-JP" sz="1800" b="0" i="1" kern="0" dirty="0" smtClean="0">
                             <a:solidFill>
                               <a:schemeClr val="accent6"/>
                             </a:solidFill>
@@ -5971,7 +5973,7 @@
                     <m:f>
                       <m:fPr>
                         <m:ctrlPr>
-                          <a:rPr lang="en-US" altLang="ja-JP" sz="1800" i="1" kern="0" smtClean="0">
+                          <a:rPr lang="en-US" altLang="ja-JP" sz="1800" b="0" i="1" kern="0" smtClean="0">
                             <a:solidFill>
                               <a:schemeClr val="accent6"/>
                             </a:solidFill>
@@ -6037,7 +6039,7 @@
                         <m:sSub>
                           <m:sSubPr>
                             <m:ctrlPr>
-                              <a:rPr lang="en-US" altLang="ja-JP" sz="1800" i="1" kern="0" smtClean="0">
+                              <a:rPr lang="en-US" altLang="ja-JP" sz="1800" b="0" i="1" kern="0" smtClean="0">
                                 <a:solidFill>
                                   <a:schemeClr val="accent6"/>
                                 </a:solidFill>
@@ -6130,7 +6132,7 @@
             </p:txBody>
           </p:sp>
         </mc:Choice>
-        <mc:Fallback>
+        <mc:Fallback xmlns="">
           <p:sp>
             <p:nvSpPr>
               <p:cNvPr id="12" name="正方形/長方形 11">
@@ -15733,6 +15735,890 @@
 </file>
 
 <file path=ppt/slides/slide8.xml><?xml version="1.0" encoding="utf-8"?>
+<p:sld xmlns:a="http://schemas.openxmlformats.org/drawingml/2006/main" xmlns:r="http://schemas.openxmlformats.org/officeDocument/2006/relationships" xmlns:p="http://schemas.openxmlformats.org/presentationml/2006/main">
+  <p:cSld>
+    <p:spTree>
+      <p:nvGrpSpPr>
+        <p:cNvPr id="1" name="">
+          <a:extLst>
+            <a:ext uri="{FF2B5EF4-FFF2-40B4-BE49-F238E27FC236}">
+              <a16:creationId xmlns:a16="http://schemas.microsoft.com/office/drawing/2014/main" id="{7835C81A-9A21-CEC4-618C-AADDA9110577}"/>
+            </a:ext>
+          </a:extLst>
+        </p:cNvPr>
+        <p:cNvGrpSpPr/>
+        <p:nvPr/>
+      </p:nvGrpSpPr>
+      <p:grpSpPr>
+        <a:xfrm>
+          <a:off x="0" y="0"/>
+          <a:ext cx="0" cy="0"/>
+          <a:chOff x="0" y="0"/>
+          <a:chExt cx="0" cy="0"/>
+        </a:xfrm>
+      </p:grpSpPr>
+      <p:sp>
+        <p:nvSpPr>
+          <p:cNvPr id="7" name="正方形/長方形 6">
+            <a:extLst>
+              <a:ext uri="{FF2B5EF4-FFF2-40B4-BE49-F238E27FC236}">
+                <a16:creationId xmlns:a16="http://schemas.microsoft.com/office/drawing/2014/main" id="{3BFEA26B-2A7C-CDA7-A5AE-7685E7C948B1}"/>
+              </a:ext>
+            </a:extLst>
+          </p:cNvPr>
+          <p:cNvSpPr/>
+          <p:nvPr/>
+        </p:nvSpPr>
+        <p:spPr bwMode="auto">
+          <a:xfrm>
+            <a:off x="5721693" y="1268414"/>
+            <a:ext cx="6610242" cy="1536313"/>
+          </a:xfrm>
+          <a:prstGeom prst="rect">
+            <a:avLst/>
+          </a:prstGeom>
+          <a:solidFill>
+            <a:schemeClr val="accent5">
+              <a:lumMod val="40000"/>
+              <a:lumOff val="60000"/>
+            </a:schemeClr>
+          </a:solidFill>
+          <a:ln w="9525" cap="flat" cmpd="sng" algn="ctr">
+            <a:noFill/>
+            <a:prstDash val="solid"/>
+            <a:miter lim="800000"/>
+            <a:headEnd type="none" w="med" len="med"/>
+            <a:tailEnd type="none" w="med" len="med"/>
+          </a:ln>
+          <a:effectLst/>
+        </p:spPr>
+        <p:txBody>
+          <a:bodyPr vert="horz" wrap="none" lIns="91440" tIns="45720" rIns="91440" bIns="45720" numCol="1" rtlCol="0" anchor="t" anchorCtr="0" compatLnSpc="1">
+            <a:prstTxWarp prst="textNoShape">
+              <a:avLst/>
+            </a:prstTxWarp>
+          </a:bodyPr>
+          <a:lstStyle/>
+          <a:p>
+            <a:pPr marL="0" marR="0" indent="0" defTabSz="914400" rtl="0" eaLnBrk="1" fontAlgn="base" latinLnBrk="0" hangingPunct="1">
+              <a:spcBef>
+                <a:spcPct val="0"/>
+              </a:spcBef>
+              <a:spcAft>
+                <a:spcPct val="0"/>
+              </a:spcAft>
+              <a:buClrTx/>
+              <a:buSzTx/>
+              <a:buFontTx/>
+              <a:buNone/>
+              <a:tabLst/>
+            </a:pPr>
+            <a:r>
+              <a:rPr lang="en-US" altLang="ja-JP" sz="1500" dirty="0">
+                <a:solidFill>
+                  <a:schemeClr val="accent5">
+                    <a:lumMod val="50000"/>
+                  </a:schemeClr>
+                </a:solidFill>
+                <a:latin typeface="Arial" charset="0"/>
+                <a:ea typeface="ＭＳ Ｐゴシック" pitchFamily="50" charset="-128"/>
+              </a:rPr>
+              <a:t>P</a:t>
+            </a:r>
+          </a:p>
+          <a:p>
+            <a:pPr marL="0" marR="0" indent="0" defTabSz="914400" rtl="0" eaLnBrk="1" fontAlgn="base" latinLnBrk="0" hangingPunct="1">
+              <a:spcBef>
+                <a:spcPct val="0"/>
+              </a:spcBef>
+              <a:spcAft>
+                <a:spcPct val="0"/>
+              </a:spcAft>
+              <a:buClrTx/>
+              <a:buSzTx/>
+              <a:buFontTx/>
+              <a:buNone/>
+              <a:tabLst/>
+            </a:pPr>
+            <a:endParaRPr lang="en-US" altLang="ja-JP" sz="1500" dirty="0">
+              <a:solidFill>
+                <a:schemeClr val="accent5">
+                  <a:lumMod val="50000"/>
+                </a:schemeClr>
+              </a:solidFill>
+              <a:latin typeface="Arial" charset="0"/>
+              <a:ea typeface="ＭＳ Ｐゴシック" pitchFamily="50" charset="-128"/>
+            </a:endParaRPr>
+          </a:p>
+          <a:p>
+            <a:pPr marL="0" marR="0" indent="0" defTabSz="914400" rtl="0" eaLnBrk="1" fontAlgn="base" latinLnBrk="0" hangingPunct="1">
+              <a:spcBef>
+                <a:spcPct val="0"/>
+              </a:spcBef>
+              <a:spcAft>
+                <a:spcPct val="0"/>
+              </a:spcAft>
+              <a:buClrTx/>
+              <a:buSzTx/>
+              <a:buFontTx/>
+              <a:buNone/>
+              <a:tabLst/>
+            </a:pPr>
+            <a:endParaRPr lang="en-US" altLang="ja-JP" sz="1500" dirty="0">
+              <a:solidFill>
+                <a:schemeClr val="accent5">
+                  <a:lumMod val="50000"/>
+                </a:schemeClr>
+              </a:solidFill>
+              <a:latin typeface="Arial" charset="0"/>
+              <a:ea typeface="ＭＳ Ｐゴシック" pitchFamily="50" charset="-128"/>
+            </a:endParaRPr>
+          </a:p>
+        </p:txBody>
+      </p:sp>
+      <p:sp>
+        <p:nvSpPr>
+          <p:cNvPr id="2" name="タイトル 1">
+            <a:extLst>
+              <a:ext uri="{FF2B5EF4-FFF2-40B4-BE49-F238E27FC236}">
+                <a16:creationId xmlns:a16="http://schemas.microsoft.com/office/drawing/2014/main" id="{AD031C14-81B9-2475-EAA3-8DA6F5206AF6}"/>
+              </a:ext>
+            </a:extLst>
+          </p:cNvPr>
+          <p:cNvSpPr>
+            <a:spLocks noGrp="1"/>
+          </p:cNvSpPr>
+          <p:nvPr>
+            <p:ph type="title"/>
+          </p:nvPr>
+        </p:nvSpPr>
+        <p:spPr/>
+        <p:txBody>
+          <a:bodyPr/>
+          <a:lstStyle/>
+          <a:p>
+            <a:r>
+              <a:rPr kumimoji="1" lang="en-US" altLang="ja-JP" dirty="0" err="1"/>
+              <a:t>elephant.ipynb</a:t>
+            </a:r>
+            <a:endParaRPr kumimoji="1" lang="ja-JP" altLang="en-US" dirty="0"/>
+          </a:p>
+        </p:txBody>
+      </p:sp>
+      <p:sp>
+        <p:nvSpPr>
+          <p:cNvPr id="3" name="コンテンツ プレースホルダー 2">
+            <a:extLst>
+              <a:ext uri="{FF2B5EF4-FFF2-40B4-BE49-F238E27FC236}">
+                <a16:creationId xmlns:a16="http://schemas.microsoft.com/office/drawing/2014/main" id="{13E17388-F4D1-41A6-3529-214D010A152D}"/>
+              </a:ext>
+            </a:extLst>
+          </p:cNvPr>
+          <p:cNvSpPr txBox="1">
+            <a:spLocks/>
+          </p:cNvSpPr>
+          <p:nvPr/>
+        </p:nvSpPr>
+        <p:spPr>
+          <a:xfrm>
+            <a:off x="609600" y="1268414"/>
+            <a:ext cx="10972800" cy="5113337"/>
+          </a:xfrm>
+          <a:prstGeom prst="rect">
+            <a:avLst/>
+          </a:prstGeom>
+        </p:spPr>
+        <p:txBody>
+          <a:bodyPr/>
+          <a:lstStyle>
+            <a:lvl1pPr marL="342900" indent="-342900" algn="l" rtl="0" eaLnBrk="1" fontAlgn="base" hangingPunct="1">
+              <a:spcBef>
+                <a:spcPct val="20000"/>
+              </a:spcBef>
+              <a:spcAft>
+                <a:spcPct val="0"/>
+              </a:spcAft>
+              <a:buClr>
+                <a:schemeClr val="accent1"/>
+              </a:buClr>
+              <a:buSzPct val="65000"/>
+              <a:buFont typeface="Wingdings" pitchFamily="2" charset="2"/>
+              <a:buChar char="n"/>
+              <a:defRPr kumimoji="1" sz="3200">
+                <a:solidFill>
+                  <a:schemeClr val="tx1"/>
+                </a:solidFill>
+                <a:latin typeface="+mn-lt"/>
+                <a:ea typeface="+mn-ea"/>
+                <a:cs typeface="+mn-cs"/>
+              </a:defRPr>
+            </a:lvl1pPr>
+            <a:lvl2pPr marL="669925" indent="-325438" algn="l" rtl="0" eaLnBrk="1" fontAlgn="base" hangingPunct="1">
+              <a:spcBef>
+                <a:spcPct val="20000"/>
+              </a:spcBef>
+              <a:spcAft>
+                <a:spcPct val="0"/>
+              </a:spcAft>
+              <a:buClr>
+                <a:schemeClr val="accent2"/>
+              </a:buClr>
+              <a:buSzPct val="60000"/>
+              <a:buFont typeface="Wingdings" pitchFamily="2" charset="2"/>
+              <a:buChar char="q"/>
+              <a:defRPr kumimoji="1" sz="2800">
+                <a:solidFill>
+                  <a:schemeClr val="tx1"/>
+                </a:solidFill>
+                <a:latin typeface="+mn-lt"/>
+                <a:ea typeface="+mn-ea"/>
+              </a:defRPr>
+            </a:lvl2pPr>
+            <a:lvl3pPr marL="1022350" indent="-350838" algn="l" rtl="0" eaLnBrk="1" fontAlgn="base" hangingPunct="1">
+              <a:spcBef>
+                <a:spcPct val="20000"/>
+              </a:spcBef>
+              <a:spcAft>
+                <a:spcPct val="0"/>
+              </a:spcAft>
+              <a:buClr>
+                <a:schemeClr val="accent1"/>
+              </a:buClr>
+              <a:buSzPct val="65000"/>
+              <a:buFont typeface="Wingdings" pitchFamily="2" charset="2"/>
+              <a:buChar char="n"/>
+              <a:defRPr kumimoji="1" sz="2400">
+                <a:solidFill>
+                  <a:schemeClr val="tx1"/>
+                </a:solidFill>
+                <a:latin typeface="+mn-lt"/>
+                <a:ea typeface="+mn-ea"/>
+              </a:defRPr>
+            </a:lvl3pPr>
+            <a:lvl4pPr marL="1339850" indent="-315913" algn="l" rtl="0" eaLnBrk="1" fontAlgn="base" hangingPunct="1">
+              <a:spcBef>
+                <a:spcPct val="20000"/>
+              </a:spcBef>
+              <a:spcAft>
+                <a:spcPct val="0"/>
+              </a:spcAft>
+              <a:buClr>
+                <a:schemeClr val="accent2"/>
+              </a:buClr>
+              <a:buSzPct val="70000"/>
+              <a:buFont typeface="Wingdings" pitchFamily="2" charset="2"/>
+              <a:buChar char="q"/>
+              <a:defRPr kumimoji="1" sz="2000">
+                <a:solidFill>
+                  <a:schemeClr val="tx1"/>
+                </a:solidFill>
+                <a:latin typeface="+mn-lt"/>
+                <a:ea typeface="+mn-ea"/>
+              </a:defRPr>
+            </a:lvl4pPr>
+            <a:lvl5pPr marL="1681163" indent="-339725" algn="l" rtl="0" eaLnBrk="1" fontAlgn="base" hangingPunct="1">
+              <a:spcBef>
+                <a:spcPct val="20000"/>
+              </a:spcBef>
+              <a:spcAft>
+                <a:spcPct val="0"/>
+              </a:spcAft>
+              <a:buClr>
+                <a:schemeClr val="accent1"/>
+              </a:buClr>
+              <a:buSzPct val="75000"/>
+              <a:buFont typeface="Wingdings" pitchFamily="2" charset="2"/>
+              <a:buChar char="§"/>
+              <a:defRPr kumimoji="1">
+                <a:solidFill>
+                  <a:schemeClr val="tx1"/>
+                </a:solidFill>
+                <a:latin typeface="+mn-lt"/>
+                <a:ea typeface="+mn-ea"/>
+              </a:defRPr>
+            </a:lvl5pPr>
+            <a:lvl6pPr marL="2138363" indent="-339725" algn="l" rtl="0" eaLnBrk="1" fontAlgn="base" hangingPunct="1">
+              <a:spcBef>
+                <a:spcPct val="20000"/>
+              </a:spcBef>
+              <a:spcAft>
+                <a:spcPct val="0"/>
+              </a:spcAft>
+              <a:buClr>
+                <a:schemeClr val="accent1"/>
+              </a:buClr>
+              <a:buSzPct val="75000"/>
+              <a:buFont typeface="Wingdings" pitchFamily="2" charset="2"/>
+              <a:buChar char="§"/>
+              <a:defRPr kumimoji="1">
+                <a:solidFill>
+                  <a:schemeClr val="tx1"/>
+                </a:solidFill>
+                <a:latin typeface="+mn-lt"/>
+                <a:ea typeface="+mn-ea"/>
+              </a:defRPr>
+            </a:lvl6pPr>
+            <a:lvl7pPr marL="2595563" indent="-339725" algn="l" rtl="0" eaLnBrk="1" fontAlgn="base" hangingPunct="1">
+              <a:spcBef>
+                <a:spcPct val="20000"/>
+              </a:spcBef>
+              <a:spcAft>
+                <a:spcPct val="0"/>
+              </a:spcAft>
+              <a:buClr>
+                <a:schemeClr val="accent1"/>
+              </a:buClr>
+              <a:buSzPct val="75000"/>
+              <a:buFont typeface="Wingdings" pitchFamily="2" charset="2"/>
+              <a:buChar char="§"/>
+              <a:defRPr kumimoji="1">
+                <a:solidFill>
+                  <a:schemeClr val="tx1"/>
+                </a:solidFill>
+                <a:latin typeface="+mn-lt"/>
+                <a:ea typeface="+mn-ea"/>
+              </a:defRPr>
+            </a:lvl7pPr>
+            <a:lvl8pPr marL="3052763" indent="-339725" algn="l" rtl="0" eaLnBrk="1" fontAlgn="base" hangingPunct="1">
+              <a:spcBef>
+                <a:spcPct val="20000"/>
+              </a:spcBef>
+              <a:spcAft>
+                <a:spcPct val="0"/>
+              </a:spcAft>
+              <a:buClr>
+                <a:schemeClr val="accent1"/>
+              </a:buClr>
+              <a:buSzPct val="75000"/>
+              <a:buFont typeface="Wingdings" pitchFamily="2" charset="2"/>
+              <a:buChar char="§"/>
+              <a:defRPr kumimoji="1">
+                <a:solidFill>
+                  <a:schemeClr val="tx1"/>
+                </a:solidFill>
+                <a:latin typeface="+mn-lt"/>
+                <a:ea typeface="+mn-ea"/>
+              </a:defRPr>
+            </a:lvl8pPr>
+            <a:lvl9pPr marL="3509963" indent="-339725" algn="l" rtl="0" eaLnBrk="1" fontAlgn="base" hangingPunct="1">
+              <a:spcBef>
+                <a:spcPct val="20000"/>
+              </a:spcBef>
+              <a:spcAft>
+                <a:spcPct val="0"/>
+              </a:spcAft>
+              <a:buClr>
+                <a:schemeClr val="accent1"/>
+              </a:buClr>
+              <a:buSzPct val="75000"/>
+              <a:buFont typeface="Wingdings" pitchFamily="2" charset="2"/>
+              <a:buChar char="§"/>
+              <a:defRPr kumimoji="1">
+                <a:solidFill>
+                  <a:schemeClr val="tx1"/>
+                </a:solidFill>
+                <a:latin typeface="+mn-lt"/>
+                <a:ea typeface="+mn-ea"/>
+              </a:defRPr>
+            </a:lvl9pPr>
+          </a:lstStyle>
+          <a:p>
+            <a:endParaRPr lang="ja-JP" altLang="en-US" kern="0" dirty="0"/>
+          </a:p>
+        </p:txBody>
+      </p:sp>
+      <p:sp>
+        <p:nvSpPr>
+          <p:cNvPr id="8" name="正方形/長方形 7">
+            <a:extLst>
+              <a:ext uri="{FF2B5EF4-FFF2-40B4-BE49-F238E27FC236}">
+                <a16:creationId xmlns:a16="http://schemas.microsoft.com/office/drawing/2014/main" id="{FB2F2228-9080-EF3D-EB3A-9FAE4C74A227}"/>
+              </a:ext>
+            </a:extLst>
+          </p:cNvPr>
+          <p:cNvSpPr/>
+          <p:nvPr/>
+        </p:nvSpPr>
+        <p:spPr bwMode="auto">
+          <a:xfrm>
+            <a:off x="6820836" y="3205011"/>
+            <a:ext cx="4411956" cy="2079508"/>
+          </a:xfrm>
+          <a:prstGeom prst="rect">
+            <a:avLst/>
+          </a:prstGeom>
+          <a:solidFill>
+            <a:schemeClr val="accent3">
+              <a:lumMod val="85000"/>
+            </a:schemeClr>
+          </a:solidFill>
+          <a:ln w="9525" cap="flat" cmpd="sng" algn="ctr">
+            <a:noFill/>
+            <a:prstDash val="solid"/>
+            <a:miter lim="800000"/>
+            <a:headEnd type="none" w="med" len="med"/>
+            <a:tailEnd type="none" w="med" len="med"/>
+          </a:ln>
+          <a:effectLst/>
+        </p:spPr>
+        <p:txBody>
+          <a:bodyPr vert="horz" wrap="none" lIns="91440" tIns="45720" rIns="91440" bIns="45720" numCol="1" rtlCol="0" anchor="t" anchorCtr="0" compatLnSpc="1">
+            <a:prstTxWarp prst="textNoShape">
+              <a:avLst/>
+            </a:prstTxWarp>
+          </a:bodyPr>
+          <a:lstStyle/>
+          <a:p>
+            <a:pPr marL="0" marR="0" indent="0" defTabSz="914400" rtl="0" eaLnBrk="1" fontAlgn="base" latinLnBrk="0" hangingPunct="1">
+              <a:spcBef>
+                <a:spcPct val="0"/>
+              </a:spcBef>
+              <a:spcAft>
+                <a:spcPct val="0"/>
+              </a:spcAft>
+              <a:buClrTx/>
+              <a:buSzTx/>
+              <a:buFontTx/>
+              <a:buNone/>
+              <a:tabLst/>
+            </a:pPr>
+            <a:r>
+              <a:rPr lang="en-US" altLang="ja-JP" sz="1500" dirty="0">
+                <a:solidFill>
+                  <a:schemeClr val="accent4">
+                    <a:lumMod val="65000"/>
+                    <a:lumOff val="35000"/>
+                  </a:schemeClr>
+                </a:solidFill>
+                <a:latin typeface="Arial" charset="0"/>
+                <a:ea typeface="ＭＳ Ｐゴシック" pitchFamily="50" charset="-128"/>
+              </a:rPr>
+              <a:t>R</a:t>
+            </a:r>
+          </a:p>
+          <a:p>
+            <a:pPr marL="0" marR="0" indent="0" defTabSz="914400" rtl="0" eaLnBrk="1" fontAlgn="base" latinLnBrk="0" hangingPunct="1">
+              <a:spcBef>
+                <a:spcPct val="0"/>
+              </a:spcBef>
+              <a:spcAft>
+                <a:spcPct val="0"/>
+              </a:spcAft>
+              <a:buClrTx/>
+              <a:buSzTx/>
+              <a:buFontTx/>
+              <a:buNone/>
+              <a:tabLst/>
+            </a:pPr>
+            <a:endParaRPr lang="en-US" altLang="ja-JP" sz="1500" dirty="0">
+              <a:solidFill>
+                <a:schemeClr val="accent4">
+                  <a:lumMod val="65000"/>
+                  <a:lumOff val="35000"/>
+                </a:schemeClr>
+              </a:solidFill>
+              <a:latin typeface="Arial" charset="0"/>
+              <a:ea typeface="ＭＳ Ｐゴシック" pitchFamily="50" charset="-128"/>
+            </a:endParaRPr>
+          </a:p>
+          <a:p>
+            <a:pPr marL="0" marR="0" indent="0" defTabSz="914400" rtl="0" eaLnBrk="1" fontAlgn="base" latinLnBrk="0" hangingPunct="1">
+              <a:spcBef>
+                <a:spcPct val="0"/>
+              </a:spcBef>
+              <a:spcAft>
+                <a:spcPct val="0"/>
+              </a:spcAft>
+              <a:buClrTx/>
+              <a:buSzTx/>
+              <a:buFontTx/>
+              <a:buNone/>
+              <a:tabLst/>
+            </a:pPr>
+            <a:endParaRPr lang="en-US" altLang="ja-JP" sz="1500" dirty="0">
+              <a:solidFill>
+                <a:schemeClr val="accent4">
+                  <a:lumMod val="65000"/>
+                  <a:lumOff val="35000"/>
+                </a:schemeClr>
+              </a:solidFill>
+              <a:latin typeface="Arial" charset="0"/>
+              <a:ea typeface="ＭＳ Ｐゴシック" pitchFamily="50" charset="-128"/>
+            </a:endParaRPr>
+          </a:p>
+          <a:p>
+            <a:pPr marL="0" marR="0" indent="0" defTabSz="914400" rtl="0" eaLnBrk="1" fontAlgn="base" latinLnBrk="0" hangingPunct="1">
+              <a:spcBef>
+                <a:spcPct val="0"/>
+              </a:spcBef>
+              <a:spcAft>
+                <a:spcPct val="0"/>
+              </a:spcAft>
+              <a:buClrTx/>
+              <a:buSzTx/>
+              <a:buFontTx/>
+              <a:buNone/>
+              <a:tabLst/>
+            </a:pPr>
+            <a:endParaRPr lang="en-US" altLang="ja-JP" sz="1500" dirty="0">
+              <a:solidFill>
+                <a:schemeClr val="accent4">
+                  <a:lumMod val="65000"/>
+                  <a:lumOff val="35000"/>
+                </a:schemeClr>
+              </a:solidFill>
+              <a:latin typeface="Arial" charset="0"/>
+              <a:ea typeface="ＭＳ Ｐゴシック" pitchFamily="50" charset="-128"/>
+            </a:endParaRPr>
+          </a:p>
+          <a:p>
+            <a:pPr marL="0" marR="0" indent="0" defTabSz="914400" rtl="0" eaLnBrk="1" fontAlgn="base" latinLnBrk="0" hangingPunct="1">
+              <a:spcBef>
+                <a:spcPct val="0"/>
+              </a:spcBef>
+              <a:spcAft>
+                <a:spcPct val="0"/>
+              </a:spcAft>
+              <a:buClrTx/>
+              <a:buSzTx/>
+              <a:buFontTx/>
+              <a:buNone/>
+              <a:tabLst/>
+            </a:pPr>
+            <a:endParaRPr lang="en-US" altLang="ja-JP" sz="1500" dirty="0">
+              <a:solidFill>
+                <a:schemeClr val="accent4">
+                  <a:lumMod val="65000"/>
+                  <a:lumOff val="35000"/>
+                </a:schemeClr>
+              </a:solidFill>
+              <a:latin typeface="Arial" charset="0"/>
+              <a:ea typeface="ＭＳ Ｐゴシック" pitchFamily="50" charset="-128"/>
+            </a:endParaRPr>
+          </a:p>
+        </p:txBody>
+      </p:sp>
+      <p:sp>
+        <p:nvSpPr>
+          <p:cNvPr id="11" name="コンテンツ プレースホルダー 2">
+            <a:extLst>
+              <a:ext uri="{FF2B5EF4-FFF2-40B4-BE49-F238E27FC236}">
+                <a16:creationId xmlns:a16="http://schemas.microsoft.com/office/drawing/2014/main" id="{E9FD4C4D-AFFF-8C85-F569-324720DC6E3B}"/>
+              </a:ext>
+            </a:extLst>
+          </p:cNvPr>
+          <p:cNvSpPr txBox="1">
+            <a:spLocks/>
+          </p:cNvSpPr>
+          <p:nvPr/>
+        </p:nvSpPr>
+        <p:spPr>
+          <a:xfrm>
+            <a:off x="762000" y="1420814"/>
+            <a:ext cx="10972800" cy="5113337"/>
+          </a:xfrm>
+          <a:prstGeom prst="rect">
+            <a:avLst/>
+          </a:prstGeom>
+        </p:spPr>
+        <p:txBody>
+          <a:bodyPr/>
+          <a:lstStyle>
+            <a:lvl1pPr marL="342900" indent="-342900" algn="l" rtl="0" eaLnBrk="1" fontAlgn="base" hangingPunct="1">
+              <a:spcBef>
+                <a:spcPct val="20000"/>
+              </a:spcBef>
+              <a:spcAft>
+                <a:spcPct val="0"/>
+              </a:spcAft>
+              <a:buClr>
+                <a:schemeClr val="accent1"/>
+              </a:buClr>
+              <a:buSzPct val="65000"/>
+              <a:buFont typeface="Wingdings" pitchFamily="2" charset="2"/>
+              <a:buChar char="n"/>
+              <a:defRPr kumimoji="1" sz="3200">
+                <a:solidFill>
+                  <a:schemeClr val="tx1"/>
+                </a:solidFill>
+                <a:latin typeface="+mn-lt"/>
+                <a:ea typeface="+mn-ea"/>
+                <a:cs typeface="+mn-cs"/>
+              </a:defRPr>
+            </a:lvl1pPr>
+            <a:lvl2pPr marL="669925" indent="-325438" algn="l" rtl="0" eaLnBrk="1" fontAlgn="base" hangingPunct="1">
+              <a:spcBef>
+                <a:spcPct val="20000"/>
+              </a:spcBef>
+              <a:spcAft>
+                <a:spcPct val="0"/>
+              </a:spcAft>
+              <a:buClr>
+                <a:schemeClr val="accent2"/>
+              </a:buClr>
+              <a:buSzPct val="60000"/>
+              <a:buFont typeface="Wingdings" pitchFamily="2" charset="2"/>
+              <a:buChar char="q"/>
+              <a:defRPr kumimoji="1" sz="2800">
+                <a:solidFill>
+                  <a:schemeClr val="tx1"/>
+                </a:solidFill>
+                <a:latin typeface="+mn-lt"/>
+                <a:ea typeface="+mn-ea"/>
+              </a:defRPr>
+            </a:lvl2pPr>
+            <a:lvl3pPr marL="1022350" indent="-350838" algn="l" rtl="0" eaLnBrk="1" fontAlgn="base" hangingPunct="1">
+              <a:spcBef>
+                <a:spcPct val="20000"/>
+              </a:spcBef>
+              <a:spcAft>
+                <a:spcPct val="0"/>
+              </a:spcAft>
+              <a:buClr>
+                <a:schemeClr val="accent1"/>
+              </a:buClr>
+              <a:buSzPct val="65000"/>
+              <a:buFont typeface="Wingdings" pitchFamily="2" charset="2"/>
+              <a:buChar char="n"/>
+              <a:defRPr kumimoji="1" sz="2400">
+                <a:solidFill>
+                  <a:schemeClr val="tx1"/>
+                </a:solidFill>
+                <a:latin typeface="+mn-lt"/>
+                <a:ea typeface="+mn-ea"/>
+              </a:defRPr>
+            </a:lvl3pPr>
+            <a:lvl4pPr marL="1339850" indent="-315913" algn="l" rtl="0" eaLnBrk="1" fontAlgn="base" hangingPunct="1">
+              <a:spcBef>
+                <a:spcPct val="20000"/>
+              </a:spcBef>
+              <a:spcAft>
+                <a:spcPct val="0"/>
+              </a:spcAft>
+              <a:buClr>
+                <a:schemeClr val="accent2"/>
+              </a:buClr>
+              <a:buSzPct val="70000"/>
+              <a:buFont typeface="Wingdings" pitchFamily="2" charset="2"/>
+              <a:buChar char="q"/>
+              <a:defRPr kumimoji="1" sz="2000">
+                <a:solidFill>
+                  <a:schemeClr val="tx1"/>
+                </a:solidFill>
+                <a:latin typeface="+mn-lt"/>
+                <a:ea typeface="+mn-ea"/>
+              </a:defRPr>
+            </a:lvl4pPr>
+            <a:lvl5pPr marL="1681163" indent="-339725" algn="l" rtl="0" eaLnBrk="1" fontAlgn="base" hangingPunct="1">
+              <a:spcBef>
+                <a:spcPct val="20000"/>
+              </a:spcBef>
+              <a:spcAft>
+                <a:spcPct val="0"/>
+              </a:spcAft>
+              <a:buClr>
+                <a:schemeClr val="accent1"/>
+              </a:buClr>
+              <a:buSzPct val="75000"/>
+              <a:buFont typeface="Wingdings" pitchFamily="2" charset="2"/>
+              <a:buChar char="§"/>
+              <a:defRPr kumimoji="1">
+                <a:solidFill>
+                  <a:schemeClr val="tx1"/>
+                </a:solidFill>
+                <a:latin typeface="+mn-lt"/>
+                <a:ea typeface="+mn-ea"/>
+              </a:defRPr>
+            </a:lvl5pPr>
+            <a:lvl6pPr marL="2138363" indent="-339725" algn="l" rtl="0" eaLnBrk="1" fontAlgn="base" hangingPunct="1">
+              <a:spcBef>
+                <a:spcPct val="20000"/>
+              </a:spcBef>
+              <a:spcAft>
+                <a:spcPct val="0"/>
+              </a:spcAft>
+              <a:buClr>
+                <a:schemeClr val="accent1"/>
+              </a:buClr>
+              <a:buSzPct val="75000"/>
+              <a:buFont typeface="Wingdings" pitchFamily="2" charset="2"/>
+              <a:buChar char="§"/>
+              <a:defRPr kumimoji="1">
+                <a:solidFill>
+                  <a:schemeClr val="tx1"/>
+                </a:solidFill>
+                <a:latin typeface="+mn-lt"/>
+                <a:ea typeface="+mn-ea"/>
+              </a:defRPr>
+            </a:lvl6pPr>
+            <a:lvl7pPr marL="2595563" indent="-339725" algn="l" rtl="0" eaLnBrk="1" fontAlgn="base" hangingPunct="1">
+              <a:spcBef>
+                <a:spcPct val="20000"/>
+              </a:spcBef>
+              <a:spcAft>
+                <a:spcPct val="0"/>
+              </a:spcAft>
+              <a:buClr>
+                <a:schemeClr val="accent1"/>
+              </a:buClr>
+              <a:buSzPct val="75000"/>
+              <a:buFont typeface="Wingdings" pitchFamily="2" charset="2"/>
+              <a:buChar char="§"/>
+              <a:defRPr kumimoji="1">
+                <a:solidFill>
+                  <a:schemeClr val="tx1"/>
+                </a:solidFill>
+                <a:latin typeface="+mn-lt"/>
+                <a:ea typeface="+mn-ea"/>
+              </a:defRPr>
+            </a:lvl7pPr>
+            <a:lvl8pPr marL="3052763" indent="-339725" algn="l" rtl="0" eaLnBrk="1" fontAlgn="base" hangingPunct="1">
+              <a:spcBef>
+                <a:spcPct val="20000"/>
+              </a:spcBef>
+              <a:spcAft>
+                <a:spcPct val="0"/>
+              </a:spcAft>
+              <a:buClr>
+                <a:schemeClr val="accent1"/>
+              </a:buClr>
+              <a:buSzPct val="75000"/>
+              <a:buFont typeface="Wingdings" pitchFamily="2" charset="2"/>
+              <a:buChar char="§"/>
+              <a:defRPr kumimoji="1">
+                <a:solidFill>
+                  <a:schemeClr val="tx1"/>
+                </a:solidFill>
+                <a:latin typeface="+mn-lt"/>
+                <a:ea typeface="+mn-ea"/>
+              </a:defRPr>
+            </a:lvl8pPr>
+            <a:lvl9pPr marL="3509963" indent="-339725" algn="l" rtl="0" eaLnBrk="1" fontAlgn="base" hangingPunct="1">
+              <a:spcBef>
+                <a:spcPct val="20000"/>
+              </a:spcBef>
+              <a:spcAft>
+                <a:spcPct val="0"/>
+              </a:spcAft>
+              <a:buClr>
+                <a:schemeClr val="accent1"/>
+              </a:buClr>
+              <a:buSzPct val="75000"/>
+              <a:buFont typeface="Wingdings" pitchFamily="2" charset="2"/>
+              <a:buChar char="§"/>
+              <a:defRPr kumimoji="1">
+                <a:solidFill>
+                  <a:schemeClr val="tx1"/>
+                </a:solidFill>
+                <a:latin typeface="+mn-lt"/>
+                <a:ea typeface="+mn-ea"/>
+              </a:defRPr>
+            </a:lvl9pPr>
+          </a:lstStyle>
+          <a:p>
+            <a:pPr marL="0" indent="0">
+              <a:buNone/>
+            </a:pPr>
+            <a:r>
+              <a:rPr lang="ja-JP" altLang="en-US" sz="2400" kern="0" dirty="0"/>
+              <a:t>データを学習用とテスト用に分ける</a:t>
+            </a:r>
+            <a:endParaRPr lang="en-US" altLang="ja-JP" sz="2400" kern="0" dirty="0"/>
+          </a:p>
+          <a:p>
+            <a:r>
+              <a:rPr lang="ja-JP" altLang="en-US" sz="2400" kern="0" dirty="0"/>
+              <a:t>図を表示する</a:t>
+            </a:r>
+          </a:p>
+        </p:txBody>
+      </p:sp>
+      <p:pic>
+        <p:nvPicPr>
+          <p:cNvPr id="6" name="図 5">
+            <a:extLst>
+              <a:ext uri="{FF2B5EF4-FFF2-40B4-BE49-F238E27FC236}">
+                <a16:creationId xmlns:a16="http://schemas.microsoft.com/office/drawing/2014/main" id="{EB8A4F90-460F-C307-D9DD-719C46DD5676}"/>
+              </a:ext>
+            </a:extLst>
+          </p:cNvPr>
+          <p:cNvPicPr>
+            <a:picLocks noChangeAspect="1"/>
+          </p:cNvPicPr>
+          <p:nvPr/>
+        </p:nvPicPr>
+        <p:blipFill>
+          <a:blip r:embed="rId2"/>
+          <a:stretch>
+            <a:fillRect/>
+          </a:stretch>
+        </p:blipFill>
+        <p:spPr>
+          <a:xfrm>
+            <a:off x="6184607" y="1302719"/>
+            <a:ext cx="6121715" cy="304816"/>
+          </a:xfrm>
+          <a:prstGeom prst="rect">
+            <a:avLst/>
+          </a:prstGeom>
+          <a:ln>
+            <a:solidFill>
+              <a:schemeClr val="accent1"/>
+            </a:solidFill>
+          </a:ln>
+        </p:spPr>
+      </p:pic>
+      <p:pic>
+        <p:nvPicPr>
+          <p:cNvPr id="10" name="図 9">
+            <a:extLst>
+              <a:ext uri="{FF2B5EF4-FFF2-40B4-BE49-F238E27FC236}">
+                <a16:creationId xmlns:a16="http://schemas.microsoft.com/office/drawing/2014/main" id="{ED1A23D9-8C35-7D43-3816-DB86A730D8F0}"/>
+              </a:ext>
+            </a:extLst>
+          </p:cNvPr>
+          <p:cNvPicPr>
+            <a:picLocks noChangeAspect="1"/>
+          </p:cNvPicPr>
+          <p:nvPr/>
+        </p:nvPicPr>
+        <p:blipFill>
+          <a:blip r:embed="rId3"/>
+          <a:stretch>
+            <a:fillRect/>
+          </a:stretch>
+        </p:blipFill>
+        <p:spPr>
+          <a:xfrm>
+            <a:off x="7175281" y="3429000"/>
+            <a:ext cx="4254719" cy="1428823"/>
+          </a:xfrm>
+          <a:prstGeom prst="rect">
+            <a:avLst/>
+          </a:prstGeom>
+          <a:ln>
+            <a:solidFill>
+              <a:schemeClr val="accent3">
+                <a:lumMod val="65000"/>
+              </a:schemeClr>
+            </a:solidFill>
+          </a:ln>
+        </p:spPr>
+      </p:pic>
+    </p:spTree>
+    <p:extLst>
+      <p:ext uri="{BB962C8B-B14F-4D97-AF65-F5344CB8AC3E}">
+        <p14:creationId xmlns:p14="http://schemas.microsoft.com/office/powerpoint/2010/main" val="3961377041"/>
+      </p:ext>
+    </p:extLst>
+  </p:cSld>
+  <p:clrMapOvr>
+    <a:masterClrMapping/>
+  </p:clrMapOvr>
+</p:sld>
+</file>
+
+<file path=ppt/slides/slide9.xml><?xml version="1.0" encoding="utf-8"?>
 <p:sld xmlns:a="http://schemas.openxmlformats.org/drawingml/2006/main" xmlns:r="http://schemas.openxmlformats.org/officeDocument/2006/relationships" xmlns:p="http://schemas.openxmlformats.org/presentationml/2006/main">
   <p:cSld>
     <p:spTree>

--- a/GoogleColab.part3.pptx
+++ b/GoogleColab.part3.pptx
@@ -5,7 +5,7 @@
     <p:sldMasterId id="2147483660" r:id="rId1"/>
   </p:sldMasterIdLst>
   <p:notesMasterIdLst>
-    <p:notesMasterId r:id="rId11"/>
+    <p:notesMasterId r:id="rId13"/>
   </p:notesMasterIdLst>
   <p:sldIdLst>
     <p:sldId id="256" r:id="rId2"/>
@@ -16,7 +16,9 @@
     <p:sldId id="324" r:id="rId7"/>
     <p:sldId id="323" r:id="rId8"/>
     <p:sldId id="325" r:id="rId9"/>
-    <p:sldId id="319" r:id="rId10"/>
+    <p:sldId id="326" r:id="rId10"/>
+    <p:sldId id="327" r:id="rId11"/>
+    <p:sldId id="319" r:id="rId12"/>
   </p:sldIdLst>
   <p:sldSz cx="12192000" cy="6858000"/>
   <p:notesSz cx="6802438" cy="9937750"/>
@@ -132,6 +134,8 @@
             <p14:sldId id="324"/>
             <p14:sldId id="323"/>
             <p14:sldId id="325"/>
+            <p14:sldId id="326"/>
+            <p14:sldId id="327"/>
           </p14:sldIdLst>
         </p14:section>
         <p14:section name="参考文献" id="{CFFDC787-557B-4910-97C6-D64501BECE89}">
@@ -230,7 +234,7 @@
           <a:p>
             <a:fld id="{1B9496A5-7C6D-4562-83AD-78E6F1D02C8F}" type="datetimeFigureOut">
               <a:rPr kumimoji="1" lang="ja-JP" altLang="en-US" smtClean="0"/>
-              <a:t>2026/9/9</a:t>
+              <a:t>2026/9/10</a:t>
             </a:fld>
             <a:endParaRPr kumimoji="1" lang="ja-JP" altLang="en-US"/>
           </a:p>
@@ -763,7 +767,7 @@
             <a:fld id="{5BBCB299-525B-C043-8ABF-E2AB50D107C3}" type="datetimeFigureOut">
               <a:rPr lang="ja-JP" altLang="en-US" smtClean="0"/>
               <a:pPr/>
-              <a:t>2026/9/9</a:t>
+              <a:t>2026/9/10</a:t>
             </a:fld>
             <a:endParaRPr lang="ja-JP" altLang="en-US" dirty="0"/>
           </a:p>
@@ -989,7 +993,7 @@
             <a:fld id="{5BBCB299-525B-C043-8ABF-E2AB50D107C3}" type="datetimeFigureOut">
               <a:rPr lang="ja-JP" altLang="en-US" smtClean="0"/>
               <a:pPr/>
-              <a:t>2026/9/9</a:t>
+              <a:t>2026/9/10</a:t>
             </a:fld>
             <a:endParaRPr lang="ja-JP" altLang="en-US" dirty="0"/>
           </a:p>
@@ -1219,7 +1223,7 @@
             <a:fld id="{5BBCB299-525B-C043-8ABF-E2AB50D107C3}" type="datetimeFigureOut">
               <a:rPr lang="ja-JP" altLang="en-US" smtClean="0"/>
               <a:pPr/>
-              <a:t>2026/9/9</a:t>
+              <a:t>2026/9/10</a:t>
             </a:fld>
             <a:endParaRPr lang="ja-JP" altLang="en-US" dirty="0"/>
           </a:p>
@@ -1537,7 +1541,7 @@
             <a:fld id="{5BBCB299-525B-C043-8ABF-E2AB50D107C3}" type="datetimeFigureOut">
               <a:rPr lang="ja-JP" altLang="en-US" smtClean="0"/>
               <a:pPr/>
-              <a:t>2026/9/9</a:t>
+              <a:t>2026/9/10</a:t>
             </a:fld>
             <a:endParaRPr lang="ja-JP" altLang="en-US" dirty="0"/>
           </a:p>
@@ -1757,7 +1761,7 @@
             <a:fld id="{5BBCB299-525B-C043-8ABF-E2AB50D107C3}" type="datetimeFigureOut">
               <a:rPr lang="ja-JP" altLang="en-US" smtClean="0"/>
               <a:pPr/>
-              <a:t>2026/9/9</a:t>
+              <a:t>2026/9/10</a:t>
             </a:fld>
             <a:endParaRPr lang="ja-JP" altLang="en-US" dirty="0"/>
           </a:p>
@@ -1968,7 +1972,7 @@
             <a:fld id="{5BBCB299-525B-C043-8ABF-E2AB50D107C3}" type="datetimeFigureOut">
               <a:rPr lang="ja-JP" altLang="en-US" smtClean="0"/>
               <a:pPr/>
-              <a:t>2026/9/9</a:t>
+              <a:t>2026/9/10</a:t>
             </a:fld>
             <a:endParaRPr lang="ja-JP" altLang="en-US" dirty="0"/>
           </a:p>
@@ -2337,7 +2341,7 @@
             <a:fld id="{5BBCB299-525B-C043-8ABF-E2AB50D107C3}" type="datetimeFigureOut">
               <a:rPr lang="ja-JP" altLang="en-US" smtClean="0"/>
               <a:pPr/>
-              <a:t>2026/9/9</a:t>
+              <a:t>2026/9/10</a:t>
             </a:fld>
             <a:endParaRPr lang="ja-JP" altLang="en-US" dirty="0"/>
           </a:p>
@@ -2845,7 +2849,7 @@
             <a:fld id="{5BBCB299-525B-C043-8ABF-E2AB50D107C3}" type="datetimeFigureOut">
               <a:rPr lang="ja-JP" altLang="en-US" smtClean="0"/>
               <a:pPr/>
-              <a:t>2026/9/9</a:t>
+              <a:t>2026/9/10</a:t>
             </a:fld>
             <a:endParaRPr lang="ja-JP" altLang="en-US" dirty="0"/>
           </a:p>
@@ -2982,7 +2986,7 @@
             <a:fld id="{5BBCB299-525B-C043-8ABF-E2AB50D107C3}" type="datetimeFigureOut">
               <a:rPr lang="ja-JP" altLang="en-US" smtClean="0"/>
               <a:pPr/>
-              <a:t>2026/9/9</a:t>
+              <a:t>2026/9/10</a:t>
             </a:fld>
             <a:endParaRPr lang="ja-JP" altLang="en-US" dirty="0"/>
           </a:p>
@@ -3097,7 +3101,7 @@
             <a:fld id="{5BBCB299-525B-C043-8ABF-E2AB50D107C3}" type="datetimeFigureOut">
               <a:rPr lang="ja-JP" altLang="en-US" smtClean="0"/>
               <a:pPr/>
-              <a:t>2026/9/9</a:t>
+              <a:t>2026/9/10</a:t>
             </a:fld>
             <a:endParaRPr lang="ja-JP" altLang="en-US" dirty="0"/>
           </a:p>
@@ -3424,7 +3428,7 @@
             <a:fld id="{5BBCB299-525B-C043-8ABF-E2AB50D107C3}" type="datetimeFigureOut">
               <a:rPr lang="ja-JP" altLang="en-US" smtClean="0"/>
               <a:pPr/>
-              <a:t>2026/9/9</a:t>
+              <a:t>2026/9/10</a:t>
             </a:fld>
             <a:endParaRPr lang="ja-JP" altLang="en-US" dirty="0"/>
           </a:p>
@@ -3700,7 +3704,7 @@
             <a:fld id="{5BBCB299-525B-C043-8ABF-E2AB50D107C3}" type="datetimeFigureOut">
               <a:rPr lang="ja-JP" altLang="en-US" smtClean="0"/>
               <a:pPr/>
-              <a:t>2026/9/9</a:t>
+              <a:t>2026/9/10</a:t>
             </a:fld>
             <a:endParaRPr lang="ja-JP" altLang="en-US" dirty="0"/>
           </a:p>
@@ -4020,7 +4024,7 @@
             <a:fld id="{5BBCB299-525B-C043-8ABF-E2AB50D107C3}" type="datetimeFigureOut">
               <a:rPr lang="ja-JP" altLang="en-US" smtClean="0"/>
               <a:pPr/>
-              <a:t>2026/9/9</a:t>
+              <a:t>2026/9/10</a:t>
             </a:fld>
             <a:endParaRPr lang="ja-JP" altLang="en-US" dirty="0"/>
           </a:p>
@@ -4866,6 +4870,1175 @@
     <p:extLst>
       <p:ext uri="{BB962C8B-B14F-4D97-AF65-F5344CB8AC3E}">
         <p14:creationId xmlns:p14="http://schemas.microsoft.com/office/powerpoint/2010/main" val="3150873403"/>
+      </p:ext>
+    </p:extLst>
+  </p:cSld>
+  <p:clrMapOvr>
+    <a:masterClrMapping/>
+  </p:clrMapOvr>
+</p:sld>
+</file>
+
+<file path=ppt/slides/slide10.xml><?xml version="1.0" encoding="utf-8"?>
+<p:sld xmlns:a="http://schemas.openxmlformats.org/drawingml/2006/main" xmlns:r="http://schemas.openxmlformats.org/officeDocument/2006/relationships" xmlns:p="http://schemas.openxmlformats.org/presentationml/2006/main">
+  <p:cSld>
+    <p:spTree>
+      <p:nvGrpSpPr>
+        <p:cNvPr id="1" name="">
+          <a:extLst>
+            <a:ext uri="{FF2B5EF4-FFF2-40B4-BE49-F238E27FC236}">
+              <a16:creationId xmlns:a16="http://schemas.microsoft.com/office/drawing/2014/main" id="{7835C81A-9A21-CEC4-618C-AADDA9110577}"/>
+            </a:ext>
+          </a:extLst>
+        </p:cNvPr>
+        <p:cNvGrpSpPr/>
+        <p:nvPr/>
+      </p:nvGrpSpPr>
+      <p:grpSpPr>
+        <a:xfrm>
+          <a:off x="0" y="0"/>
+          <a:ext cx="0" cy="0"/>
+          <a:chOff x="0" y="0"/>
+          <a:chExt cx="0" cy="0"/>
+        </a:xfrm>
+      </p:grpSpPr>
+      <p:sp>
+        <p:nvSpPr>
+          <p:cNvPr id="7" name="正方形/長方形 6">
+            <a:extLst>
+              <a:ext uri="{FF2B5EF4-FFF2-40B4-BE49-F238E27FC236}">
+                <a16:creationId xmlns:a16="http://schemas.microsoft.com/office/drawing/2014/main" id="{3BFEA26B-2A7C-CDA7-A5AE-7685E7C948B1}"/>
+              </a:ext>
+            </a:extLst>
+          </p:cNvPr>
+          <p:cNvSpPr/>
+          <p:nvPr/>
+        </p:nvSpPr>
+        <p:spPr bwMode="auto">
+          <a:xfrm>
+            <a:off x="5832784" y="1297640"/>
+            <a:ext cx="6610242" cy="3309096"/>
+          </a:xfrm>
+          <a:prstGeom prst="rect">
+            <a:avLst/>
+          </a:prstGeom>
+          <a:solidFill>
+            <a:schemeClr val="accent5">
+              <a:lumMod val="40000"/>
+              <a:lumOff val="60000"/>
+            </a:schemeClr>
+          </a:solidFill>
+          <a:ln w="9525" cap="flat" cmpd="sng" algn="ctr">
+            <a:noFill/>
+            <a:prstDash val="solid"/>
+            <a:miter lim="800000"/>
+            <a:headEnd type="none" w="med" len="med"/>
+            <a:tailEnd type="none" w="med" len="med"/>
+          </a:ln>
+          <a:effectLst/>
+        </p:spPr>
+        <p:txBody>
+          <a:bodyPr vert="horz" wrap="none" lIns="91440" tIns="45720" rIns="91440" bIns="45720" numCol="1" rtlCol="0" anchor="t" anchorCtr="0" compatLnSpc="1">
+            <a:prstTxWarp prst="textNoShape">
+              <a:avLst/>
+            </a:prstTxWarp>
+          </a:bodyPr>
+          <a:lstStyle/>
+          <a:p>
+            <a:pPr marL="0" marR="0" indent="0" defTabSz="914400" rtl="0" eaLnBrk="1" fontAlgn="base" latinLnBrk="0" hangingPunct="1">
+              <a:spcBef>
+                <a:spcPct val="0"/>
+              </a:spcBef>
+              <a:spcAft>
+                <a:spcPct val="0"/>
+              </a:spcAft>
+              <a:buClrTx/>
+              <a:buSzTx/>
+              <a:buFontTx/>
+              <a:buNone/>
+              <a:tabLst/>
+            </a:pPr>
+            <a:r>
+              <a:rPr lang="en-US" altLang="ja-JP" sz="1500" dirty="0">
+                <a:solidFill>
+                  <a:schemeClr val="accent5">
+                    <a:lumMod val="50000"/>
+                  </a:schemeClr>
+                </a:solidFill>
+                <a:latin typeface="Arial" charset="0"/>
+                <a:ea typeface="ＭＳ Ｐゴシック" pitchFamily="50" charset="-128"/>
+              </a:rPr>
+              <a:t>P</a:t>
+            </a:r>
+          </a:p>
+          <a:p>
+            <a:pPr marL="0" marR="0" indent="0" defTabSz="914400" rtl="0" eaLnBrk="1" fontAlgn="base" latinLnBrk="0" hangingPunct="1">
+              <a:spcBef>
+                <a:spcPct val="0"/>
+              </a:spcBef>
+              <a:spcAft>
+                <a:spcPct val="0"/>
+              </a:spcAft>
+              <a:buClrTx/>
+              <a:buSzTx/>
+              <a:buFontTx/>
+              <a:buNone/>
+              <a:tabLst/>
+            </a:pPr>
+            <a:endParaRPr lang="en-US" altLang="ja-JP" sz="1500" dirty="0">
+              <a:solidFill>
+                <a:schemeClr val="accent5">
+                  <a:lumMod val="50000"/>
+                </a:schemeClr>
+              </a:solidFill>
+              <a:latin typeface="Arial" charset="0"/>
+              <a:ea typeface="ＭＳ Ｐゴシック" pitchFamily="50" charset="-128"/>
+            </a:endParaRPr>
+          </a:p>
+          <a:p>
+            <a:pPr marL="0" marR="0" indent="0" defTabSz="914400" rtl="0" eaLnBrk="1" fontAlgn="base" latinLnBrk="0" hangingPunct="1">
+              <a:spcBef>
+                <a:spcPct val="0"/>
+              </a:spcBef>
+              <a:spcAft>
+                <a:spcPct val="0"/>
+              </a:spcAft>
+              <a:buClrTx/>
+              <a:buSzTx/>
+              <a:buFontTx/>
+              <a:buNone/>
+              <a:tabLst/>
+            </a:pPr>
+            <a:endParaRPr lang="en-US" altLang="ja-JP" sz="1500" dirty="0">
+              <a:solidFill>
+                <a:schemeClr val="accent5">
+                  <a:lumMod val="50000"/>
+                </a:schemeClr>
+              </a:solidFill>
+              <a:latin typeface="Arial" charset="0"/>
+              <a:ea typeface="ＭＳ Ｐゴシック" pitchFamily="50" charset="-128"/>
+            </a:endParaRPr>
+          </a:p>
+        </p:txBody>
+      </p:sp>
+      <p:sp>
+        <p:nvSpPr>
+          <p:cNvPr id="2" name="タイトル 1">
+            <a:extLst>
+              <a:ext uri="{FF2B5EF4-FFF2-40B4-BE49-F238E27FC236}">
+                <a16:creationId xmlns:a16="http://schemas.microsoft.com/office/drawing/2014/main" id="{AD031C14-81B9-2475-EAA3-8DA6F5206AF6}"/>
+              </a:ext>
+            </a:extLst>
+          </p:cNvPr>
+          <p:cNvSpPr>
+            <a:spLocks noGrp="1"/>
+          </p:cNvSpPr>
+          <p:nvPr>
+            <p:ph type="title"/>
+          </p:nvPr>
+        </p:nvSpPr>
+        <p:spPr/>
+        <p:txBody>
+          <a:bodyPr/>
+          <a:lstStyle/>
+          <a:p>
+            <a:r>
+              <a:rPr kumimoji="1" lang="en-US" altLang="ja-JP" dirty="0" err="1"/>
+              <a:t>elephant.ipynb</a:t>
+            </a:r>
+            <a:endParaRPr kumimoji="1" lang="ja-JP" altLang="en-US" dirty="0"/>
+          </a:p>
+        </p:txBody>
+      </p:sp>
+      <p:sp>
+        <p:nvSpPr>
+          <p:cNvPr id="3" name="コンテンツ プレースホルダー 2">
+            <a:extLst>
+              <a:ext uri="{FF2B5EF4-FFF2-40B4-BE49-F238E27FC236}">
+                <a16:creationId xmlns:a16="http://schemas.microsoft.com/office/drawing/2014/main" id="{13E17388-F4D1-41A6-3529-214D010A152D}"/>
+              </a:ext>
+            </a:extLst>
+          </p:cNvPr>
+          <p:cNvSpPr txBox="1">
+            <a:spLocks/>
+          </p:cNvSpPr>
+          <p:nvPr/>
+        </p:nvSpPr>
+        <p:spPr>
+          <a:xfrm>
+            <a:off x="609600" y="1268414"/>
+            <a:ext cx="10972800" cy="5113337"/>
+          </a:xfrm>
+          <a:prstGeom prst="rect">
+            <a:avLst/>
+          </a:prstGeom>
+        </p:spPr>
+        <p:txBody>
+          <a:bodyPr/>
+          <a:lstStyle>
+            <a:lvl1pPr marL="342900" indent="-342900" algn="l" rtl="0" eaLnBrk="1" fontAlgn="base" hangingPunct="1">
+              <a:spcBef>
+                <a:spcPct val="20000"/>
+              </a:spcBef>
+              <a:spcAft>
+                <a:spcPct val="0"/>
+              </a:spcAft>
+              <a:buClr>
+                <a:schemeClr val="accent1"/>
+              </a:buClr>
+              <a:buSzPct val="65000"/>
+              <a:buFont typeface="Wingdings" pitchFamily="2" charset="2"/>
+              <a:buChar char="n"/>
+              <a:defRPr kumimoji="1" sz="3200">
+                <a:solidFill>
+                  <a:schemeClr val="tx1"/>
+                </a:solidFill>
+                <a:latin typeface="+mn-lt"/>
+                <a:ea typeface="+mn-ea"/>
+                <a:cs typeface="+mn-cs"/>
+              </a:defRPr>
+            </a:lvl1pPr>
+            <a:lvl2pPr marL="669925" indent="-325438" algn="l" rtl="0" eaLnBrk="1" fontAlgn="base" hangingPunct="1">
+              <a:spcBef>
+                <a:spcPct val="20000"/>
+              </a:spcBef>
+              <a:spcAft>
+                <a:spcPct val="0"/>
+              </a:spcAft>
+              <a:buClr>
+                <a:schemeClr val="accent2"/>
+              </a:buClr>
+              <a:buSzPct val="60000"/>
+              <a:buFont typeface="Wingdings" pitchFamily="2" charset="2"/>
+              <a:buChar char="q"/>
+              <a:defRPr kumimoji="1" sz="2800">
+                <a:solidFill>
+                  <a:schemeClr val="tx1"/>
+                </a:solidFill>
+                <a:latin typeface="+mn-lt"/>
+                <a:ea typeface="+mn-ea"/>
+              </a:defRPr>
+            </a:lvl2pPr>
+            <a:lvl3pPr marL="1022350" indent="-350838" algn="l" rtl="0" eaLnBrk="1" fontAlgn="base" hangingPunct="1">
+              <a:spcBef>
+                <a:spcPct val="20000"/>
+              </a:spcBef>
+              <a:spcAft>
+                <a:spcPct val="0"/>
+              </a:spcAft>
+              <a:buClr>
+                <a:schemeClr val="accent1"/>
+              </a:buClr>
+              <a:buSzPct val="65000"/>
+              <a:buFont typeface="Wingdings" pitchFamily="2" charset="2"/>
+              <a:buChar char="n"/>
+              <a:defRPr kumimoji="1" sz="2400">
+                <a:solidFill>
+                  <a:schemeClr val="tx1"/>
+                </a:solidFill>
+                <a:latin typeface="+mn-lt"/>
+                <a:ea typeface="+mn-ea"/>
+              </a:defRPr>
+            </a:lvl3pPr>
+            <a:lvl4pPr marL="1339850" indent="-315913" algn="l" rtl="0" eaLnBrk="1" fontAlgn="base" hangingPunct="1">
+              <a:spcBef>
+                <a:spcPct val="20000"/>
+              </a:spcBef>
+              <a:spcAft>
+                <a:spcPct val="0"/>
+              </a:spcAft>
+              <a:buClr>
+                <a:schemeClr val="accent2"/>
+              </a:buClr>
+              <a:buSzPct val="70000"/>
+              <a:buFont typeface="Wingdings" pitchFamily="2" charset="2"/>
+              <a:buChar char="q"/>
+              <a:defRPr kumimoji="1" sz="2000">
+                <a:solidFill>
+                  <a:schemeClr val="tx1"/>
+                </a:solidFill>
+                <a:latin typeface="+mn-lt"/>
+                <a:ea typeface="+mn-ea"/>
+              </a:defRPr>
+            </a:lvl4pPr>
+            <a:lvl5pPr marL="1681163" indent="-339725" algn="l" rtl="0" eaLnBrk="1" fontAlgn="base" hangingPunct="1">
+              <a:spcBef>
+                <a:spcPct val="20000"/>
+              </a:spcBef>
+              <a:spcAft>
+                <a:spcPct val="0"/>
+              </a:spcAft>
+              <a:buClr>
+                <a:schemeClr val="accent1"/>
+              </a:buClr>
+              <a:buSzPct val="75000"/>
+              <a:buFont typeface="Wingdings" pitchFamily="2" charset="2"/>
+              <a:buChar char="§"/>
+              <a:defRPr kumimoji="1">
+                <a:solidFill>
+                  <a:schemeClr val="tx1"/>
+                </a:solidFill>
+                <a:latin typeface="+mn-lt"/>
+                <a:ea typeface="+mn-ea"/>
+              </a:defRPr>
+            </a:lvl5pPr>
+            <a:lvl6pPr marL="2138363" indent="-339725" algn="l" rtl="0" eaLnBrk="1" fontAlgn="base" hangingPunct="1">
+              <a:spcBef>
+                <a:spcPct val="20000"/>
+              </a:spcBef>
+              <a:spcAft>
+                <a:spcPct val="0"/>
+              </a:spcAft>
+              <a:buClr>
+                <a:schemeClr val="accent1"/>
+              </a:buClr>
+              <a:buSzPct val="75000"/>
+              <a:buFont typeface="Wingdings" pitchFamily="2" charset="2"/>
+              <a:buChar char="§"/>
+              <a:defRPr kumimoji="1">
+                <a:solidFill>
+                  <a:schemeClr val="tx1"/>
+                </a:solidFill>
+                <a:latin typeface="+mn-lt"/>
+                <a:ea typeface="+mn-ea"/>
+              </a:defRPr>
+            </a:lvl6pPr>
+            <a:lvl7pPr marL="2595563" indent="-339725" algn="l" rtl="0" eaLnBrk="1" fontAlgn="base" hangingPunct="1">
+              <a:spcBef>
+                <a:spcPct val="20000"/>
+              </a:spcBef>
+              <a:spcAft>
+                <a:spcPct val="0"/>
+              </a:spcAft>
+              <a:buClr>
+                <a:schemeClr val="accent1"/>
+              </a:buClr>
+              <a:buSzPct val="75000"/>
+              <a:buFont typeface="Wingdings" pitchFamily="2" charset="2"/>
+              <a:buChar char="§"/>
+              <a:defRPr kumimoji="1">
+                <a:solidFill>
+                  <a:schemeClr val="tx1"/>
+                </a:solidFill>
+                <a:latin typeface="+mn-lt"/>
+                <a:ea typeface="+mn-ea"/>
+              </a:defRPr>
+            </a:lvl7pPr>
+            <a:lvl8pPr marL="3052763" indent="-339725" algn="l" rtl="0" eaLnBrk="1" fontAlgn="base" hangingPunct="1">
+              <a:spcBef>
+                <a:spcPct val="20000"/>
+              </a:spcBef>
+              <a:spcAft>
+                <a:spcPct val="0"/>
+              </a:spcAft>
+              <a:buClr>
+                <a:schemeClr val="accent1"/>
+              </a:buClr>
+              <a:buSzPct val="75000"/>
+              <a:buFont typeface="Wingdings" pitchFamily="2" charset="2"/>
+              <a:buChar char="§"/>
+              <a:defRPr kumimoji="1">
+                <a:solidFill>
+                  <a:schemeClr val="tx1"/>
+                </a:solidFill>
+                <a:latin typeface="+mn-lt"/>
+                <a:ea typeface="+mn-ea"/>
+              </a:defRPr>
+            </a:lvl8pPr>
+            <a:lvl9pPr marL="3509963" indent="-339725" algn="l" rtl="0" eaLnBrk="1" fontAlgn="base" hangingPunct="1">
+              <a:spcBef>
+                <a:spcPct val="20000"/>
+              </a:spcBef>
+              <a:spcAft>
+                <a:spcPct val="0"/>
+              </a:spcAft>
+              <a:buClr>
+                <a:schemeClr val="accent1"/>
+              </a:buClr>
+              <a:buSzPct val="75000"/>
+              <a:buFont typeface="Wingdings" pitchFamily="2" charset="2"/>
+              <a:buChar char="§"/>
+              <a:defRPr kumimoji="1">
+                <a:solidFill>
+                  <a:schemeClr val="tx1"/>
+                </a:solidFill>
+                <a:latin typeface="+mn-lt"/>
+                <a:ea typeface="+mn-ea"/>
+              </a:defRPr>
+            </a:lvl9pPr>
+          </a:lstStyle>
+          <a:p>
+            <a:endParaRPr lang="ja-JP" altLang="en-US" kern="0" dirty="0"/>
+          </a:p>
+        </p:txBody>
+      </p:sp>
+      <p:sp>
+        <p:nvSpPr>
+          <p:cNvPr id="8" name="正方形/長方形 7">
+            <a:extLst>
+              <a:ext uri="{FF2B5EF4-FFF2-40B4-BE49-F238E27FC236}">
+                <a16:creationId xmlns:a16="http://schemas.microsoft.com/office/drawing/2014/main" id="{FB2F2228-9080-EF3D-EB3A-9FAE4C74A227}"/>
+              </a:ext>
+            </a:extLst>
+          </p:cNvPr>
+          <p:cNvSpPr/>
+          <p:nvPr/>
+        </p:nvSpPr>
+        <p:spPr bwMode="auto">
+          <a:xfrm>
+            <a:off x="5832784" y="4729910"/>
+            <a:ext cx="4913964" cy="2079508"/>
+          </a:xfrm>
+          <a:prstGeom prst="rect">
+            <a:avLst/>
+          </a:prstGeom>
+          <a:solidFill>
+            <a:schemeClr val="accent3">
+              <a:lumMod val="85000"/>
+            </a:schemeClr>
+          </a:solidFill>
+          <a:ln w="9525" cap="flat" cmpd="sng" algn="ctr">
+            <a:noFill/>
+            <a:prstDash val="solid"/>
+            <a:miter lim="800000"/>
+            <a:headEnd type="none" w="med" len="med"/>
+            <a:tailEnd type="none" w="med" len="med"/>
+          </a:ln>
+          <a:effectLst/>
+        </p:spPr>
+        <p:txBody>
+          <a:bodyPr vert="horz" wrap="none" lIns="91440" tIns="45720" rIns="91440" bIns="45720" numCol="1" rtlCol="0" anchor="t" anchorCtr="0" compatLnSpc="1">
+            <a:prstTxWarp prst="textNoShape">
+              <a:avLst/>
+            </a:prstTxWarp>
+          </a:bodyPr>
+          <a:lstStyle/>
+          <a:p>
+            <a:pPr marL="0" marR="0" indent="0" defTabSz="914400" rtl="0" eaLnBrk="1" fontAlgn="base" latinLnBrk="0" hangingPunct="1">
+              <a:spcBef>
+                <a:spcPct val="0"/>
+              </a:spcBef>
+              <a:spcAft>
+                <a:spcPct val="0"/>
+              </a:spcAft>
+              <a:buClrTx/>
+              <a:buSzTx/>
+              <a:buFontTx/>
+              <a:buNone/>
+              <a:tabLst/>
+            </a:pPr>
+            <a:r>
+              <a:rPr lang="en-US" altLang="ja-JP" sz="1500" dirty="0">
+                <a:solidFill>
+                  <a:schemeClr val="accent4">
+                    <a:lumMod val="65000"/>
+                    <a:lumOff val="35000"/>
+                  </a:schemeClr>
+                </a:solidFill>
+                <a:latin typeface="Arial" charset="0"/>
+                <a:ea typeface="ＭＳ Ｐゴシック" pitchFamily="50" charset="-128"/>
+              </a:rPr>
+              <a:t>R</a:t>
+            </a:r>
+          </a:p>
+          <a:p>
+            <a:pPr marL="0" marR="0" indent="0" defTabSz="914400" rtl="0" eaLnBrk="1" fontAlgn="base" latinLnBrk="0" hangingPunct="1">
+              <a:spcBef>
+                <a:spcPct val="0"/>
+              </a:spcBef>
+              <a:spcAft>
+                <a:spcPct val="0"/>
+              </a:spcAft>
+              <a:buClrTx/>
+              <a:buSzTx/>
+              <a:buFontTx/>
+              <a:buNone/>
+              <a:tabLst/>
+            </a:pPr>
+            <a:endParaRPr lang="en-US" altLang="ja-JP" sz="1500" dirty="0">
+              <a:solidFill>
+                <a:schemeClr val="accent4">
+                  <a:lumMod val="65000"/>
+                  <a:lumOff val="35000"/>
+                </a:schemeClr>
+              </a:solidFill>
+              <a:latin typeface="Arial" charset="0"/>
+              <a:ea typeface="ＭＳ Ｐゴシック" pitchFamily="50" charset="-128"/>
+            </a:endParaRPr>
+          </a:p>
+          <a:p>
+            <a:pPr marL="0" marR="0" indent="0" defTabSz="914400" rtl="0" eaLnBrk="1" fontAlgn="base" latinLnBrk="0" hangingPunct="1">
+              <a:spcBef>
+                <a:spcPct val="0"/>
+              </a:spcBef>
+              <a:spcAft>
+                <a:spcPct val="0"/>
+              </a:spcAft>
+              <a:buClrTx/>
+              <a:buSzTx/>
+              <a:buFontTx/>
+              <a:buNone/>
+              <a:tabLst/>
+            </a:pPr>
+            <a:endParaRPr lang="en-US" altLang="ja-JP" sz="1500" dirty="0">
+              <a:solidFill>
+                <a:schemeClr val="accent4">
+                  <a:lumMod val="65000"/>
+                  <a:lumOff val="35000"/>
+                </a:schemeClr>
+              </a:solidFill>
+              <a:latin typeface="Arial" charset="0"/>
+              <a:ea typeface="ＭＳ Ｐゴシック" pitchFamily="50" charset="-128"/>
+            </a:endParaRPr>
+          </a:p>
+          <a:p>
+            <a:pPr marL="0" marR="0" indent="0" defTabSz="914400" rtl="0" eaLnBrk="1" fontAlgn="base" latinLnBrk="0" hangingPunct="1">
+              <a:spcBef>
+                <a:spcPct val="0"/>
+              </a:spcBef>
+              <a:spcAft>
+                <a:spcPct val="0"/>
+              </a:spcAft>
+              <a:buClrTx/>
+              <a:buSzTx/>
+              <a:buFontTx/>
+              <a:buNone/>
+              <a:tabLst/>
+            </a:pPr>
+            <a:endParaRPr lang="en-US" altLang="ja-JP" sz="1500" dirty="0">
+              <a:solidFill>
+                <a:schemeClr val="accent4">
+                  <a:lumMod val="65000"/>
+                  <a:lumOff val="35000"/>
+                </a:schemeClr>
+              </a:solidFill>
+              <a:latin typeface="Arial" charset="0"/>
+              <a:ea typeface="ＭＳ Ｐゴシック" pitchFamily="50" charset="-128"/>
+            </a:endParaRPr>
+          </a:p>
+          <a:p>
+            <a:pPr marL="0" marR="0" indent="0" defTabSz="914400" rtl="0" eaLnBrk="1" fontAlgn="base" latinLnBrk="0" hangingPunct="1">
+              <a:spcBef>
+                <a:spcPct val="0"/>
+              </a:spcBef>
+              <a:spcAft>
+                <a:spcPct val="0"/>
+              </a:spcAft>
+              <a:buClrTx/>
+              <a:buSzTx/>
+              <a:buFontTx/>
+              <a:buNone/>
+              <a:tabLst/>
+            </a:pPr>
+            <a:endParaRPr lang="en-US" altLang="ja-JP" sz="1500" dirty="0">
+              <a:solidFill>
+                <a:schemeClr val="accent4">
+                  <a:lumMod val="65000"/>
+                  <a:lumOff val="35000"/>
+                </a:schemeClr>
+              </a:solidFill>
+              <a:latin typeface="Arial" charset="0"/>
+              <a:ea typeface="ＭＳ Ｐゴシック" pitchFamily="50" charset="-128"/>
+            </a:endParaRPr>
+          </a:p>
+        </p:txBody>
+      </p:sp>
+      <p:sp>
+        <p:nvSpPr>
+          <p:cNvPr id="11" name="コンテンツ プレースホルダー 2">
+            <a:extLst>
+              <a:ext uri="{FF2B5EF4-FFF2-40B4-BE49-F238E27FC236}">
+                <a16:creationId xmlns:a16="http://schemas.microsoft.com/office/drawing/2014/main" id="{E9FD4C4D-AFFF-8C85-F569-324720DC6E3B}"/>
+              </a:ext>
+            </a:extLst>
+          </p:cNvPr>
+          <p:cNvSpPr txBox="1">
+            <a:spLocks/>
+          </p:cNvSpPr>
+          <p:nvPr/>
+        </p:nvSpPr>
+        <p:spPr>
+          <a:xfrm>
+            <a:off x="762000" y="1420814"/>
+            <a:ext cx="10972800" cy="5113337"/>
+          </a:xfrm>
+          <a:prstGeom prst="rect">
+            <a:avLst/>
+          </a:prstGeom>
+        </p:spPr>
+        <p:txBody>
+          <a:bodyPr/>
+          <a:lstStyle>
+            <a:lvl1pPr marL="342900" indent="-342900" algn="l" rtl="0" eaLnBrk="1" fontAlgn="base" hangingPunct="1">
+              <a:spcBef>
+                <a:spcPct val="20000"/>
+              </a:spcBef>
+              <a:spcAft>
+                <a:spcPct val="0"/>
+              </a:spcAft>
+              <a:buClr>
+                <a:schemeClr val="accent1"/>
+              </a:buClr>
+              <a:buSzPct val="65000"/>
+              <a:buFont typeface="Wingdings" pitchFamily="2" charset="2"/>
+              <a:buChar char="n"/>
+              <a:defRPr kumimoji="1" sz="3200">
+                <a:solidFill>
+                  <a:schemeClr val="tx1"/>
+                </a:solidFill>
+                <a:latin typeface="+mn-lt"/>
+                <a:ea typeface="+mn-ea"/>
+                <a:cs typeface="+mn-cs"/>
+              </a:defRPr>
+            </a:lvl1pPr>
+            <a:lvl2pPr marL="669925" indent="-325438" algn="l" rtl="0" eaLnBrk="1" fontAlgn="base" hangingPunct="1">
+              <a:spcBef>
+                <a:spcPct val="20000"/>
+              </a:spcBef>
+              <a:spcAft>
+                <a:spcPct val="0"/>
+              </a:spcAft>
+              <a:buClr>
+                <a:schemeClr val="accent2"/>
+              </a:buClr>
+              <a:buSzPct val="60000"/>
+              <a:buFont typeface="Wingdings" pitchFamily="2" charset="2"/>
+              <a:buChar char="q"/>
+              <a:defRPr kumimoji="1" sz="2800">
+                <a:solidFill>
+                  <a:schemeClr val="tx1"/>
+                </a:solidFill>
+                <a:latin typeface="+mn-lt"/>
+                <a:ea typeface="+mn-ea"/>
+              </a:defRPr>
+            </a:lvl2pPr>
+            <a:lvl3pPr marL="1022350" indent="-350838" algn="l" rtl="0" eaLnBrk="1" fontAlgn="base" hangingPunct="1">
+              <a:spcBef>
+                <a:spcPct val="20000"/>
+              </a:spcBef>
+              <a:spcAft>
+                <a:spcPct val="0"/>
+              </a:spcAft>
+              <a:buClr>
+                <a:schemeClr val="accent1"/>
+              </a:buClr>
+              <a:buSzPct val="65000"/>
+              <a:buFont typeface="Wingdings" pitchFamily="2" charset="2"/>
+              <a:buChar char="n"/>
+              <a:defRPr kumimoji="1" sz="2400">
+                <a:solidFill>
+                  <a:schemeClr val="tx1"/>
+                </a:solidFill>
+                <a:latin typeface="+mn-lt"/>
+                <a:ea typeface="+mn-ea"/>
+              </a:defRPr>
+            </a:lvl3pPr>
+            <a:lvl4pPr marL="1339850" indent="-315913" algn="l" rtl="0" eaLnBrk="1" fontAlgn="base" hangingPunct="1">
+              <a:spcBef>
+                <a:spcPct val="20000"/>
+              </a:spcBef>
+              <a:spcAft>
+                <a:spcPct val="0"/>
+              </a:spcAft>
+              <a:buClr>
+                <a:schemeClr val="accent2"/>
+              </a:buClr>
+              <a:buSzPct val="70000"/>
+              <a:buFont typeface="Wingdings" pitchFamily="2" charset="2"/>
+              <a:buChar char="q"/>
+              <a:defRPr kumimoji="1" sz="2000">
+                <a:solidFill>
+                  <a:schemeClr val="tx1"/>
+                </a:solidFill>
+                <a:latin typeface="+mn-lt"/>
+                <a:ea typeface="+mn-ea"/>
+              </a:defRPr>
+            </a:lvl4pPr>
+            <a:lvl5pPr marL="1681163" indent="-339725" algn="l" rtl="0" eaLnBrk="1" fontAlgn="base" hangingPunct="1">
+              <a:spcBef>
+                <a:spcPct val="20000"/>
+              </a:spcBef>
+              <a:spcAft>
+                <a:spcPct val="0"/>
+              </a:spcAft>
+              <a:buClr>
+                <a:schemeClr val="accent1"/>
+              </a:buClr>
+              <a:buSzPct val="75000"/>
+              <a:buFont typeface="Wingdings" pitchFamily="2" charset="2"/>
+              <a:buChar char="§"/>
+              <a:defRPr kumimoji="1">
+                <a:solidFill>
+                  <a:schemeClr val="tx1"/>
+                </a:solidFill>
+                <a:latin typeface="+mn-lt"/>
+                <a:ea typeface="+mn-ea"/>
+              </a:defRPr>
+            </a:lvl5pPr>
+            <a:lvl6pPr marL="2138363" indent="-339725" algn="l" rtl="0" eaLnBrk="1" fontAlgn="base" hangingPunct="1">
+              <a:spcBef>
+                <a:spcPct val="20000"/>
+              </a:spcBef>
+              <a:spcAft>
+                <a:spcPct val="0"/>
+              </a:spcAft>
+              <a:buClr>
+                <a:schemeClr val="accent1"/>
+              </a:buClr>
+              <a:buSzPct val="75000"/>
+              <a:buFont typeface="Wingdings" pitchFamily="2" charset="2"/>
+              <a:buChar char="§"/>
+              <a:defRPr kumimoji="1">
+                <a:solidFill>
+                  <a:schemeClr val="tx1"/>
+                </a:solidFill>
+                <a:latin typeface="+mn-lt"/>
+                <a:ea typeface="+mn-ea"/>
+              </a:defRPr>
+            </a:lvl6pPr>
+            <a:lvl7pPr marL="2595563" indent="-339725" algn="l" rtl="0" eaLnBrk="1" fontAlgn="base" hangingPunct="1">
+              <a:spcBef>
+                <a:spcPct val="20000"/>
+              </a:spcBef>
+              <a:spcAft>
+                <a:spcPct val="0"/>
+              </a:spcAft>
+              <a:buClr>
+                <a:schemeClr val="accent1"/>
+              </a:buClr>
+              <a:buSzPct val="75000"/>
+              <a:buFont typeface="Wingdings" pitchFamily="2" charset="2"/>
+              <a:buChar char="§"/>
+              <a:defRPr kumimoji="1">
+                <a:solidFill>
+                  <a:schemeClr val="tx1"/>
+                </a:solidFill>
+                <a:latin typeface="+mn-lt"/>
+                <a:ea typeface="+mn-ea"/>
+              </a:defRPr>
+            </a:lvl7pPr>
+            <a:lvl8pPr marL="3052763" indent="-339725" algn="l" rtl="0" eaLnBrk="1" fontAlgn="base" hangingPunct="1">
+              <a:spcBef>
+                <a:spcPct val="20000"/>
+              </a:spcBef>
+              <a:spcAft>
+                <a:spcPct val="0"/>
+              </a:spcAft>
+              <a:buClr>
+                <a:schemeClr val="accent1"/>
+              </a:buClr>
+              <a:buSzPct val="75000"/>
+              <a:buFont typeface="Wingdings" pitchFamily="2" charset="2"/>
+              <a:buChar char="§"/>
+              <a:defRPr kumimoji="1">
+                <a:solidFill>
+                  <a:schemeClr val="tx1"/>
+                </a:solidFill>
+                <a:latin typeface="+mn-lt"/>
+                <a:ea typeface="+mn-ea"/>
+              </a:defRPr>
+            </a:lvl8pPr>
+            <a:lvl9pPr marL="3509963" indent="-339725" algn="l" rtl="0" eaLnBrk="1" fontAlgn="base" hangingPunct="1">
+              <a:spcBef>
+                <a:spcPct val="20000"/>
+              </a:spcBef>
+              <a:spcAft>
+                <a:spcPct val="0"/>
+              </a:spcAft>
+              <a:buClr>
+                <a:schemeClr val="accent1"/>
+              </a:buClr>
+              <a:buSzPct val="75000"/>
+              <a:buFont typeface="Wingdings" pitchFamily="2" charset="2"/>
+              <a:buChar char="§"/>
+              <a:defRPr kumimoji="1">
+                <a:solidFill>
+                  <a:schemeClr val="tx1"/>
+                </a:solidFill>
+                <a:latin typeface="+mn-lt"/>
+                <a:ea typeface="+mn-ea"/>
+              </a:defRPr>
+            </a:lvl9pPr>
+          </a:lstStyle>
+          <a:p>
+            <a:pPr marL="0" indent="0">
+              <a:buNone/>
+            </a:pPr>
+            <a:r>
+              <a:rPr lang="ja-JP" altLang="en-US" sz="2400" kern="0" dirty="0"/>
+              <a:t>正解率を出す</a:t>
+            </a:r>
+            <a:endParaRPr lang="en-US" altLang="ja-JP" sz="2400" kern="0" dirty="0"/>
+          </a:p>
+          <a:p>
+            <a:r>
+              <a:rPr lang="ja-JP" altLang="en-US" sz="2400" kern="0" dirty="0"/>
+              <a:t>図を表示する</a:t>
+            </a:r>
+          </a:p>
+        </p:txBody>
+      </p:sp>
+      <p:pic>
+        <p:nvPicPr>
+          <p:cNvPr id="6" name="図 5">
+            <a:extLst>
+              <a:ext uri="{FF2B5EF4-FFF2-40B4-BE49-F238E27FC236}">
+                <a16:creationId xmlns:a16="http://schemas.microsoft.com/office/drawing/2014/main" id="{97AC90B4-9D67-A81F-A2EA-414387F9B97B}"/>
+              </a:ext>
+            </a:extLst>
+          </p:cNvPr>
+          <p:cNvPicPr>
+            <a:picLocks noChangeAspect="1"/>
+          </p:cNvPicPr>
+          <p:nvPr/>
+        </p:nvPicPr>
+        <p:blipFill>
+          <a:blip r:embed="rId2"/>
+          <a:stretch>
+            <a:fillRect/>
+          </a:stretch>
+        </p:blipFill>
+        <p:spPr>
+          <a:xfrm>
+            <a:off x="6231859" y="1420814"/>
+            <a:ext cx="6211167" cy="2962688"/>
+          </a:xfrm>
+          <a:prstGeom prst="rect">
+            <a:avLst/>
+          </a:prstGeom>
+          <a:ln>
+            <a:solidFill>
+              <a:schemeClr val="accent5">
+                <a:lumMod val="75000"/>
+              </a:schemeClr>
+            </a:solidFill>
+          </a:ln>
+        </p:spPr>
+      </p:pic>
+    </p:spTree>
+    <p:extLst>
+      <p:ext uri="{BB962C8B-B14F-4D97-AF65-F5344CB8AC3E}">
+        <p14:creationId xmlns:p14="http://schemas.microsoft.com/office/powerpoint/2010/main" val="1599161850"/>
+      </p:ext>
+    </p:extLst>
+  </p:cSld>
+  <p:clrMapOvr>
+    <a:masterClrMapping/>
+  </p:clrMapOvr>
+</p:sld>
+</file>
+
+<file path=ppt/slides/slide11.xml><?xml version="1.0" encoding="utf-8"?>
+<p:sld xmlns:a="http://schemas.openxmlformats.org/drawingml/2006/main" xmlns:r="http://schemas.openxmlformats.org/officeDocument/2006/relationships" xmlns:p="http://schemas.openxmlformats.org/presentationml/2006/main">
+  <p:cSld>
+    <p:spTree>
+      <p:nvGrpSpPr>
+        <p:cNvPr id="1" name="">
+          <a:extLst>
+            <a:ext uri="{FF2B5EF4-FFF2-40B4-BE49-F238E27FC236}">
+              <a16:creationId xmlns:a16="http://schemas.microsoft.com/office/drawing/2014/main" id="{BD22EEB9-D52F-262D-9932-339045E0736E}"/>
+            </a:ext>
+          </a:extLst>
+        </p:cNvPr>
+        <p:cNvGrpSpPr/>
+        <p:nvPr/>
+      </p:nvGrpSpPr>
+      <p:grpSpPr>
+        <a:xfrm>
+          <a:off x="0" y="0"/>
+          <a:ext cx="0" cy="0"/>
+          <a:chOff x="0" y="0"/>
+          <a:chExt cx="0" cy="0"/>
+        </a:xfrm>
+      </p:grpSpPr>
+      <p:sp>
+        <p:nvSpPr>
+          <p:cNvPr id="2" name="タイトル 1">
+            <a:extLst>
+              <a:ext uri="{FF2B5EF4-FFF2-40B4-BE49-F238E27FC236}">
+                <a16:creationId xmlns:a16="http://schemas.microsoft.com/office/drawing/2014/main" id="{DF11AD8D-36A1-5DF0-654C-7D5CB301EF39}"/>
+              </a:ext>
+            </a:extLst>
+          </p:cNvPr>
+          <p:cNvSpPr>
+            <a:spLocks noGrp="1"/>
+          </p:cNvSpPr>
+          <p:nvPr>
+            <p:ph type="title"/>
+          </p:nvPr>
+        </p:nvSpPr>
+        <p:spPr/>
+        <p:txBody>
+          <a:bodyPr/>
+          <a:lstStyle/>
+          <a:p>
+            <a:r>
+              <a:rPr kumimoji="1" lang="ja-JP" altLang="en-US" dirty="0"/>
+              <a:t>参考文献</a:t>
+            </a:r>
+          </a:p>
+        </p:txBody>
+      </p:sp>
+      <p:sp>
+        <p:nvSpPr>
+          <p:cNvPr id="3" name="コンテンツ プレースホルダー 2">
+            <a:extLst>
+              <a:ext uri="{FF2B5EF4-FFF2-40B4-BE49-F238E27FC236}">
+                <a16:creationId xmlns:a16="http://schemas.microsoft.com/office/drawing/2014/main" id="{1E819672-D17E-DF8C-DEA2-084BC6C49B5F}"/>
+              </a:ext>
+            </a:extLst>
+          </p:cNvPr>
+          <p:cNvSpPr>
+            <a:spLocks noGrp="1"/>
+          </p:cNvSpPr>
+          <p:nvPr>
+            <p:ph idx="1"/>
+          </p:nvPr>
+        </p:nvSpPr>
+        <p:spPr/>
+        <p:txBody>
+          <a:bodyPr/>
+          <a:lstStyle/>
+          <a:p>
+            <a:r>
+              <a:rPr kumimoji="1" lang="ja-JP" altLang="en-US" dirty="0"/>
+              <a:t>あ</a:t>
+            </a:r>
+          </a:p>
+        </p:txBody>
+      </p:sp>
+      <p:sp>
+        <p:nvSpPr>
+          <p:cNvPr id="7" name="字幕 2">
+            <a:extLst>
+              <a:ext uri="{FF2B5EF4-FFF2-40B4-BE49-F238E27FC236}">
+                <a16:creationId xmlns:a16="http://schemas.microsoft.com/office/drawing/2014/main" id="{99641A50-23CB-2877-6685-B6FDD180F290}"/>
+              </a:ext>
+            </a:extLst>
+          </p:cNvPr>
+          <p:cNvSpPr txBox="1">
+            <a:spLocks/>
+          </p:cNvSpPr>
+          <p:nvPr/>
+        </p:nvSpPr>
+        <p:spPr>
+          <a:xfrm>
+            <a:off x="719541" y="2386173"/>
+            <a:ext cx="10992128" cy="1837679"/>
+          </a:xfrm>
+          <a:prstGeom prst="rect">
+            <a:avLst/>
+          </a:prstGeom>
+        </p:spPr>
+        <p:txBody>
+          <a:bodyPr vert="horz" lIns="91440" tIns="45720" rIns="91440" bIns="45720" rtlCol="0">
+            <a:normAutofit/>
+          </a:bodyPr>
+          <a:lstStyle>
+            <a:lvl1pPr marL="0" indent="0" algn="ctr" defTabSz="914400" rtl="0" eaLnBrk="1" latinLnBrk="0" hangingPunct="1">
+              <a:lnSpc>
+                <a:spcPct val="90000"/>
+              </a:lnSpc>
+              <a:spcBef>
+                <a:spcPts val="1000"/>
+              </a:spcBef>
+              <a:buFont typeface="Arial" panose="020B0604020202020204" pitchFamily="34" charset="0"/>
+              <a:buNone/>
+              <a:defRPr kumimoji="1" sz="2400" kern="1200">
+                <a:solidFill>
+                  <a:schemeClr val="tx1"/>
+                </a:solidFill>
+                <a:latin typeface="+mn-lt"/>
+                <a:ea typeface="+mn-ea"/>
+                <a:cs typeface="+mn-cs"/>
+              </a:defRPr>
+            </a:lvl1pPr>
+            <a:lvl2pPr marL="457200" indent="0" algn="ctr" defTabSz="914400" rtl="0" eaLnBrk="1" latinLnBrk="0" hangingPunct="1">
+              <a:lnSpc>
+                <a:spcPct val="90000"/>
+              </a:lnSpc>
+              <a:spcBef>
+                <a:spcPts val="500"/>
+              </a:spcBef>
+              <a:buFont typeface="Arial" panose="020B0604020202020204" pitchFamily="34" charset="0"/>
+              <a:buNone/>
+              <a:defRPr kumimoji="1" sz="2000" kern="1200">
+                <a:solidFill>
+                  <a:schemeClr val="tx1"/>
+                </a:solidFill>
+                <a:latin typeface="+mn-lt"/>
+                <a:ea typeface="+mn-ea"/>
+                <a:cs typeface="+mn-cs"/>
+              </a:defRPr>
+            </a:lvl2pPr>
+            <a:lvl3pPr marL="914400" indent="0" algn="ctr" defTabSz="914400" rtl="0" eaLnBrk="1" latinLnBrk="0" hangingPunct="1">
+              <a:lnSpc>
+                <a:spcPct val="90000"/>
+              </a:lnSpc>
+              <a:spcBef>
+                <a:spcPts val="500"/>
+              </a:spcBef>
+              <a:buFont typeface="Arial" panose="020B0604020202020204" pitchFamily="34" charset="0"/>
+              <a:buNone/>
+              <a:defRPr kumimoji="1" sz="1800" kern="1200">
+                <a:solidFill>
+                  <a:schemeClr val="tx1"/>
+                </a:solidFill>
+                <a:latin typeface="+mn-lt"/>
+                <a:ea typeface="+mn-ea"/>
+                <a:cs typeface="+mn-cs"/>
+              </a:defRPr>
+            </a:lvl3pPr>
+            <a:lvl4pPr marL="1371600" indent="0" algn="ctr" defTabSz="914400" rtl="0" eaLnBrk="1" latinLnBrk="0" hangingPunct="1">
+              <a:lnSpc>
+                <a:spcPct val="90000"/>
+              </a:lnSpc>
+              <a:spcBef>
+                <a:spcPts val="500"/>
+              </a:spcBef>
+              <a:buFont typeface="Arial" panose="020B0604020202020204" pitchFamily="34" charset="0"/>
+              <a:buNone/>
+              <a:defRPr kumimoji="1" sz="1600" kern="1200">
+                <a:solidFill>
+                  <a:schemeClr val="tx1"/>
+                </a:solidFill>
+                <a:latin typeface="+mn-lt"/>
+                <a:ea typeface="+mn-ea"/>
+                <a:cs typeface="+mn-cs"/>
+              </a:defRPr>
+            </a:lvl4pPr>
+            <a:lvl5pPr marL="1828800" indent="0" algn="ctr" defTabSz="914400" rtl="0" eaLnBrk="1" latinLnBrk="0" hangingPunct="1">
+              <a:lnSpc>
+                <a:spcPct val="90000"/>
+              </a:lnSpc>
+              <a:spcBef>
+                <a:spcPts val="500"/>
+              </a:spcBef>
+              <a:buFont typeface="Arial" panose="020B0604020202020204" pitchFamily="34" charset="0"/>
+              <a:buNone/>
+              <a:defRPr kumimoji="1" sz="1600" kern="1200">
+                <a:solidFill>
+                  <a:schemeClr val="tx1"/>
+                </a:solidFill>
+                <a:latin typeface="+mn-lt"/>
+                <a:ea typeface="+mn-ea"/>
+                <a:cs typeface="+mn-cs"/>
+              </a:defRPr>
+            </a:lvl5pPr>
+            <a:lvl6pPr marL="2286000" indent="0" algn="ctr" defTabSz="914400" rtl="0" eaLnBrk="1" latinLnBrk="0" hangingPunct="1">
+              <a:lnSpc>
+                <a:spcPct val="90000"/>
+              </a:lnSpc>
+              <a:spcBef>
+                <a:spcPts val="500"/>
+              </a:spcBef>
+              <a:buFont typeface="Arial" panose="020B0604020202020204" pitchFamily="34" charset="0"/>
+              <a:buNone/>
+              <a:defRPr kumimoji="1" sz="1600" kern="1200">
+                <a:solidFill>
+                  <a:schemeClr val="tx1"/>
+                </a:solidFill>
+                <a:latin typeface="+mn-lt"/>
+                <a:ea typeface="+mn-ea"/>
+                <a:cs typeface="+mn-cs"/>
+              </a:defRPr>
+            </a:lvl6pPr>
+            <a:lvl7pPr marL="2743200" indent="0" algn="ctr" defTabSz="914400" rtl="0" eaLnBrk="1" latinLnBrk="0" hangingPunct="1">
+              <a:lnSpc>
+                <a:spcPct val="90000"/>
+              </a:lnSpc>
+              <a:spcBef>
+                <a:spcPts val="500"/>
+              </a:spcBef>
+              <a:buFont typeface="Arial" panose="020B0604020202020204" pitchFamily="34" charset="0"/>
+              <a:buNone/>
+              <a:defRPr kumimoji="1" sz="1600" kern="1200">
+                <a:solidFill>
+                  <a:schemeClr val="tx1"/>
+                </a:solidFill>
+                <a:latin typeface="+mn-lt"/>
+                <a:ea typeface="+mn-ea"/>
+                <a:cs typeface="+mn-cs"/>
+              </a:defRPr>
+            </a:lvl7pPr>
+            <a:lvl8pPr marL="3200400" indent="0" algn="ctr" defTabSz="914400" rtl="0" eaLnBrk="1" latinLnBrk="0" hangingPunct="1">
+              <a:lnSpc>
+                <a:spcPct val="90000"/>
+              </a:lnSpc>
+              <a:spcBef>
+                <a:spcPts val="500"/>
+              </a:spcBef>
+              <a:buFont typeface="Arial" panose="020B0604020202020204" pitchFamily="34" charset="0"/>
+              <a:buNone/>
+              <a:defRPr kumimoji="1" sz="1600" kern="1200">
+                <a:solidFill>
+                  <a:schemeClr val="tx1"/>
+                </a:solidFill>
+                <a:latin typeface="+mn-lt"/>
+                <a:ea typeface="+mn-ea"/>
+                <a:cs typeface="+mn-cs"/>
+              </a:defRPr>
+            </a:lvl8pPr>
+            <a:lvl9pPr marL="3657600" indent="0" algn="ctr" defTabSz="914400" rtl="0" eaLnBrk="1" latinLnBrk="0" hangingPunct="1">
+              <a:lnSpc>
+                <a:spcPct val="90000"/>
+              </a:lnSpc>
+              <a:spcBef>
+                <a:spcPts val="500"/>
+              </a:spcBef>
+              <a:buFont typeface="Arial" panose="020B0604020202020204" pitchFamily="34" charset="0"/>
+              <a:buNone/>
+              <a:defRPr kumimoji="1" sz="1600" kern="1200">
+                <a:solidFill>
+                  <a:schemeClr val="tx1"/>
+                </a:solidFill>
+                <a:latin typeface="+mn-lt"/>
+                <a:ea typeface="+mn-ea"/>
+                <a:cs typeface="+mn-cs"/>
+              </a:defRPr>
+            </a:lvl9pPr>
+          </a:lstStyle>
+          <a:p>
+            <a:pPr marL="0" marR="0" lvl="0" indent="0" algn="l" defTabSz="914400" rtl="0" eaLnBrk="1" fontAlgn="auto" latinLnBrk="0" hangingPunct="1">
+              <a:lnSpc>
+                <a:spcPct val="90000"/>
+              </a:lnSpc>
+              <a:spcBef>
+                <a:spcPts val="1000"/>
+              </a:spcBef>
+              <a:spcAft>
+                <a:spcPts val="0"/>
+              </a:spcAft>
+              <a:buClrTx/>
+              <a:buSzTx/>
+              <a:buFont typeface="Arial" panose="020B0604020202020204" pitchFamily="34" charset="0"/>
+              <a:buNone/>
+              <a:tabLst/>
+              <a:defRPr/>
+            </a:pPr>
+            <a:endParaRPr kumimoji="1" lang="ja-JP" altLang="en-US" sz="2000" b="0" i="0" u="none" strike="noStrike" kern="1200" cap="none" spc="0" normalizeH="0" baseline="0" noProof="0" dirty="0">
+              <a:ln>
+                <a:noFill/>
+              </a:ln>
+              <a:solidFill>
+                <a:srgbClr val="FFC000">
+                  <a:lumMod val="75000"/>
+                </a:srgbClr>
+              </a:solidFill>
+              <a:effectLst/>
+              <a:uLnTx/>
+              <a:uFillTx/>
+              <a:latin typeface="メイリオ" panose="020B0604030504040204" pitchFamily="50" charset="-128"/>
+              <a:ea typeface="メイリオ" panose="020B0604030504040204" pitchFamily="50" charset="-128"/>
+              <a:cs typeface="+mn-cs"/>
+            </a:endParaRPr>
+          </a:p>
+        </p:txBody>
+      </p:sp>
+    </p:spTree>
+    <p:extLst>
+      <p:ext uri="{BB962C8B-B14F-4D97-AF65-F5344CB8AC3E}">
+        <p14:creationId xmlns:p14="http://schemas.microsoft.com/office/powerpoint/2010/main" val="3300878030"/>
       </p:ext>
     </p:extLst>
   </p:cSld>
@@ -12064,6 +13237,9 @@
             <a:endParaRPr lang="en-US" altLang="ja-JP" sz="2400" kern="0" dirty="0"/>
           </a:p>
           <a:p>
+            <a:pPr marL="0" indent="0">
+              <a:buNone/>
+            </a:pPr>
             <a:endParaRPr lang="en-US" altLang="ja-JP" sz="2400" kern="0" dirty="0">
               <a:solidFill>
                 <a:schemeClr val="accent6"/>
@@ -12753,7 +13929,7 @@
         <p:spPr bwMode="auto">
           <a:xfrm>
             <a:off x="4947777" y="1268414"/>
-            <a:ext cx="6280341" cy="3661825"/>
+            <a:ext cx="6939423" cy="3149207"/>
           </a:xfrm>
           <a:prstGeom prst="rect">
             <a:avLst/>
@@ -13021,6 +14197,123 @@
               <a:buNone/>
               <a:tabLst/>
             </a:pPr>
+            <a:r>
+              <a:rPr lang="ja-JP" altLang="en-US" sz="1500" dirty="0">
+                <a:solidFill>
+                  <a:schemeClr val="accent4">
+                    <a:lumMod val="65000"/>
+                    <a:lumOff val="35000"/>
+                  </a:schemeClr>
+                </a:solidFill>
+                <a:latin typeface="Arial" charset="0"/>
+                <a:ea typeface="ＭＳ Ｐゴシック" pitchFamily="50" charset="-128"/>
+              </a:rPr>
+              <a:t>「 </a:t>
+            </a:r>
+            <a:r>
+              <a:rPr lang="en-US" altLang="ja-JP" sz="1500" dirty="0">
+                <a:solidFill>
+                  <a:schemeClr val="accent4">
+                    <a:lumMod val="65000"/>
+                    <a:lumOff val="35000"/>
+                  </a:schemeClr>
+                </a:solidFill>
+                <a:latin typeface="Arial" charset="0"/>
+                <a:ea typeface="ＭＳ Ｐゴシック" pitchFamily="50" charset="-128"/>
+              </a:rPr>
+              <a:t>plot( x</a:t>
+            </a:r>
+            <a:r>
+              <a:rPr lang="ja-JP" altLang="en-US" sz="1500" dirty="0">
+                <a:solidFill>
+                  <a:schemeClr val="accent4">
+                    <a:lumMod val="65000"/>
+                    <a:lumOff val="35000"/>
+                  </a:schemeClr>
+                </a:solidFill>
+                <a:latin typeface="Arial" charset="0"/>
+                <a:ea typeface="ＭＳ Ｐゴシック" pitchFamily="50" charset="-128"/>
+              </a:rPr>
+              <a:t>軸</a:t>
+            </a:r>
+            <a:r>
+              <a:rPr lang="en-US" altLang="ja-JP" sz="1500" dirty="0">
+                <a:solidFill>
+                  <a:schemeClr val="accent4">
+                    <a:lumMod val="65000"/>
+                    <a:lumOff val="35000"/>
+                  </a:schemeClr>
+                </a:solidFill>
+                <a:latin typeface="Arial" charset="0"/>
+                <a:ea typeface="ＭＳ Ｐゴシック" pitchFamily="50" charset="-128"/>
+              </a:rPr>
+              <a:t>, y</a:t>
+            </a:r>
+            <a:r>
+              <a:rPr lang="ja-JP" altLang="en-US" sz="1500" dirty="0">
+                <a:solidFill>
+                  <a:schemeClr val="accent4">
+                    <a:lumMod val="65000"/>
+                    <a:lumOff val="35000"/>
+                  </a:schemeClr>
+                </a:solidFill>
+                <a:latin typeface="Arial" charset="0"/>
+                <a:ea typeface="ＭＳ Ｐゴシック" pitchFamily="50" charset="-128"/>
+              </a:rPr>
+              <a:t>軸</a:t>
+            </a:r>
+            <a:r>
+              <a:rPr lang="en-US" altLang="ja-JP" sz="1500" dirty="0">
+                <a:solidFill>
+                  <a:schemeClr val="accent4">
+                    <a:lumMod val="65000"/>
+                    <a:lumOff val="35000"/>
+                  </a:schemeClr>
+                </a:solidFill>
+                <a:latin typeface="Arial" charset="0"/>
+                <a:ea typeface="ＭＳ Ｐゴシック" pitchFamily="50" charset="-128"/>
+              </a:rPr>
+              <a:t>, type = n)</a:t>
+            </a:r>
+            <a:r>
+              <a:rPr lang="ja-JP" altLang="en-US" sz="1500" dirty="0">
+                <a:solidFill>
+                  <a:schemeClr val="accent4">
+                    <a:lumMod val="65000"/>
+                    <a:lumOff val="35000"/>
+                  </a:schemeClr>
+                </a:solidFill>
+                <a:latin typeface="Arial" charset="0"/>
+                <a:ea typeface="ＭＳ Ｐゴシック" pitchFamily="50" charset="-128"/>
+              </a:rPr>
+              <a:t> 」　</a:t>
+            </a:r>
+            <a:r>
+              <a:rPr lang="en-US" altLang="ja-JP" sz="1500" dirty="0">
+                <a:solidFill>
+                  <a:schemeClr val="accent4">
+                    <a:lumMod val="65000"/>
+                    <a:lumOff val="35000"/>
+                  </a:schemeClr>
+                </a:solidFill>
+                <a:latin typeface="Arial" charset="0"/>
+                <a:ea typeface="ＭＳ Ｐゴシック" pitchFamily="50" charset="-128"/>
+              </a:rPr>
+              <a:t>NULL</a:t>
+            </a:r>
+            <a:r>
+              <a:rPr lang="ja-JP" altLang="en-US" sz="1500" dirty="0">
+                <a:solidFill>
+                  <a:schemeClr val="accent4">
+                    <a:lumMod val="65000"/>
+                    <a:lumOff val="35000"/>
+                  </a:schemeClr>
+                </a:solidFill>
+                <a:latin typeface="Arial" charset="0"/>
+                <a:ea typeface="ＭＳ Ｐゴシック" pitchFamily="50" charset="-128"/>
+              </a:rPr>
+              <a:t>の図をかく</a:t>
+            </a:r>
             <a:endParaRPr lang="en-US" altLang="ja-JP" sz="1500" dirty="0">
               <a:solidFill>
                 <a:schemeClr val="accent4">
@@ -13046,6 +14339,100 @@
               <a:buNone/>
               <a:tabLst/>
             </a:pPr>
+            <a:r>
+              <a:rPr kumimoji="1" lang="ja-JP" altLang="en-US" sz="1500" b="0" i="0" u="none" strike="noStrike" cap="none" normalizeH="0" baseline="0" dirty="0">
+                <a:ln>
+                  <a:noFill/>
+                </a:ln>
+                <a:solidFill>
+                  <a:schemeClr val="accent4">
+                    <a:lumMod val="65000"/>
+                    <a:lumOff val="35000"/>
+                  </a:schemeClr>
+                </a:solidFill>
+                <a:effectLst/>
+                <a:latin typeface="Arial" charset="0"/>
+                <a:ea typeface="ＭＳ Ｐゴシック" pitchFamily="50" charset="-128"/>
+              </a:rPr>
+              <a:t>「 </a:t>
+            </a:r>
+            <a:r>
+              <a:rPr lang="en-US" altLang="ja-JP" sz="1500" dirty="0">
+                <a:solidFill>
+                  <a:schemeClr val="accent4">
+                    <a:lumMod val="65000"/>
+                    <a:lumOff val="35000"/>
+                  </a:schemeClr>
+                </a:solidFill>
+                <a:latin typeface="Arial" charset="0"/>
+                <a:ea typeface="ＭＳ Ｐゴシック" pitchFamily="50" charset="-128"/>
+              </a:rPr>
+              <a:t>unique</a:t>
+            </a:r>
+            <a:r>
+              <a:rPr kumimoji="1" lang="en-US" altLang="ja-JP" sz="1500" b="0" i="0" u="none" strike="noStrike" cap="none" normalizeH="0" baseline="0" dirty="0">
+                <a:ln>
+                  <a:noFill/>
+                </a:ln>
+                <a:solidFill>
+                  <a:schemeClr val="accent4">
+                    <a:lumMod val="65000"/>
+                    <a:lumOff val="35000"/>
+                  </a:schemeClr>
+                </a:solidFill>
+                <a:effectLst/>
+                <a:latin typeface="Arial" charset="0"/>
+                <a:ea typeface="ＭＳ Ｐゴシック" pitchFamily="50" charset="-128"/>
+              </a:rPr>
+              <a:t>( x )</a:t>
+            </a:r>
+            <a:r>
+              <a:rPr kumimoji="1" lang="ja-JP" altLang="en-US" sz="1500" b="0" i="0" u="none" strike="noStrike" cap="none" normalizeH="0" baseline="0" dirty="0">
+                <a:ln>
+                  <a:noFill/>
+                </a:ln>
+                <a:solidFill>
+                  <a:schemeClr val="accent4">
+                    <a:lumMod val="65000"/>
+                    <a:lumOff val="35000"/>
+                  </a:schemeClr>
+                </a:solidFill>
+                <a:effectLst/>
+                <a:latin typeface="Arial" charset="0"/>
+                <a:ea typeface="ＭＳ Ｐゴシック" pitchFamily="50" charset="-128"/>
+              </a:rPr>
+              <a:t> 」　</a:t>
+            </a:r>
+            <a:r>
+              <a:rPr kumimoji="1" lang="en-US" altLang="ja-JP" sz="1500" b="0" i="0" u="none" strike="noStrike" cap="none" normalizeH="0" baseline="0" dirty="0">
+                <a:ln>
+                  <a:noFill/>
+                </a:ln>
+                <a:solidFill>
+                  <a:schemeClr val="accent4">
+                    <a:lumMod val="65000"/>
+                    <a:lumOff val="35000"/>
+                  </a:schemeClr>
+                </a:solidFill>
+                <a:effectLst/>
+                <a:latin typeface="Arial" charset="0"/>
+                <a:ea typeface="ＭＳ Ｐゴシック" pitchFamily="50" charset="-128"/>
+              </a:rPr>
+              <a:t>x</a:t>
+            </a:r>
+            <a:r>
+              <a:rPr lang="ja-JP" altLang="en-US" sz="1500" dirty="0">
+                <a:solidFill>
+                  <a:schemeClr val="accent4">
+                    <a:lumMod val="65000"/>
+                    <a:lumOff val="35000"/>
+                  </a:schemeClr>
+                </a:solidFill>
+                <a:latin typeface="Arial" charset="0"/>
+                <a:ea typeface="ＭＳ Ｐゴシック" pitchFamily="50" charset="-128"/>
+              </a:rPr>
+              <a:t> の中の重複をなくしたもの</a:t>
+            </a:r>
             <a:endParaRPr lang="en-US" altLang="ja-JP" sz="1500" dirty="0">
               <a:solidFill>
                 <a:schemeClr val="accent4">
@@ -13095,7 +14482,7 @@
                 <a:latin typeface="Arial" charset="0"/>
                 <a:ea typeface="ＭＳ Ｐゴシック" pitchFamily="50" charset="-128"/>
               </a:rPr>
-              <a:t>plot( x</a:t>
+              <a:t>which(</a:t>
             </a:r>
             <a:r>
               <a:rPr lang="ja-JP" altLang="en-US" sz="1500" dirty="0">
@@ -13108,7 +14495,7 @@
                 <a:latin typeface="Arial" charset="0"/>
                 <a:ea typeface="ＭＳ Ｐゴシック" pitchFamily="50" charset="-128"/>
               </a:rPr>
-              <a:t>軸</a:t>
+              <a:t>条件式</a:t>
             </a:r>
             <a:r>
               <a:rPr lang="en-US" altLang="ja-JP" sz="1500" dirty="0">
@@ -13121,7 +14508,7 @@
                 <a:latin typeface="Arial" charset="0"/>
                 <a:ea typeface="ＭＳ Ｐゴシック" pitchFamily="50" charset="-128"/>
               </a:rPr>
-              <a:t>, y</a:t>
+              <a:t>)</a:t>
             </a:r>
             <a:r>
               <a:rPr lang="ja-JP" altLang="en-US" sz="1500" dirty="0">
@@ -13134,59 +14521,7 @@
                 <a:latin typeface="Arial" charset="0"/>
                 <a:ea typeface="ＭＳ Ｐゴシック" pitchFamily="50" charset="-128"/>
               </a:rPr>
-              <a:t>軸</a:t>
-            </a:r>
-            <a:r>
-              <a:rPr lang="en-US" altLang="ja-JP" sz="1500" dirty="0">
-                <a:solidFill>
-                  <a:schemeClr val="accent4">
-                    <a:lumMod val="65000"/>
-                    <a:lumOff val="35000"/>
-                  </a:schemeClr>
-                </a:solidFill>
-                <a:latin typeface="Arial" charset="0"/>
-                <a:ea typeface="ＭＳ Ｐゴシック" pitchFamily="50" charset="-128"/>
-              </a:rPr>
-              <a:t>, type = n)</a:t>
-            </a:r>
-            <a:r>
-              <a:rPr lang="ja-JP" altLang="en-US" sz="1500" dirty="0">
-                <a:solidFill>
-                  <a:schemeClr val="accent4">
-                    <a:lumMod val="65000"/>
-                    <a:lumOff val="35000"/>
-                  </a:schemeClr>
-                </a:solidFill>
-                <a:latin typeface="Arial" charset="0"/>
-                <a:ea typeface="ＭＳ Ｐゴシック" pitchFamily="50" charset="-128"/>
-              </a:rPr>
-              <a:t> 」　</a:t>
-            </a:r>
-            <a:r>
-              <a:rPr lang="en-US" altLang="ja-JP" sz="1500" dirty="0">
-                <a:solidFill>
-                  <a:schemeClr val="accent4">
-                    <a:lumMod val="65000"/>
-                    <a:lumOff val="35000"/>
-                  </a:schemeClr>
-                </a:solidFill>
-                <a:latin typeface="Arial" charset="0"/>
-                <a:ea typeface="ＭＳ Ｐゴシック" pitchFamily="50" charset="-128"/>
-              </a:rPr>
-              <a:t>NULL</a:t>
-            </a:r>
-            <a:r>
-              <a:rPr lang="ja-JP" altLang="en-US" sz="1500" dirty="0">
-                <a:solidFill>
-                  <a:schemeClr val="accent4">
-                    <a:lumMod val="65000"/>
-                    <a:lumOff val="35000"/>
-                  </a:schemeClr>
-                </a:solidFill>
-                <a:latin typeface="Arial" charset="0"/>
-                <a:ea typeface="ＭＳ Ｐゴシック" pitchFamily="50" charset="-128"/>
-              </a:rPr>
-              <a:t>の図をかく</a:t>
+              <a:t> 」　条件を満たす要素の位置</a:t>
             </a:r>
             <a:endParaRPr lang="en-US" altLang="ja-JP" sz="1500" dirty="0">
               <a:solidFill>
@@ -13214,17 +14549,13 @@
               <a:tabLst/>
             </a:pPr>
             <a:r>
-              <a:rPr kumimoji="1" lang="ja-JP" altLang="en-US" sz="1500" b="0" i="0" u="none" strike="noStrike" cap="none" normalizeH="0" baseline="0" dirty="0">
-                <a:ln>
-                  <a:noFill/>
-                </a:ln>
+              <a:rPr lang="ja-JP" altLang="en-US" sz="1500" dirty="0">
                 <a:solidFill>
                   <a:schemeClr val="accent4">
                     <a:lumMod val="65000"/>
                     <a:lumOff val="35000"/>
                   </a:schemeClr>
                 </a:solidFill>
-                <a:effectLst/>
                 <a:latin typeface="Arial" charset="0"/>
                 <a:ea typeface="ＭＳ Ｐゴシック" pitchFamily="50" charset="-128"/>
               </a:rPr>
@@ -13241,71 +14572,46 @@
                 <a:latin typeface="Arial" charset="0"/>
                 <a:ea typeface="ＭＳ Ｐゴシック" pitchFamily="50" charset="-128"/>
               </a:rPr>
-              <a:t>unique</a:t>
-            </a:r>
-            <a:r>
-              <a:rPr kumimoji="1" lang="en-US" altLang="ja-JP" sz="1500" b="0" i="0" u="none" strike="noStrike" cap="none" normalizeH="0" baseline="0" dirty="0">
-                <a:ln>
-                  <a:noFill/>
-                </a:ln>
+              <a:t>points(x, y, </a:t>
+            </a:r>
+            <a:r>
+              <a:rPr lang="en-US" altLang="ja-JP" sz="1500" dirty="0" err="1">
                 <a:solidFill>
                   <a:schemeClr val="accent4">
                     <a:lumMod val="65000"/>
                     <a:lumOff val="35000"/>
                   </a:schemeClr>
                 </a:solidFill>
-                <a:effectLst/>
-                <a:latin typeface="Arial" charset="0"/>
-                <a:ea typeface="ＭＳ Ｐゴシック" pitchFamily="50" charset="-128"/>
-              </a:rPr>
-              <a:t>( x )</a:t>
-            </a:r>
-            <a:r>
-              <a:rPr kumimoji="1" lang="ja-JP" altLang="en-US" sz="1500" b="0" i="0" u="none" strike="noStrike" cap="none" normalizeH="0" baseline="0" dirty="0">
-                <a:ln>
-                  <a:noFill/>
-                </a:ln>
+                <a:latin typeface="Arial" charset="0"/>
+                <a:ea typeface="ＭＳ Ｐゴシック" pitchFamily="50" charset="-128"/>
+              </a:rPr>
+              <a:t>pch</a:t>
+            </a:r>
+            <a:r>
+              <a:rPr lang="en-US" altLang="ja-JP" sz="1500" dirty="0">
                 <a:solidFill>
                   <a:schemeClr val="accent4">
                     <a:lumMod val="65000"/>
                     <a:lumOff val="35000"/>
                   </a:schemeClr>
                 </a:solidFill>
-                <a:effectLst/>
-                <a:latin typeface="Arial" charset="0"/>
-                <a:ea typeface="ＭＳ Ｐゴシック" pitchFamily="50" charset="-128"/>
-              </a:rPr>
-              <a:t> 」　</a:t>
-            </a:r>
-            <a:r>
-              <a:rPr kumimoji="1" lang="en-US" altLang="ja-JP" sz="1500" b="0" i="0" u="none" strike="noStrike" cap="none" normalizeH="0" baseline="0" dirty="0">
-                <a:ln>
-                  <a:noFill/>
-                </a:ln>
+                <a:latin typeface="Arial" charset="0"/>
+                <a:ea typeface="ＭＳ Ｐゴシック" pitchFamily="50" charset="-128"/>
+              </a:rPr>
+              <a:t>, col)</a:t>
+            </a:r>
+            <a:r>
+              <a:rPr lang="ja-JP" altLang="en-US" sz="1500" dirty="0">
                 <a:solidFill>
                   <a:schemeClr val="accent4">
                     <a:lumMod val="65000"/>
                     <a:lumOff val="35000"/>
                   </a:schemeClr>
                 </a:solidFill>
-                <a:effectLst/>
-                <a:latin typeface="Arial" charset="0"/>
-                <a:ea typeface="ＭＳ Ｐゴシック" pitchFamily="50" charset="-128"/>
-              </a:rPr>
-              <a:t>x</a:t>
-            </a:r>
-            <a:r>
-              <a:rPr lang="ja-JP" altLang="en-US" sz="1500" dirty="0">
-                <a:solidFill>
-                  <a:schemeClr val="accent4">
-                    <a:lumMod val="65000"/>
-                    <a:lumOff val="35000"/>
-                  </a:schemeClr>
-                </a:solidFill>
-                <a:latin typeface="Arial" charset="0"/>
-                <a:ea typeface="ＭＳ Ｐゴシック" pitchFamily="50" charset="-128"/>
-              </a:rPr>
-              <a:t> の中の重複をなくしたもの</a:t>
+                <a:latin typeface="Arial" charset="0"/>
+                <a:ea typeface="ＭＳ Ｐゴシック" pitchFamily="50" charset="-128"/>
+              </a:rPr>
+              <a:t> 」　点を打つ</a:t>
             </a:r>
             <a:endParaRPr lang="en-US" altLang="ja-JP" sz="1500" dirty="0">
               <a:solidFill>
@@ -13318,262 +14624,8 @@
               <a:ea typeface="ＭＳ Ｐゴシック" pitchFamily="50" charset="-128"/>
             </a:endParaRPr>
           </a:p>
-          <a:p>
-            <a:pPr marL="0" marR="0" indent="0" defTabSz="914400" rtl="0" eaLnBrk="1" fontAlgn="base" latinLnBrk="0" hangingPunct="1">
-              <a:spcBef>
-                <a:spcPct val="0"/>
-              </a:spcBef>
-              <a:spcAft>
-                <a:spcPct val="0"/>
-              </a:spcAft>
-              <a:buClrTx/>
-              <a:buSzTx/>
-              <a:buFontTx/>
-              <a:buNone/>
-              <a:tabLst/>
-            </a:pPr>
-            <a:r>
-              <a:rPr lang="ja-JP" altLang="en-US" sz="1500" dirty="0">
-                <a:solidFill>
-                  <a:schemeClr val="accent4">
-                    <a:lumMod val="65000"/>
-                    <a:lumOff val="35000"/>
-                  </a:schemeClr>
-                </a:solidFill>
-                <a:latin typeface="Arial" charset="0"/>
-                <a:ea typeface="ＭＳ Ｐゴシック" pitchFamily="50" charset="-128"/>
-              </a:rPr>
-              <a:t>「 </a:t>
-            </a:r>
-            <a:r>
-              <a:rPr lang="en-US" altLang="ja-JP" sz="1500" dirty="0">
-                <a:solidFill>
-                  <a:schemeClr val="accent4">
-                    <a:lumMod val="65000"/>
-                    <a:lumOff val="35000"/>
-                  </a:schemeClr>
-                </a:solidFill>
-                <a:latin typeface="Arial" charset="0"/>
-                <a:ea typeface="ＭＳ Ｐゴシック" pitchFamily="50" charset="-128"/>
-              </a:rPr>
-              <a:t>which(</a:t>
-            </a:r>
-            <a:r>
-              <a:rPr lang="ja-JP" altLang="en-US" sz="1500" dirty="0">
-                <a:solidFill>
-                  <a:schemeClr val="accent4">
-                    <a:lumMod val="65000"/>
-                    <a:lumOff val="35000"/>
-                  </a:schemeClr>
-                </a:solidFill>
-                <a:latin typeface="Arial" charset="0"/>
-                <a:ea typeface="ＭＳ Ｐゴシック" pitchFamily="50" charset="-128"/>
-              </a:rPr>
-              <a:t>条件式</a:t>
-            </a:r>
-            <a:r>
-              <a:rPr lang="en-US" altLang="ja-JP" sz="1500" dirty="0">
-                <a:solidFill>
-                  <a:schemeClr val="accent4">
-                    <a:lumMod val="65000"/>
-                    <a:lumOff val="35000"/>
-                  </a:schemeClr>
-                </a:solidFill>
-                <a:latin typeface="Arial" charset="0"/>
-                <a:ea typeface="ＭＳ Ｐゴシック" pitchFamily="50" charset="-128"/>
-              </a:rPr>
-              <a:t>)</a:t>
-            </a:r>
-            <a:r>
-              <a:rPr lang="ja-JP" altLang="en-US" sz="1500" dirty="0">
-                <a:solidFill>
-                  <a:schemeClr val="accent4">
-                    <a:lumMod val="65000"/>
-                    <a:lumOff val="35000"/>
-                  </a:schemeClr>
-                </a:solidFill>
-                <a:latin typeface="Arial" charset="0"/>
-                <a:ea typeface="ＭＳ Ｐゴシック" pitchFamily="50" charset="-128"/>
-              </a:rPr>
-              <a:t> 」　条件を満たす要素の位置</a:t>
-            </a:r>
-            <a:endParaRPr lang="en-US" altLang="ja-JP" sz="1500" dirty="0">
-              <a:solidFill>
-                <a:schemeClr val="accent4">
-                  <a:lumMod val="65000"/>
-                  <a:lumOff val="35000"/>
-                </a:schemeClr>
-              </a:solidFill>
-              <a:latin typeface="Arial" charset="0"/>
-              <a:ea typeface="ＭＳ Ｐゴシック" pitchFamily="50" charset="-128"/>
-            </a:endParaRPr>
-          </a:p>
-          <a:p>
-            <a:pPr marL="0" marR="0" indent="0" defTabSz="914400" rtl="0" eaLnBrk="1" fontAlgn="base" latinLnBrk="0" hangingPunct="1">
-              <a:spcBef>
-                <a:spcPct val="0"/>
-              </a:spcBef>
-              <a:spcAft>
-                <a:spcPct val="0"/>
-              </a:spcAft>
-              <a:buClrTx/>
-              <a:buSzTx/>
-              <a:buFontTx/>
-              <a:buNone/>
-              <a:tabLst/>
-            </a:pPr>
-            <a:r>
-              <a:rPr lang="ja-JP" altLang="en-US" sz="1500" dirty="0">
-                <a:solidFill>
-                  <a:schemeClr val="accent4">
-                    <a:lumMod val="65000"/>
-                    <a:lumOff val="35000"/>
-                  </a:schemeClr>
-                </a:solidFill>
-                <a:latin typeface="Arial" charset="0"/>
-                <a:ea typeface="ＭＳ Ｐゴシック" pitchFamily="50" charset="-128"/>
-              </a:rPr>
-              <a:t>「 </a:t>
-            </a:r>
-            <a:r>
-              <a:rPr lang="en-US" altLang="ja-JP" sz="1500" dirty="0">
-                <a:solidFill>
-                  <a:schemeClr val="accent4">
-                    <a:lumMod val="65000"/>
-                    <a:lumOff val="35000"/>
-                  </a:schemeClr>
-                </a:solidFill>
-                <a:latin typeface="Arial" charset="0"/>
-                <a:ea typeface="ＭＳ Ｐゴシック" pitchFamily="50" charset="-128"/>
-              </a:rPr>
-              <a:t>points(x, y, </a:t>
-            </a:r>
-            <a:r>
-              <a:rPr lang="en-US" altLang="ja-JP" sz="1500" dirty="0" err="1">
-                <a:solidFill>
-                  <a:schemeClr val="accent4">
-                    <a:lumMod val="65000"/>
-                    <a:lumOff val="35000"/>
-                  </a:schemeClr>
-                </a:solidFill>
-                <a:latin typeface="Arial" charset="0"/>
-                <a:ea typeface="ＭＳ Ｐゴシック" pitchFamily="50" charset="-128"/>
-              </a:rPr>
-              <a:t>pch</a:t>
-            </a:r>
-            <a:r>
-              <a:rPr lang="en-US" altLang="ja-JP" sz="1500" dirty="0">
-                <a:solidFill>
-                  <a:schemeClr val="accent4">
-                    <a:lumMod val="65000"/>
-                    <a:lumOff val="35000"/>
-                  </a:schemeClr>
-                </a:solidFill>
-                <a:latin typeface="Arial" charset="0"/>
-                <a:ea typeface="ＭＳ Ｐゴシック" pitchFamily="50" charset="-128"/>
-              </a:rPr>
-              <a:t>, col)</a:t>
-            </a:r>
-            <a:r>
-              <a:rPr lang="ja-JP" altLang="en-US" sz="1500" dirty="0">
-                <a:solidFill>
-                  <a:schemeClr val="accent4">
-                    <a:lumMod val="65000"/>
-                    <a:lumOff val="35000"/>
-                  </a:schemeClr>
-                </a:solidFill>
-                <a:latin typeface="Arial" charset="0"/>
-                <a:ea typeface="ＭＳ Ｐゴシック" pitchFamily="50" charset="-128"/>
-              </a:rPr>
-              <a:t> 」　点を打つ</a:t>
-            </a:r>
-            <a:endParaRPr lang="en-US" altLang="ja-JP" sz="1500" dirty="0">
-              <a:solidFill>
-                <a:schemeClr val="accent4">
-                  <a:lumMod val="65000"/>
-                  <a:lumOff val="35000"/>
-                </a:schemeClr>
-              </a:solidFill>
-              <a:latin typeface="Arial" charset="0"/>
-              <a:ea typeface="ＭＳ Ｐゴシック" pitchFamily="50" charset="-128"/>
-            </a:endParaRPr>
-          </a:p>
         </p:txBody>
       </p:sp>
-      <p:pic>
-        <p:nvPicPr>
-          <p:cNvPr id="10" name="図 9">
-            <a:extLst>
-              <a:ext uri="{FF2B5EF4-FFF2-40B4-BE49-F238E27FC236}">
-                <a16:creationId xmlns:a16="http://schemas.microsoft.com/office/drawing/2014/main" id="{EED49052-6400-70AB-1241-CB556F6D2047}"/>
-              </a:ext>
-            </a:extLst>
-          </p:cNvPr>
-          <p:cNvPicPr>
-            <a:picLocks noChangeAspect="1"/>
-          </p:cNvPicPr>
-          <p:nvPr/>
-        </p:nvPicPr>
-        <p:blipFill>
-          <a:blip r:embed="rId2"/>
-          <a:stretch>
-            <a:fillRect/>
-          </a:stretch>
-        </p:blipFill>
-        <p:spPr>
-          <a:xfrm>
-            <a:off x="5488406" y="1367310"/>
-            <a:ext cx="4896533" cy="2305372"/>
-          </a:xfrm>
-          <a:prstGeom prst="rect">
-            <a:avLst/>
-          </a:prstGeom>
-          <a:ln>
-            <a:solidFill>
-              <a:schemeClr val="accent3">
-                <a:lumMod val="65000"/>
-              </a:schemeClr>
-            </a:solidFill>
-          </a:ln>
-        </p:spPr>
-      </p:pic>
-      <p:pic>
-        <p:nvPicPr>
-          <p:cNvPr id="5" name="図 4">
-            <a:extLst>
-              <a:ext uri="{FF2B5EF4-FFF2-40B4-BE49-F238E27FC236}">
-                <a16:creationId xmlns:a16="http://schemas.microsoft.com/office/drawing/2014/main" id="{1EE0FA69-D986-A076-E543-3A5BDDF36EC5}"/>
-              </a:ext>
-            </a:extLst>
-          </p:cNvPr>
-          <p:cNvPicPr>
-            <a:picLocks noChangeAspect="1"/>
-          </p:cNvPicPr>
-          <p:nvPr/>
-        </p:nvPicPr>
-        <p:blipFill>
-          <a:blip r:embed="rId3"/>
-          <a:stretch>
-            <a:fillRect/>
-          </a:stretch>
-        </p:blipFill>
-        <p:spPr>
-          <a:xfrm>
-            <a:off x="9464632" y="3402947"/>
-            <a:ext cx="2458193" cy="3283604"/>
-          </a:xfrm>
-          <a:prstGeom prst="rect">
-            <a:avLst/>
-          </a:prstGeom>
-          <a:ln>
-            <a:solidFill>
-              <a:schemeClr val="accent3">
-                <a:lumMod val="65000"/>
-              </a:schemeClr>
-            </a:solidFill>
-          </a:ln>
-        </p:spPr>
-      </p:pic>
       <p:sp>
         <p:nvSpPr>
           <p:cNvPr id="12" name="コンテンツ プレースホルダー 2">
@@ -13814,9 +14866,6 @@
               <a:rPr lang="ja-JP" altLang="en-US" sz="2400" kern="0" dirty="0"/>
               <a:t>を用意</a:t>
             </a:r>
-            <a:endParaRPr lang="en-US" altLang="ja-JP" sz="2400" kern="0" dirty="0"/>
-          </a:p>
-          <a:p>
             <a:endParaRPr lang="en-US" altLang="ja-JP" sz="2400" kern="0" dirty="0">
               <a:solidFill>
                 <a:schemeClr val="accent6"/>
@@ -13884,6 +14933,71 @@
               </a:rPr>
               <a:t>　形と色を分ける</a:t>
             </a:r>
+            <a:endParaRPr lang="en-US" altLang="ja-JP" sz="2400" kern="0" dirty="0">
+              <a:solidFill>
+                <a:schemeClr val="accent4"/>
+              </a:solidFill>
+            </a:endParaRPr>
+          </a:p>
+          <a:p>
+            <a:r>
+              <a:rPr lang="ja-JP" altLang="en-US" sz="2400" kern="0" dirty="0">
+                <a:solidFill>
+                  <a:schemeClr val="accent4"/>
+                </a:solidFill>
+              </a:rPr>
+              <a:t>マーカーを打って図をかく</a:t>
+            </a:r>
+            <a:endParaRPr lang="en-US" altLang="ja-JP" sz="2400" kern="0" dirty="0">
+              <a:solidFill>
+                <a:schemeClr val="accent4"/>
+              </a:solidFill>
+            </a:endParaRPr>
+          </a:p>
+          <a:p>
+            <a:pPr marL="0" indent="0">
+              <a:buNone/>
+            </a:pPr>
+            <a:r>
+              <a:rPr lang="ja-JP" altLang="en-US" sz="2400" kern="0" dirty="0">
+                <a:solidFill>
+                  <a:schemeClr val="accent4"/>
+                </a:solidFill>
+              </a:rPr>
+              <a:t>　</a:t>
+            </a:r>
+            <a:r>
+              <a:rPr lang="en-US" altLang="ja-JP" sz="1800" kern="0" dirty="0">
+                <a:solidFill>
+                  <a:schemeClr val="accent6"/>
+                </a:solidFill>
+              </a:rPr>
+              <a:t>yd</a:t>
+            </a:r>
+            <a:r>
+              <a:rPr lang="ja-JP" altLang="en-US" sz="1800" kern="0" dirty="0">
+                <a:solidFill>
+                  <a:schemeClr val="accent6"/>
+                </a:solidFill>
+              </a:rPr>
+              <a:t>の１種類のデータ番号を</a:t>
+            </a:r>
+            <a:r>
+              <a:rPr lang="en-US" altLang="ja-JP" sz="1800" kern="0" dirty="0">
+                <a:solidFill>
+                  <a:schemeClr val="accent6"/>
+                </a:solidFill>
+              </a:rPr>
+              <a:t>n</a:t>
+            </a:r>
+            <a:r>
+              <a:rPr lang="ja-JP" altLang="en-US" sz="1800" kern="0" dirty="0">
+                <a:solidFill>
+                  <a:schemeClr val="accent6"/>
+                </a:solidFill>
+              </a:rPr>
+              <a:t>に格納する</a:t>
+            </a:r>
             <a:endParaRPr lang="en-US" altLang="ja-JP" sz="1800" kern="0" dirty="0">
               <a:solidFill>
                 <a:schemeClr val="accent6"/>
@@ -13894,35 +15008,10 @@
             <a:pPr marL="0" indent="0">
               <a:buNone/>
             </a:pPr>
-            <a:endParaRPr lang="en-US" altLang="ja-JP" sz="2400" kern="0" dirty="0">
-              <a:solidFill>
-                <a:schemeClr val="accent4"/>
-              </a:solidFill>
-            </a:endParaRPr>
-          </a:p>
-          <a:p>
-            <a:r>
-              <a:rPr lang="ja-JP" altLang="en-US" sz="2400" kern="0" dirty="0">
-                <a:solidFill>
-                  <a:schemeClr val="accent4"/>
-                </a:solidFill>
-              </a:rPr>
-              <a:t>マーカーを打って図をかく</a:t>
-            </a:r>
-            <a:endParaRPr lang="en-US" altLang="ja-JP" sz="2400" kern="0" dirty="0">
-              <a:solidFill>
-                <a:schemeClr val="accent4"/>
-              </a:solidFill>
-            </a:endParaRPr>
-          </a:p>
-          <a:p>
-            <a:pPr marL="0" indent="0">
-              <a:buNone/>
-            </a:pPr>
-            <a:r>
-              <a:rPr lang="ja-JP" altLang="en-US" sz="2400" kern="0" dirty="0">
-                <a:solidFill>
-                  <a:schemeClr val="accent4"/>
+            <a:r>
+              <a:rPr lang="ja-JP" altLang="en-US" sz="1800" kern="0" dirty="0">
+                <a:solidFill>
+                  <a:schemeClr val="accent6"/>
                 </a:solidFill>
               </a:rPr>
               <a:t>　</a:t>
@@ -13933,7 +15022,7 @@
                   <a:schemeClr val="accent6"/>
                 </a:solidFill>
               </a:rPr>
-              <a:t>yd</a:t>
+              <a:t>n</a:t>
             </a:r>
             <a:r>
               <a:rPr lang="ja-JP" altLang="en-US" sz="1800" kern="0" dirty="0">
@@ -13941,7 +15030,7 @@
                   <a:schemeClr val="accent6"/>
                 </a:solidFill>
               </a:rPr>
-              <a:t>の１種類のデータ番号を</a:t>
+              <a:t>番目の（体長</a:t>
             </a:r>
             <a:r>
               <a:rPr lang="en-US" altLang="ja-JP" sz="1800" kern="0" dirty="0">
@@ -13949,7 +15038,7 @@
                   <a:schemeClr val="accent6"/>
                 </a:solidFill>
               </a:rPr>
-              <a:t>n</a:t>
+              <a:t>,</a:t>
             </a:r>
             <a:r>
               <a:rPr lang="ja-JP" altLang="en-US" sz="1800" kern="0" dirty="0">
@@ -13957,7 +15046,23 @@
                   <a:schemeClr val="accent6"/>
                 </a:solidFill>
               </a:rPr>
-              <a:t>に格納する</a:t>
+              <a:t>体重）の座標に</a:t>
+            </a:r>
+            <a:r>
+              <a:rPr lang="en-US" altLang="ja-JP" sz="1800" kern="0" dirty="0">
+                <a:solidFill>
+                  <a:schemeClr val="accent6"/>
+                </a:solidFill>
+              </a:rPr>
+              <a:t>m</a:t>
+            </a:r>
+            <a:r>
+              <a:rPr lang="ja-JP" altLang="en-US" sz="1800" kern="0" dirty="0">
+                <a:solidFill>
+                  <a:schemeClr val="accent6"/>
+                </a:solidFill>
+              </a:rPr>
+              <a:t>番目のマーカーをつける</a:t>
             </a:r>
             <a:endParaRPr lang="en-US" altLang="ja-JP" sz="1800" kern="0" dirty="0">
               <a:solidFill>
@@ -13975,7 +15080,7 @@
                   <a:schemeClr val="accent6"/>
                 </a:solidFill>
               </a:rPr>
-              <a:t>　</a:t>
+              <a:t>　次に</a:t>
             </a:r>
             <a:r>
               <a:rPr lang="en-US" altLang="ja-JP" sz="1800" kern="0" dirty="0">
@@ -13983,7 +15088,7 @@
                   <a:schemeClr val="accent6"/>
                 </a:solidFill>
               </a:rPr>
-              <a:t>n</a:t>
+              <a:t> yd</a:t>
             </a:r>
             <a:r>
               <a:rPr lang="ja-JP" altLang="en-US" sz="1800" kern="0" dirty="0">
@@ -13991,7 +15096,7 @@
                   <a:schemeClr val="accent6"/>
                 </a:solidFill>
               </a:rPr>
-              <a:t>番目の（体長</a:t>
+              <a:t> の種類に進める（同時に</a:t>
             </a:r>
             <a:r>
               <a:rPr lang="en-US" altLang="ja-JP" sz="1800" kern="0" dirty="0">
@@ -13999,7 +15104,7 @@
                   <a:schemeClr val="accent6"/>
                 </a:solidFill>
               </a:rPr>
-              <a:t>,</a:t>
+              <a:t>m</a:t>
             </a:r>
             <a:r>
               <a:rPr lang="ja-JP" altLang="en-US" sz="1800" kern="0" dirty="0">
@@ -14007,23 +15112,7 @@
                   <a:schemeClr val="accent6"/>
                 </a:solidFill>
               </a:rPr>
-              <a:t>体重）の座標に</a:t>
-            </a:r>
-            <a:r>
-              <a:rPr lang="en-US" altLang="ja-JP" sz="1800" kern="0" dirty="0">
-                <a:solidFill>
-                  <a:schemeClr val="accent6"/>
-                </a:solidFill>
-              </a:rPr>
-              <a:t>m</a:t>
-            </a:r>
-            <a:r>
-              <a:rPr lang="ja-JP" altLang="en-US" sz="1800" kern="0" dirty="0">
-                <a:solidFill>
-                  <a:schemeClr val="accent6"/>
-                </a:solidFill>
-              </a:rPr>
-              <a:t>番目のマーカーをつける</a:t>
+              <a:t>も１増やす）</a:t>
             </a:r>
             <a:endParaRPr lang="en-US" altLang="ja-JP" sz="1800" kern="0" dirty="0">
               <a:solidFill>
@@ -14038,60 +15127,26 @@
             <a:r>
               <a:rPr lang="ja-JP" altLang="en-US" sz="1800" kern="0" dirty="0">
                 <a:solidFill>
-                  <a:schemeClr val="accent6"/>
-                </a:solidFill>
-              </a:rPr>
-              <a:t>　次に</a:t>
-            </a:r>
-            <a:r>
-              <a:rPr lang="en-US" altLang="ja-JP" sz="1800" kern="0" dirty="0">
-                <a:solidFill>
-                  <a:schemeClr val="accent6"/>
-                </a:solidFill>
-              </a:rPr>
-              <a:t> yd</a:t>
+                  <a:schemeClr val="accent4"/>
+                </a:solidFill>
+              </a:rPr>
+              <a:t>　図（</a:t>
+            </a:r>
+            <a:r>
+              <a:rPr lang="en-US" altLang="ja-JP" sz="1800" kern="0" dirty="0" err="1">
+                <a:solidFill>
+                  <a:schemeClr val="accent4"/>
+                </a:solidFill>
+              </a:rPr>
+              <a:t>Rdocumentation</a:t>
             </a:r>
             <a:r>
               <a:rPr lang="ja-JP" altLang="en-US" sz="1800" kern="0" dirty="0">
                 <a:solidFill>
-                  <a:schemeClr val="accent6"/>
-                </a:solidFill>
-              </a:rPr>
-              <a:t> の種類に進める（同時に</a:t>
-            </a:r>
-            <a:r>
-              <a:rPr lang="en-US" altLang="ja-JP" sz="1800" kern="0" dirty="0">
-                <a:solidFill>
-                  <a:schemeClr val="accent6"/>
-                </a:solidFill>
-              </a:rPr>
-              <a:t>m</a:t>
-            </a:r>
-            <a:r>
-              <a:rPr lang="ja-JP" altLang="en-US" sz="1800" kern="0" dirty="0">
-                <a:solidFill>
-                  <a:schemeClr val="accent6"/>
-                </a:solidFill>
-              </a:rPr>
-              <a:t>も１増やす）</a:t>
-            </a:r>
-            <a:endParaRPr lang="en-US" altLang="ja-JP" sz="1800" kern="0" dirty="0">
-              <a:solidFill>
-                <a:schemeClr val="accent6"/>
-              </a:solidFill>
-            </a:endParaRPr>
-          </a:p>
-          <a:p>
-            <a:pPr marL="0" indent="0">
-              <a:buNone/>
-            </a:pPr>
-            <a:r>
-              <a:rPr lang="ja-JP" altLang="en-US" sz="1800" kern="0" dirty="0">
-                <a:solidFill>
                   <a:schemeClr val="accent4"/>
                 </a:solidFill>
               </a:rPr>
-              <a:t>　</a:t>
+              <a:t>より）</a:t>
             </a:r>
             <a:endParaRPr lang="en-US" altLang="ja-JP" sz="1800" kern="0" dirty="0">
               <a:solidFill>
@@ -14115,7 +15170,7 @@
         </p:nvSpPr>
         <p:spPr bwMode="auto">
           <a:xfrm>
-            <a:off x="8670965" y="5495984"/>
+            <a:off x="8088020" y="5148208"/>
             <a:ext cx="605642" cy="187204"/>
           </a:xfrm>
           <a:prstGeom prst="rightArrow">
@@ -14174,6 +15229,117 @@
           </a:p>
         </p:txBody>
       </p:sp>
+      <p:pic>
+        <p:nvPicPr>
+          <p:cNvPr id="6" name="図 5">
+            <a:extLst>
+              <a:ext uri="{FF2B5EF4-FFF2-40B4-BE49-F238E27FC236}">
+                <a16:creationId xmlns:a16="http://schemas.microsoft.com/office/drawing/2014/main" id="{19E63388-168A-7BBD-C711-AFF810293955}"/>
+              </a:ext>
+            </a:extLst>
+          </p:cNvPr>
+          <p:cNvPicPr>
+            <a:picLocks noChangeAspect="1"/>
+          </p:cNvPicPr>
+          <p:nvPr/>
+        </p:nvPicPr>
+        <p:blipFill>
+          <a:blip r:embed="rId2"/>
+          <a:stretch>
+            <a:fillRect/>
+          </a:stretch>
+        </p:blipFill>
+        <p:spPr>
+          <a:xfrm>
+            <a:off x="762000" y="5589586"/>
+            <a:ext cx="10218413" cy="769654"/>
+          </a:xfrm>
+          <a:prstGeom prst="rect">
+            <a:avLst/>
+          </a:prstGeom>
+          <a:ln>
+            <a:solidFill>
+              <a:schemeClr val="accent3">
+                <a:lumMod val="65000"/>
+              </a:schemeClr>
+            </a:solidFill>
+          </a:ln>
+        </p:spPr>
+      </p:pic>
+      <p:pic>
+        <p:nvPicPr>
+          <p:cNvPr id="9" name="図 8">
+            <a:extLst>
+              <a:ext uri="{FF2B5EF4-FFF2-40B4-BE49-F238E27FC236}">
+                <a16:creationId xmlns:a16="http://schemas.microsoft.com/office/drawing/2014/main" id="{3DBFCFB2-423E-A348-2C0F-8742A9190910}"/>
+              </a:ext>
+            </a:extLst>
+          </p:cNvPr>
+          <p:cNvPicPr>
+            <a:picLocks noChangeAspect="1"/>
+          </p:cNvPicPr>
+          <p:nvPr/>
+        </p:nvPicPr>
+        <p:blipFill>
+          <a:blip r:embed="rId3"/>
+          <a:stretch>
+            <a:fillRect/>
+          </a:stretch>
+        </p:blipFill>
+        <p:spPr>
+          <a:xfrm>
+            <a:off x="8867295" y="3764495"/>
+            <a:ext cx="3187689" cy="3033375"/>
+          </a:xfrm>
+          <a:prstGeom prst="rect">
+            <a:avLst/>
+          </a:prstGeom>
+          <a:ln>
+            <a:solidFill>
+              <a:schemeClr val="accent3">
+                <a:lumMod val="65000"/>
+              </a:schemeClr>
+            </a:solidFill>
+          </a:ln>
+        </p:spPr>
+      </p:pic>
+      <p:pic>
+        <p:nvPicPr>
+          <p:cNvPr id="14" name="図 13">
+            <a:extLst>
+              <a:ext uri="{FF2B5EF4-FFF2-40B4-BE49-F238E27FC236}">
+                <a16:creationId xmlns:a16="http://schemas.microsoft.com/office/drawing/2014/main" id="{FC6C2D05-CC9A-CEC4-2EC1-58D35E2E1F4D}"/>
+              </a:ext>
+            </a:extLst>
+          </p:cNvPr>
+          <p:cNvPicPr>
+            <a:picLocks noChangeAspect="1"/>
+          </p:cNvPicPr>
+          <p:nvPr/>
+        </p:nvPicPr>
+        <p:blipFill>
+          <a:blip r:embed="rId4"/>
+          <a:stretch>
+            <a:fillRect/>
+          </a:stretch>
+        </p:blipFill>
+        <p:spPr>
+          <a:xfrm>
+            <a:off x="5275732" y="1420752"/>
+            <a:ext cx="6230219" cy="1838582"/>
+          </a:xfrm>
+          <a:prstGeom prst="rect">
+            <a:avLst/>
+          </a:prstGeom>
+          <a:ln>
+            <a:solidFill>
+              <a:schemeClr val="accent3">
+                <a:lumMod val="65000"/>
+              </a:schemeClr>
+            </a:solidFill>
+          </a:ln>
+        </p:spPr>
+      </p:pic>
     </p:spTree>
     <p:extLst>
       <p:ext uri="{BB962C8B-B14F-4D97-AF65-F5344CB8AC3E}">
@@ -15772,7 +16938,7 @@
         <p:spPr bwMode="auto">
           <a:xfrm>
             <a:off x="5721693" y="1268414"/>
-            <a:ext cx="6610242" cy="1536313"/>
+            <a:ext cx="6610242" cy="686965"/>
           </a:xfrm>
           <a:prstGeom prst="rect">
             <a:avLst/>
@@ -16141,8 +17307,8 @@
         </p:nvSpPr>
         <p:spPr bwMode="auto">
           <a:xfrm>
-            <a:off x="6820836" y="3205011"/>
-            <a:ext cx="4411956" cy="2079508"/>
+            <a:off x="5721693" y="2190410"/>
+            <a:ext cx="4913964" cy="2079508"/>
           </a:xfrm>
           <a:prstGeom prst="rect">
             <a:avLst/>
@@ -16555,7 +17721,7 @@
         </p:blipFill>
         <p:spPr>
           <a:xfrm>
-            <a:off x="6184607" y="1302719"/>
+            <a:off x="6210220" y="1445539"/>
             <a:ext cx="6121715" cy="304816"/>
           </a:xfrm>
           <a:prstGeom prst="rect">
@@ -16590,7 +17756,7 @@
         </p:blipFill>
         <p:spPr>
           <a:xfrm>
-            <a:off x="7175281" y="3429000"/>
+            <a:off x="6076138" y="2414399"/>
             <a:ext cx="4254719" cy="1428823"/>
           </a:xfrm>
           <a:prstGeom prst="rect">
@@ -16626,7 +17792,7 @@
         <p:cNvPr id="1" name="">
           <a:extLst>
             <a:ext uri="{FF2B5EF4-FFF2-40B4-BE49-F238E27FC236}">
-              <a16:creationId xmlns:a16="http://schemas.microsoft.com/office/drawing/2014/main" id="{BD22EEB9-D52F-262D-9932-339045E0736E}"/>
+              <a16:creationId xmlns:a16="http://schemas.microsoft.com/office/drawing/2014/main" id="{7835C81A-9A21-CEC4-618C-AADDA9110577}"/>
             </a:ext>
           </a:extLst>
         </p:cNvPr>
@@ -16643,10 +17809,129 @@
       </p:grpSpPr>
       <p:sp>
         <p:nvSpPr>
+          <p:cNvPr id="7" name="正方形/長方形 6">
+            <a:extLst>
+              <a:ext uri="{FF2B5EF4-FFF2-40B4-BE49-F238E27FC236}">
+                <a16:creationId xmlns:a16="http://schemas.microsoft.com/office/drawing/2014/main" id="{3BFEA26B-2A7C-CDA7-A5AE-7685E7C948B1}"/>
+              </a:ext>
+            </a:extLst>
+          </p:cNvPr>
+          <p:cNvSpPr/>
+          <p:nvPr/>
+        </p:nvSpPr>
+        <p:spPr bwMode="auto">
+          <a:xfrm>
+            <a:off x="5832784" y="1297640"/>
+            <a:ext cx="5597215" cy="1898174"/>
+          </a:xfrm>
+          <a:prstGeom prst="rect">
+            <a:avLst/>
+          </a:prstGeom>
+          <a:solidFill>
+            <a:schemeClr val="accent5">
+              <a:lumMod val="40000"/>
+              <a:lumOff val="60000"/>
+            </a:schemeClr>
+          </a:solidFill>
+          <a:ln w="9525" cap="flat" cmpd="sng" algn="ctr">
+            <a:noFill/>
+            <a:prstDash val="solid"/>
+            <a:miter lim="800000"/>
+            <a:headEnd type="none" w="med" len="med"/>
+            <a:tailEnd type="none" w="med" len="med"/>
+          </a:ln>
+          <a:effectLst/>
+        </p:spPr>
+        <p:txBody>
+          <a:bodyPr vert="horz" wrap="none" lIns="91440" tIns="45720" rIns="91440" bIns="45720" numCol="1" rtlCol="0" anchor="t" anchorCtr="0" compatLnSpc="1">
+            <a:prstTxWarp prst="textNoShape">
+              <a:avLst/>
+            </a:prstTxWarp>
+          </a:bodyPr>
+          <a:lstStyle/>
+          <a:p>
+            <a:pPr marL="0" marR="0" indent="0" defTabSz="914400" rtl="0" eaLnBrk="1" fontAlgn="base" latinLnBrk="0" hangingPunct="1">
+              <a:spcBef>
+                <a:spcPct val="0"/>
+              </a:spcBef>
+              <a:spcAft>
+                <a:spcPct val="0"/>
+              </a:spcAft>
+              <a:buClrTx/>
+              <a:buSzTx/>
+              <a:buFontTx/>
+              <a:buNone/>
+              <a:tabLst/>
+            </a:pPr>
+            <a:r>
+              <a:rPr lang="en-US" altLang="ja-JP" sz="1500" dirty="0">
+                <a:solidFill>
+                  <a:schemeClr val="accent5">
+                    <a:lumMod val="50000"/>
+                  </a:schemeClr>
+                </a:solidFill>
+                <a:latin typeface="Arial" charset="0"/>
+                <a:ea typeface="ＭＳ Ｐゴシック" pitchFamily="50" charset="-128"/>
+              </a:rPr>
+              <a:t>P</a:t>
+            </a:r>
+          </a:p>
+          <a:p>
+            <a:pPr marL="0" marR="0" indent="0" defTabSz="914400" rtl="0" eaLnBrk="1" fontAlgn="base" latinLnBrk="0" hangingPunct="1">
+              <a:spcBef>
+                <a:spcPct val="0"/>
+              </a:spcBef>
+              <a:spcAft>
+                <a:spcPct val="0"/>
+              </a:spcAft>
+              <a:buClrTx/>
+              <a:buSzTx/>
+              <a:buFontTx/>
+              <a:buNone/>
+              <a:tabLst/>
+            </a:pPr>
+            <a:endParaRPr lang="en-US" altLang="ja-JP" sz="1500" dirty="0">
+              <a:solidFill>
+                <a:schemeClr val="accent5">
+                  <a:lumMod val="50000"/>
+                </a:schemeClr>
+              </a:solidFill>
+              <a:latin typeface="Arial" charset="0"/>
+              <a:ea typeface="ＭＳ Ｐゴシック" pitchFamily="50" charset="-128"/>
+            </a:endParaRPr>
+          </a:p>
+          <a:p>
+            <a:pPr marL="0" marR="0" indent="0" defTabSz="914400" rtl="0" eaLnBrk="1" fontAlgn="base" latinLnBrk="0" hangingPunct="1">
+              <a:spcBef>
+                <a:spcPct val="0"/>
+              </a:spcBef>
+              <a:spcAft>
+                <a:spcPct val="0"/>
+              </a:spcAft>
+              <a:buClrTx/>
+              <a:buSzTx/>
+              <a:buFontTx/>
+              <a:buNone/>
+              <a:tabLst/>
+            </a:pPr>
+            <a:endParaRPr lang="en-US" altLang="ja-JP" sz="1500" dirty="0">
+              <a:solidFill>
+                <a:schemeClr val="accent5">
+                  <a:lumMod val="50000"/>
+                </a:schemeClr>
+              </a:solidFill>
+              <a:latin typeface="Arial" charset="0"/>
+              <a:ea typeface="ＭＳ Ｐゴシック" pitchFamily="50" charset="-128"/>
+            </a:endParaRPr>
+          </a:p>
+        </p:txBody>
+      </p:sp>
+      <p:sp>
+        <p:nvSpPr>
           <p:cNvPr id="2" name="タイトル 1">
             <a:extLst>
               <a:ext uri="{FF2B5EF4-FFF2-40B4-BE49-F238E27FC236}">
-                <a16:creationId xmlns:a16="http://schemas.microsoft.com/office/drawing/2014/main" id="{DF11AD8D-36A1-5DF0-654C-7D5CB301EF39}"/>
+                <a16:creationId xmlns:a16="http://schemas.microsoft.com/office/drawing/2014/main" id="{AD031C14-81B9-2475-EAA3-8DA6F5206AF6}"/>
               </a:ext>
             </a:extLst>
           </p:cNvPr>
@@ -16663,9 +17948,10 @@
           <a:lstStyle/>
           <a:p>
             <a:r>
-              <a:rPr kumimoji="1" lang="ja-JP" altLang="en-US" dirty="0"/>
-              <a:t>参考文献</a:t>
-            </a:r>
+              <a:rPr kumimoji="1" lang="en-US" altLang="ja-JP" dirty="0" err="1"/>
+              <a:t>elephant.ipynb</a:t>
+            </a:r>
+            <a:endParaRPr kumimoji="1" lang="ja-JP" altLang="en-US" dirty="0"/>
           </a:p>
         </p:txBody>
       </p:sp>
@@ -16674,35 +17960,7 @@
           <p:cNvPr id="3" name="コンテンツ プレースホルダー 2">
             <a:extLst>
               <a:ext uri="{FF2B5EF4-FFF2-40B4-BE49-F238E27FC236}">
-                <a16:creationId xmlns:a16="http://schemas.microsoft.com/office/drawing/2014/main" id="{1E819672-D17E-DF8C-DEA2-084BC6C49B5F}"/>
-              </a:ext>
-            </a:extLst>
-          </p:cNvPr>
-          <p:cNvSpPr>
-            <a:spLocks noGrp="1"/>
-          </p:cNvSpPr>
-          <p:nvPr>
-            <p:ph idx="1"/>
-          </p:nvPr>
-        </p:nvSpPr>
-        <p:spPr/>
-        <p:txBody>
-          <a:bodyPr/>
-          <a:lstStyle/>
-          <a:p>
-            <a:r>
-              <a:rPr kumimoji="1" lang="ja-JP" altLang="en-US" dirty="0"/>
-              <a:t>あ</a:t>
-            </a:r>
-          </a:p>
-        </p:txBody>
-      </p:sp>
-      <p:sp>
-        <p:nvSpPr>
-          <p:cNvPr id="7" name="字幕 2">
-            <a:extLst>
-              <a:ext uri="{FF2B5EF4-FFF2-40B4-BE49-F238E27FC236}">
-                <a16:creationId xmlns:a16="http://schemas.microsoft.com/office/drawing/2014/main" id="{99641A50-23CB-2877-6685-B6FDD180F290}"/>
+                <a16:creationId xmlns:a16="http://schemas.microsoft.com/office/drawing/2014/main" id="{13E17388-F4D1-41A6-3529-214D010A152D}"/>
               </a:ext>
             </a:extLst>
           </p:cNvPr>
@@ -16713,28 +17971,30 @@
         </p:nvSpPr>
         <p:spPr>
           <a:xfrm>
-            <a:off x="719541" y="2386173"/>
-            <a:ext cx="10992128" cy="1837679"/>
+            <a:off x="609600" y="1268414"/>
+            <a:ext cx="10972800" cy="5113337"/>
           </a:xfrm>
           <a:prstGeom prst="rect">
             <a:avLst/>
           </a:prstGeom>
         </p:spPr>
         <p:txBody>
-          <a:bodyPr vert="horz" lIns="91440" tIns="45720" rIns="91440" bIns="45720" rtlCol="0">
-            <a:normAutofit/>
-          </a:bodyPr>
+          <a:bodyPr/>
           <a:lstStyle>
-            <a:lvl1pPr marL="0" indent="0" algn="ctr" defTabSz="914400" rtl="0" eaLnBrk="1" latinLnBrk="0" hangingPunct="1">
-              <a:lnSpc>
-                <a:spcPct val="90000"/>
-              </a:lnSpc>
-              <a:spcBef>
-                <a:spcPts val="1000"/>
-              </a:spcBef>
-              <a:buFont typeface="Arial" panose="020B0604020202020204" pitchFamily="34" charset="0"/>
-              <a:buNone/>
-              <a:defRPr kumimoji="1" sz="2400" kern="1200">
+            <a:lvl1pPr marL="342900" indent="-342900" algn="l" rtl="0" eaLnBrk="1" fontAlgn="base" hangingPunct="1">
+              <a:spcBef>
+                <a:spcPct val="20000"/>
+              </a:spcBef>
+              <a:spcAft>
+                <a:spcPct val="0"/>
+              </a:spcAft>
+              <a:buClr>
+                <a:schemeClr val="accent1"/>
+              </a:buClr>
+              <a:buSzPct val="65000"/>
+              <a:buFont typeface="Wingdings" pitchFamily="2" charset="2"/>
+              <a:buChar char="n"/>
+              <a:defRPr kumimoji="1" sz="3200">
                 <a:solidFill>
                   <a:schemeClr val="tx1"/>
                 </a:solidFill>
@@ -16743,16 +18003,391 @@
                 <a:cs typeface="+mn-cs"/>
               </a:defRPr>
             </a:lvl1pPr>
-            <a:lvl2pPr marL="457200" indent="0" algn="ctr" defTabSz="914400" rtl="0" eaLnBrk="1" latinLnBrk="0" hangingPunct="1">
-              <a:lnSpc>
-                <a:spcPct val="90000"/>
-              </a:lnSpc>
-              <a:spcBef>
-                <a:spcPts val="500"/>
-              </a:spcBef>
-              <a:buFont typeface="Arial" panose="020B0604020202020204" pitchFamily="34" charset="0"/>
-              <a:buNone/>
-              <a:defRPr kumimoji="1" sz="2000" kern="1200">
+            <a:lvl2pPr marL="669925" indent="-325438" algn="l" rtl="0" eaLnBrk="1" fontAlgn="base" hangingPunct="1">
+              <a:spcBef>
+                <a:spcPct val="20000"/>
+              </a:spcBef>
+              <a:spcAft>
+                <a:spcPct val="0"/>
+              </a:spcAft>
+              <a:buClr>
+                <a:schemeClr val="accent2"/>
+              </a:buClr>
+              <a:buSzPct val="60000"/>
+              <a:buFont typeface="Wingdings" pitchFamily="2" charset="2"/>
+              <a:buChar char="q"/>
+              <a:defRPr kumimoji="1" sz="2800">
+                <a:solidFill>
+                  <a:schemeClr val="tx1"/>
+                </a:solidFill>
+                <a:latin typeface="+mn-lt"/>
+                <a:ea typeface="+mn-ea"/>
+              </a:defRPr>
+            </a:lvl2pPr>
+            <a:lvl3pPr marL="1022350" indent="-350838" algn="l" rtl="0" eaLnBrk="1" fontAlgn="base" hangingPunct="1">
+              <a:spcBef>
+                <a:spcPct val="20000"/>
+              </a:spcBef>
+              <a:spcAft>
+                <a:spcPct val="0"/>
+              </a:spcAft>
+              <a:buClr>
+                <a:schemeClr val="accent1"/>
+              </a:buClr>
+              <a:buSzPct val="65000"/>
+              <a:buFont typeface="Wingdings" pitchFamily="2" charset="2"/>
+              <a:buChar char="n"/>
+              <a:defRPr kumimoji="1" sz="2400">
+                <a:solidFill>
+                  <a:schemeClr val="tx1"/>
+                </a:solidFill>
+                <a:latin typeface="+mn-lt"/>
+                <a:ea typeface="+mn-ea"/>
+              </a:defRPr>
+            </a:lvl3pPr>
+            <a:lvl4pPr marL="1339850" indent="-315913" algn="l" rtl="0" eaLnBrk="1" fontAlgn="base" hangingPunct="1">
+              <a:spcBef>
+                <a:spcPct val="20000"/>
+              </a:spcBef>
+              <a:spcAft>
+                <a:spcPct val="0"/>
+              </a:spcAft>
+              <a:buClr>
+                <a:schemeClr val="accent2"/>
+              </a:buClr>
+              <a:buSzPct val="70000"/>
+              <a:buFont typeface="Wingdings" pitchFamily="2" charset="2"/>
+              <a:buChar char="q"/>
+              <a:defRPr kumimoji="1" sz="2000">
+                <a:solidFill>
+                  <a:schemeClr val="tx1"/>
+                </a:solidFill>
+                <a:latin typeface="+mn-lt"/>
+                <a:ea typeface="+mn-ea"/>
+              </a:defRPr>
+            </a:lvl4pPr>
+            <a:lvl5pPr marL="1681163" indent="-339725" algn="l" rtl="0" eaLnBrk="1" fontAlgn="base" hangingPunct="1">
+              <a:spcBef>
+                <a:spcPct val="20000"/>
+              </a:spcBef>
+              <a:spcAft>
+                <a:spcPct val="0"/>
+              </a:spcAft>
+              <a:buClr>
+                <a:schemeClr val="accent1"/>
+              </a:buClr>
+              <a:buSzPct val="75000"/>
+              <a:buFont typeface="Wingdings" pitchFamily="2" charset="2"/>
+              <a:buChar char="§"/>
+              <a:defRPr kumimoji="1">
+                <a:solidFill>
+                  <a:schemeClr val="tx1"/>
+                </a:solidFill>
+                <a:latin typeface="+mn-lt"/>
+                <a:ea typeface="+mn-ea"/>
+              </a:defRPr>
+            </a:lvl5pPr>
+            <a:lvl6pPr marL="2138363" indent="-339725" algn="l" rtl="0" eaLnBrk="1" fontAlgn="base" hangingPunct="1">
+              <a:spcBef>
+                <a:spcPct val="20000"/>
+              </a:spcBef>
+              <a:spcAft>
+                <a:spcPct val="0"/>
+              </a:spcAft>
+              <a:buClr>
+                <a:schemeClr val="accent1"/>
+              </a:buClr>
+              <a:buSzPct val="75000"/>
+              <a:buFont typeface="Wingdings" pitchFamily="2" charset="2"/>
+              <a:buChar char="§"/>
+              <a:defRPr kumimoji="1">
+                <a:solidFill>
+                  <a:schemeClr val="tx1"/>
+                </a:solidFill>
+                <a:latin typeface="+mn-lt"/>
+                <a:ea typeface="+mn-ea"/>
+              </a:defRPr>
+            </a:lvl6pPr>
+            <a:lvl7pPr marL="2595563" indent="-339725" algn="l" rtl="0" eaLnBrk="1" fontAlgn="base" hangingPunct="1">
+              <a:spcBef>
+                <a:spcPct val="20000"/>
+              </a:spcBef>
+              <a:spcAft>
+                <a:spcPct val="0"/>
+              </a:spcAft>
+              <a:buClr>
+                <a:schemeClr val="accent1"/>
+              </a:buClr>
+              <a:buSzPct val="75000"/>
+              <a:buFont typeface="Wingdings" pitchFamily="2" charset="2"/>
+              <a:buChar char="§"/>
+              <a:defRPr kumimoji="1">
+                <a:solidFill>
+                  <a:schemeClr val="tx1"/>
+                </a:solidFill>
+                <a:latin typeface="+mn-lt"/>
+                <a:ea typeface="+mn-ea"/>
+              </a:defRPr>
+            </a:lvl7pPr>
+            <a:lvl8pPr marL="3052763" indent="-339725" algn="l" rtl="0" eaLnBrk="1" fontAlgn="base" hangingPunct="1">
+              <a:spcBef>
+                <a:spcPct val="20000"/>
+              </a:spcBef>
+              <a:spcAft>
+                <a:spcPct val="0"/>
+              </a:spcAft>
+              <a:buClr>
+                <a:schemeClr val="accent1"/>
+              </a:buClr>
+              <a:buSzPct val="75000"/>
+              <a:buFont typeface="Wingdings" pitchFamily="2" charset="2"/>
+              <a:buChar char="§"/>
+              <a:defRPr kumimoji="1">
+                <a:solidFill>
+                  <a:schemeClr val="tx1"/>
+                </a:solidFill>
+                <a:latin typeface="+mn-lt"/>
+                <a:ea typeface="+mn-ea"/>
+              </a:defRPr>
+            </a:lvl8pPr>
+            <a:lvl9pPr marL="3509963" indent="-339725" algn="l" rtl="0" eaLnBrk="1" fontAlgn="base" hangingPunct="1">
+              <a:spcBef>
+                <a:spcPct val="20000"/>
+              </a:spcBef>
+              <a:spcAft>
+                <a:spcPct val="0"/>
+              </a:spcAft>
+              <a:buClr>
+                <a:schemeClr val="accent1"/>
+              </a:buClr>
+              <a:buSzPct val="75000"/>
+              <a:buFont typeface="Wingdings" pitchFamily="2" charset="2"/>
+              <a:buChar char="§"/>
+              <a:defRPr kumimoji="1">
+                <a:solidFill>
+                  <a:schemeClr val="tx1"/>
+                </a:solidFill>
+                <a:latin typeface="+mn-lt"/>
+                <a:ea typeface="+mn-ea"/>
+              </a:defRPr>
+            </a:lvl9pPr>
+          </a:lstStyle>
+          <a:p>
+            <a:endParaRPr lang="ja-JP" altLang="en-US" kern="0" dirty="0"/>
+          </a:p>
+        </p:txBody>
+      </p:sp>
+      <p:sp>
+        <p:nvSpPr>
+          <p:cNvPr id="8" name="正方形/長方形 7">
+            <a:extLst>
+              <a:ext uri="{FF2B5EF4-FFF2-40B4-BE49-F238E27FC236}">
+                <a16:creationId xmlns:a16="http://schemas.microsoft.com/office/drawing/2014/main" id="{FB2F2228-9080-EF3D-EB3A-9FAE4C74A227}"/>
+              </a:ext>
+            </a:extLst>
+          </p:cNvPr>
+          <p:cNvSpPr/>
+          <p:nvPr/>
+        </p:nvSpPr>
+        <p:spPr bwMode="auto">
+          <a:xfrm>
+            <a:off x="5892586" y="3491089"/>
+            <a:ext cx="5537413" cy="2292194"/>
+          </a:xfrm>
+          <a:prstGeom prst="rect">
+            <a:avLst/>
+          </a:prstGeom>
+          <a:solidFill>
+            <a:schemeClr val="accent3">
+              <a:lumMod val="85000"/>
+            </a:schemeClr>
+          </a:solidFill>
+          <a:ln w="9525" cap="flat" cmpd="sng" algn="ctr">
+            <a:noFill/>
+            <a:prstDash val="solid"/>
+            <a:miter lim="800000"/>
+            <a:headEnd type="none" w="med" len="med"/>
+            <a:tailEnd type="none" w="med" len="med"/>
+          </a:ln>
+          <a:effectLst/>
+        </p:spPr>
+        <p:txBody>
+          <a:bodyPr vert="horz" wrap="none" lIns="91440" tIns="45720" rIns="91440" bIns="45720" numCol="1" rtlCol="0" anchor="t" anchorCtr="0" compatLnSpc="1">
+            <a:prstTxWarp prst="textNoShape">
+              <a:avLst/>
+            </a:prstTxWarp>
+          </a:bodyPr>
+          <a:lstStyle/>
+          <a:p>
+            <a:pPr marL="0" marR="0" indent="0" defTabSz="914400" rtl="0" eaLnBrk="1" fontAlgn="base" latinLnBrk="0" hangingPunct="1">
+              <a:spcBef>
+                <a:spcPct val="0"/>
+              </a:spcBef>
+              <a:spcAft>
+                <a:spcPct val="0"/>
+              </a:spcAft>
+              <a:buClrTx/>
+              <a:buSzTx/>
+              <a:buFontTx/>
+              <a:buNone/>
+              <a:tabLst/>
+            </a:pPr>
+            <a:r>
+              <a:rPr lang="en-US" altLang="ja-JP" sz="1500" dirty="0">
+                <a:solidFill>
+                  <a:schemeClr val="accent4">
+                    <a:lumMod val="65000"/>
+                    <a:lumOff val="35000"/>
+                  </a:schemeClr>
+                </a:solidFill>
+                <a:latin typeface="Arial" charset="0"/>
+                <a:ea typeface="ＭＳ Ｐゴシック" pitchFamily="50" charset="-128"/>
+              </a:rPr>
+              <a:t>R</a:t>
+            </a:r>
+          </a:p>
+          <a:p>
+            <a:pPr marL="0" marR="0" indent="0" defTabSz="914400" rtl="0" eaLnBrk="1" fontAlgn="base" latinLnBrk="0" hangingPunct="1">
+              <a:spcBef>
+                <a:spcPct val="0"/>
+              </a:spcBef>
+              <a:spcAft>
+                <a:spcPct val="0"/>
+              </a:spcAft>
+              <a:buClrTx/>
+              <a:buSzTx/>
+              <a:buFontTx/>
+              <a:buNone/>
+              <a:tabLst/>
+            </a:pPr>
+            <a:endParaRPr lang="en-US" altLang="ja-JP" sz="1500" dirty="0">
+              <a:solidFill>
+                <a:schemeClr val="accent4">
+                  <a:lumMod val="65000"/>
+                  <a:lumOff val="35000"/>
+                </a:schemeClr>
+              </a:solidFill>
+              <a:latin typeface="Arial" charset="0"/>
+              <a:ea typeface="ＭＳ Ｐゴシック" pitchFamily="50" charset="-128"/>
+            </a:endParaRPr>
+          </a:p>
+          <a:p>
+            <a:pPr marL="0" marR="0" indent="0" defTabSz="914400" rtl="0" eaLnBrk="1" fontAlgn="base" latinLnBrk="0" hangingPunct="1">
+              <a:spcBef>
+                <a:spcPct val="0"/>
+              </a:spcBef>
+              <a:spcAft>
+                <a:spcPct val="0"/>
+              </a:spcAft>
+              <a:buClrTx/>
+              <a:buSzTx/>
+              <a:buFontTx/>
+              <a:buNone/>
+              <a:tabLst/>
+            </a:pPr>
+            <a:endParaRPr lang="en-US" altLang="ja-JP" sz="1500" dirty="0">
+              <a:solidFill>
+                <a:schemeClr val="accent4">
+                  <a:lumMod val="65000"/>
+                  <a:lumOff val="35000"/>
+                </a:schemeClr>
+              </a:solidFill>
+              <a:latin typeface="Arial" charset="0"/>
+              <a:ea typeface="ＭＳ Ｐゴシック" pitchFamily="50" charset="-128"/>
+            </a:endParaRPr>
+          </a:p>
+          <a:p>
+            <a:pPr marL="0" marR="0" indent="0" defTabSz="914400" rtl="0" eaLnBrk="1" fontAlgn="base" latinLnBrk="0" hangingPunct="1">
+              <a:spcBef>
+                <a:spcPct val="0"/>
+              </a:spcBef>
+              <a:spcAft>
+                <a:spcPct val="0"/>
+              </a:spcAft>
+              <a:buClrTx/>
+              <a:buSzTx/>
+              <a:buFontTx/>
+              <a:buNone/>
+              <a:tabLst/>
+            </a:pPr>
+            <a:endParaRPr lang="en-US" altLang="ja-JP" sz="1500" dirty="0">
+              <a:solidFill>
+                <a:schemeClr val="accent4">
+                  <a:lumMod val="65000"/>
+                  <a:lumOff val="35000"/>
+                </a:schemeClr>
+              </a:solidFill>
+              <a:latin typeface="Arial" charset="0"/>
+              <a:ea typeface="ＭＳ Ｐゴシック" pitchFamily="50" charset="-128"/>
+            </a:endParaRPr>
+          </a:p>
+          <a:p>
+            <a:pPr marL="0" marR="0" indent="0" defTabSz="914400" rtl="0" eaLnBrk="1" fontAlgn="base" latinLnBrk="0" hangingPunct="1">
+              <a:spcBef>
+                <a:spcPct val="0"/>
+              </a:spcBef>
+              <a:spcAft>
+                <a:spcPct val="0"/>
+              </a:spcAft>
+              <a:buClrTx/>
+              <a:buSzTx/>
+              <a:buFontTx/>
+              <a:buNone/>
+              <a:tabLst/>
+            </a:pPr>
+            <a:endParaRPr lang="en-US" altLang="ja-JP" sz="1500" dirty="0">
+              <a:solidFill>
+                <a:schemeClr val="accent4">
+                  <a:lumMod val="65000"/>
+                  <a:lumOff val="35000"/>
+                </a:schemeClr>
+              </a:solidFill>
+              <a:latin typeface="Arial" charset="0"/>
+              <a:ea typeface="ＭＳ Ｐゴシック" pitchFamily="50" charset="-128"/>
+            </a:endParaRPr>
+          </a:p>
+        </p:txBody>
+      </p:sp>
+      <p:sp>
+        <p:nvSpPr>
+          <p:cNvPr id="11" name="コンテンツ プレースホルダー 2">
+            <a:extLst>
+              <a:ext uri="{FF2B5EF4-FFF2-40B4-BE49-F238E27FC236}">
+                <a16:creationId xmlns:a16="http://schemas.microsoft.com/office/drawing/2014/main" id="{E9FD4C4D-AFFF-8C85-F569-324720DC6E3B}"/>
+              </a:ext>
+            </a:extLst>
+          </p:cNvPr>
+          <p:cNvSpPr txBox="1">
+            <a:spLocks/>
+          </p:cNvSpPr>
+          <p:nvPr/>
+        </p:nvSpPr>
+        <p:spPr>
+          <a:xfrm>
+            <a:off x="762000" y="1420814"/>
+            <a:ext cx="10972800" cy="5113337"/>
+          </a:xfrm>
+          <a:prstGeom prst="rect">
+            <a:avLst/>
+          </a:prstGeom>
+        </p:spPr>
+        <p:txBody>
+          <a:bodyPr/>
+          <a:lstStyle>
+            <a:lvl1pPr marL="342900" indent="-342900" algn="l" rtl="0" eaLnBrk="1" fontAlgn="base" hangingPunct="1">
+              <a:spcBef>
+                <a:spcPct val="20000"/>
+              </a:spcBef>
+              <a:spcAft>
+                <a:spcPct val="0"/>
+              </a:spcAft>
+              <a:buClr>
+                <a:schemeClr val="accent1"/>
+              </a:buClr>
+              <a:buSzPct val="65000"/>
+              <a:buFont typeface="Wingdings" pitchFamily="2" charset="2"/>
+              <a:buChar char="n"/>
+              <a:defRPr kumimoji="1" sz="3200">
                 <a:solidFill>
                   <a:schemeClr val="tx1"/>
                 </a:solidFill>
@@ -16760,175 +18395,342 @@
                 <a:ea typeface="+mn-ea"/>
                 <a:cs typeface="+mn-cs"/>
               </a:defRPr>
-            </a:lvl2pPr>
-            <a:lvl3pPr marL="914400" indent="0" algn="ctr" defTabSz="914400" rtl="0" eaLnBrk="1" latinLnBrk="0" hangingPunct="1">
-              <a:lnSpc>
-                <a:spcPct val="90000"/>
-              </a:lnSpc>
-              <a:spcBef>
-                <a:spcPts val="500"/>
-              </a:spcBef>
-              <a:buFont typeface="Arial" panose="020B0604020202020204" pitchFamily="34" charset="0"/>
-              <a:buNone/>
-              <a:defRPr kumimoji="1" sz="1800" kern="1200">
+            </a:lvl1pPr>
+            <a:lvl2pPr marL="669925" indent="-325438" algn="l" rtl="0" eaLnBrk="1" fontAlgn="base" hangingPunct="1">
+              <a:spcBef>
+                <a:spcPct val="20000"/>
+              </a:spcBef>
+              <a:spcAft>
+                <a:spcPct val="0"/>
+              </a:spcAft>
+              <a:buClr>
+                <a:schemeClr val="accent2"/>
+              </a:buClr>
+              <a:buSzPct val="60000"/>
+              <a:buFont typeface="Wingdings" pitchFamily="2" charset="2"/>
+              <a:buChar char="q"/>
+              <a:defRPr kumimoji="1" sz="2800">
                 <a:solidFill>
                   <a:schemeClr val="tx1"/>
                 </a:solidFill>
                 <a:latin typeface="+mn-lt"/>
                 <a:ea typeface="+mn-ea"/>
-                <a:cs typeface="+mn-cs"/>
+              </a:defRPr>
+            </a:lvl2pPr>
+            <a:lvl3pPr marL="1022350" indent="-350838" algn="l" rtl="0" eaLnBrk="1" fontAlgn="base" hangingPunct="1">
+              <a:spcBef>
+                <a:spcPct val="20000"/>
+              </a:spcBef>
+              <a:spcAft>
+                <a:spcPct val="0"/>
+              </a:spcAft>
+              <a:buClr>
+                <a:schemeClr val="accent1"/>
+              </a:buClr>
+              <a:buSzPct val="65000"/>
+              <a:buFont typeface="Wingdings" pitchFamily="2" charset="2"/>
+              <a:buChar char="n"/>
+              <a:defRPr kumimoji="1" sz="2400">
+                <a:solidFill>
+                  <a:schemeClr val="tx1"/>
+                </a:solidFill>
+                <a:latin typeface="+mn-lt"/>
+                <a:ea typeface="+mn-ea"/>
               </a:defRPr>
             </a:lvl3pPr>
-            <a:lvl4pPr marL="1371600" indent="0" algn="ctr" defTabSz="914400" rtl="0" eaLnBrk="1" latinLnBrk="0" hangingPunct="1">
-              <a:lnSpc>
-                <a:spcPct val="90000"/>
-              </a:lnSpc>
-              <a:spcBef>
-                <a:spcPts val="500"/>
-              </a:spcBef>
-              <a:buFont typeface="Arial" panose="020B0604020202020204" pitchFamily="34" charset="0"/>
-              <a:buNone/>
-              <a:defRPr kumimoji="1" sz="1600" kern="1200">
+            <a:lvl4pPr marL="1339850" indent="-315913" algn="l" rtl="0" eaLnBrk="1" fontAlgn="base" hangingPunct="1">
+              <a:spcBef>
+                <a:spcPct val="20000"/>
+              </a:spcBef>
+              <a:spcAft>
+                <a:spcPct val="0"/>
+              </a:spcAft>
+              <a:buClr>
+                <a:schemeClr val="accent2"/>
+              </a:buClr>
+              <a:buSzPct val="70000"/>
+              <a:buFont typeface="Wingdings" pitchFamily="2" charset="2"/>
+              <a:buChar char="q"/>
+              <a:defRPr kumimoji="1" sz="2000">
                 <a:solidFill>
                   <a:schemeClr val="tx1"/>
                 </a:solidFill>
                 <a:latin typeface="+mn-lt"/>
                 <a:ea typeface="+mn-ea"/>
-                <a:cs typeface="+mn-cs"/>
               </a:defRPr>
             </a:lvl4pPr>
-            <a:lvl5pPr marL="1828800" indent="0" algn="ctr" defTabSz="914400" rtl="0" eaLnBrk="1" latinLnBrk="0" hangingPunct="1">
-              <a:lnSpc>
-                <a:spcPct val="90000"/>
-              </a:lnSpc>
-              <a:spcBef>
-                <a:spcPts val="500"/>
-              </a:spcBef>
-              <a:buFont typeface="Arial" panose="020B0604020202020204" pitchFamily="34" charset="0"/>
-              <a:buNone/>
-              <a:defRPr kumimoji="1" sz="1600" kern="1200">
+            <a:lvl5pPr marL="1681163" indent="-339725" algn="l" rtl="0" eaLnBrk="1" fontAlgn="base" hangingPunct="1">
+              <a:spcBef>
+                <a:spcPct val="20000"/>
+              </a:spcBef>
+              <a:spcAft>
+                <a:spcPct val="0"/>
+              </a:spcAft>
+              <a:buClr>
+                <a:schemeClr val="accent1"/>
+              </a:buClr>
+              <a:buSzPct val="75000"/>
+              <a:buFont typeface="Wingdings" pitchFamily="2" charset="2"/>
+              <a:buChar char="§"/>
+              <a:defRPr kumimoji="1">
                 <a:solidFill>
                   <a:schemeClr val="tx1"/>
                 </a:solidFill>
                 <a:latin typeface="+mn-lt"/>
                 <a:ea typeface="+mn-ea"/>
-                <a:cs typeface="+mn-cs"/>
               </a:defRPr>
             </a:lvl5pPr>
-            <a:lvl6pPr marL="2286000" indent="0" algn="ctr" defTabSz="914400" rtl="0" eaLnBrk="1" latinLnBrk="0" hangingPunct="1">
-              <a:lnSpc>
-                <a:spcPct val="90000"/>
-              </a:lnSpc>
-              <a:spcBef>
-                <a:spcPts val="500"/>
-              </a:spcBef>
-              <a:buFont typeface="Arial" panose="020B0604020202020204" pitchFamily="34" charset="0"/>
-              <a:buNone/>
-              <a:defRPr kumimoji="1" sz="1600" kern="1200">
+            <a:lvl6pPr marL="2138363" indent="-339725" algn="l" rtl="0" eaLnBrk="1" fontAlgn="base" hangingPunct="1">
+              <a:spcBef>
+                <a:spcPct val="20000"/>
+              </a:spcBef>
+              <a:spcAft>
+                <a:spcPct val="0"/>
+              </a:spcAft>
+              <a:buClr>
+                <a:schemeClr val="accent1"/>
+              </a:buClr>
+              <a:buSzPct val="75000"/>
+              <a:buFont typeface="Wingdings" pitchFamily="2" charset="2"/>
+              <a:buChar char="§"/>
+              <a:defRPr kumimoji="1">
                 <a:solidFill>
                   <a:schemeClr val="tx1"/>
                 </a:solidFill>
                 <a:latin typeface="+mn-lt"/>
                 <a:ea typeface="+mn-ea"/>
-                <a:cs typeface="+mn-cs"/>
               </a:defRPr>
             </a:lvl6pPr>
-            <a:lvl7pPr marL="2743200" indent="0" algn="ctr" defTabSz="914400" rtl="0" eaLnBrk="1" latinLnBrk="0" hangingPunct="1">
-              <a:lnSpc>
-                <a:spcPct val="90000"/>
-              </a:lnSpc>
-              <a:spcBef>
-                <a:spcPts val="500"/>
-              </a:spcBef>
-              <a:buFont typeface="Arial" panose="020B0604020202020204" pitchFamily="34" charset="0"/>
-              <a:buNone/>
-              <a:defRPr kumimoji="1" sz="1600" kern="1200">
+            <a:lvl7pPr marL="2595563" indent="-339725" algn="l" rtl="0" eaLnBrk="1" fontAlgn="base" hangingPunct="1">
+              <a:spcBef>
+                <a:spcPct val="20000"/>
+              </a:spcBef>
+              <a:spcAft>
+                <a:spcPct val="0"/>
+              </a:spcAft>
+              <a:buClr>
+                <a:schemeClr val="accent1"/>
+              </a:buClr>
+              <a:buSzPct val="75000"/>
+              <a:buFont typeface="Wingdings" pitchFamily="2" charset="2"/>
+              <a:buChar char="§"/>
+              <a:defRPr kumimoji="1">
                 <a:solidFill>
                   <a:schemeClr val="tx1"/>
                 </a:solidFill>
                 <a:latin typeface="+mn-lt"/>
                 <a:ea typeface="+mn-ea"/>
-                <a:cs typeface="+mn-cs"/>
               </a:defRPr>
             </a:lvl7pPr>
-            <a:lvl8pPr marL="3200400" indent="0" algn="ctr" defTabSz="914400" rtl="0" eaLnBrk="1" latinLnBrk="0" hangingPunct="1">
-              <a:lnSpc>
-                <a:spcPct val="90000"/>
-              </a:lnSpc>
-              <a:spcBef>
-                <a:spcPts val="500"/>
-              </a:spcBef>
-              <a:buFont typeface="Arial" panose="020B0604020202020204" pitchFamily="34" charset="0"/>
-              <a:buNone/>
-              <a:defRPr kumimoji="1" sz="1600" kern="1200">
+            <a:lvl8pPr marL="3052763" indent="-339725" algn="l" rtl="0" eaLnBrk="1" fontAlgn="base" hangingPunct="1">
+              <a:spcBef>
+                <a:spcPct val="20000"/>
+              </a:spcBef>
+              <a:spcAft>
+                <a:spcPct val="0"/>
+              </a:spcAft>
+              <a:buClr>
+                <a:schemeClr val="accent1"/>
+              </a:buClr>
+              <a:buSzPct val="75000"/>
+              <a:buFont typeface="Wingdings" pitchFamily="2" charset="2"/>
+              <a:buChar char="§"/>
+              <a:defRPr kumimoji="1">
                 <a:solidFill>
                   <a:schemeClr val="tx1"/>
                 </a:solidFill>
                 <a:latin typeface="+mn-lt"/>
                 <a:ea typeface="+mn-ea"/>
-                <a:cs typeface="+mn-cs"/>
               </a:defRPr>
             </a:lvl8pPr>
-            <a:lvl9pPr marL="3657600" indent="0" algn="ctr" defTabSz="914400" rtl="0" eaLnBrk="1" latinLnBrk="0" hangingPunct="1">
-              <a:lnSpc>
-                <a:spcPct val="90000"/>
-              </a:lnSpc>
-              <a:spcBef>
-                <a:spcPts val="500"/>
-              </a:spcBef>
-              <a:buFont typeface="Arial" panose="020B0604020202020204" pitchFamily="34" charset="0"/>
-              <a:buNone/>
-              <a:defRPr kumimoji="1" sz="1600" kern="1200">
+            <a:lvl9pPr marL="3509963" indent="-339725" algn="l" rtl="0" eaLnBrk="1" fontAlgn="base" hangingPunct="1">
+              <a:spcBef>
+                <a:spcPct val="20000"/>
+              </a:spcBef>
+              <a:spcAft>
+                <a:spcPct val="0"/>
+              </a:spcAft>
+              <a:buClr>
+                <a:schemeClr val="accent1"/>
+              </a:buClr>
+              <a:buSzPct val="75000"/>
+              <a:buFont typeface="Wingdings" pitchFamily="2" charset="2"/>
+              <a:buChar char="§"/>
+              <a:defRPr kumimoji="1">
                 <a:solidFill>
                   <a:schemeClr val="tx1"/>
                 </a:solidFill>
                 <a:latin typeface="+mn-lt"/>
                 <a:ea typeface="+mn-ea"/>
-                <a:cs typeface="+mn-cs"/>
               </a:defRPr>
             </a:lvl9pPr>
           </a:lstStyle>
           <a:p>
-            <a:pPr marL="0" marR="0" lvl="0" indent="0" algn="l" defTabSz="914400" rtl="0" eaLnBrk="1" fontAlgn="auto" latinLnBrk="0" hangingPunct="1">
-              <a:lnSpc>
-                <a:spcPct val="90000"/>
-              </a:lnSpc>
-              <a:spcBef>
-                <a:spcPts val="1000"/>
-              </a:spcBef>
-              <a:spcAft>
-                <a:spcPts val="0"/>
-              </a:spcAft>
-              <a:buClrTx/>
-              <a:buSzTx/>
-              <a:buFont typeface="Arial" panose="020B0604020202020204" pitchFamily="34" charset="0"/>
-              <a:buNone/>
-              <a:tabLst/>
-              <a:defRPr/>
+            <a:pPr marL="0" indent="0">
+              <a:buNone/>
             </a:pPr>
-            <a:endParaRPr kumimoji="1" lang="ja-JP" altLang="en-US" sz="2000" b="0" i="0" u="none" strike="noStrike" kern="1200" cap="none" spc="0" normalizeH="0" baseline="0" noProof="0" dirty="0">
-              <a:ln>
-                <a:noFill/>
-              </a:ln>
-              <a:solidFill>
-                <a:srgbClr val="FFC000">
-                  <a:lumMod val="75000"/>
-                </a:srgbClr>
-              </a:solidFill>
-              <a:effectLst/>
-              <a:uLnTx/>
-              <a:uFillTx/>
-              <a:latin typeface="メイリオ" panose="020B0604030504040204" pitchFamily="50" charset="-128"/>
-              <a:ea typeface="メイリオ" panose="020B0604030504040204" pitchFamily="50" charset="-128"/>
-              <a:cs typeface="+mn-cs"/>
-            </a:endParaRPr>
+            <a:r>
+              <a:rPr lang="ja-JP" altLang="en-US" sz="2400" kern="0" dirty="0"/>
+              <a:t>正解率を出す</a:t>
+            </a:r>
+            <a:endParaRPr lang="en-US" altLang="ja-JP" sz="2400" kern="0" dirty="0"/>
+          </a:p>
+          <a:p>
+            <a:r>
+              <a:rPr lang="ja-JP" altLang="en-US" sz="2400" kern="0" dirty="0"/>
+              <a:t>図を表示する</a:t>
+            </a:r>
           </a:p>
         </p:txBody>
       </p:sp>
+      <p:pic>
+        <p:nvPicPr>
+          <p:cNvPr id="5" name="図 4">
+            <a:extLst>
+              <a:ext uri="{FF2B5EF4-FFF2-40B4-BE49-F238E27FC236}">
+                <a16:creationId xmlns:a16="http://schemas.microsoft.com/office/drawing/2014/main" id="{A6D8A17A-84B9-F153-3062-B8D45CA1254F}"/>
+              </a:ext>
+            </a:extLst>
+          </p:cNvPr>
+          <p:cNvPicPr>
+            <a:picLocks noChangeAspect="1"/>
+          </p:cNvPicPr>
+          <p:nvPr/>
+        </p:nvPicPr>
+        <p:blipFill>
+          <a:blip r:embed="rId2"/>
+          <a:stretch>
+            <a:fillRect/>
+          </a:stretch>
+        </p:blipFill>
+        <p:spPr>
+          <a:xfrm>
+            <a:off x="6359217" y="1340909"/>
+            <a:ext cx="2038635" cy="1533739"/>
+          </a:xfrm>
+          <a:prstGeom prst="rect">
+            <a:avLst/>
+          </a:prstGeom>
+          <a:ln>
+            <a:solidFill>
+              <a:schemeClr val="accent1"/>
+            </a:solidFill>
+          </a:ln>
+        </p:spPr>
+      </p:pic>
+      <p:pic>
+        <p:nvPicPr>
+          <p:cNvPr id="12" name="図 11">
+            <a:extLst>
+              <a:ext uri="{FF2B5EF4-FFF2-40B4-BE49-F238E27FC236}">
+                <a16:creationId xmlns:a16="http://schemas.microsoft.com/office/drawing/2014/main" id="{AD02BE06-D0F6-9C7F-00E2-4DA8736C4430}"/>
+              </a:ext>
+            </a:extLst>
+          </p:cNvPr>
+          <p:cNvPicPr>
+            <a:picLocks noChangeAspect="1"/>
+          </p:cNvPicPr>
+          <p:nvPr/>
+        </p:nvPicPr>
+        <p:blipFill>
+          <a:blip r:embed="rId3"/>
+          <a:stretch>
+            <a:fillRect/>
+          </a:stretch>
+        </p:blipFill>
+        <p:spPr>
+          <a:xfrm>
+            <a:off x="10135307" y="2107778"/>
+            <a:ext cx="495369" cy="304843"/>
+          </a:xfrm>
+          <a:prstGeom prst="rect">
+            <a:avLst/>
+          </a:prstGeom>
+          <a:ln>
+            <a:solidFill>
+              <a:schemeClr val="accent1"/>
+            </a:solidFill>
+          </a:ln>
+        </p:spPr>
+      </p:pic>
+      <p:pic>
+        <p:nvPicPr>
+          <p:cNvPr id="14" name="図 13">
+            <a:extLst>
+              <a:ext uri="{FF2B5EF4-FFF2-40B4-BE49-F238E27FC236}">
+                <a16:creationId xmlns:a16="http://schemas.microsoft.com/office/drawing/2014/main" id="{04346335-C146-E93C-8DEC-CFEB5C1C2607}"/>
+              </a:ext>
+            </a:extLst>
+          </p:cNvPr>
+          <p:cNvPicPr>
+            <a:picLocks noChangeAspect="1"/>
+          </p:cNvPicPr>
+          <p:nvPr/>
+        </p:nvPicPr>
+        <p:blipFill>
+          <a:blip r:embed="rId4"/>
+          <a:stretch>
+            <a:fillRect/>
+          </a:stretch>
+        </p:blipFill>
+        <p:spPr>
+          <a:xfrm>
+            <a:off x="6359217" y="3665331"/>
+            <a:ext cx="2791215" cy="1905266"/>
+          </a:xfrm>
+          <a:prstGeom prst="rect">
+            <a:avLst/>
+          </a:prstGeom>
+          <a:ln>
+            <a:solidFill>
+              <a:schemeClr val="accent3">
+                <a:lumMod val="65000"/>
+              </a:schemeClr>
+            </a:solidFill>
+          </a:ln>
+        </p:spPr>
+      </p:pic>
+      <p:pic>
+        <p:nvPicPr>
+          <p:cNvPr id="16" name="図 15">
+            <a:extLst>
+              <a:ext uri="{FF2B5EF4-FFF2-40B4-BE49-F238E27FC236}">
+                <a16:creationId xmlns:a16="http://schemas.microsoft.com/office/drawing/2014/main" id="{74BDD603-446E-9A2B-7FA9-FE9681916EE0}"/>
+              </a:ext>
+            </a:extLst>
+          </p:cNvPr>
+          <p:cNvPicPr>
+            <a:picLocks noChangeAspect="1"/>
+          </p:cNvPicPr>
+          <p:nvPr/>
+        </p:nvPicPr>
+        <p:blipFill>
+          <a:blip r:embed="rId5"/>
+          <a:stretch>
+            <a:fillRect/>
+          </a:stretch>
+        </p:blipFill>
+        <p:spPr>
+          <a:xfrm>
+            <a:off x="9396633" y="4664742"/>
+            <a:ext cx="1562318" cy="285790"/>
+          </a:xfrm>
+          <a:prstGeom prst="rect">
+            <a:avLst/>
+          </a:prstGeom>
+          <a:ln>
+            <a:solidFill>
+              <a:schemeClr val="accent3">
+                <a:lumMod val="65000"/>
+              </a:schemeClr>
+            </a:solidFill>
+          </a:ln>
+        </p:spPr>
+      </p:pic>
     </p:spTree>
     <p:extLst>
       <p:ext uri="{BB962C8B-B14F-4D97-AF65-F5344CB8AC3E}">
-        <p14:creationId xmlns:p14="http://schemas.microsoft.com/office/powerpoint/2010/main" val="3300878030"/>
+        <p14:creationId xmlns:p14="http://schemas.microsoft.com/office/powerpoint/2010/main" val="1504757760"/>
       </p:ext>
     </p:extLst>
   </p:cSld>
